--- a/Part5_Track_Init_Mgmt/ref/산출물/Chapter5_TrackInitMgmt.pptx
+++ b/Part5_Track_Init_Mgmt/ref/산출물/Chapter5_TrackInitMgmt.pptx
@@ -2000,7 +2000,7 @@
           <a:p/>
           <a:p>
             <a:r>
-              <a:t>아래는 과제에서 요구한 참값, 플롯, 트랙 심볼을 함께 그린 546 번 스캔 화면입니다. 왼쪽 2D 에서 파란 선이 표적 1, 빨간 선이 표적 2 의 참값 궤적이고, 큰 점이 지금 스캔에 받은 플롯, 옅은 점이 지난 30 스캔의 플롯입니다. 빈 주황 사각형이 임시 트랙, 회색 X 가 삭제 상태가 된 트랙입니다. 가운데는 표적 2 주변을 확대한 것인데, 사각형에서 뻗은 선은 트랙 속도로 1 초 동안 가는 거리입니다. 위치 오차를 0.1 초로 나눠 구한 속도라 궤적 방향과 꽤 어긋나는 것이 보입니다.</a:t>
+              <a:t>아래는 과제에서 요구한 참값, 플롯, 트랙 심볼을 함께 그린 546 번 스캔 그림으로, 프로그램이 낸 결과 자료로 다시 그린 것입니다. 왼쪽 2D 에서 파란 선이 표적 1, 빨간 선이 표적 2 의 참값 궤적이고, 큰 점이 지금 스캔에 받은 플롯, 옅은 점이 지난 30 스캔의 플롯입니다. 빈 주황 사각형이 임시 트랙, 회색 X 가 삭제 상태가 된 트랙입니다. 가운데는 표적 2 주변을 확대한 것인데, 사각형에서 뻗은 선은 트랙 속도로 1 초 동안 가는 거리입니다. 위치 오차를 0.1 초로 나눠 구한 속도라 궤적 방향과 꽤 어긋나는 것이 보입니다.</a:t>
             </a:r>
           </a:p>
           <a:p/>
@@ -4340,7 +4340,7 @@
         <p:spPr>
           <a:xfrm>
             <a:off x="1418234" y="2057400"/>
-            <a:ext cx="1636188" cy="405994"/>
+            <a:ext cx="1780540" cy="405994"/>
           </a:xfrm>
           <a:prstGeom prst="rect">
             <a:avLst/>
@@ -4378,8 +4378,8 @@
         </p:nvSpPr>
         <p:spPr>
           <a:xfrm>
-            <a:off x="3163236" y="2313432"/>
-            <a:ext cx="7443803" cy="0"/>
+            <a:off x="3307588" y="2313432"/>
+            <a:ext cx="7299451" cy="0"/>
           </a:xfrm>
           <a:prstGeom prst="line">
             <a:avLst/>
@@ -4480,7 +4480,7 @@
         <p:spPr>
           <a:xfrm>
             <a:off x="1418234" y="2464308"/>
-            <a:ext cx="1121096" cy="405994"/>
+            <a:ext cx="1200912" cy="405994"/>
           </a:xfrm>
           <a:prstGeom prst="rect">
             <a:avLst/>
@@ -4518,8 +4518,8 @@
         </p:nvSpPr>
         <p:spPr>
           <a:xfrm>
-            <a:off x="2648144" y="2720339"/>
-            <a:ext cx="7958895" cy="0"/>
+            <a:off x="2727960" y="2720339"/>
+            <a:ext cx="7879080" cy="0"/>
           </a:xfrm>
           <a:prstGeom prst="line">
             <a:avLst/>
@@ -4620,7 +4620,7 @@
         <p:spPr>
           <a:xfrm>
             <a:off x="1418234" y="2871216"/>
-            <a:ext cx="1636188" cy="405994"/>
+            <a:ext cx="1780540" cy="405994"/>
           </a:xfrm>
           <a:prstGeom prst="rect">
             <a:avLst/>
@@ -4658,8 +4658,8 @@
         </p:nvSpPr>
         <p:spPr>
           <a:xfrm>
-            <a:off x="3163236" y="3127248"/>
-            <a:ext cx="7443803" cy="0"/>
+            <a:off x="3307588" y="3127248"/>
+            <a:ext cx="7299451" cy="0"/>
           </a:xfrm>
           <a:prstGeom prst="line">
             <a:avLst/>
@@ -4760,7 +4760,7 @@
         <p:spPr>
           <a:xfrm>
             <a:off x="1418234" y="3278124"/>
-            <a:ext cx="2123360" cy="405994"/>
+            <a:ext cx="2305050" cy="405994"/>
           </a:xfrm>
           <a:prstGeom prst="rect">
             <a:avLst/>
@@ -4798,8 +4798,8 @@
         </p:nvSpPr>
         <p:spPr>
           <a:xfrm>
-            <a:off x="3650408" y="3534156"/>
-            <a:ext cx="6956631" cy="0"/>
+            <a:off x="3832098" y="3534156"/>
+            <a:ext cx="6774941" cy="0"/>
           </a:xfrm>
           <a:prstGeom prst="line">
             <a:avLst/>
@@ -7765,7 +7765,7 @@
         <p:spPr>
           <a:xfrm>
             <a:off x="1418234" y="2057400"/>
-            <a:ext cx="2252071" cy="405994"/>
+            <a:ext cx="2413508" cy="405994"/>
           </a:xfrm>
           <a:prstGeom prst="rect">
             <a:avLst/>
@@ -7803,8 +7803,8 @@
         </p:nvSpPr>
         <p:spPr>
           <a:xfrm>
-            <a:off x="3779119" y="2313432"/>
-            <a:ext cx="6827920" cy="0"/>
+            <a:off x="3940556" y="2313432"/>
+            <a:ext cx="6666483" cy="0"/>
           </a:xfrm>
           <a:prstGeom prst="line">
             <a:avLst/>
@@ -7905,7 +7905,7 @@
         <p:spPr>
           <a:xfrm>
             <a:off x="1418234" y="2464308"/>
-            <a:ext cx="2736770" cy="405994"/>
+            <a:ext cx="2790444" cy="405994"/>
           </a:xfrm>
           <a:prstGeom prst="rect">
             <a:avLst/>
@@ -7943,8 +7943,8 @@
         </p:nvSpPr>
         <p:spPr>
           <a:xfrm>
-            <a:off x="4263818" y="2720339"/>
-            <a:ext cx="6343221" cy="0"/>
+            <a:off x="4317492" y="2720339"/>
+            <a:ext cx="6289547" cy="0"/>
           </a:xfrm>
           <a:prstGeom prst="line">
             <a:avLst/>
@@ -8045,7 +8045,7 @@
         <p:spPr>
           <a:xfrm>
             <a:off x="1418234" y="2871216"/>
-            <a:ext cx="2216177" cy="405994"/>
+            <a:ext cx="2415286" cy="405994"/>
           </a:xfrm>
           <a:prstGeom prst="rect">
             <a:avLst/>
@@ -8083,8 +8083,8 @@
         </p:nvSpPr>
         <p:spPr>
           <a:xfrm>
-            <a:off x="3743225" y="3127248"/>
-            <a:ext cx="6863814" cy="0"/>
+            <a:off x="3942334" y="3127248"/>
+            <a:ext cx="6664705" cy="0"/>
           </a:xfrm>
           <a:prstGeom prst="line">
             <a:avLst/>
@@ -8185,7 +8185,7 @@
         <p:spPr>
           <a:xfrm>
             <a:off x="1418234" y="3278124"/>
-            <a:ext cx="2419592" cy="405994"/>
+            <a:ext cx="2655316" cy="405994"/>
           </a:xfrm>
           <a:prstGeom prst="rect">
             <a:avLst/>
@@ -8223,8 +8223,8 @@
         </p:nvSpPr>
         <p:spPr>
           <a:xfrm>
-            <a:off x="3946640" y="3534156"/>
-            <a:ext cx="6660399" cy="0"/>
+            <a:off x="4182364" y="3534156"/>
+            <a:ext cx="6424676" cy="0"/>
           </a:xfrm>
           <a:prstGeom prst="line">
             <a:avLst/>
@@ -8325,7 +8325,7 @@
         <p:spPr>
           <a:xfrm>
             <a:off x="1418234" y="3685032"/>
-            <a:ext cx="2162115" cy="405994"/>
+            <a:ext cx="2290714" cy="405994"/>
           </a:xfrm>
           <a:prstGeom prst="rect">
             <a:avLst/>
@@ -8363,8 +8363,8 @@
         </p:nvSpPr>
         <p:spPr>
           <a:xfrm>
-            <a:off x="3689163" y="3941064"/>
-            <a:ext cx="6917876" cy="0"/>
+            <a:off x="3817762" y="3941064"/>
+            <a:ext cx="6789277" cy="0"/>
           </a:xfrm>
           <a:prstGeom prst="line">
             <a:avLst/>
@@ -8465,7 +8465,7 @@
         <p:spPr>
           <a:xfrm>
             <a:off x="1418234" y="4091939"/>
-            <a:ext cx="1542288" cy="405994"/>
+            <a:ext cx="1593738" cy="405994"/>
           </a:xfrm>
           <a:prstGeom prst="rect">
             <a:avLst/>
@@ -8503,8 +8503,8 @@
         </p:nvSpPr>
         <p:spPr>
           <a:xfrm>
-            <a:off x="3069336" y="4347972"/>
-            <a:ext cx="7537703" cy="0"/>
+            <a:off x="3120786" y="4347972"/>
+            <a:ext cx="7486253" cy="0"/>
           </a:xfrm>
           <a:prstGeom prst="line">
             <a:avLst/>
@@ -8605,7 +8605,7 @@
         <p:spPr>
           <a:xfrm>
             <a:off x="1418234" y="4498848"/>
-            <a:ext cx="1636188" cy="405994"/>
+            <a:ext cx="1780540" cy="405994"/>
           </a:xfrm>
           <a:prstGeom prst="rect">
             <a:avLst/>
@@ -8643,8 +8643,8 @@
         </p:nvSpPr>
         <p:spPr>
           <a:xfrm>
-            <a:off x="3163236" y="4754880"/>
-            <a:ext cx="7443803" cy="0"/>
+            <a:off x="3307588" y="4754880"/>
+            <a:ext cx="7299451" cy="0"/>
           </a:xfrm>
           <a:prstGeom prst="line">
             <a:avLst/>
@@ -15762,7 +15762,7 @@
                 <a:ea typeface="Consolas"/>
                 <a:cs typeface="Consolas"/>
               </a:rPr>
-              <a:t>593  </a:t>
+              <a:t>602  </a:t>
             </a:r>
             <a:r>
               <a:rPr sz="790" b="0">
@@ -15886,7 +15886,7 @@
                 <a:ea typeface="Consolas"/>
                 <a:cs typeface="Consolas"/>
               </a:rPr>
-              <a:t>595  </a:t>
+              <a:t>604  </a:t>
             </a:r>
             <a:r>
               <a:rPr sz="790" b="0">
@@ -16065,7 +16065,7 @@
                 <a:ea typeface="Consolas"/>
                 <a:cs typeface="Consolas"/>
               </a:rPr>
-              <a:t>610  </a:t>
+              <a:t>619  </a:t>
             </a:r>
             <a:r>
               <a:rPr sz="790" b="0">
@@ -16105,7 +16105,7 @@
                 <a:ea typeface="Consolas"/>
                 <a:cs typeface="Consolas"/>
               </a:rPr>
-              <a:t>611  </a:t>
+              <a:t>620  </a:t>
             </a:r>
             <a:r>
               <a:rPr sz="790" b="0">
@@ -16145,7 +16145,7 @@
                 <a:ea typeface="Consolas"/>
                 <a:cs typeface="Consolas"/>
               </a:rPr>
-              <a:t>612  </a:t>
+              <a:t>621  </a:t>
             </a:r>
             <a:r>
               <a:rPr sz="790" b="0">
@@ -16185,7 +16185,7 @@
                 <a:ea typeface="Consolas"/>
                 <a:cs typeface="Consolas"/>
               </a:rPr>
-              <a:t>613  </a:t>
+              <a:t>622  </a:t>
             </a:r>
             <a:r>
               <a:rPr sz="790" b="0">
@@ -16225,7 +16225,7 @@
                 <a:ea typeface="Consolas"/>
                 <a:cs typeface="Consolas"/>
               </a:rPr>
-              <a:t>614  </a:t>
+              <a:t>623  </a:t>
             </a:r>
             <a:r>
               <a:rPr sz="790" b="0">
@@ -16254,7 +16254,7 @@
                 <a:ea typeface="Consolas"/>
                 <a:cs typeface="Consolas"/>
               </a:rPr>
-              <a:t>615  </a:t>
+              <a:t>624  </a:t>
             </a:r>
             <a:r>
               <a:rPr sz="790" b="0">
@@ -16312,7 +16312,7 @@
                 <a:ea typeface="Consolas"/>
                 <a:cs typeface="Consolas"/>
               </a:rPr>
-              <a:t>617  </a:t>
+              <a:t>626  </a:t>
             </a:r>
             <a:r>
               <a:rPr sz="790" b="0">
@@ -16396,7 +16396,7 @@
                 <a:ea typeface="Consolas"/>
                 <a:cs typeface="Consolas"/>
               </a:rPr>
-              <a:t>618  </a:t>
+              <a:t>627  </a:t>
             </a:r>
             <a:r>
               <a:rPr sz="790" b="0">
@@ -16425,7 +16425,7 @@
                 <a:ea typeface="Consolas"/>
                 <a:cs typeface="Consolas"/>
               </a:rPr>
-              <a:t>619  </a:t>
+              <a:t>628  </a:t>
             </a:r>
             <a:r>
               <a:rPr sz="790" b="0">
@@ -16465,7 +16465,7 @@
                 <a:ea typeface="Consolas"/>
                 <a:cs typeface="Consolas"/>
               </a:rPr>
-              <a:t>620  </a:t>
+              <a:t>629  </a:t>
             </a:r>
             <a:r>
               <a:rPr sz="790" b="0">
@@ -16534,7 +16534,7 @@
                 <a:ea typeface="Consolas"/>
                 <a:cs typeface="Consolas"/>
               </a:rPr>
-              <a:t>628  </a:t>
+              <a:t>637  </a:t>
             </a:r>
             <a:r>
               <a:rPr sz="790" b="0">
@@ -16596,7 +16596,7 @@
                 <a:ea typeface="Consolas"/>
                 <a:cs typeface="Consolas"/>
               </a:rPr>
-              <a:t>629  </a:t>
+              <a:t>638  </a:t>
             </a:r>
             <a:r>
               <a:rPr sz="790" b="0">
@@ -16658,7 +16658,7 @@
                 <a:ea typeface="Consolas"/>
                 <a:cs typeface="Consolas"/>
               </a:rPr>
-              <a:t>630  </a:t>
+              <a:t>639  </a:t>
             </a:r>
             <a:r>
               <a:rPr sz="790" b="0">
@@ -16749,7 +16749,7 @@
                 <a:ea typeface="Consolas"/>
                 <a:cs typeface="Consolas"/>
               </a:rPr>
-              <a:t>632  </a:t>
+              <a:t>641  </a:t>
             </a:r>
             <a:r>
               <a:rPr sz="790" b="0">
@@ -16818,7 +16818,7 @@
                 <a:ea typeface="Consolas"/>
                 <a:cs typeface="Consolas"/>
               </a:rPr>
-              <a:t>643  </a:t>
+              <a:t>652  </a:t>
             </a:r>
             <a:r>
               <a:rPr sz="790" b="0">
@@ -16887,7 +16887,7 @@
                 <a:ea typeface="Consolas"/>
                 <a:cs typeface="Consolas"/>
               </a:rPr>
-              <a:t>649  </a:t>
+              <a:t>658  </a:t>
             </a:r>
             <a:r>
               <a:rPr sz="790" b="0">
@@ -17051,7 +17051,7 @@
                 <a:ea typeface="Consolas"/>
                 <a:cs typeface="Consolas"/>
               </a:rPr>
-              <a:t>541  </a:t>
+              <a:t>550  </a:t>
             </a:r>
             <a:r>
               <a:rPr sz="740" b="0">
@@ -17091,7 +17091,7 @@
                 <a:ea typeface="Consolas"/>
                 <a:cs typeface="Consolas"/>
               </a:rPr>
-              <a:t>542  </a:t>
+              <a:t>551  </a:t>
             </a:r>
             <a:r>
               <a:rPr sz="740" b="0">
@@ -17131,7 +17131,7 @@
                 <a:ea typeface="Consolas"/>
                 <a:cs typeface="Consolas"/>
               </a:rPr>
-              <a:t>543  </a:t>
+              <a:t>552  </a:t>
             </a:r>
             <a:r>
               <a:rPr sz="740" b="0">
@@ -17838,7 +17838,7 @@
         <p:spPr>
           <a:xfrm>
             <a:off x="5852160" y="1801368"/>
-            <a:ext cx="1155769" cy="502920"/>
+            <a:ext cx="1240155" cy="502920"/>
           </a:xfrm>
           <a:prstGeom prst="rect">
             <a:avLst/>
@@ -17876,8 +17876,8 @@
         </p:nvSpPr>
         <p:spPr>
           <a:xfrm>
-            <a:off x="7117657" y="2103120"/>
-            <a:ext cx="3809422" cy="0"/>
+            <a:off x="7202043" y="2103120"/>
+            <a:ext cx="3725036" cy="0"/>
           </a:xfrm>
           <a:prstGeom prst="line">
             <a:avLst/>
@@ -18001,7 +18001,7 @@
         <p:spPr>
           <a:xfrm>
             <a:off x="5852160" y="2569464"/>
-            <a:ext cx="1155769" cy="502920"/>
+            <a:ext cx="1240155" cy="502920"/>
           </a:xfrm>
           <a:prstGeom prst="rect">
             <a:avLst/>
@@ -18039,8 +18039,8 @@
         </p:nvSpPr>
         <p:spPr>
           <a:xfrm>
-            <a:off x="7117657" y="2871216"/>
-            <a:ext cx="3809422" cy="0"/>
+            <a:off x="7202043" y="2871216"/>
+            <a:ext cx="3725036" cy="0"/>
           </a:xfrm>
           <a:prstGeom prst="line">
             <a:avLst/>
@@ -18164,7 +18164,7 @@
         <p:spPr>
           <a:xfrm>
             <a:off x="5852160" y="3337560"/>
-            <a:ext cx="1155769" cy="502920"/>
+            <a:ext cx="1240155" cy="502920"/>
           </a:xfrm>
           <a:prstGeom prst="rect">
             <a:avLst/>
@@ -18202,8 +18202,8 @@
         </p:nvSpPr>
         <p:spPr>
           <a:xfrm>
-            <a:off x="7117657" y="3639312"/>
-            <a:ext cx="3809422" cy="0"/>
+            <a:off x="7202043" y="3639312"/>
+            <a:ext cx="3725036" cy="0"/>
           </a:xfrm>
           <a:prstGeom prst="line">
             <a:avLst/>
@@ -18327,7 +18327,7 @@
         <p:spPr>
           <a:xfrm>
             <a:off x="5852160" y="4105656"/>
-            <a:ext cx="762000" cy="502920"/>
+            <a:ext cx="792480" cy="502920"/>
           </a:xfrm>
           <a:prstGeom prst="rect">
             <a:avLst/>
@@ -18365,8 +18365,8 @@
         </p:nvSpPr>
         <p:spPr>
           <a:xfrm>
-            <a:off x="6723888" y="4407408"/>
-            <a:ext cx="4203192" cy="0"/>
+            <a:off x="6754368" y="4407408"/>
+            <a:ext cx="4172711" cy="0"/>
           </a:xfrm>
           <a:prstGeom prst="line">
             <a:avLst/>
@@ -18490,7 +18490,7 @@
         <p:spPr>
           <a:xfrm>
             <a:off x="5852160" y="4873752"/>
-            <a:ext cx="762000" cy="502920"/>
+            <a:ext cx="792480" cy="502920"/>
           </a:xfrm>
           <a:prstGeom prst="rect">
             <a:avLst/>
@@ -18528,8 +18528,8 @@
         </p:nvSpPr>
         <p:spPr>
           <a:xfrm>
-            <a:off x="6723888" y="5175504"/>
-            <a:ext cx="4203192" cy="0"/>
+            <a:off x="6754368" y="5175504"/>
+            <a:ext cx="4172711" cy="0"/>
           </a:xfrm>
           <a:prstGeom prst="line">
             <a:avLst/>
@@ -28616,7 +28616,7 @@
         <p:spPr>
           <a:xfrm>
             <a:off x="1418234" y="2057400"/>
-            <a:ext cx="4170227" cy="405994"/>
+            <a:ext cx="4319023" cy="405994"/>
           </a:xfrm>
           <a:prstGeom prst="rect">
             <a:avLst/>
@@ -28654,8 +28654,8 @@
         </p:nvSpPr>
         <p:spPr>
           <a:xfrm>
-            <a:off x="5697275" y="2313432"/>
-            <a:ext cx="4909764" cy="0"/>
+            <a:off x="5846071" y="2313432"/>
+            <a:ext cx="4760968" cy="0"/>
           </a:xfrm>
           <a:prstGeom prst="line">
             <a:avLst/>
@@ -28756,7 +28756,7 @@
         <p:spPr>
           <a:xfrm>
             <a:off x="1418234" y="2464308"/>
-            <a:ext cx="2166754" cy="405994"/>
+            <a:ext cx="2376170" cy="405994"/>
           </a:xfrm>
           <a:prstGeom prst="rect">
             <a:avLst/>
@@ -28794,8 +28794,8 @@
         </p:nvSpPr>
         <p:spPr>
           <a:xfrm>
-            <a:off x="3693802" y="2720339"/>
-            <a:ext cx="6913237" cy="0"/>
+            <a:off x="3903218" y="2720339"/>
+            <a:ext cx="6703821" cy="0"/>
           </a:xfrm>
           <a:prstGeom prst="line">
             <a:avLst/>
@@ -28896,7 +28896,7 @@
         <p:spPr>
           <a:xfrm>
             <a:off x="1418234" y="2871216"/>
-            <a:ext cx="2003178" cy="405994"/>
+            <a:ext cx="2198370" cy="405994"/>
           </a:xfrm>
           <a:prstGeom prst="rect">
             <a:avLst/>
@@ -28934,8 +28934,8 @@
         </p:nvSpPr>
         <p:spPr>
           <a:xfrm>
-            <a:off x="3530226" y="3127248"/>
-            <a:ext cx="7076813" cy="0"/>
+            <a:off x="3725418" y="3127248"/>
+            <a:ext cx="6881622" cy="0"/>
           </a:xfrm>
           <a:prstGeom prst="line">
             <a:avLst/>
@@ -35405,7 +35405,7 @@
         <p:spPr>
           <a:xfrm>
             <a:off x="1418234" y="2057400"/>
-            <a:ext cx="1065784" cy="405994"/>
+            <a:ext cx="1122680" cy="405994"/>
           </a:xfrm>
           <a:prstGeom prst="rect">
             <a:avLst/>
@@ -35443,8 +35443,8 @@
         </p:nvSpPr>
         <p:spPr>
           <a:xfrm>
-            <a:off x="2592832" y="2313432"/>
-            <a:ext cx="8014207" cy="0"/>
+            <a:off x="2649728" y="2313432"/>
+            <a:ext cx="7957312" cy="0"/>
           </a:xfrm>
           <a:prstGeom prst="line">
             <a:avLst/>
@@ -35545,7 +35545,7 @@
         <p:spPr>
           <a:xfrm>
             <a:off x="1418234" y="2464308"/>
-            <a:ext cx="2222206" cy="405994"/>
+            <a:ext cx="2304827" cy="405994"/>
           </a:xfrm>
           <a:prstGeom prst="rect">
             <a:avLst/>
@@ -35583,8 +35583,8 @@
         </p:nvSpPr>
         <p:spPr>
           <a:xfrm>
-            <a:off x="3749254" y="2720339"/>
-            <a:ext cx="6857785" cy="0"/>
+            <a:off x="3831875" y="2720339"/>
+            <a:ext cx="6775164" cy="0"/>
           </a:xfrm>
           <a:prstGeom prst="line">
             <a:avLst/>
@@ -35685,7 +35685,7 @@
         <p:spPr>
           <a:xfrm>
             <a:off x="1418234" y="2871216"/>
-            <a:ext cx="1909278" cy="405994"/>
+            <a:ext cx="2011568" cy="405994"/>
           </a:xfrm>
           <a:prstGeom prst="rect">
             <a:avLst/>
@@ -35723,8 +35723,8 @@
         </p:nvSpPr>
         <p:spPr>
           <a:xfrm>
-            <a:off x="3436326" y="3127248"/>
-            <a:ext cx="7170713" cy="0"/>
+            <a:off x="3538616" y="3127248"/>
+            <a:ext cx="7068423" cy="0"/>
           </a:xfrm>
           <a:prstGeom prst="line">
             <a:avLst/>
@@ -35825,7 +35825,7 @@
         <p:spPr>
           <a:xfrm>
             <a:off x="1418234" y="3278124"/>
-            <a:ext cx="1269198" cy="405994"/>
+            <a:ext cx="1362709" cy="405994"/>
           </a:xfrm>
           <a:prstGeom prst="rect">
             <a:avLst/>
@@ -35863,8 +35863,8 @@
         </p:nvSpPr>
         <p:spPr>
           <a:xfrm>
-            <a:off x="2796246" y="3534156"/>
-            <a:ext cx="7810793" cy="0"/>
+            <a:off x="2889758" y="3534156"/>
+            <a:ext cx="7717282" cy="0"/>
           </a:xfrm>
           <a:prstGeom prst="line">
             <a:avLst/>
@@ -35965,7 +35965,7 @@
         <p:spPr>
           <a:xfrm>
             <a:off x="1418234" y="3685032"/>
-            <a:ext cx="2668873" cy="405994"/>
+            <a:ext cx="2914848" cy="405994"/>
           </a:xfrm>
           <a:prstGeom prst="rect">
             <a:avLst/>
@@ -36003,8 +36003,8 @@
         </p:nvSpPr>
         <p:spPr>
           <a:xfrm>
-            <a:off x="4195921" y="3941064"/>
-            <a:ext cx="6411118" cy="0"/>
+            <a:off x="4441896" y="3941064"/>
+            <a:ext cx="6165143" cy="0"/>
           </a:xfrm>
           <a:prstGeom prst="line">
             <a:avLst/>

--- a/Part5_Track_Init_Mgmt/ref/산출물/Chapter5_TrackInitMgmt.pptx
+++ b/Part5_Track_Init_Mgmt/ref/산출물/Chapter5_TrackInitMgmt.pptx
@@ -1457,7 +1457,7 @@
           </a:p>
           <a:p>
             <a:r>
-              <a:t>실행 화면과 결과 수치를 확인하고, 과제 요구사항 점검으로 마무리하겠습니다.</a:t>
+              <a:t>시뮬레이션 조건과 실행 화면, 전체 궤적, 한 스캔 시점의 화면, 트랙 수명 순서로 확인하겠습니다.</a:t>
             </a:r>
           </a:p>
         </p:txBody>
@@ -1537,7 +1537,7 @@
           </a:p>
           <a:p>
             <a:r>
-              <a:t>세 번째로 C 코드 구현을 보고, 마지막으로 실행 결과와 과제 요구사항 점검 순서로 마무리하겠습니다.</a:t>
+              <a:t>세 번째로 C 코드 구현을 보고, 마지막으로 실행 결과를 확인하겠습니다.</a:t>
             </a:r>
           </a:p>
         </p:txBody>
@@ -1622,7 +1622,7 @@
           </a:p>
           <a:p>
             <a:r>
-              <a:t>오른쪽은 실제 실행 화면입니다. 위쪽이 2D와 3D 그림, 왼쪽 아래가 송수신과 트랙 요약, 오른쪽 아래가 현재 스캔의 트랙 표입니다. 플롯 메시지 1,160개를 모두 송수신해 처리한 것을 확인했습니다.</a:t>
+              <a:t>오른쪽은 시뮬레이션이 끝난 시점의 실행 화면입니다. 위쪽이 2D와 3D 그림, 왼쪽 아래가 송수신과 트랙 요약, 오른쪽 아래가 현재 스캔의 트랙 표입니다. 플롯 메시지 1,160개를 모두 송수신해 처리한 것을 확인했습니다.</a:t>
             </a:r>
           </a:p>
         </p:txBody>
@@ -1692,22 +1692,27 @@
           <a:lstStyle/>
           <a:p>
             <a:r>
-              <a:t>과제의 결과 화면 조건인 True, Plot, Track 심볼의 동시 표시입니다. 스캔 701, 70.1초 시점입니다.</a:t>
-            </a:r>
-          </a:p>
-          <a:p>
-            <a:r>
-              <a:t>왼쪽 2D 그림은 위경도 격자 위에 그렸습니다. 선이 참값 궤적, 동그라미가 현재 참값 위치, 작은 점이 플롯과 클러터입니다. 표적 근처의 주황색 네모가 임시 트랙, 회색 네모가 삭제 트랙이며, 옆의 숫자는 트랙 ID입니다.</a:t>
-            </a:r>
-          </a:p>
-          <a:p>
-            <a:r>
-              <a:t>오른쪽 3D 그림은 고도를 2배로 늘려 표시했습니다. 대공 표적 주변의 클러터와 플롯, 트랙을 함께 볼 수 있습니다.</a:t>
-            </a:r>
-          </a:p>
-          <a:p>
-            <a:r>
-              <a:t>아래 기호는 화면 범례와 같습니다.</a:t>
+              <a:t>시뮬레이션을 끝까지 실행한 마지막 화면입니다. 스캔 1159, 115.9초 시점입니다.</a:t>
+            </a:r>
+          </a:p>
+          <a:p>
+            <a:r>
+              <a:t>왼쪽 2D 그림에서 빨간 선이 대공 표적, 파란 선이 대함 표적의 참값 궤적이고, 동그라미는 각 표적의 시작점입니다. 대공 표적은 위쪽에서 출발해 200 m/s로 S자 기동을 하며 내려오고, 대함 표적은 30 m/s로 움직이기 때문에 이동 거리가 짧습니다.</a:t>
+            </a:r>
+          </a:p>
+          <a:p>
+            <a:r>
+              <a:t>궤적을 따라 이어진 점이 116초 동안 받은 표적 플롯이고, 넓게 퍼진 회색 점이 클러터입니다.</a:t>
+            </a:r>
+          </a:p>
+          <a:p>
+            <a:r>
+              <a:t>오른쪽 3D 그림은 같은 결과를 고도까지 표시한 것입니다. 대공 표적은 고도 약 2,000미터에서, 대함 표적은 해수면 높이에서 움직입니다.</a:t>
+            </a:r>
+          </a:p>
+          <a:p>
+            <a:r>
+              <a:t>주황색 네모 453과 454는 마지막 스캔 시점에 남아 있는 임시 트랙입니다. 다음 장에서는 시뮬레이션 중간의 한 스캔을 골라 트랙이 어떻게 표시되는지 보겠습니다.</a:t>
             </a:r>
           </a:p>
         </p:txBody>
@@ -1777,22 +1782,22 @@
           <a:lstStyle/>
           <a:p>
             <a:r>
-              <a:t>같은 스캔을 표적 주변만 확대한 그림입니다. 현재 참값 위치를 원점으로 두었습니다.</a:t>
-            </a:r>
-          </a:p>
-          <a:p>
-            <a:r>
-              <a:t>표적 1을 보면, 흰 동그라미가 앞 스캔 플롯, 검은 동그라미가 이번 스캔 플롯입니다. 두 플롯이 속도 게이트를 통과해 이번 플롯 위치에 임시 트랙 284가 개시되었습니다. 화살표는 두 플롯으로 구한 속도이고, 점선 타원은 오차 공분산의 위치 1시그마입니다.</a:t>
-            </a:r>
-          </a:p>
-          <a:p>
-            <a:r>
-              <a:t>회색 네모 282는 두 스캔 전에 개시된 트랙으로, 연관이 없어 TrackScore가 2, 1, 0으로 내려가 이번 스캔에 삭제 상태가 되었습니다.</a:t>
-            </a:r>
-          </a:p>
-          <a:p>
-            <a:r>
-              <a:t>아래 트랙 표에서도 같은 내용을 확인할 수 있습니다. 284와 285는 임시 상태에 TrackScore 2, 282와 283은 삭제 상태에 TrackScore 0이며, Assigned_Flag는 모두 0입니다.</a:t>
+              <a:t>시뮬레이션 중간인 스캔 701, 70.1초 시점의 화면입니다. 과제의 결과 화면 조건대로 True, Plot, Track 심볼을 한 그림에 함께 표시했습니다.</a:t>
+            </a:r>
+          </a:p>
+          <a:p>
+            <a:r>
+              <a:t>왼쪽 2D 그림에서 진한 선은 지금까지 지나온 참값 궤적, 옅은 선은 앞으로 지나갈 궤적이고, 동그라미는 시작점입니다. 작은 점이 플롯과 클러터입니다. 표적 근처의 주황색 네모가 임시 트랙, 회색 네모가 삭제 트랙이며, 옆의 숫자는 트랙 ID입니다.</a:t>
+            </a:r>
+          </a:p>
+          <a:p>
+            <a:r>
+              <a:t>오른쪽 3D 그림은 고도를 2배로 늘려 표시했습니다. 대공 표적 주변의 클러터와 플롯, 트랙을 함께 볼 수 있습니다.</a:t>
+            </a:r>
+          </a:p>
+          <a:p>
+            <a:r>
+              <a:t>아래 기호는 화면 범례와 같습니다.</a:t>
             </a:r>
           </a:p>
         </p:txBody>
@@ -1862,27 +1867,22 @@
           <a:lstStyle/>
           <a:p>
             <a:r>
-              <a:t>전체 116초 동안의 트랙 생성 결과입니다.</a:t>
-            </a:r>
-          </a:p>
-          <a:p>
-            <a:r>
-              <a:t>위쪽의 세로선 하나가 트랙 하나가 개시된 시각입니다. 표적 1에서 117개, 표적 2에서 235개, 클러터끼리 3개로 모두 355개의 트랙이 개시되었습니다.</a:t>
-            </a:r>
-          </a:p>
-          <a:p>
-            <a:r>
-              <a:t>아래쪽은 스캔마다 트랙 표에 남아 있는 트랙 수입니다. 연관이 없어 모든 트랙의 TrackScore가 2, 1, 0으로 내려가고, 개시 두 스캔 뒤 삭제되므로 많아야 4개입니다.</a:t>
-            </a:r>
-          </a:p>
-          <a:p>
-            <a:r>
-              <a:t>같은 이유로 시뮬레이션에서는 확정과 메모리 상태가 나타나지 않습니다. 이 두 상태는 오른쪽의 스코어 확인 창으로 확인했습니다. Assigned_Flag 순서를 입력하면 코어의 스코어 함수를 그대로 호출해 결과를 표시합니다. 1, 1, 1을 입력하면 TrackScore 5에서 확정되고, 0, 0이 이어지면 메모리 트랙으로 전환되며, 다시 1이 들어오면 바로 확정으로 돌아가고 MemoryScore가 0이 됩니다.</a:t>
-            </a:r>
-          </a:p>
-          <a:p>
-            <a:r>
-              <a:t>트랙 ID와 플롯 ID도 과제 범위 안에서 부여되었습니다.</a:t>
+              <a:t>같은 스캔을 표적 주변만 확대한 그림입니다. 현재 참값 위치를 원점으로 두었습니다.</a:t>
+            </a:r>
+          </a:p>
+          <a:p>
+            <a:r>
+              <a:t>표적 1을 보면, 흰 동그라미가 앞 스캔 플롯, 검은 동그라미가 이번 스캔 플롯입니다. 두 플롯이 속도 게이트를 통과해 이번 플롯 위치에 임시 트랙 284가 개시되었습니다. 화살표는 두 플롯으로 구한 속도이고, 점선 타원은 오차 공분산의 위치 1시그마입니다.</a:t>
+            </a:r>
+          </a:p>
+          <a:p>
+            <a:r>
+              <a:t>회색 네모 282는 두 스캔 전에 개시된 트랙으로, 연관이 없어 TrackScore가 2, 1, 0으로 내려가 이번 스캔에 삭제 상태가 되었습니다.</a:t>
+            </a:r>
+          </a:p>
+          <a:p>
+            <a:r>
+              <a:t>아래 트랙 표에서도 같은 내용을 확인할 수 있습니다. 284와 285는 임시 상태에 TrackScore 2, 282와 283은 삭제 상태에 TrackScore 0이며, Assigned_Flag는 모두 0입니다.</a:t>
             </a:r>
           </a:p>
         </p:txBody>
@@ -1952,27 +1952,27 @@
           <a:lstStyle/>
           <a:p>
             <a:r>
-              <a:t>마지막으로 과제 요구사항 점검표입니다.</a:t>
-            </a:r>
-          </a:p>
-          <a:p>
-            <a:r>
-              <a:t>트랙 개시는 9차원 상태 변수, 2-Point 개시와 800 m/s 속도 게이트, 가속도 항 0, R 표준편차, 트랙 ID 범위를 모두 구현했고, 각각 단위 시험으로 확인했습니다.</a:t>
-            </a:r>
-          </a:p>
-          <a:p>
-            <a:r>
-              <a:t>트랙 관리는 문턱치 5, 0, 5와 메모리 트랙의 확정 복귀 규칙, 변수 이름까지 명세대로 구현했습니다.</a:t>
-            </a:r>
-          </a:p>
-          <a:p>
-            <a:r>
-              <a:t>시뮬레이션은 안테나 구좌표 플롯 메시지의 UDP 송수신, 스캔마다의 플롯 ID 부여, Assigned_Flag 0 처리, 2D와 3D 화면의 True, Plot, Track 동시 표시를 확인했습니다.</a:t>
-            </a:r>
-          </a:p>
-          <a:p>
-            <a:r>
-              <a:t>이상으로 과제 5의 요구사항을 모두 충족했습니다.</a:t>
+              <a:t>전체 116초 동안의 트랙 생성 결과입니다.</a:t>
+            </a:r>
+          </a:p>
+          <a:p>
+            <a:r>
+              <a:t>위쪽의 세로선 하나가 트랙 하나가 개시된 시각입니다. 표적 1에서 117개, 표적 2에서 235개, 클러터끼리 3개로 모두 355개의 트랙이 개시되었습니다.</a:t>
+            </a:r>
+          </a:p>
+          <a:p>
+            <a:r>
+              <a:t>아래쪽은 스캔마다 트랙 표에 남아 있는 트랙 수입니다. 연관이 없어 모든 트랙의 TrackScore가 2, 1, 0으로 내려가고, 개시 두 스캔 뒤 삭제되므로 많아야 4개입니다.</a:t>
+            </a:r>
+          </a:p>
+          <a:p>
+            <a:r>
+              <a:t>같은 이유로 시뮬레이션에서는 확정과 메모리 상태가 나타나지 않습니다. 이 두 상태는 오른쪽의 스코어 확인 창으로 확인했습니다. Assigned_Flag 순서를 입력하면 코어의 스코어 함수를 그대로 호출해 결과를 표시합니다. 1, 1, 1을 입력하면 TrackScore 5에서 확정되고, 0, 0이 이어지면 메모리 트랙으로 전환되며, 다시 1이 들어오면 바로 확정으로 돌아가고 MemoryScore가 0이 됩니다.</a:t>
+            </a:r>
+          </a:p>
+          <a:p>
+            <a:r>
+              <a:t>트랙 ID와 플롯 ID도 과제 범위 안에서 부여되었습니다.</a:t>
             </a:r>
           </a:p>
         </p:txBody>
@@ -2040,6 +2040,11 @@
         <p:txBody>
           <a:bodyPr/>
           <a:lstStyle/>
+          <a:p>
+            <a:r>
+              <a:t>정리하면, 이번 과제에서는 2-Point 트랙 개시와 트랙 스코어 방식의 트랙 관리를 구현했고, 플롯 메시지 송수신부터 화면 표시까지 동작을 확인했습니다.</a:t>
+            </a:r>
+          </a:p>
           <a:p>
             <a:r>
               <a:t>이상으로 발표를 마치겠습니다. 감사합니다.</a:t>
@@ -28422,7 +28427,7 @@
                 <a:latin typeface="맑은 고딕"/>
                 <a:ea typeface="맑은 고딕"/>
               </a:rPr>
-              <a:t>프로그램을 실행한 결과 화면과 수치로 개시 · 관리 동작을 확인하고, 과제 요구사항을 항목별로 점검합니다.</a:t>
+              <a:t>프로그램을 실행한 결과 화면과 수치로 트랙 개시 · 관리 동작을 확인합니다.</a:t>
             </a:r>
           </a:p>
         </p:txBody>
@@ -28658,7 +28663,7 @@
                 <a:latin typeface="맑은 고딕"/>
                 <a:ea typeface="맑은 고딕"/>
               </a:rPr>
-              <a:t>True · Plot · Track 동시 표시 (2D · 3D)</a:t>
+              <a:t>전체 궤적 (시뮬레이션 마지막 화면)</a:t>
             </a:r>
           </a:p>
         </p:txBody>
@@ -28671,8 +28676,8 @@
         </p:nvCxnSpPr>
         <p:spPr>
           <a:xfrm>
-            <a:off x="5216652" y="2720339"/>
-            <a:ext cx="5390388" cy="0"/>
+            <a:off x="4553712" y="2720339"/>
+            <a:ext cx="6053328" cy="0"/>
           </a:xfrm>
           <a:prstGeom prst="line">
             <a:avLst/>
@@ -28814,7 +28819,7 @@
                 <a:latin typeface="맑은 고딕"/>
                 <a:ea typeface="맑은 고딕"/>
               </a:rPr>
-              <a:t>한 스캔 확대: 트랙이 만들어지는 모습</a:t>
+              <a:t>True · Plot · Track 동시 표시 (스캔 701)</a:t>
             </a:r>
           </a:p>
         </p:txBody>
@@ -28827,8 +28832,8 @@
         </p:nvCxnSpPr>
         <p:spPr>
           <a:xfrm>
-            <a:off x="4727448" y="3127248"/>
-            <a:ext cx="5879592" cy="0"/>
+            <a:off x="5276088" y="3127248"/>
+            <a:ext cx="5330952" cy="0"/>
           </a:xfrm>
           <a:prstGeom prst="line">
             <a:avLst/>
@@ -28970,7 +28975,7 @@
                 <a:latin typeface="맑은 고딕"/>
                 <a:ea typeface="맑은 고딕"/>
               </a:rPr>
-              <a:t>트랙 수명과 스코어 로직 확인</a:t>
+              <a:t>한 스캔 확대: 트랙이 만들어지는 모습</a:t>
             </a:r>
           </a:p>
         </p:txBody>
@@ -28983,8 +28988,8 @@
         </p:nvCxnSpPr>
         <p:spPr>
           <a:xfrm>
-            <a:off x="4014216" y="3534155"/>
-            <a:ext cx="6592824" cy="0"/>
+            <a:off x="4727448" y="3534155"/>
+            <a:ext cx="5879592" cy="0"/>
           </a:xfrm>
           <a:prstGeom prst="line">
             <a:avLst/>
@@ -29126,7 +29131,7 @@
                 <a:latin typeface="맑은 고딕"/>
                 <a:ea typeface="맑은 고딕"/>
               </a:rPr>
-              <a:t>과제 요구사항 점검</a:t>
+              <a:t>트랙 수명과 스코어 로직 확인</a:t>
             </a:r>
           </a:p>
         </p:txBody>
@@ -29139,8 +29144,8 @@
         </p:nvCxnSpPr>
         <p:spPr>
           <a:xfrm>
-            <a:off x="3127248" y="3941063"/>
-            <a:ext cx="7479792" cy="0"/>
+            <a:off x="4014216" y="3941063"/>
+            <a:ext cx="6592824" cy="0"/>
           </a:xfrm>
           <a:prstGeom prst="line">
             <a:avLst/>
@@ -31260,7 +31265,7 @@
       </p:sp>
       <p:pic>
         <p:nvPicPr>
-          <p:cNvPr id="50" name="Picture 49" descr="ui_s701_both.png"/>
+          <p:cNvPr id="50" name="Picture 49" descr="ui_s1159_both.png"/>
           <p:cNvPicPr>
             <a:picLocks noChangeAspect="1"/>
           </p:cNvPicPr>
@@ -31386,7 +31391,7 @@
                 <a:latin typeface="맑은 고딕"/>
                 <a:ea typeface="맑은 고딕"/>
               </a:rPr>
-              <a:t>4.2 True · Plot · Track 동시 표시 (2D · 3D)</a:t>
+              <a:t>4.2 전체 궤적 (시뮬레이션 마지막 화면)</a:t>
             </a:r>
           </a:p>
         </p:txBody>
@@ -31414,7 +31419,7 @@
                 <a:latin typeface="맑은 고딕"/>
                 <a:ea typeface="맑은 고딕"/>
               </a:rPr>
-              <a:t>스캔 701 (70.1 s) 화면. 참값 궤적과 지금 위치, 지금까지의 플롯 · 클러터, 지금 스캔의 트랙 심볼을 한 그림에 겹쳐 그립니다.</a:t>
+              <a:t>스캔 1159 (115.9 s), 116 초를 끝까지 돌린 화면입니다. 두 표적의 참값 궤적 전체와 그동안 받은 플롯 · 클러터가 모두 그려져 있습니다.</a:t>
             </a:r>
           </a:p>
         </p:txBody>
@@ -31469,7 +31474,7 @@
       </p:sp>
       <p:pic>
         <p:nvPicPr>
-          <p:cNvPr id="26" name="Picture 25" descr="ui_crop_2d.png"/>
+          <p:cNvPr id="26" name="Picture 25" descr="ui_crop_full_2d.png"/>
           <p:cNvPicPr>
             <a:picLocks noChangeAspect="1"/>
           </p:cNvPicPr>
@@ -31498,7 +31503,7 @@
       </p:pic>
       <p:pic>
         <p:nvPicPr>
-          <p:cNvPr id="27" name="Picture 26" descr="ui_crop_3d.png"/>
+          <p:cNvPr id="27" name="Picture 26" descr="ui_crop_full_3d.png"/>
           <p:cNvPicPr>
             <a:picLocks noChangeAspect="1"/>
           </p:cNvPicPr>
@@ -31600,7 +31605,7 @@
                 <a:latin typeface="맑은 고딕"/>
                 <a:ea typeface="맑은 고딕"/>
               </a:rPr>
-              <a:t>3D: 동-북-고도 (고도 2 배), 끌어서 회전</a:t>
+              <a:t>3D: 동-북-고도 (고도 2 배)</a:t>
             </a:r>
           </a:p>
         </p:txBody>
@@ -31614,7 +31619,7 @@
         <p:spPr>
           <a:xfrm>
             <a:off x="640080" y="5998464"/>
-            <a:ext cx="2295144" cy="237744"/>
+            <a:ext cx="1933956" cy="237744"/>
           </a:xfrm>
           <a:prstGeom prst="rect">
             <a:avLst/>
@@ -31635,12 +31640,12 @@
             <a:r>
               <a:rPr sz="1050" b="1" i="0">
                 <a:solidFill>
-                  <a:srgbClr val="1B2740"/>
-                </a:solidFill>
-                <a:latin typeface="맑은 고딕"/>
-                <a:ea typeface="맑은 고딕"/>
-              </a:rPr>
-              <a:t>━ 참값 궤적 · ○ 지금 위치</a:t>
+                  <a:srgbClr val="2563EB"/>
+                </a:solidFill>
+                <a:latin typeface="맑은 고딕"/>
+                <a:ea typeface="맑은 고딕"/>
+              </a:rPr>
+              <a:t>━ 표적 1 대함 30 m/s</a:t>
             </a:r>
           </a:p>
         </p:txBody>
@@ -31653,8 +31658,8 @@
         </p:nvSpPr>
         <p:spPr>
           <a:xfrm>
-            <a:off x="2935224" y="5998464"/>
-            <a:ext cx="2414015" cy="237744"/>
+            <a:off x="2574036" y="5998464"/>
+            <a:ext cx="2011680" cy="237744"/>
           </a:xfrm>
           <a:prstGeom prst="rect">
             <a:avLst/>
@@ -31675,12 +31680,12 @@
             <a:r>
               <a:rPr sz="1050" b="1" i="0">
                 <a:solidFill>
-                  <a:srgbClr val="1B2740"/>
-                </a:solidFill>
-                <a:latin typeface="맑은 고딕"/>
-                <a:ea typeface="맑은 고딕"/>
-              </a:rPr>
-              <a:t>● 플롯 (큰 점 = 지금 스캔)</a:t>
+                  <a:srgbClr val="DC2626"/>
+                </a:solidFill>
+                <a:latin typeface="맑은 고딕"/>
+                <a:ea typeface="맑은 고딕"/>
+              </a:rPr>
+              <a:t>━ 표적 2 대공 200 m/s</a:t>
             </a:r>
           </a:p>
         </p:txBody>
@@ -31693,8 +31698,8 @@
         </p:nvSpPr>
         <p:spPr>
           <a:xfrm>
-            <a:off x="5349240" y="5998464"/>
-            <a:ext cx="868680" cy="237744"/>
+            <a:off x="4585716" y="5998464"/>
+            <a:ext cx="1010412" cy="237744"/>
           </a:xfrm>
           <a:prstGeom prst="rect">
             <a:avLst/>
@@ -31715,12 +31720,12 @@
             <a:r>
               <a:rPr sz="1050" b="1" i="0">
                 <a:solidFill>
-                  <a:srgbClr val="6B7280"/>
-                </a:solidFill>
-                <a:latin typeface="맑은 고딕"/>
-                <a:ea typeface="맑은 고딕"/>
-              </a:rPr>
-              <a:t>· 클러터</a:t>
+                  <a:srgbClr val="1B2740"/>
+                </a:solidFill>
+                <a:latin typeface="맑은 고딕"/>
+                <a:ea typeface="맑은 고딕"/>
+              </a:rPr>
+              <a:t>○ 시작점</a:t>
             </a:r>
           </a:p>
         </p:txBody>
@@ -31733,8 +31738,8 @@
         </p:nvSpPr>
         <p:spPr>
           <a:xfrm>
-            <a:off x="6217920" y="5998464"/>
-            <a:ext cx="749808" cy="237744"/>
+            <a:off x="5596128" y="5998464"/>
+            <a:ext cx="864108" cy="237744"/>
           </a:xfrm>
           <a:prstGeom prst="rect">
             <a:avLst/>
@@ -31755,12 +31760,12 @@
             <a:r>
               <a:rPr sz="1050" b="1" i="0">
                 <a:solidFill>
-                  <a:srgbClr val="D97706"/>
-                </a:solidFill>
-                <a:latin typeface="맑은 고딕"/>
-                <a:ea typeface="맑은 고딕"/>
-              </a:rPr>
-              <a:t>□ 임시</a:t>
+                  <a:srgbClr val="1B2740"/>
+                </a:solidFill>
+                <a:latin typeface="맑은 고딕"/>
+                <a:ea typeface="맑은 고딕"/>
+              </a:rPr>
+              <a:t>● 플롯</a:t>
             </a:r>
           </a:p>
         </p:txBody>
@@ -31773,8 +31778,8 @@
         </p:nvSpPr>
         <p:spPr>
           <a:xfrm>
-            <a:off x="6967728" y="5998464"/>
-            <a:ext cx="749808" cy="237744"/>
+            <a:off x="6460236" y="5998464"/>
+            <a:ext cx="941832" cy="237744"/>
           </a:xfrm>
           <a:prstGeom prst="rect">
             <a:avLst/>
@@ -31795,12 +31800,12 @@
             <a:r>
               <a:rPr sz="1050" b="1" i="0">
                 <a:solidFill>
-                  <a:srgbClr val="059669"/>
-                </a:solidFill>
-                <a:latin typeface="맑은 고딕"/>
-                <a:ea typeface="맑은 고딕"/>
-              </a:rPr>
-              <a:t>■ 확정</a:t>
+                  <a:srgbClr val="6B7280"/>
+                </a:solidFill>
+                <a:latin typeface="맑은 고딕"/>
+                <a:ea typeface="맑은 고딕"/>
+              </a:rPr>
+              <a:t>· 클러터</a:t>
             </a:r>
           </a:p>
         </p:txBody>
@@ -31813,8 +31818,8 @@
         </p:nvSpPr>
         <p:spPr>
           <a:xfrm>
-            <a:off x="7717536" y="5998464"/>
-            <a:ext cx="868680" cy="237744"/>
+            <a:off x="7402068" y="5998464"/>
+            <a:ext cx="1234440" cy="237744"/>
           </a:xfrm>
           <a:prstGeom prst="rect">
             <a:avLst/>
@@ -31835,52 +31840,12 @@
             <a:r>
               <a:rPr sz="1050" b="1" i="0">
                 <a:solidFill>
-                  <a:srgbClr val="7C3AED"/>
-                </a:solidFill>
-                <a:latin typeface="맑은 고딕"/>
-                <a:ea typeface="맑은 고딕"/>
-              </a:rPr>
-              <a:t>⬚ 메모리</a:t>
-            </a:r>
-          </a:p>
-        </p:txBody>
-      </p:sp>
-      <p:sp>
-        <p:nvSpPr>
-          <p:cNvPr id="36" name="TextBox 35"/>
-          <p:cNvSpPr txBox="1"/>
-          <p:nvPr/>
-        </p:nvSpPr>
-        <p:spPr>
-          <a:xfrm>
-            <a:off x="8586215" y="5998464"/>
-            <a:ext cx="749808" cy="237744"/>
-          </a:xfrm>
-          <a:prstGeom prst="rect">
-            <a:avLst/>
-          </a:prstGeom>
-          <a:noFill/>
-        </p:spPr>
-        <p:txBody>
-          <a:bodyPr wrap="square" lIns="0" rIns="0" tIns="0" bIns="0" anchor="t">
-            <a:spAutoFit/>
-          </a:bodyPr>
-          <a:lstStyle/>
-          <a:p>
-            <a:pPr algn="l">
-              <a:spcAft>
-                <a:spcPts val="0"/>
-              </a:spcAft>
-            </a:pPr>
-            <a:r>
-              <a:rPr sz="1050" b="1" i="0">
-                <a:solidFill>
-                  <a:srgbClr val="6B7280"/>
-                </a:solidFill>
-                <a:latin typeface="맑은 고딕"/>
-                <a:ea typeface="맑은 고딕"/>
-              </a:rPr>
-              <a:t>⊠ 삭제</a:t>
+                  <a:srgbClr val="D97706"/>
+                </a:solidFill>
+                <a:latin typeface="맑은 고딕"/>
+                <a:ea typeface="맑은 고딕"/>
+              </a:rPr>
+              <a:t>□ 임시 트랙</a:t>
             </a:r>
           </a:p>
         </p:txBody>
@@ -31954,7 +31919,7 @@
                 <a:latin typeface="맑은 고딕"/>
                 <a:ea typeface="맑은 고딕"/>
               </a:rPr>
-              <a:t>4.3 한 스캔 확대: 트랙이 만들어지는 모습</a:t>
+              <a:t>4.3 True · Plot · Track 동시 표시 (스캔 701)</a:t>
             </a:r>
           </a:p>
         </p:txBody>
@@ -31982,7 +31947,7 @@
                 <a:latin typeface="맑은 고딕"/>
                 <a:ea typeface="맑은 고딕"/>
               </a:rPr>
-              <a:t>스캔 701 에서 두 표적 모두 앞 스캔 · 이번 스캔 플롯 쌍이 게이트를 통과해 임시 트랙 284, 285 가 생겼고, 스캔 699 에 만든 282, 283 은 삭제됐습니다.</a:t>
+              <a:t>스캔 701 (70.1 s) 화면. 참값 궤적, 지금까지의 플롯 · 클러터, 지금 스캔의 트랙 심볼을 한 그림에 겹쳐 그립니다.</a:t>
             </a:r>
           </a:p>
         </p:txBody>
@@ -32037,7 +32002,7 @@
       </p:sp>
       <p:pic>
         <p:nvPicPr>
-          <p:cNvPr id="26" name="Picture 25" descr="fig_zoom.png"/>
+          <p:cNvPr id="26" name="Picture 25" descr="ui_crop_2d.png"/>
           <p:cNvPicPr>
             <a:picLocks noChangeAspect="1"/>
           </p:cNvPicPr>
@@ -32051,148 +32016,22 @@
         </p:blipFill>
         <p:spPr>
           <a:xfrm>
-            <a:off x="640080" y="2212848"/>
-            <a:ext cx="7223760" cy="3127360"/>
+            <a:off x="640080" y="2286000"/>
+            <a:ext cx="5349240" cy="3410140"/>
           </a:xfrm>
           <a:prstGeom prst="rect">
             <a:avLst/>
           </a:prstGeom>
+          <a:ln w="9525">
+            <a:solidFill>
+              <a:srgbClr val="D2D9E5"/>
+            </a:solidFill>
+          </a:ln>
         </p:spPr>
       </p:pic>
-      <p:sp>
-        <p:nvSpPr>
-          <p:cNvPr id="27" name="TextBox 26"/>
-          <p:cNvSpPr txBox="1"/>
-          <p:nvPr/>
-        </p:nvSpPr>
-        <p:spPr>
-          <a:xfrm>
-            <a:off x="8366760" y="2286000"/>
-            <a:ext cx="3200400" cy="274320"/>
-          </a:xfrm>
-          <a:prstGeom prst="rect">
-            <a:avLst/>
-          </a:prstGeom>
-          <a:noFill/>
-        </p:spPr>
-        <p:txBody>
-          <a:bodyPr wrap="square" lIns="0" rIns="0" tIns="0" bIns="0" anchor="t">
-            <a:spAutoFit/>
-          </a:bodyPr>
-          <a:lstStyle/>
-          <a:p>
-            <a:pPr algn="l">
-              <a:spcAft>
-                <a:spcPts val="0"/>
-              </a:spcAft>
-            </a:pPr>
-            <a:r>
-              <a:rPr sz="1200" b="1" i="0">
-                <a:solidFill>
-                  <a:srgbClr val="1B2740"/>
-                </a:solidFill>
-                <a:latin typeface="맑은 고딕"/>
-                <a:ea typeface="맑은 고딕"/>
-              </a:rPr>
-              <a:t>같은 스캔의 트랙 표 (UI)</a:t>
-            </a:r>
-          </a:p>
-        </p:txBody>
-      </p:sp>
-      <p:sp>
-        <p:nvSpPr>
-          <p:cNvPr id="28" name="TextBox 27"/>
-          <p:cNvSpPr txBox="1"/>
-          <p:nvPr/>
-        </p:nvSpPr>
-        <p:spPr>
-          <a:xfrm>
-            <a:off x="8366760" y="2578608"/>
-            <a:ext cx="3200400" cy="1737360"/>
-          </a:xfrm>
-          <a:prstGeom prst="rect">
-            <a:avLst/>
-          </a:prstGeom>
-          <a:noFill/>
-        </p:spPr>
-        <p:txBody>
-          <a:bodyPr wrap="square" lIns="0" rIns="0" tIns="0" bIns="0" anchor="t">
-            <a:spAutoFit/>
-          </a:bodyPr>
-          <a:lstStyle/>
-          <a:p>
-            <a:pPr algn="l">
-              <a:spcAft>
-                <a:spcPts val="300"/>
-              </a:spcAft>
-            </a:pPr>
-            <a:r>
-              <a:rPr sz="1050" b="0" i="0">
-                <a:solidFill>
-                  <a:srgbClr val="1B2740"/>
-                </a:solidFill>
-                <a:latin typeface="맑은 고딕"/>
-                <a:ea typeface="맑은 고딕"/>
-              </a:rPr>
-              <a:t>284 · 285: 임시 (1), TrackScore 2</a:t>
-            </a:r>
-          </a:p>
-          <a:p>
-            <a:pPr algn="l">
-              <a:spcAft>
-                <a:spcPts val="300"/>
-              </a:spcAft>
-            </a:pPr>
-            <a:r>
-              <a:rPr sz="1050" b="0" i="0">
-                <a:solidFill>
-                  <a:srgbClr val="1B2740"/>
-                </a:solidFill>
-                <a:latin typeface="맑은 고딕"/>
-                <a:ea typeface="맑은 고딕"/>
-              </a:rPr>
-              <a:t>282 · 283: 삭제 (4), TrackScore 0</a:t>
-            </a:r>
-          </a:p>
-          <a:p>
-            <a:pPr algn="l">
-              <a:spcAft>
-                <a:spcPts val="300"/>
-              </a:spcAft>
-            </a:pPr>
-            <a:r>
-              <a:rPr sz="1050" b="0" i="0">
-                <a:solidFill>
-                  <a:srgbClr val="1B2740"/>
-                </a:solidFill>
-                <a:latin typeface="맑은 고딕"/>
-                <a:ea typeface="맑은 고딕"/>
-              </a:rPr>
-              <a:t>Assigned_Flag 는 모두 0</a:t>
-            </a:r>
-          </a:p>
-          <a:p>
-            <a:pPr algn="l">
-              <a:spcAft>
-                <a:spcPts val="0"/>
-              </a:spcAft>
-            </a:pPr>
-            <a:r>
-              <a:rPr sz="1050" b="0" i="0">
-                <a:solidFill>
-                  <a:srgbClr val="4A5A7A"/>
-                </a:solidFill>
-                <a:latin typeface="맑은 고딕"/>
-                <a:ea typeface="맑은 고딕"/>
-              </a:rPr>
-              <a:t>트랙 위치 = 이번 플롯, 속도 = 두 플롯 차 ÷ 0.1 s</a:t>
-            </a:r>
-          </a:p>
-        </p:txBody>
-      </p:sp>
       <p:pic>
         <p:nvPicPr>
-          <p:cNvPr id="29" name="Picture 28" descr="ui_crop_table.png"/>
+          <p:cNvPr id="27" name="Picture 26" descr="ui_crop_3d.png"/>
           <p:cNvPicPr>
             <a:picLocks noChangeAspect="1"/>
           </p:cNvPicPr>
@@ -32206,8 +32045,8 @@
         </p:blipFill>
         <p:spPr>
           <a:xfrm>
-            <a:off x="640080" y="5422392"/>
-            <a:ext cx="7223760" cy="784713"/>
+            <a:off x="6199632" y="2286000"/>
+            <a:ext cx="5349240" cy="3387852"/>
           </a:xfrm>
           <a:prstGeom prst="rect">
             <a:avLst/>
@@ -32219,6 +32058,366 @@
           </a:ln>
         </p:spPr>
       </p:pic>
+      <p:sp>
+        <p:nvSpPr>
+          <p:cNvPr id="28" name="TextBox 27"/>
+          <p:cNvSpPr txBox="1"/>
+          <p:nvPr/>
+        </p:nvSpPr>
+        <p:spPr>
+          <a:xfrm>
+            <a:off x="640080" y="5741860"/>
+            <a:ext cx="5349240" cy="228600"/>
+          </a:xfrm>
+          <a:prstGeom prst="rect">
+            <a:avLst/>
+          </a:prstGeom>
+          <a:noFill/>
+        </p:spPr>
+        <p:txBody>
+          <a:bodyPr wrap="square" lIns="0" rIns="0" tIns="0" bIns="0" anchor="t">
+            <a:spAutoFit/>
+          </a:bodyPr>
+          <a:lstStyle/>
+          <a:p>
+            <a:pPr algn="l">
+              <a:spcAft>
+                <a:spcPts val="0"/>
+              </a:spcAft>
+            </a:pPr>
+            <a:r>
+              <a:rPr sz="1000" b="0" i="0">
+                <a:solidFill>
+                  <a:srgbClr val="4A5A7A"/>
+                </a:solidFill>
+                <a:latin typeface="맑은 고딕"/>
+                <a:ea typeface="맑은 고딕"/>
+              </a:rPr>
+              <a:t>2D: 위경도 격자 위 동-북 평면</a:t>
+            </a:r>
+          </a:p>
+        </p:txBody>
+      </p:sp>
+      <p:sp>
+        <p:nvSpPr>
+          <p:cNvPr id="29" name="TextBox 28"/>
+          <p:cNvSpPr txBox="1"/>
+          <p:nvPr/>
+        </p:nvSpPr>
+        <p:spPr>
+          <a:xfrm>
+            <a:off x="6199632" y="5741860"/>
+            <a:ext cx="5349240" cy="228600"/>
+          </a:xfrm>
+          <a:prstGeom prst="rect">
+            <a:avLst/>
+          </a:prstGeom>
+          <a:noFill/>
+        </p:spPr>
+        <p:txBody>
+          <a:bodyPr wrap="square" lIns="0" rIns="0" tIns="0" bIns="0" anchor="t">
+            <a:spAutoFit/>
+          </a:bodyPr>
+          <a:lstStyle/>
+          <a:p>
+            <a:pPr algn="l">
+              <a:spcAft>
+                <a:spcPts val="0"/>
+              </a:spcAft>
+            </a:pPr>
+            <a:r>
+              <a:rPr sz="1000" b="0" i="0">
+                <a:solidFill>
+                  <a:srgbClr val="4A5A7A"/>
+                </a:solidFill>
+                <a:latin typeface="맑은 고딕"/>
+                <a:ea typeface="맑은 고딕"/>
+              </a:rPr>
+              <a:t>3D: 동-북-고도 (고도 2 배), 끌어서 회전</a:t>
+            </a:r>
+          </a:p>
+        </p:txBody>
+      </p:sp>
+      <p:sp>
+        <p:nvSpPr>
+          <p:cNvPr id="30" name="TextBox 29"/>
+          <p:cNvSpPr txBox="1"/>
+          <p:nvPr/>
+        </p:nvSpPr>
+        <p:spPr>
+          <a:xfrm>
+            <a:off x="640080" y="5998464"/>
+            <a:ext cx="2057400" cy="237744"/>
+          </a:xfrm>
+          <a:prstGeom prst="rect">
+            <a:avLst/>
+          </a:prstGeom>
+          <a:noFill/>
+        </p:spPr>
+        <p:txBody>
+          <a:bodyPr wrap="square" lIns="0" rIns="0" tIns="0" bIns="0" anchor="t">
+            <a:spAutoFit/>
+          </a:bodyPr>
+          <a:lstStyle/>
+          <a:p>
+            <a:pPr algn="l">
+              <a:spcAft>
+                <a:spcPts val="0"/>
+              </a:spcAft>
+            </a:pPr>
+            <a:r>
+              <a:rPr sz="1050" b="1" i="0">
+                <a:solidFill>
+                  <a:srgbClr val="1B2740"/>
+                </a:solidFill>
+                <a:latin typeface="맑은 고딕"/>
+                <a:ea typeface="맑은 고딕"/>
+              </a:rPr>
+              <a:t>━ 참값 궤적 · ○ 시작점</a:t>
+            </a:r>
+          </a:p>
+        </p:txBody>
+      </p:sp>
+      <p:sp>
+        <p:nvSpPr>
+          <p:cNvPr id="31" name="TextBox 30"/>
+          <p:cNvSpPr txBox="1"/>
+          <p:nvPr/>
+        </p:nvSpPr>
+        <p:spPr>
+          <a:xfrm>
+            <a:off x="2697480" y="5998464"/>
+            <a:ext cx="2414015" cy="237744"/>
+          </a:xfrm>
+          <a:prstGeom prst="rect">
+            <a:avLst/>
+          </a:prstGeom>
+          <a:noFill/>
+        </p:spPr>
+        <p:txBody>
+          <a:bodyPr wrap="square" lIns="0" rIns="0" tIns="0" bIns="0" anchor="t">
+            <a:spAutoFit/>
+          </a:bodyPr>
+          <a:lstStyle/>
+          <a:p>
+            <a:pPr algn="l">
+              <a:spcAft>
+                <a:spcPts val="0"/>
+              </a:spcAft>
+            </a:pPr>
+            <a:r>
+              <a:rPr sz="1050" b="1" i="0">
+                <a:solidFill>
+                  <a:srgbClr val="1B2740"/>
+                </a:solidFill>
+                <a:latin typeface="맑은 고딕"/>
+                <a:ea typeface="맑은 고딕"/>
+              </a:rPr>
+              <a:t>● 플롯 (큰 점 = 지금 스캔)</a:t>
+            </a:r>
+          </a:p>
+        </p:txBody>
+      </p:sp>
+      <p:sp>
+        <p:nvSpPr>
+          <p:cNvPr id="32" name="TextBox 31"/>
+          <p:cNvSpPr txBox="1"/>
+          <p:nvPr/>
+        </p:nvSpPr>
+        <p:spPr>
+          <a:xfrm>
+            <a:off x="5111496" y="5998464"/>
+            <a:ext cx="868680" cy="237744"/>
+          </a:xfrm>
+          <a:prstGeom prst="rect">
+            <a:avLst/>
+          </a:prstGeom>
+          <a:noFill/>
+        </p:spPr>
+        <p:txBody>
+          <a:bodyPr wrap="square" lIns="0" rIns="0" tIns="0" bIns="0" anchor="t">
+            <a:spAutoFit/>
+          </a:bodyPr>
+          <a:lstStyle/>
+          <a:p>
+            <a:pPr algn="l">
+              <a:spcAft>
+                <a:spcPts val="0"/>
+              </a:spcAft>
+            </a:pPr>
+            <a:r>
+              <a:rPr sz="1050" b="1" i="0">
+                <a:solidFill>
+                  <a:srgbClr val="6B7280"/>
+                </a:solidFill>
+                <a:latin typeface="맑은 고딕"/>
+                <a:ea typeface="맑은 고딕"/>
+              </a:rPr>
+              <a:t>· 클러터</a:t>
+            </a:r>
+          </a:p>
+        </p:txBody>
+      </p:sp>
+      <p:sp>
+        <p:nvSpPr>
+          <p:cNvPr id="33" name="TextBox 32"/>
+          <p:cNvSpPr txBox="1"/>
+          <p:nvPr/>
+        </p:nvSpPr>
+        <p:spPr>
+          <a:xfrm>
+            <a:off x="5980176" y="5998464"/>
+            <a:ext cx="749808" cy="237744"/>
+          </a:xfrm>
+          <a:prstGeom prst="rect">
+            <a:avLst/>
+          </a:prstGeom>
+          <a:noFill/>
+        </p:spPr>
+        <p:txBody>
+          <a:bodyPr wrap="square" lIns="0" rIns="0" tIns="0" bIns="0" anchor="t">
+            <a:spAutoFit/>
+          </a:bodyPr>
+          <a:lstStyle/>
+          <a:p>
+            <a:pPr algn="l">
+              <a:spcAft>
+                <a:spcPts val="0"/>
+              </a:spcAft>
+            </a:pPr>
+            <a:r>
+              <a:rPr sz="1050" b="1" i="0">
+                <a:solidFill>
+                  <a:srgbClr val="D97706"/>
+                </a:solidFill>
+                <a:latin typeface="맑은 고딕"/>
+                <a:ea typeface="맑은 고딕"/>
+              </a:rPr>
+              <a:t>□ 임시</a:t>
+            </a:r>
+          </a:p>
+        </p:txBody>
+      </p:sp>
+      <p:sp>
+        <p:nvSpPr>
+          <p:cNvPr id="34" name="TextBox 33"/>
+          <p:cNvSpPr txBox="1"/>
+          <p:nvPr/>
+        </p:nvSpPr>
+        <p:spPr>
+          <a:xfrm>
+            <a:off x="6729984" y="5998464"/>
+            <a:ext cx="749808" cy="237744"/>
+          </a:xfrm>
+          <a:prstGeom prst="rect">
+            <a:avLst/>
+          </a:prstGeom>
+          <a:noFill/>
+        </p:spPr>
+        <p:txBody>
+          <a:bodyPr wrap="square" lIns="0" rIns="0" tIns="0" bIns="0" anchor="t">
+            <a:spAutoFit/>
+          </a:bodyPr>
+          <a:lstStyle/>
+          <a:p>
+            <a:pPr algn="l">
+              <a:spcAft>
+                <a:spcPts val="0"/>
+              </a:spcAft>
+            </a:pPr>
+            <a:r>
+              <a:rPr sz="1050" b="1" i="0">
+                <a:solidFill>
+                  <a:srgbClr val="059669"/>
+                </a:solidFill>
+                <a:latin typeface="맑은 고딕"/>
+                <a:ea typeface="맑은 고딕"/>
+              </a:rPr>
+              <a:t>■ 확정</a:t>
+            </a:r>
+          </a:p>
+        </p:txBody>
+      </p:sp>
+      <p:sp>
+        <p:nvSpPr>
+          <p:cNvPr id="35" name="TextBox 34"/>
+          <p:cNvSpPr txBox="1"/>
+          <p:nvPr/>
+        </p:nvSpPr>
+        <p:spPr>
+          <a:xfrm>
+            <a:off x="7479792" y="5998464"/>
+            <a:ext cx="868680" cy="237744"/>
+          </a:xfrm>
+          <a:prstGeom prst="rect">
+            <a:avLst/>
+          </a:prstGeom>
+          <a:noFill/>
+        </p:spPr>
+        <p:txBody>
+          <a:bodyPr wrap="square" lIns="0" rIns="0" tIns="0" bIns="0" anchor="t">
+            <a:spAutoFit/>
+          </a:bodyPr>
+          <a:lstStyle/>
+          <a:p>
+            <a:pPr algn="l">
+              <a:spcAft>
+                <a:spcPts val="0"/>
+              </a:spcAft>
+            </a:pPr>
+            <a:r>
+              <a:rPr sz="1050" b="1" i="0">
+                <a:solidFill>
+                  <a:srgbClr val="7C3AED"/>
+                </a:solidFill>
+                <a:latin typeface="맑은 고딕"/>
+                <a:ea typeface="맑은 고딕"/>
+              </a:rPr>
+              <a:t>⬚ 메모리</a:t>
+            </a:r>
+          </a:p>
+        </p:txBody>
+      </p:sp>
+      <p:sp>
+        <p:nvSpPr>
+          <p:cNvPr id="36" name="TextBox 35"/>
+          <p:cNvSpPr txBox="1"/>
+          <p:nvPr/>
+        </p:nvSpPr>
+        <p:spPr>
+          <a:xfrm>
+            <a:off x="8348471" y="5998464"/>
+            <a:ext cx="749808" cy="237744"/>
+          </a:xfrm>
+          <a:prstGeom prst="rect">
+            <a:avLst/>
+          </a:prstGeom>
+          <a:noFill/>
+        </p:spPr>
+        <p:txBody>
+          <a:bodyPr wrap="square" lIns="0" rIns="0" tIns="0" bIns="0" anchor="t">
+            <a:spAutoFit/>
+          </a:bodyPr>
+          <a:lstStyle/>
+          <a:p>
+            <a:pPr algn="l">
+              <a:spcAft>
+                <a:spcPts val="0"/>
+              </a:spcAft>
+            </a:pPr>
+            <a:r>
+              <a:rPr sz="1050" b="1" i="0">
+                <a:solidFill>
+                  <a:srgbClr val="6B7280"/>
+                </a:solidFill>
+                <a:latin typeface="맑은 고딕"/>
+                <a:ea typeface="맑은 고딕"/>
+              </a:rPr>
+              <a:t>⊠ 삭제</a:t>
+            </a:r>
+          </a:p>
+        </p:txBody>
+      </p:sp>
     </p:spTree>
   </p:cSld>
   <p:clrMapOvr>
@@ -32288,7 +32487,7 @@
                 <a:latin typeface="맑은 고딕"/>
                 <a:ea typeface="맑은 고딕"/>
               </a:rPr>
-              <a:t>4.4 트랙 수명과 스코어 로직 확인</a:t>
+              <a:t>4.4 한 스캔 확대: 트랙이 만들어지는 모습</a:t>
             </a:r>
           </a:p>
         </p:txBody>
@@ -32316,7 +32515,7 @@
                 <a:latin typeface="맑은 고딕"/>
                 <a:ea typeface="맑은 고딕"/>
               </a:rPr>
-              <a:t>연관이 없어 모든 트랙이 2 → 1 → 0 으로 내려가 개시 두 스캔 뒤 삭제됩니다. 확정 · 메모리 전환은 스코어 확인 창에 Flag 를 넣어 확인했습니다.</a:t>
+              <a:t>스캔 701 에서 두 표적 모두 앞 스캔 · 이번 스캔 플롯 쌍이 게이트를 통과해 임시 트랙 284, 285 가 생겼고, 스캔 699 에 만든 282, 283 은 삭제됐습니다.</a:t>
             </a:r>
           </a:p>
         </p:txBody>
@@ -32371,7 +32570,7 @@
       </p:sp>
       <p:pic>
         <p:nvPicPr>
-          <p:cNvPr id="26" name="Picture 25" descr="fig_life.png"/>
+          <p:cNvPr id="26" name="Picture 25" descr="fig_zoom.png"/>
           <p:cNvPicPr>
             <a:picLocks noChangeAspect="1"/>
           </p:cNvPicPr>
@@ -32385,8 +32584,8 @@
         </p:blipFill>
         <p:spPr>
           <a:xfrm>
-            <a:off x="566928" y="2240280"/>
-            <a:ext cx="6766560" cy="2606040"/>
+            <a:off x="640080" y="2212848"/>
+            <a:ext cx="7223760" cy="3127360"/>
           </a:xfrm>
           <a:prstGeom prst="rect">
             <a:avLst/>
@@ -32401,8 +32600,8 @@
         </p:nvSpPr>
         <p:spPr>
           <a:xfrm>
-            <a:off x="640080" y="4937760"/>
-            <a:ext cx="1600200" cy="502920"/>
+            <a:off x="8366760" y="2286000"/>
+            <a:ext cx="3200400" cy="274320"/>
           </a:xfrm>
           <a:prstGeom prst="rect">
             <a:avLst/>
@@ -32421,14 +32620,14 @@
               </a:spcAft>
             </a:pPr>
             <a:r>
-              <a:rPr sz="2400" b="1" i="0">
-                <a:solidFill>
-                  <a:srgbClr val="1B2740"/>
-                </a:solidFill>
-                <a:latin typeface="Arial"/>
-                <a:ea typeface="맑은 고딕"/>
-              </a:rPr>
-              <a:t>355</a:t>
+              <a:rPr sz="1200" b="1" i="0">
+                <a:solidFill>
+                  <a:srgbClr val="1B2740"/>
+                </a:solidFill>
+                <a:latin typeface="맑은 고딕"/>
+                <a:ea typeface="맑은 고딕"/>
+              </a:rPr>
+              <a:t>같은 스캔의 트랙 표 (UI)</a:t>
             </a:r>
           </a:p>
         </p:txBody>
@@ -32441,8 +32640,8 @@
         </p:nvSpPr>
         <p:spPr>
           <a:xfrm>
-            <a:off x="640080" y="5440680"/>
-            <a:ext cx="1600200" cy="274320"/>
+            <a:off x="8366760" y="2578608"/>
+            <a:ext cx="3200400" cy="1737360"/>
           </a:xfrm>
           <a:prstGeom prst="rect">
             <a:avLst/>
@@ -32454,6 +32653,57 @@
             <a:spAutoFit/>
           </a:bodyPr>
           <a:lstStyle/>
+          <a:p>
+            <a:pPr algn="l">
+              <a:spcAft>
+                <a:spcPts val="300"/>
+              </a:spcAft>
+            </a:pPr>
+            <a:r>
+              <a:rPr sz="1050" b="0" i="0">
+                <a:solidFill>
+                  <a:srgbClr val="1B2740"/>
+                </a:solidFill>
+                <a:latin typeface="맑은 고딕"/>
+                <a:ea typeface="맑은 고딕"/>
+              </a:rPr>
+              <a:t>284 · 285: 임시 (1), TrackScore 2</a:t>
+            </a:r>
+          </a:p>
+          <a:p>
+            <a:pPr algn="l">
+              <a:spcAft>
+                <a:spcPts val="300"/>
+              </a:spcAft>
+            </a:pPr>
+            <a:r>
+              <a:rPr sz="1050" b="0" i="0">
+                <a:solidFill>
+                  <a:srgbClr val="1B2740"/>
+                </a:solidFill>
+                <a:latin typeface="맑은 고딕"/>
+                <a:ea typeface="맑은 고딕"/>
+              </a:rPr>
+              <a:t>282 · 283: 삭제 (4), TrackScore 0</a:t>
+            </a:r>
+          </a:p>
+          <a:p>
+            <a:pPr algn="l">
+              <a:spcAft>
+                <a:spcPts val="300"/>
+              </a:spcAft>
+            </a:pPr>
+            <a:r>
+              <a:rPr sz="1050" b="0" i="0">
+                <a:solidFill>
+                  <a:srgbClr val="1B2740"/>
+                </a:solidFill>
+                <a:latin typeface="맑은 고딕"/>
+                <a:ea typeface="맑은 고딕"/>
+              </a:rPr>
+              <a:t>Assigned_Flag 는 모두 0</a:t>
+            </a:r>
+          </a:p>
           <a:p>
             <a:pPr algn="l">
               <a:spcAft>
@@ -32461,301 +32711,21 @@
               </a:spcAft>
             </a:pPr>
             <a:r>
-              <a:rPr sz="1000" b="0" i="0">
+              <a:rPr sz="1050" b="0" i="0">
                 <a:solidFill>
                   <a:srgbClr val="4A5A7A"/>
                 </a:solidFill>
                 <a:latin typeface="맑은 고딕"/>
                 <a:ea typeface="맑은 고딕"/>
               </a:rPr>
-              <a:t>만든 트랙</a:t>
-            </a:r>
-          </a:p>
-        </p:txBody>
-      </p:sp>
-      <p:sp>
-        <p:nvSpPr>
-          <p:cNvPr id="29" name="TextBox 28"/>
-          <p:cNvSpPr txBox="1"/>
-          <p:nvPr/>
-        </p:nvSpPr>
-        <p:spPr>
-          <a:xfrm>
-            <a:off x="2331720" y="4937760"/>
-            <a:ext cx="1600200" cy="502920"/>
-          </a:xfrm>
-          <a:prstGeom prst="rect">
-            <a:avLst/>
-          </a:prstGeom>
-          <a:noFill/>
-        </p:spPr>
-        <p:txBody>
-          <a:bodyPr wrap="square" lIns="0" rIns="0" tIns="0" bIns="0" anchor="t">
-            <a:spAutoFit/>
-          </a:bodyPr>
-          <a:lstStyle/>
-          <a:p>
-            <a:pPr algn="l">
-              <a:spcAft>
-                <a:spcPts val="0"/>
-              </a:spcAft>
-            </a:pPr>
-            <a:r>
-              <a:rPr sz="2400" b="1" i="0">
-                <a:solidFill>
-                  <a:srgbClr val="2563EB"/>
-                </a:solidFill>
-                <a:latin typeface="Arial"/>
-                <a:ea typeface="맑은 고딕"/>
-              </a:rPr>
-              <a:t>352</a:t>
-            </a:r>
-          </a:p>
-        </p:txBody>
-      </p:sp>
-      <p:sp>
-        <p:nvSpPr>
-          <p:cNvPr id="30" name="TextBox 29"/>
-          <p:cNvSpPr txBox="1"/>
-          <p:nvPr/>
-        </p:nvSpPr>
-        <p:spPr>
-          <a:xfrm>
-            <a:off x="2331720" y="5440680"/>
-            <a:ext cx="1600200" cy="274320"/>
-          </a:xfrm>
-          <a:prstGeom prst="rect">
-            <a:avLst/>
-          </a:prstGeom>
-          <a:noFill/>
-        </p:spPr>
-        <p:txBody>
-          <a:bodyPr wrap="square" lIns="0" rIns="0" tIns="0" bIns="0" anchor="t">
-            <a:spAutoFit/>
-          </a:bodyPr>
-          <a:lstStyle/>
-          <a:p>
-            <a:pPr algn="l">
-              <a:spcAft>
-                <a:spcPts val="0"/>
-              </a:spcAft>
-            </a:pPr>
-            <a:r>
-              <a:rPr sz="1000" b="0" i="0">
-                <a:solidFill>
-                  <a:srgbClr val="4A5A7A"/>
-                </a:solidFill>
-                <a:latin typeface="맑은 고딕"/>
-                <a:ea typeface="맑은 고딕"/>
-              </a:rPr>
-              <a:t>같은 표적 플롯 쌍</a:t>
-            </a:r>
-          </a:p>
-        </p:txBody>
-      </p:sp>
-      <p:sp>
-        <p:nvSpPr>
-          <p:cNvPr id="31" name="TextBox 30"/>
-          <p:cNvSpPr txBox="1"/>
-          <p:nvPr/>
-        </p:nvSpPr>
-        <p:spPr>
-          <a:xfrm>
-            <a:off x="4023360" y="4937760"/>
-            <a:ext cx="1600200" cy="502920"/>
-          </a:xfrm>
-          <a:prstGeom prst="rect">
-            <a:avLst/>
-          </a:prstGeom>
-          <a:noFill/>
-        </p:spPr>
-        <p:txBody>
-          <a:bodyPr wrap="square" lIns="0" rIns="0" tIns="0" bIns="0" anchor="t">
-            <a:spAutoFit/>
-          </a:bodyPr>
-          <a:lstStyle/>
-          <a:p>
-            <a:pPr algn="l">
-              <a:spcAft>
-                <a:spcPts val="0"/>
-              </a:spcAft>
-            </a:pPr>
-            <a:r>
-              <a:rPr sz="2400" b="1" i="0">
-                <a:solidFill>
-                  <a:srgbClr val="6B7280"/>
-                </a:solidFill>
-                <a:latin typeface="Arial"/>
-                <a:ea typeface="맑은 고딕"/>
-              </a:rPr>
-              <a:t>3</a:t>
-            </a:r>
-          </a:p>
-        </p:txBody>
-      </p:sp>
-      <p:sp>
-        <p:nvSpPr>
-          <p:cNvPr id="32" name="TextBox 31"/>
-          <p:cNvSpPr txBox="1"/>
-          <p:nvPr/>
-        </p:nvSpPr>
-        <p:spPr>
-          <a:xfrm>
-            <a:off x="4023360" y="5440680"/>
-            <a:ext cx="1600200" cy="274320"/>
-          </a:xfrm>
-          <a:prstGeom prst="rect">
-            <a:avLst/>
-          </a:prstGeom>
-          <a:noFill/>
-        </p:spPr>
-        <p:txBody>
-          <a:bodyPr wrap="square" lIns="0" rIns="0" tIns="0" bIns="0" anchor="t">
-            <a:spAutoFit/>
-          </a:bodyPr>
-          <a:lstStyle/>
-          <a:p>
-            <a:pPr algn="l">
-              <a:spcAft>
-                <a:spcPts val="0"/>
-              </a:spcAft>
-            </a:pPr>
-            <a:r>
-              <a:rPr sz="1000" b="0" i="0">
-                <a:solidFill>
-                  <a:srgbClr val="4A5A7A"/>
-                </a:solidFill>
-                <a:latin typeface="맑은 고딕"/>
-                <a:ea typeface="맑은 고딕"/>
-              </a:rPr>
-              <a:t>클러터끼리 쌍</a:t>
-            </a:r>
-          </a:p>
-        </p:txBody>
-      </p:sp>
-      <p:sp>
-        <p:nvSpPr>
-          <p:cNvPr id="33" name="TextBox 32"/>
-          <p:cNvSpPr txBox="1"/>
-          <p:nvPr/>
-        </p:nvSpPr>
-        <p:spPr>
-          <a:xfrm>
-            <a:off x="5715000" y="4937760"/>
-            <a:ext cx="1600200" cy="502920"/>
-          </a:xfrm>
-          <a:prstGeom prst="rect">
-            <a:avLst/>
-          </a:prstGeom>
-          <a:noFill/>
-        </p:spPr>
-        <p:txBody>
-          <a:bodyPr wrap="square" lIns="0" rIns="0" tIns="0" bIns="0" anchor="t">
-            <a:spAutoFit/>
-          </a:bodyPr>
-          <a:lstStyle/>
-          <a:p>
-            <a:pPr algn="l">
-              <a:spcAft>
-                <a:spcPts val="0"/>
-              </a:spcAft>
-            </a:pPr>
-            <a:r>
-              <a:rPr sz="2400" b="1" i="0">
-                <a:solidFill>
-                  <a:srgbClr val="D97706"/>
-                </a:solidFill>
-                <a:latin typeface="Arial"/>
-                <a:ea typeface="맑은 고딕"/>
-              </a:rPr>
-              <a:t>4</a:t>
-            </a:r>
-          </a:p>
-        </p:txBody>
-      </p:sp>
-      <p:sp>
-        <p:nvSpPr>
-          <p:cNvPr id="34" name="TextBox 33"/>
-          <p:cNvSpPr txBox="1"/>
-          <p:nvPr/>
-        </p:nvSpPr>
-        <p:spPr>
-          <a:xfrm>
-            <a:off x="5715000" y="5440680"/>
-            <a:ext cx="1600200" cy="274320"/>
-          </a:xfrm>
-          <a:prstGeom prst="rect">
-            <a:avLst/>
-          </a:prstGeom>
-          <a:noFill/>
-        </p:spPr>
-        <p:txBody>
-          <a:bodyPr wrap="square" lIns="0" rIns="0" tIns="0" bIns="0" anchor="t">
-            <a:spAutoFit/>
-          </a:bodyPr>
-          <a:lstStyle/>
-          <a:p>
-            <a:pPr algn="l">
-              <a:spcAft>
-                <a:spcPts val="0"/>
-              </a:spcAft>
-            </a:pPr>
-            <a:r>
-              <a:rPr sz="1000" b="0" i="0">
-                <a:solidFill>
-                  <a:srgbClr val="4A5A7A"/>
-                </a:solidFill>
-                <a:latin typeface="맑은 고딕"/>
-                <a:ea typeface="맑은 고딕"/>
-              </a:rPr>
-              <a:t>표의 최대 트랙 수</a:t>
-            </a:r>
-          </a:p>
-        </p:txBody>
-      </p:sp>
-      <p:sp>
-        <p:nvSpPr>
-          <p:cNvPr id="35" name="TextBox 34"/>
-          <p:cNvSpPr txBox="1"/>
-          <p:nvPr/>
-        </p:nvSpPr>
-        <p:spPr>
-          <a:xfrm>
-            <a:off x="640080" y="5779008"/>
-            <a:ext cx="6675120" cy="457200"/>
-          </a:xfrm>
-          <a:prstGeom prst="rect">
-            <a:avLst/>
-          </a:prstGeom>
-          <a:noFill/>
-        </p:spPr>
-        <p:txBody>
-          <a:bodyPr wrap="square" lIns="0" rIns="0" tIns="0" bIns="0" anchor="t">
-            <a:spAutoFit/>
-          </a:bodyPr>
-          <a:lstStyle/>
-          <a:p>
-            <a:pPr algn="l">
-              <a:spcAft>
-                <a:spcPts val="0"/>
-              </a:spcAft>
-            </a:pPr>
-            <a:r>
-              <a:rPr sz="1000" b="0" i="0">
-                <a:solidFill>
-                  <a:srgbClr val="4A5A7A"/>
-                </a:solidFill>
-                <a:latin typeface="맑은 고딕"/>
-                <a:ea typeface="맑은 고딕"/>
-              </a:rPr>
-              <a:t>트랙 ID 100 ~ 454 사용 (과제 범위 100 ~ 10000),  플롯 ID 10000 ~ 18119 사용 (과제 범위 10000 ~ 1000000)</a:t>
+              <a:t>트랙 위치 = 이번 플롯, 속도 = 두 플롯 차 ÷ 0.1 s</a:t>
             </a:r>
           </a:p>
         </p:txBody>
       </p:sp>
       <p:pic>
         <p:nvPicPr>
-          <p:cNvPr id="36" name="Picture 35" descr="ui_score_p2.png"/>
+          <p:cNvPr id="29" name="Picture 28" descr="ui_crop_table.png"/>
           <p:cNvPicPr>
             <a:picLocks noChangeAspect="1"/>
           </p:cNvPicPr>
@@ -32769,8 +32739,8 @@
         </p:blipFill>
         <p:spPr>
           <a:xfrm>
-            <a:off x="7589520" y="2286000"/>
-            <a:ext cx="3959352" cy="3196492"/>
+            <a:off x="640080" y="5422392"/>
+            <a:ext cx="7223760" cy="784713"/>
           </a:xfrm>
           <a:prstGeom prst="rect">
             <a:avLst/>
@@ -32782,63 +32752,6 @@
           </a:ln>
         </p:spPr>
       </p:pic>
-      <p:sp>
-        <p:nvSpPr>
-          <p:cNvPr id="37" name="TextBox 36"/>
-          <p:cNvSpPr txBox="1"/>
-          <p:nvPr/>
-        </p:nvSpPr>
-        <p:spPr>
-          <a:xfrm>
-            <a:off x="7589520" y="5514672"/>
-            <a:ext cx="3959352" cy="457200"/>
-          </a:xfrm>
-          <a:prstGeom prst="rect">
-            <a:avLst/>
-          </a:prstGeom>
-          <a:noFill/>
-        </p:spPr>
-        <p:txBody>
-          <a:bodyPr wrap="square" lIns="0" rIns="0" tIns="0" bIns="0" anchor="t">
-            <a:spAutoFit/>
-          </a:bodyPr>
-          <a:lstStyle/>
-          <a:p>
-            <a:pPr algn="l">
-              <a:spcAft>
-                <a:spcPts val="0"/>
-              </a:spcAft>
-            </a:pPr>
-            <a:r>
-              <a:rPr sz="1000" b="0" i="0">
-                <a:solidFill>
-                  <a:srgbClr val="4A5A7A"/>
-                </a:solidFill>
-                <a:latin typeface="맑은 고딕"/>
-                <a:ea typeface="맑은 고딕"/>
-              </a:rPr>
-              <a:t>스코어 확인 창: Flag 1 1 1 0 0 1 1</a:t>
-            </a:r>
-          </a:p>
-          <a:p>
-            <a:pPr algn="l">
-              <a:spcAft>
-                <a:spcPts val="0"/>
-              </a:spcAft>
-            </a:pPr>
-            <a:r>
-              <a:rPr sz="1000" b="0" i="0">
-                <a:solidFill>
-                  <a:srgbClr val="4A5A7A"/>
-                </a:solidFill>
-                <a:latin typeface="맑은 고딕"/>
-                <a:ea typeface="맑은 고딕"/>
-              </a:rPr>
-              <a:t>임시 → 확정 (5) → 메모리 → 다시 확정 (MemoryScore 0)</a:t>
-            </a:r>
-          </a:p>
-        </p:txBody>
-      </p:sp>
     </p:spTree>
   </p:cSld>
   <p:clrMapOvr>
@@ -32908,7 +32821,7 @@
                 <a:latin typeface="맑은 고딕"/>
                 <a:ea typeface="맑은 고딕"/>
               </a:rPr>
-              <a:t>4.5 과제 요구사항 점검</a:t>
+              <a:t>4.5 트랙 수명과 스코어 로직 확인</a:t>
             </a:r>
           </a:p>
         </p:txBody>
@@ -32936,7 +32849,7 @@
                 <a:latin typeface="맑은 고딕"/>
                 <a:ea typeface="맑은 고딕"/>
               </a:rPr>
-              <a:t>과제 5 의 구현 항목을 하나씩 코드 위치와 확인 방법에 맞춰 봤습니다. 전 항목 충족입니다.</a:t>
+              <a:t>연관이 없어 모든 트랙이 2 → 1 → 0 으로 내려가 개시 두 스캔 뒤 삭제됩니다. 확정 · 메모리 전환은 스코어 확인 창에 Flag 를 넣어 확인했습니다.</a:t>
             </a:r>
           </a:p>
         </p:txBody>
@@ -32989,1240 +32902,476 @@
           </a:p>
         </p:txBody>
       </p:sp>
-      <p:graphicFrame>
-        <p:nvGraphicFramePr>
-          <p:cNvPr id="26" name="Table 25"/>
-          <p:cNvGraphicFramePr>
-            <a:graphicFrameLocks noGrp="1"/>
-          </p:cNvGraphicFramePr>
-          <p:nvPr/>
-        </p:nvGraphicFramePr>
-        <p:xfrm>
-          <a:off x="640080" y="2240280"/>
-          <a:ext cx="10908791" cy="3712464"/>
-        </p:xfrm>
-        <a:graphic>
-          <a:graphicData uri="http://schemas.openxmlformats.org/drawingml/2006/table">
-            <a:tbl>
-              <a:tblPr firstRow="0" bandRow="0">
-                <a:tableStyleId>{5C22544A-7EE6-4342-B048-85BDC9FD1C3A}</a:tableStyleId>
-              </a:tblPr>
-              <a:tblGrid>
-                <a:gridCol w="960120"/>
-                <a:gridCol w="3977639"/>
-                <a:gridCol w="3291840"/>
-                <a:gridCol w="2679192"/>
-              </a:tblGrid>
-              <a:tr h="265176">
-                <a:tc>
-                  <a:txBody>
-                    <a:bodyPr/>
-                    <a:lstStyle/>
-                    <a:p>
-                      <a:r>
-                        <a:rPr sz="1050" b="1" i="0">
-                          <a:solidFill>
-                            <a:srgbClr val="FFFFFF"/>
-                          </a:solidFill>
-                          <a:latin typeface="맑은 고딕"/>
-                          <a:ea typeface="맑은 고딕"/>
-                        </a:rPr>
-                        <a:t>구분</a:t>
-                      </a:r>
-                    </a:p>
-                  </a:txBody>
-                  <a:tcPr marL="54864" marR="54864" marT="9144" marB="9144" anchor="ctr">
-                    <a:solidFill>
-                      <a:srgbClr val="1B2740"/>
-                    </a:solidFill>
-                  </a:tcPr>
-                </a:tc>
-                <a:tc>
-                  <a:txBody>
-                    <a:bodyPr/>
-                    <a:lstStyle/>
-                    <a:p>
-                      <a:r>
-                        <a:rPr sz="1050" b="1" i="0">
-                          <a:solidFill>
-                            <a:srgbClr val="FFFFFF"/>
-                          </a:solidFill>
-                          <a:latin typeface="맑은 고딕"/>
-                          <a:ea typeface="맑은 고딕"/>
-                        </a:rPr>
-                        <a:t>요구사항</a:t>
-                      </a:r>
-                    </a:p>
-                  </a:txBody>
-                  <a:tcPr marL="54864" marR="54864" marT="9144" marB="9144" anchor="ctr">
-                    <a:solidFill>
-                      <a:srgbClr val="1B2740"/>
-                    </a:solidFill>
-                  </a:tcPr>
-                </a:tc>
-                <a:tc>
-                  <a:txBody>
-                    <a:bodyPr/>
-                    <a:lstStyle/>
-                    <a:p>
-                      <a:r>
-                        <a:rPr sz="1050" b="1" i="0">
-                          <a:solidFill>
-                            <a:srgbClr val="FFFFFF"/>
-                          </a:solidFill>
-                          <a:latin typeface="맑은 고딕"/>
-                          <a:ea typeface="맑은 고딕"/>
-                        </a:rPr>
-                        <a:t>구현 (파일 · 함수)</a:t>
-                      </a:r>
-                    </a:p>
-                  </a:txBody>
-                  <a:tcPr marL="54864" marR="54864" marT="9144" marB="9144" anchor="ctr">
-                    <a:solidFill>
-                      <a:srgbClr val="1B2740"/>
-                    </a:solidFill>
-                  </a:tcPr>
-                </a:tc>
-                <a:tc>
-                  <a:txBody>
-                    <a:bodyPr/>
-                    <a:lstStyle/>
-                    <a:p>
-                      <a:r>
-                        <a:rPr sz="1050" b="1" i="0">
-                          <a:solidFill>
-                            <a:srgbClr val="FFFFFF"/>
-                          </a:solidFill>
-                          <a:latin typeface="맑은 고딕"/>
-                          <a:ea typeface="맑은 고딕"/>
-                        </a:rPr>
-                        <a:t>확인</a:t>
-                      </a:r>
-                    </a:p>
-                  </a:txBody>
-                  <a:tcPr marL="54864" marR="54864" marT="9144" marB="9144" anchor="ctr">
-                    <a:solidFill>
-                      <a:srgbClr val="1B2740"/>
-                    </a:solidFill>
-                  </a:tcPr>
-                </a:tc>
-              </a:tr>
-              <a:tr h="265176">
-                <a:tc>
-                  <a:txBody>
-                    <a:bodyPr/>
-                    <a:lstStyle/>
-                    <a:p>
-                      <a:r>
-                        <a:rPr sz="1000" b="1" i="0">
-                          <a:solidFill>
-                            <a:srgbClr val="2563EB"/>
-                          </a:solidFill>
-                          <a:latin typeface="맑은 고딕"/>
-                          <a:ea typeface="맑은 고딕"/>
-                        </a:rPr>
-                        <a:t>개시</a:t>
-                      </a:r>
-                    </a:p>
-                  </a:txBody>
-                  <a:tcPr marL="54864" marR="54864" marT="9144" marB="9144" anchor="ctr">
-                    <a:solidFill>
-                      <a:srgbClr val="FFFFFF"/>
-                    </a:solidFill>
-                  </a:tcPr>
-                </a:tc>
-                <a:tc>
-                  <a:txBody>
-                    <a:bodyPr/>
-                    <a:lstStyle/>
-                    <a:p>
-                      <a:r>
-                        <a:rPr sz="1000" b="0" i="0">
-                          <a:solidFill>
-                            <a:srgbClr val="1B2740"/>
-                          </a:solidFill>
-                          <a:latin typeface="맑은 고딕"/>
-                          <a:ea typeface="맑은 고딕"/>
-                        </a:rPr>
-                        <a:t>상태 변수 X = [x x' x'' y y' y'' z z' z'']ᵀ</a:t>
-                      </a:r>
-                    </a:p>
-                  </a:txBody>
-                  <a:tcPr marL="54864" marR="54864" marT="9144" marB="9144" anchor="ctr">
-                    <a:solidFill>
-                      <a:srgbClr val="FFFFFF"/>
-                    </a:solidFill>
-                  </a:tcPr>
-                </a:tc>
-                <a:tc>
-                  <a:txBody>
-                    <a:bodyPr/>
-                    <a:lstStyle/>
-                    <a:p>
-                      <a:r>
-                        <a:rPr sz="1000" b="0" i="0">
-                          <a:solidFill>
-                            <a:srgbClr val="1B2740"/>
-                          </a:solidFill>
-                          <a:latin typeface="맑은 고딕"/>
-                          <a:ea typeface="맑은 고딕"/>
-                        </a:rPr>
-                        <a:t>TrackMgr.h  TRK_STATE_DIM 9, ST_Track</a:t>
-                      </a:r>
-                    </a:p>
-                  </a:txBody>
-                  <a:tcPr marL="54864" marR="54864" marT="9144" marB="9144" anchor="ctr">
-                    <a:solidFill>
-                      <a:srgbClr val="FFFFFF"/>
-                    </a:solidFill>
-                  </a:tcPr>
-                </a:tc>
-                <a:tc>
-                  <a:txBody>
-                    <a:bodyPr/>
-                    <a:lstStyle/>
-                    <a:p>
-                      <a:r>
-                        <a:rPr sz="1000" b="0" i="0">
-                          <a:solidFill>
-                            <a:srgbClr val="059669"/>
-                          </a:solidFill>
-                          <a:latin typeface="맑은 고딕"/>
-                          <a:ea typeface="맑은 고딕"/>
-                        </a:rPr>
-                        <a:t>단위 시험 9×1, 9×9</a:t>
-                      </a:r>
-                    </a:p>
-                  </a:txBody>
-                  <a:tcPr marL="54864" marR="54864" marT="9144" marB="9144" anchor="ctr">
-                    <a:solidFill>
-                      <a:srgbClr val="FFFFFF"/>
-                    </a:solidFill>
-                  </a:tcPr>
-                </a:tc>
-              </a:tr>
-              <a:tr h="265176">
-                <a:tc>
-                  <a:txBody>
-                    <a:bodyPr/>
-                    <a:lstStyle/>
-                    <a:p/>
-                  </a:txBody>
-                  <a:tcPr marL="54864" marR="54864" marT="9144" marB="9144" anchor="ctr">
-                    <a:solidFill>
-                      <a:srgbClr val="F7F9FC"/>
-                    </a:solidFill>
-                  </a:tcPr>
-                </a:tc>
-                <a:tc>
-                  <a:txBody>
-                    <a:bodyPr/>
-                    <a:lstStyle/>
-                    <a:p>
-                      <a:r>
-                        <a:rPr sz="1000" b="0" i="0">
-                          <a:solidFill>
-                            <a:srgbClr val="1B2740"/>
-                          </a:solidFill>
-                          <a:latin typeface="맑은 고딕"/>
-                          <a:ea typeface="맑은 고딕"/>
-                        </a:rPr>
-                        <a:t>2-Point 개시, 속도 게이트 V_max = 800 m/s</a:t>
-                      </a:r>
-                    </a:p>
-                  </a:txBody>
-                  <a:tcPr marL="54864" marR="54864" marT="9144" marB="9144" anchor="ctr">
-                    <a:solidFill>
-                      <a:srgbClr val="F7F9FC"/>
-                    </a:solidFill>
-                  </a:tcPr>
-                </a:tc>
-                <a:tc>
-                  <a:txBody>
-                    <a:bodyPr/>
-                    <a:lstStyle/>
-                    <a:p>
-                      <a:r>
-                        <a:rPr sz="1000" b="0" i="0">
-                          <a:solidFill>
-                            <a:srgbClr val="1B2740"/>
-                          </a:solidFill>
-                          <a:latin typeface="맑은 고딕"/>
-                          <a:ea typeface="맑은 고딕"/>
-                        </a:rPr>
-                        <a:t>TrackMgr.c  f_Trk_ProcessScan</a:t>
-                      </a:r>
-                    </a:p>
-                  </a:txBody>
-                  <a:tcPr marL="54864" marR="54864" marT="9144" marB="9144" anchor="ctr">
-                    <a:solidFill>
-                      <a:srgbClr val="F7F9FC"/>
-                    </a:solidFill>
-                  </a:tcPr>
-                </a:tc>
-                <a:tc>
-                  <a:txBody>
-                    <a:bodyPr/>
-                    <a:lstStyle/>
-                    <a:p>
-                      <a:r>
-                        <a:rPr sz="1000" b="0" i="0">
-                          <a:solidFill>
-                            <a:srgbClr val="059669"/>
-                          </a:solidFill>
-                          <a:latin typeface="맑은 고딕"/>
-                          <a:ea typeface="맑은 고딕"/>
-                        </a:rPr>
-                        <a:t>799 m/s 통과, 801 m/s 탈락</a:t>
-                      </a:r>
-                    </a:p>
-                  </a:txBody>
-                  <a:tcPr marL="54864" marR="54864" marT="9144" marB="9144" anchor="ctr">
-                    <a:solidFill>
-                      <a:srgbClr val="F7F9FC"/>
-                    </a:solidFill>
-                  </a:tcPr>
-                </a:tc>
-              </a:tr>
-              <a:tr h="265176">
-                <a:tc>
-                  <a:txBody>
-                    <a:bodyPr/>
-                    <a:lstStyle/>
-                    <a:p/>
-                  </a:txBody>
-                  <a:tcPr marL="54864" marR="54864" marT="9144" marB="9144" anchor="ctr">
-                    <a:solidFill>
-                      <a:srgbClr val="FFFFFF"/>
-                    </a:solidFill>
-                  </a:tcPr>
-                </a:tc>
-                <a:tc>
-                  <a:txBody>
-                    <a:bodyPr/>
-                    <a:lstStyle/>
-                    <a:p>
-                      <a:r>
-                        <a:rPr sz="1000" b="0" i="0">
-                          <a:solidFill>
-                            <a:srgbClr val="1B2740"/>
-                          </a:solidFill>
-                          <a:latin typeface="맑은 고딕"/>
-                          <a:ea typeface="맑은 고딕"/>
-                        </a:rPr>
-                        <a:t>mat_EstX · mat_EstP 가속도 항 0</a:t>
-                      </a:r>
-                    </a:p>
-                  </a:txBody>
-                  <a:tcPr marL="54864" marR="54864" marT="9144" marB="9144" anchor="ctr">
-                    <a:solidFill>
-                      <a:srgbClr val="FFFFFF"/>
-                    </a:solidFill>
-                  </a:tcPr>
-                </a:tc>
-                <a:tc>
-                  <a:txBody>
-                    <a:bodyPr/>
-                    <a:lstStyle/>
-                    <a:p>
-                      <a:r>
-                        <a:rPr sz="1000" b="0" i="0">
-                          <a:solidFill>
-                            <a:srgbClr val="1B2740"/>
-                          </a:solidFill>
-                          <a:latin typeface="맑은 고딕"/>
-                          <a:ea typeface="맑은 고딕"/>
-                        </a:rPr>
-                        <a:t>f_Trk_TwoPointInit</a:t>
-                      </a:r>
-                    </a:p>
-                  </a:txBody>
-                  <a:tcPr marL="54864" marR="54864" marT="9144" marB="9144" anchor="ctr">
-                    <a:solidFill>
-                      <a:srgbClr val="FFFFFF"/>
-                    </a:solidFill>
-                  </a:tcPr>
-                </a:tc>
-                <a:tc>
-                  <a:txBody>
-                    <a:bodyPr/>
-                    <a:lstStyle/>
-                    <a:p>
-                      <a:r>
-                        <a:rPr sz="1000" b="0" i="0">
-                          <a:solidFill>
-                            <a:srgbClr val="059669"/>
-                          </a:solidFill>
-                          <a:latin typeface="맑은 고딕"/>
-                          <a:ea typeface="맑은 고딕"/>
-                        </a:rPr>
-                        <a:t>가속도 행 · 열 0 확인</a:t>
-                      </a:r>
-                    </a:p>
-                  </a:txBody>
-                  <a:tcPr marL="54864" marR="54864" marT="9144" marB="9144" anchor="ctr">
-                    <a:solidFill>
-                      <a:srgbClr val="FFFFFF"/>
-                    </a:solidFill>
-                  </a:tcPr>
-                </a:tc>
-              </a:tr>
-              <a:tr h="265176">
-                <a:tc>
-                  <a:txBody>
-                    <a:bodyPr/>
-                    <a:lstStyle/>
-                    <a:p/>
-                  </a:txBody>
-                  <a:tcPr marL="54864" marR="54864" marT="9144" marB="9144" anchor="ctr">
-                    <a:solidFill>
-                      <a:srgbClr val="F7F9FC"/>
-                    </a:solidFill>
-                  </a:tcPr>
-                </a:tc>
-                <a:tc>
-                  <a:txBody>
-                    <a:bodyPr/>
-                    <a:lstStyle/>
-                    <a:p>
-                      <a:r>
-                        <a:rPr sz="1000" b="0" i="0">
-                          <a:solidFill>
-                            <a:srgbClr val="1B2740"/>
-                          </a:solidFill>
-                          <a:latin typeface="맑은 고딕"/>
-                          <a:ea typeface="맑은 고딕"/>
-                        </a:rPr>
-                        <a:t>R: σr 10 m, σaz 0.2°, σel 0.2°</a:t>
-                      </a:r>
-                    </a:p>
-                  </a:txBody>
-                  <a:tcPr marL="54864" marR="54864" marT="9144" marB="9144" anchor="ctr">
-                    <a:solidFill>
-                      <a:srgbClr val="F7F9FC"/>
-                    </a:solidFill>
-                  </a:tcPr>
-                </a:tc>
-                <a:tc>
-                  <a:txBody>
-                    <a:bodyPr/>
-                    <a:lstStyle/>
-                    <a:p>
-                      <a:r>
-                        <a:rPr sz="1000" b="0" i="0">
-                          <a:solidFill>
-                            <a:srgbClr val="1B2740"/>
-                          </a:solidFill>
-                          <a:latin typeface="맑은 고딕"/>
-                          <a:ea typeface="맑은 고딕"/>
-                        </a:rPr>
-                        <a:t>f_Trk_GetMeasSigma, f_Trk_MeasCov</a:t>
-                      </a:r>
-                    </a:p>
-                  </a:txBody>
-                  <a:tcPr marL="54864" marR="54864" marT="9144" marB="9144" anchor="ctr">
-                    <a:solidFill>
-                      <a:srgbClr val="F7F9FC"/>
-                    </a:solidFill>
-                  </a:tcPr>
-                </a:tc>
-                <a:tc>
-                  <a:txBody>
-                    <a:bodyPr/>
-                    <a:lstStyle/>
-                    <a:p>
-                      <a:r>
-                        <a:rPr sz="1000" b="0" i="0">
-                          <a:solidFill>
-                            <a:srgbClr val="059669"/>
-                          </a:solidFill>
-                          <a:latin typeface="맑은 고딕"/>
-                          <a:ea typeface="맑은 고딕"/>
-                        </a:rPr>
-                        <a:t>초기 P 위치 대각 = R</a:t>
-                      </a:r>
-                    </a:p>
-                  </a:txBody>
-                  <a:tcPr marL="54864" marR="54864" marT="9144" marB="9144" anchor="ctr">
-                    <a:solidFill>
-                      <a:srgbClr val="F7F9FC"/>
-                    </a:solidFill>
-                  </a:tcPr>
-                </a:tc>
-              </a:tr>
-              <a:tr h="265176">
-                <a:tc>
-                  <a:txBody>
-                    <a:bodyPr/>
-                    <a:lstStyle/>
-                    <a:p/>
-                  </a:txBody>
-                  <a:tcPr marL="54864" marR="54864" marT="9144" marB="9144" anchor="ctr">
-                    <a:solidFill>
-                      <a:srgbClr val="FFFFFF"/>
-                    </a:solidFill>
-                  </a:tcPr>
-                </a:tc>
-                <a:tc>
-                  <a:txBody>
-                    <a:bodyPr/>
-                    <a:lstStyle/>
-                    <a:p>
-                      <a:r>
-                        <a:rPr sz="1000" b="0" i="0">
-                          <a:solidFill>
-                            <a:srgbClr val="1B2740"/>
-                          </a:solidFill>
-                          <a:latin typeface="맑은 고딕"/>
-                          <a:ea typeface="맑은 고딕"/>
-                        </a:rPr>
-                        <a:t>트랙 ID 100 ~ 10000</a:t>
-                      </a:r>
-                    </a:p>
-                  </a:txBody>
-                  <a:tcPr marL="54864" marR="54864" marT="9144" marB="9144" anchor="ctr">
-                    <a:solidFill>
-                      <a:srgbClr val="FFFFFF"/>
-                    </a:solidFill>
-                  </a:tcPr>
-                </a:tc>
-                <a:tc>
-                  <a:txBody>
-                    <a:bodyPr/>
-                    <a:lstStyle/>
-                    <a:p>
-                      <a:r>
-                        <a:rPr sz="1000" b="0" i="0">
-                          <a:solidFill>
-                            <a:srgbClr val="1B2740"/>
-                          </a:solidFill>
-                          <a:latin typeface="맑은 고딕"/>
-                          <a:ea typeface="맑은 고딕"/>
-                        </a:rPr>
-                        <a:t>f_Trk_NewId</a:t>
-                      </a:r>
-                    </a:p>
-                  </a:txBody>
-                  <a:tcPr marL="54864" marR="54864" marT="9144" marB="9144" anchor="ctr">
-                    <a:solidFill>
-                      <a:srgbClr val="FFFFFF"/>
-                    </a:solidFill>
-                  </a:tcPr>
-                </a:tc>
-                <a:tc>
-                  <a:txBody>
-                    <a:bodyPr/>
-                    <a:lstStyle/>
-                    <a:p>
-                      <a:r>
-                        <a:rPr sz="1000" b="0" i="0">
-                          <a:solidFill>
-                            <a:srgbClr val="059669"/>
-                          </a:solidFill>
-                          <a:latin typeface="맑은 고딕"/>
-                          <a:ea typeface="맑은 고딕"/>
-                        </a:rPr>
-                        <a:t>9999 → 10000 → 100 순환</a:t>
-                      </a:r>
-                    </a:p>
-                  </a:txBody>
-                  <a:tcPr marL="54864" marR="54864" marT="9144" marB="9144" anchor="ctr">
-                    <a:solidFill>
-                      <a:srgbClr val="FFFFFF"/>
-                    </a:solidFill>
-                  </a:tcPr>
-                </a:tc>
-              </a:tr>
-              <a:tr h="265176">
-                <a:tc>
-                  <a:txBody>
-                    <a:bodyPr/>
-                    <a:lstStyle/>
-                    <a:p>
-                      <a:r>
-                        <a:rPr sz="1000" b="1" i="0">
-                          <a:solidFill>
-                            <a:srgbClr val="2563EB"/>
-                          </a:solidFill>
-                          <a:latin typeface="맑은 고딕"/>
-                          <a:ea typeface="맑은 고딕"/>
-                        </a:rPr>
-                        <a:t>관리</a:t>
-                      </a:r>
-                    </a:p>
-                  </a:txBody>
-                  <a:tcPr marL="54864" marR="54864" marT="9144" marB="9144" anchor="ctr">
-                    <a:solidFill>
-                      <a:srgbClr val="F7F9FC"/>
-                    </a:solidFill>
-                  </a:tcPr>
-                </a:tc>
-                <a:tc>
-                  <a:txBody>
-                    <a:bodyPr/>
-                    <a:lstStyle/>
-                    <a:p>
-                      <a:r>
-                        <a:rPr sz="1000" b="0" i="0">
-                          <a:solidFill>
-                            <a:srgbClr val="1B2740"/>
-                          </a:solidFill>
-                          <a:latin typeface="맑은 고딕"/>
-                          <a:ea typeface="맑은 고딕"/>
-                        </a:rPr>
-                        <a:t>확정 5, 임시 삭제 0, 메모리 삭제 5</a:t>
-                      </a:r>
-                    </a:p>
-                  </a:txBody>
-                  <a:tcPr marL="54864" marR="54864" marT="9144" marB="9144" anchor="ctr">
-                    <a:solidFill>
-                      <a:srgbClr val="F7F9FC"/>
-                    </a:solidFill>
-                  </a:tcPr>
-                </a:tc>
-                <a:tc>
-                  <a:txBody>
-                    <a:bodyPr/>
-                    <a:lstStyle/>
-                    <a:p>
-                      <a:r>
-                        <a:rPr sz="1000" b="0" i="0">
-                          <a:solidFill>
-                            <a:srgbClr val="1B2740"/>
-                          </a:solidFill>
-                          <a:latin typeface="맑은 고딕"/>
-                          <a:ea typeface="맑은 고딕"/>
-                        </a:rPr>
-                        <a:t>TrackMgr.h 상수, f_Trk_UpdateState</a:t>
-                      </a:r>
-                    </a:p>
-                  </a:txBody>
-                  <a:tcPr marL="54864" marR="54864" marT="9144" marB="9144" anchor="ctr">
-                    <a:solidFill>
-                      <a:srgbClr val="F7F9FC"/>
-                    </a:solidFill>
-                  </a:tcPr>
-                </a:tc>
-                <a:tc>
-                  <a:txBody>
-                    <a:bodyPr/>
-                    <a:lstStyle/>
-                    <a:p>
-                      <a:r>
-                        <a:rPr sz="1000" b="0" i="0">
-                          <a:solidFill>
-                            <a:srgbClr val="059669"/>
-                          </a:solidFill>
-                          <a:latin typeface="맑은 고딕"/>
-                          <a:ea typeface="맑은 고딕"/>
-                        </a:rPr>
-                        <a:t>스코어 확인 창 · 단위 시험</a:t>
-                      </a:r>
-                    </a:p>
-                  </a:txBody>
-                  <a:tcPr marL="54864" marR="54864" marT="9144" marB="9144" anchor="ctr">
-                    <a:solidFill>
-                      <a:srgbClr val="F7F9FC"/>
-                    </a:solidFill>
-                  </a:tcPr>
-                </a:tc>
-              </a:tr>
-              <a:tr h="265176">
-                <a:tc>
-                  <a:txBody>
-                    <a:bodyPr/>
-                    <a:lstStyle/>
-                    <a:p/>
-                  </a:txBody>
-                  <a:tcPr marL="54864" marR="54864" marT="9144" marB="9144" anchor="ctr">
-                    <a:solidFill>
-                      <a:srgbClr val="FFFFFF"/>
-                    </a:solidFill>
-                  </a:tcPr>
-                </a:tc>
-                <a:tc>
-                  <a:txBody>
-                    <a:bodyPr/>
-                    <a:lstStyle/>
-                    <a:p>
-                      <a:r>
-                        <a:rPr sz="1000" b="0" i="0">
-                          <a:solidFill>
-                            <a:srgbClr val="1B2740"/>
-                          </a:solidFill>
-                          <a:latin typeface="맑은 고딕"/>
-                          <a:ea typeface="맑은 고딕"/>
-                        </a:rPr>
-                        <a:t>메모리 → 연관 성공 시 바로 확정, MemoryScore 0</a:t>
-                      </a:r>
-                    </a:p>
-                  </a:txBody>
-                  <a:tcPr marL="54864" marR="54864" marT="9144" marB="9144" anchor="ctr">
-                    <a:solidFill>
-                      <a:srgbClr val="FFFFFF"/>
-                    </a:solidFill>
-                  </a:tcPr>
-                </a:tc>
-                <a:tc>
-                  <a:txBody>
-                    <a:bodyPr/>
-                    <a:lstStyle/>
-                    <a:p>
-                      <a:r>
-                        <a:rPr sz="1000" b="0" i="0">
-                          <a:solidFill>
-                            <a:srgbClr val="1B2740"/>
-                          </a:solidFill>
-                          <a:latin typeface="맑은 고딕"/>
-                          <a:ea typeface="맑은 고딕"/>
-                        </a:rPr>
-                        <a:t>f_Trk_UpdateState</a:t>
-                      </a:r>
-                    </a:p>
-                  </a:txBody>
-                  <a:tcPr marL="54864" marR="54864" marT="9144" marB="9144" anchor="ctr">
-                    <a:solidFill>
-                      <a:srgbClr val="FFFFFF"/>
-                    </a:solidFill>
-                  </a:tcPr>
-                </a:tc>
-                <a:tc>
-                  <a:txBody>
-                    <a:bodyPr/>
-                    <a:lstStyle/>
-                    <a:p>
-                      <a:r>
-                        <a:rPr sz="1000" b="0" i="0">
-                          <a:solidFill>
-                            <a:srgbClr val="059669"/>
-                          </a:solidFill>
-                          <a:latin typeface="맑은 고딕"/>
-                          <a:ea typeface="맑은 고딕"/>
-                        </a:rPr>
-                        <a:t>Flag 1 1 1 0 0 1 결과</a:t>
-                      </a:r>
-                    </a:p>
-                  </a:txBody>
-                  <a:tcPr marL="54864" marR="54864" marT="9144" marB="9144" anchor="ctr">
-                    <a:solidFill>
-                      <a:srgbClr val="FFFFFF"/>
-                    </a:solidFill>
-                  </a:tcPr>
-                </a:tc>
-              </a:tr>
-              <a:tr h="265176">
-                <a:tc>
-                  <a:txBody>
-                    <a:bodyPr/>
-                    <a:lstStyle/>
-                    <a:p/>
-                  </a:txBody>
-                  <a:tcPr marL="54864" marR="54864" marT="9144" marB="9144" anchor="ctr">
-                    <a:solidFill>
-                      <a:srgbClr val="F7F9FC"/>
-                    </a:solidFill>
-                  </a:tcPr>
-                </a:tc>
-                <a:tc>
-                  <a:txBody>
-                    <a:bodyPr/>
-                    <a:lstStyle/>
-                    <a:p>
-                      <a:r>
-                        <a:rPr sz="1000" b="0" i="0">
-                          <a:solidFill>
-                            <a:srgbClr val="1B2740"/>
-                          </a:solidFill>
-                          <a:latin typeface="맑은 고딕"/>
-                          <a:ea typeface="맑은 고딕"/>
-                        </a:rPr>
-                        <a:t>TrackScore · MemoryScore · TrackState (1 ~ 4)</a:t>
-                      </a:r>
-                    </a:p>
-                  </a:txBody>
-                  <a:tcPr marL="54864" marR="54864" marT="9144" marB="9144" anchor="ctr">
-                    <a:solidFill>
-                      <a:srgbClr val="F7F9FC"/>
-                    </a:solidFill>
-                  </a:tcPr>
-                </a:tc>
-                <a:tc>
-                  <a:txBody>
-                    <a:bodyPr/>
-                    <a:lstStyle/>
-                    <a:p>
-                      <a:r>
-                        <a:rPr sz="1000" b="0" i="0">
-                          <a:solidFill>
-                            <a:srgbClr val="1B2740"/>
-                          </a:solidFill>
-                          <a:latin typeface="맑은 고딕"/>
-                          <a:ea typeface="맑은 고딕"/>
-                        </a:rPr>
-                        <a:t>ST_Track (명세 이름 그대로)</a:t>
-                      </a:r>
-                    </a:p>
-                  </a:txBody>
-                  <a:tcPr marL="54864" marR="54864" marT="9144" marB="9144" anchor="ctr">
-                    <a:solidFill>
-                      <a:srgbClr val="F7F9FC"/>
-                    </a:solidFill>
-                  </a:tcPr>
-                </a:tc>
-                <a:tc>
-                  <a:txBody>
-                    <a:bodyPr/>
-                    <a:lstStyle/>
-                    <a:p>
-                      <a:r>
-                        <a:rPr sz="1000" b="0" i="0">
-                          <a:solidFill>
-                            <a:srgbClr val="059669"/>
-                          </a:solidFill>
-                          <a:latin typeface="맑은 고딕"/>
-                          <a:ea typeface="맑은 고딕"/>
-                        </a:rPr>
-                        <a:t>트랙 표 · CSV</a:t>
-                      </a:r>
-                    </a:p>
-                  </a:txBody>
-                  <a:tcPr marL="54864" marR="54864" marT="9144" marB="9144" anchor="ctr">
-                    <a:solidFill>
-                      <a:srgbClr val="F7F9FC"/>
-                    </a:solidFill>
-                  </a:tcPr>
-                </a:tc>
-              </a:tr>
-              <a:tr h="265176">
-                <a:tc>
-                  <a:txBody>
-                    <a:bodyPr/>
-                    <a:lstStyle/>
-                    <a:p>
-                      <a:r>
-                        <a:rPr sz="1000" b="1" i="0">
-                          <a:solidFill>
-                            <a:srgbClr val="2563EB"/>
-                          </a:solidFill>
-                          <a:latin typeface="맑은 고딕"/>
-                          <a:ea typeface="맑은 고딕"/>
-                        </a:rPr>
-                        <a:t>시뮬레이션</a:t>
-                      </a:r>
-                    </a:p>
-                  </a:txBody>
-                  <a:tcPr marL="54864" marR="54864" marT="9144" marB="9144" anchor="ctr">
-                    <a:solidFill>
-                      <a:srgbClr val="FFFFFF"/>
-                    </a:solidFill>
-                  </a:tcPr>
-                </a:tc>
-                <a:tc>
-                  <a:txBody>
-                    <a:bodyPr/>
-                    <a:lstStyle/>
-                    <a:p>
-                      <a:r>
-                        <a:rPr sz="1000" b="0" i="0">
-                          <a:solidFill>
-                            <a:srgbClr val="1B2740"/>
-                          </a:solidFill>
-                          <a:latin typeface="맑은 고딕"/>
-                          <a:ea typeface="맑은 고딕"/>
-                        </a:rPr>
-                        <a:t>안테나 구좌표 플롯 메시지 (STRUCT_PlotMsg) 를 수신 쓰레드로</a:t>
-                      </a:r>
-                    </a:p>
-                  </a:txBody>
-                  <a:tcPr marL="54864" marR="54864" marT="9144" marB="9144" anchor="ctr">
-                    <a:solidFill>
-                      <a:srgbClr val="FFFFFF"/>
-                    </a:solidFill>
-                  </a:tcPr>
-                </a:tc>
-                <a:tc>
-                  <a:txBody>
-                    <a:bodyPr/>
-                    <a:lstStyle/>
-                    <a:p>
-                      <a:r>
-                        <a:rPr sz="1000" b="0" i="0">
-                          <a:solidFill>
-                            <a:srgbClr val="1B2740"/>
-                          </a:solidFill>
-                          <a:latin typeface="맑은 고딕"/>
-                          <a:ea typeface="맑은 고딕"/>
-                        </a:rPr>
-                        <a:t>Idd.h, PlotLink.c  송신 · 수신 쓰레드</a:t>
-                      </a:r>
-                    </a:p>
-                  </a:txBody>
-                  <a:tcPr marL="54864" marR="54864" marT="9144" marB="9144" anchor="ctr">
-                    <a:solidFill>
-                      <a:srgbClr val="FFFFFF"/>
-                    </a:solidFill>
-                  </a:tcPr>
-                </a:tc>
-                <a:tc>
-                  <a:txBody>
-                    <a:bodyPr/>
-                    <a:lstStyle/>
-                    <a:p>
-                      <a:r>
-                        <a:rPr sz="1000" b="0" i="0">
-                          <a:solidFill>
-                            <a:srgbClr val="059669"/>
-                          </a:solidFill>
-                          <a:latin typeface="맑은 고딕"/>
-                          <a:ea typeface="맑은 고딕"/>
-                        </a:rPr>
-                        <a:t>1,160 보냄 = 받음</a:t>
-                      </a:r>
-                    </a:p>
-                  </a:txBody>
-                  <a:tcPr marL="54864" marR="54864" marT="9144" marB="9144" anchor="ctr">
-                    <a:solidFill>
-                      <a:srgbClr val="FFFFFF"/>
-                    </a:solidFill>
-                  </a:tcPr>
-                </a:tc>
-              </a:tr>
-              <a:tr h="265176">
-                <a:tc>
-                  <a:txBody>
-                    <a:bodyPr/>
-                    <a:lstStyle/>
-                    <a:p/>
-                  </a:txBody>
-                  <a:tcPr marL="54864" marR="54864" marT="9144" marB="9144" anchor="ctr">
-                    <a:solidFill>
-                      <a:srgbClr val="F7F9FC"/>
-                    </a:solidFill>
-                  </a:tcPr>
-                </a:tc>
-                <a:tc>
-                  <a:txBody>
-                    <a:bodyPr/>
-                    <a:lstStyle/>
-                    <a:p>
-                      <a:r>
-                        <a:rPr sz="1000" b="0" i="0">
-                          <a:solidFill>
-                            <a:srgbClr val="1B2740"/>
-                          </a:solidFill>
-                          <a:latin typeface="맑은 고딕"/>
-                          <a:ea typeface="맑은 고딕"/>
-                        </a:rPr>
-                        <a:t>표적 + 클러터, 스캔마다 플롯 ID 10000 ~ 1000000</a:t>
-                      </a:r>
-                    </a:p>
-                  </a:txBody>
-                  <a:tcPr marL="54864" marR="54864" marT="9144" marB="9144" anchor="ctr">
-                    <a:solidFill>
-                      <a:srgbClr val="F7F9FC"/>
-                    </a:solidFill>
-                  </a:tcPr>
-                </a:tc>
-                <a:tc>
-                  <a:txBody>
-                    <a:bodyPr/>
-                    <a:lstStyle/>
-                    <a:p>
-                      <a:r>
-                        <a:rPr sz="1000" b="0" i="0">
-                          <a:solidFill>
-                            <a:srgbClr val="1B2740"/>
-                          </a:solidFill>
-                          <a:latin typeface="맑은 고딕"/>
-                          <a:ea typeface="맑은 고딕"/>
-                        </a:rPr>
-                        <a:t>f_Lnk_BuildMsg</a:t>
-                      </a:r>
-                    </a:p>
-                  </a:txBody>
-                  <a:tcPr marL="54864" marR="54864" marT="9144" marB="9144" anchor="ctr">
-                    <a:solidFill>
-                      <a:srgbClr val="F7F9FC"/>
-                    </a:solidFill>
-                  </a:tcPr>
-                </a:tc>
-                <a:tc>
-                  <a:txBody>
-                    <a:bodyPr/>
-                    <a:lstStyle/>
-                    <a:p>
-                      <a:r>
-                        <a:rPr sz="1000" b="0" i="0">
-                          <a:solidFill>
-                            <a:srgbClr val="059669"/>
-                          </a:solidFill>
-                          <a:latin typeface="맑은 고딕"/>
-                          <a:ea typeface="맑은 고딕"/>
-                        </a:rPr>
-                        <a:t>ID 10000 ~ 18119</a:t>
-                      </a:r>
-                    </a:p>
-                  </a:txBody>
-                  <a:tcPr marL="54864" marR="54864" marT="9144" marB="9144" anchor="ctr">
-                    <a:solidFill>
-                      <a:srgbClr val="F7F9FC"/>
-                    </a:solidFill>
-                  </a:tcPr>
-                </a:tc>
-              </a:tr>
-              <a:tr h="265176">
-                <a:tc>
-                  <a:txBody>
-                    <a:bodyPr/>
-                    <a:lstStyle/>
-                    <a:p/>
-                  </a:txBody>
-                  <a:tcPr marL="54864" marR="54864" marT="9144" marB="9144" anchor="ctr">
-                    <a:solidFill>
-                      <a:srgbClr val="FFFFFF"/>
-                    </a:solidFill>
-                  </a:tcPr>
-                </a:tc>
-                <a:tc>
-                  <a:txBody>
-                    <a:bodyPr/>
-                    <a:lstStyle/>
-                    <a:p>
-                      <a:r>
-                        <a:rPr sz="1000" b="0" i="0">
-                          <a:solidFill>
-                            <a:srgbClr val="1B2740"/>
-                          </a:solidFill>
-                          <a:latin typeface="맑은 고딕"/>
-                          <a:ea typeface="맑은 고딕"/>
-                        </a:rPr>
-                        <a:t>UDP 또는 TCP/IP</a:t>
-                      </a:r>
-                    </a:p>
-                  </a:txBody>
-                  <a:tcPr marL="54864" marR="54864" marT="9144" marB="9144" anchor="ctr">
-                    <a:solidFill>
-                      <a:srgbClr val="FFFFFF"/>
-                    </a:solidFill>
-                  </a:tcPr>
-                </a:tc>
-                <a:tc>
-                  <a:txBody>
-                    <a:bodyPr/>
-                    <a:lstStyle/>
-                    <a:p>
-                      <a:r>
-                        <a:rPr sz="1000" b="0" i="0">
-                          <a:solidFill>
-                            <a:srgbClr val="1B2740"/>
-                          </a:solidFill>
-                          <a:latin typeface="맑은 고딕"/>
-                          <a:ea typeface="맑은 고딕"/>
-                        </a:rPr>
-                        <a:t>UDP 127.0.0.1:50505</a:t>
-                      </a:r>
-                    </a:p>
-                  </a:txBody>
-                  <a:tcPr marL="54864" marR="54864" marT="9144" marB="9144" anchor="ctr">
-                    <a:solidFill>
-                      <a:srgbClr val="FFFFFF"/>
-                    </a:solidFill>
-                  </a:tcPr>
-                </a:tc>
-                <a:tc>
-                  <a:txBody>
-                    <a:bodyPr/>
-                    <a:lstStyle/>
-                    <a:p>
-                      <a:r>
-                        <a:rPr sz="1000" b="0" i="0">
-                          <a:solidFill>
-                            <a:srgbClr val="059669"/>
-                          </a:solidFill>
-                          <a:latin typeface="맑은 고딕"/>
-                          <a:ea typeface="맑은 고딕"/>
-                        </a:rPr>
-                        <a:t>손실 0</a:t>
-                      </a:r>
-                    </a:p>
-                  </a:txBody>
-                  <a:tcPr marL="54864" marR="54864" marT="9144" marB="9144" anchor="ctr">
-                    <a:solidFill>
-                      <a:srgbClr val="FFFFFF"/>
-                    </a:solidFill>
-                  </a:tcPr>
-                </a:tc>
-              </a:tr>
-              <a:tr h="265176">
-                <a:tc>
-                  <a:txBody>
-                    <a:bodyPr/>
-                    <a:lstStyle/>
-                    <a:p/>
-                  </a:txBody>
-                  <a:tcPr marL="54864" marR="54864" marT="9144" marB="9144" anchor="ctr">
-                    <a:solidFill>
-                      <a:srgbClr val="F7F9FC"/>
-                    </a:solidFill>
-                  </a:tcPr>
-                </a:tc>
-                <a:tc>
-                  <a:txBody>
-                    <a:bodyPr/>
-                    <a:lstStyle/>
-                    <a:p>
-                      <a:r>
-                        <a:rPr sz="1000" b="0" i="0">
-                          <a:solidFill>
-                            <a:srgbClr val="1B2740"/>
-                          </a:solidFill>
-                          <a:latin typeface="맑은 고딕"/>
-                          <a:ea typeface="맑은 고딕"/>
-                        </a:rPr>
-                        <a:t>Assigned_Flag 매 스캔 0 (실패)</a:t>
-                      </a:r>
-                    </a:p>
-                  </a:txBody>
-                  <a:tcPr marL="54864" marR="54864" marT="9144" marB="9144" anchor="ctr">
-                    <a:solidFill>
-                      <a:srgbClr val="F7F9FC"/>
-                    </a:solidFill>
-                  </a:tcPr>
-                </a:tc>
-                <a:tc>
-                  <a:txBody>
-                    <a:bodyPr/>
-                    <a:lstStyle/>
-                    <a:p>
-                      <a:r>
-                        <a:rPr sz="1000" b="0" i="0">
-                          <a:solidFill>
-                            <a:srgbClr val="1B2740"/>
-                          </a:solidFill>
-                          <a:latin typeface="맑은 고딕"/>
-                          <a:ea typeface="맑은 고딕"/>
-                        </a:rPr>
-                        <a:t>f_Trk_ProcessScan ②</a:t>
-                      </a:r>
-                    </a:p>
-                  </a:txBody>
-                  <a:tcPr marL="54864" marR="54864" marT="9144" marB="9144" anchor="ctr">
-                    <a:solidFill>
-                      <a:srgbClr val="F7F9FC"/>
-                    </a:solidFill>
-                  </a:tcPr>
-                </a:tc>
-                <a:tc>
-                  <a:txBody>
-                    <a:bodyPr/>
-                    <a:lstStyle/>
-                    <a:p>
-                      <a:r>
-                        <a:rPr sz="1000" b="0" i="0">
-                          <a:solidFill>
-                            <a:srgbClr val="059669"/>
-                          </a:solidFill>
-                          <a:latin typeface="맑은 고딕"/>
-                          <a:ea typeface="맑은 고딕"/>
-                        </a:rPr>
-                        <a:t>모든 트랙 · 스캔 0</a:t>
-                      </a:r>
-                    </a:p>
-                  </a:txBody>
-                  <a:tcPr marL="54864" marR="54864" marT="9144" marB="9144" anchor="ctr">
-                    <a:solidFill>
-                      <a:srgbClr val="F7F9FC"/>
-                    </a:solidFill>
-                  </a:tcPr>
-                </a:tc>
-              </a:tr>
-              <a:tr h="265176">
-                <a:tc>
-                  <a:txBody>
-                    <a:bodyPr/>
-                    <a:lstStyle/>
-                    <a:p/>
-                  </a:txBody>
-                  <a:tcPr marL="54864" marR="54864" marT="9144" marB="9144" anchor="ctr">
-                    <a:solidFill>
-                      <a:srgbClr val="FFFFFF"/>
-                    </a:solidFill>
-                  </a:tcPr>
-                </a:tc>
-                <a:tc>
-                  <a:txBody>
-                    <a:bodyPr/>
-                    <a:lstStyle/>
-                    <a:p>
-                      <a:r>
-                        <a:rPr sz="1000" b="0" i="0">
-                          <a:solidFill>
-                            <a:srgbClr val="1B2740"/>
-                          </a:solidFill>
-                          <a:latin typeface="맑은 고딕"/>
-                          <a:ea typeface="맑은 고딕"/>
-                        </a:rPr>
-                        <a:t>True · Plot · Track 동시 표시 (3D, 2D)</a:t>
-                      </a:r>
-                    </a:p>
-                  </a:txBody>
-                  <a:tcPr marL="54864" marR="54864" marT="9144" marB="9144" anchor="ctr">
-                    <a:solidFill>
-                      <a:srgbClr val="FFFFFF"/>
-                    </a:solidFill>
-                  </a:tcPr>
-                </a:tc>
-                <a:tc>
-                  <a:txBody>
-                    <a:bodyPr/>
-                    <a:lstStyle/>
-                    <a:p>
-                      <a:r>
-                        <a:rPr sz="1000" b="0" i="0">
-                          <a:solidFill>
-                            <a:srgbClr val="1B2740"/>
-                          </a:solidFill>
-                          <a:latin typeface="맑은 고딕"/>
-                          <a:ea typeface="맑은 고딕"/>
-                        </a:rPr>
-                        <a:t>TrajectoryPlot.cpp  2D · 3D 그림</a:t>
-                      </a:r>
-                    </a:p>
-                  </a:txBody>
-                  <a:tcPr marL="54864" marR="54864" marT="9144" marB="9144" anchor="ctr">
-                    <a:solidFill>
-                      <a:srgbClr val="FFFFFF"/>
-                    </a:solidFill>
-                  </a:tcPr>
-                </a:tc>
-                <a:tc>
-                  <a:txBody>
-                    <a:bodyPr/>
-                    <a:lstStyle/>
-                    <a:p>
-                      <a:r>
-                        <a:rPr sz="1000" b="0" i="0">
-                          <a:solidFill>
-                            <a:srgbClr val="059669"/>
-                          </a:solidFill>
-                          <a:latin typeface="맑은 고딕"/>
-                          <a:ea typeface="맑은 고딕"/>
-                        </a:rPr>
-                        <a:t>4.2 화면</a:t>
-                      </a:r>
-                    </a:p>
-                  </a:txBody>
-                  <a:tcPr marL="54864" marR="54864" marT="9144" marB="9144" anchor="ctr">
-                    <a:solidFill>
-                      <a:srgbClr val="FFFFFF"/>
-                    </a:solidFill>
-                  </a:tcPr>
-                </a:tc>
-              </a:tr>
-            </a:tbl>
-          </a:graphicData>
-        </a:graphic>
-      </p:graphicFrame>
+      <p:pic>
+        <p:nvPicPr>
+          <p:cNvPr id="26" name="Picture 25" descr="fig_life.png"/>
+          <p:cNvPicPr>
+            <a:picLocks noChangeAspect="1"/>
+          </p:cNvPicPr>
+          <p:nvPr/>
+        </p:nvPicPr>
+        <p:blipFill>
+          <a:blip r:embed="rId2"/>
+          <a:stretch>
+            <a:fillRect/>
+          </a:stretch>
+        </p:blipFill>
+        <p:spPr>
+          <a:xfrm>
+            <a:off x="566928" y="2240280"/>
+            <a:ext cx="6766560" cy="2606040"/>
+          </a:xfrm>
+          <a:prstGeom prst="rect">
+            <a:avLst/>
+          </a:prstGeom>
+        </p:spPr>
+      </p:pic>
+      <p:sp>
+        <p:nvSpPr>
+          <p:cNvPr id="27" name="TextBox 26"/>
+          <p:cNvSpPr txBox="1"/>
+          <p:nvPr/>
+        </p:nvSpPr>
+        <p:spPr>
+          <a:xfrm>
+            <a:off x="640080" y="4937760"/>
+            <a:ext cx="1600200" cy="502920"/>
+          </a:xfrm>
+          <a:prstGeom prst="rect">
+            <a:avLst/>
+          </a:prstGeom>
+          <a:noFill/>
+        </p:spPr>
+        <p:txBody>
+          <a:bodyPr wrap="square" lIns="0" rIns="0" tIns="0" bIns="0" anchor="t">
+            <a:spAutoFit/>
+          </a:bodyPr>
+          <a:lstStyle/>
+          <a:p>
+            <a:pPr algn="l">
+              <a:spcAft>
+                <a:spcPts val="0"/>
+              </a:spcAft>
+            </a:pPr>
+            <a:r>
+              <a:rPr sz="2400" b="1" i="0">
+                <a:solidFill>
+                  <a:srgbClr val="1B2740"/>
+                </a:solidFill>
+                <a:latin typeface="Arial"/>
+                <a:ea typeface="맑은 고딕"/>
+              </a:rPr>
+              <a:t>355</a:t>
+            </a:r>
+          </a:p>
+        </p:txBody>
+      </p:sp>
+      <p:sp>
+        <p:nvSpPr>
+          <p:cNvPr id="28" name="TextBox 27"/>
+          <p:cNvSpPr txBox="1"/>
+          <p:nvPr/>
+        </p:nvSpPr>
+        <p:spPr>
+          <a:xfrm>
+            <a:off x="640080" y="5440680"/>
+            <a:ext cx="1600200" cy="274320"/>
+          </a:xfrm>
+          <a:prstGeom prst="rect">
+            <a:avLst/>
+          </a:prstGeom>
+          <a:noFill/>
+        </p:spPr>
+        <p:txBody>
+          <a:bodyPr wrap="square" lIns="0" rIns="0" tIns="0" bIns="0" anchor="t">
+            <a:spAutoFit/>
+          </a:bodyPr>
+          <a:lstStyle/>
+          <a:p>
+            <a:pPr algn="l">
+              <a:spcAft>
+                <a:spcPts val="0"/>
+              </a:spcAft>
+            </a:pPr>
+            <a:r>
+              <a:rPr sz="1000" b="0" i="0">
+                <a:solidFill>
+                  <a:srgbClr val="4A5A7A"/>
+                </a:solidFill>
+                <a:latin typeface="맑은 고딕"/>
+                <a:ea typeface="맑은 고딕"/>
+              </a:rPr>
+              <a:t>만든 트랙</a:t>
+            </a:r>
+          </a:p>
+        </p:txBody>
+      </p:sp>
+      <p:sp>
+        <p:nvSpPr>
+          <p:cNvPr id="29" name="TextBox 28"/>
+          <p:cNvSpPr txBox="1"/>
+          <p:nvPr/>
+        </p:nvSpPr>
+        <p:spPr>
+          <a:xfrm>
+            <a:off x="2331720" y="4937760"/>
+            <a:ext cx="1600200" cy="502920"/>
+          </a:xfrm>
+          <a:prstGeom prst="rect">
+            <a:avLst/>
+          </a:prstGeom>
+          <a:noFill/>
+        </p:spPr>
+        <p:txBody>
+          <a:bodyPr wrap="square" lIns="0" rIns="0" tIns="0" bIns="0" anchor="t">
+            <a:spAutoFit/>
+          </a:bodyPr>
+          <a:lstStyle/>
+          <a:p>
+            <a:pPr algn="l">
+              <a:spcAft>
+                <a:spcPts val="0"/>
+              </a:spcAft>
+            </a:pPr>
+            <a:r>
+              <a:rPr sz="2400" b="1" i="0">
+                <a:solidFill>
+                  <a:srgbClr val="2563EB"/>
+                </a:solidFill>
+                <a:latin typeface="Arial"/>
+                <a:ea typeface="맑은 고딕"/>
+              </a:rPr>
+              <a:t>352</a:t>
+            </a:r>
+          </a:p>
+        </p:txBody>
+      </p:sp>
+      <p:sp>
+        <p:nvSpPr>
+          <p:cNvPr id="30" name="TextBox 29"/>
+          <p:cNvSpPr txBox="1"/>
+          <p:nvPr/>
+        </p:nvSpPr>
+        <p:spPr>
+          <a:xfrm>
+            <a:off x="2331720" y="5440680"/>
+            <a:ext cx="1600200" cy="274320"/>
+          </a:xfrm>
+          <a:prstGeom prst="rect">
+            <a:avLst/>
+          </a:prstGeom>
+          <a:noFill/>
+        </p:spPr>
+        <p:txBody>
+          <a:bodyPr wrap="square" lIns="0" rIns="0" tIns="0" bIns="0" anchor="t">
+            <a:spAutoFit/>
+          </a:bodyPr>
+          <a:lstStyle/>
+          <a:p>
+            <a:pPr algn="l">
+              <a:spcAft>
+                <a:spcPts val="0"/>
+              </a:spcAft>
+            </a:pPr>
+            <a:r>
+              <a:rPr sz="1000" b="0" i="0">
+                <a:solidFill>
+                  <a:srgbClr val="4A5A7A"/>
+                </a:solidFill>
+                <a:latin typeface="맑은 고딕"/>
+                <a:ea typeface="맑은 고딕"/>
+              </a:rPr>
+              <a:t>같은 표적 플롯 쌍</a:t>
+            </a:r>
+          </a:p>
+        </p:txBody>
+      </p:sp>
+      <p:sp>
+        <p:nvSpPr>
+          <p:cNvPr id="31" name="TextBox 30"/>
+          <p:cNvSpPr txBox="1"/>
+          <p:nvPr/>
+        </p:nvSpPr>
+        <p:spPr>
+          <a:xfrm>
+            <a:off x="4023360" y="4937760"/>
+            <a:ext cx="1600200" cy="502920"/>
+          </a:xfrm>
+          <a:prstGeom prst="rect">
+            <a:avLst/>
+          </a:prstGeom>
+          <a:noFill/>
+        </p:spPr>
+        <p:txBody>
+          <a:bodyPr wrap="square" lIns="0" rIns="0" tIns="0" bIns="0" anchor="t">
+            <a:spAutoFit/>
+          </a:bodyPr>
+          <a:lstStyle/>
+          <a:p>
+            <a:pPr algn="l">
+              <a:spcAft>
+                <a:spcPts val="0"/>
+              </a:spcAft>
+            </a:pPr>
+            <a:r>
+              <a:rPr sz="2400" b="1" i="0">
+                <a:solidFill>
+                  <a:srgbClr val="6B7280"/>
+                </a:solidFill>
+                <a:latin typeface="Arial"/>
+                <a:ea typeface="맑은 고딕"/>
+              </a:rPr>
+              <a:t>3</a:t>
+            </a:r>
+          </a:p>
+        </p:txBody>
+      </p:sp>
+      <p:sp>
+        <p:nvSpPr>
+          <p:cNvPr id="32" name="TextBox 31"/>
+          <p:cNvSpPr txBox="1"/>
+          <p:nvPr/>
+        </p:nvSpPr>
+        <p:spPr>
+          <a:xfrm>
+            <a:off x="4023360" y="5440680"/>
+            <a:ext cx="1600200" cy="274320"/>
+          </a:xfrm>
+          <a:prstGeom prst="rect">
+            <a:avLst/>
+          </a:prstGeom>
+          <a:noFill/>
+        </p:spPr>
+        <p:txBody>
+          <a:bodyPr wrap="square" lIns="0" rIns="0" tIns="0" bIns="0" anchor="t">
+            <a:spAutoFit/>
+          </a:bodyPr>
+          <a:lstStyle/>
+          <a:p>
+            <a:pPr algn="l">
+              <a:spcAft>
+                <a:spcPts val="0"/>
+              </a:spcAft>
+            </a:pPr>
+            <a:r>
+              <a:rPr sz="1000" b="0" i="0">
+                <a:solidFill>
+                  <a:srgbClr val="4A5A7A"/>
+                </a:solidFill>
+                <a:latin typeface="맑은 고딕"/>
+                <a:ea typeface="맑은 고딕"/>
+              </a:rPr>
+              <a:t>클러터끼리 쌍</a:t>
+            </a:r>
+          </a:p>
+        </p:txBody>
+      </p:sp>
+      <p:sp>
+        <p:nvSpPr>
+          <p:cNvPr id="33" name="TextBox 32"/>
+          <p:cNvSpPr txBox="1"/>
+          <p:nvPr/>
+        </p:nvSpPr>
+        <p:spPr>
+          <a:xfrm>
+            <a:off x="5715000" y="4937760"/>
+            <a:ext cx="1600200" cy="502920"/>
+          </a:xfrm>
+          <a:prstGeom prst="rect">
+            <a:avLst/>
+          </a:prstGeom>
+          <a:noFill/>
+        </p:spPr>
+        <p:txBody>
+          <a:bodyPr wrap="square" lIns="0" rIns="0" tIns="0" bIns="0" anchor="t">
+            <a:spAutoFit/>
+          </a:bodyPr>
+          <a:lstStyle/>
+          <a:p>
+            <a:pPr algn="l">
+              <a:spcAft>
+                <a:spcPts val="0"/>
+              </a:spcAft>
+            </a:pPr>
+            <a:r>
+              <a:rPr sz="2400" b="1" i="0">
+                <a:solidFill>
+                  <a:srgbClr val="D97706"/>
+                </a:solidFill>
+                <a:latin typeface="Arial"/>
+                <a:ea typeface="맑은 고딕"/>
+              </a:rPr>
+              <a:t>4</a:t>
+            </a:r>
+          </a:p>
+        </p:txBody>
+      </p:sp>
+      <p:sp>
+        <p:nvSpPr>
+          <p:cNvPr id="34" name="TextBox 33"/>
+          <p:cNvSpPr txBox="1"/>
+          <p:nvPr/>
+        </p:nvSpPr>
+        <p:spPr>
+          <a:xfrm>
+            <a:off x="5715000" y="5440680"/>
+            <a:ext cx="1600200" cy="274320"/>
+          </a:xfrm>
+          <a:prstGeom prst="rect">
+            <a:avLst/>
+          </a:prstGeom>
+          <a:noFill/>
+        </p:spPr>
+        <p:txBody>
+          <a:bodyPr wrap="square" lIns="0" rIns="0" tIns="0" bIns="0" anchor="t">
+            <a:spAutoFit/>
+          </a:bodyPr>
+          <a:lstStyle/>
+          <a:p>
+            <a:pPr algn="l">
+              <a:spcAft>
+                <a:spcPts val="0"/>
+              </a:spcAft>
+            </a:pPr>
+            <a:r>
+              <a:rPr sz="1000" b="0" i="0">
+                <a:solidFill>
+                  <a:srgbClr val="4A5A7A"/>
+                </a:solidFill>
+                <a:latin typeface="맑은 고딕"/>
+                <a:ea typeface="맑은 고딕"/>
+              </a:rPr>
+              <a:t>표의 최대 트랙 수</a:t>
+            </a:r>
+          </a:p>
+        </p:txBody>
+      </p:sp>
+      <p:sp>
+        <p:nvSpPr>
+          <p:cNvPr id="35" name="TextBox 34"/>
+          <p:cNvSpPr txBox="1"/>
+          <p:nvPr/>
+        </p:nvSpPr>
+        <p:spPr>
+          <a:xfrm>
+            <a:off x="640080" y="5779008"/>
+            <a:ext cx="6675120" cy="457200"/>
+          </a:xfrm>
+          <a:prstGeom prst="rect">
+            <a:avLst/>
+          </a:prstGeom>
+          <a:noFill/>
+        </p:spPr>
+        <p:txBody>
+          <a:bodyPr wrap="square" lIns="0" rIns="0" tIns="0" bIns="0" anchor="t">
+            <a:spAutoFit/>
+          </a:bodyPr>
+          <a:lstStyle/>
+          <a:p>
+            <a:pPr algn="l">
+              <a:spcAft>
+                <a:spcPts val="0"/>
+              </a:spcAft>
+            </a:pPr>
+            <a:r>
+              <a:rPr sz="1000" b="0" i="0">
+                <a:solidFill>
+                  <a:srgbClr val="4A5A7A"/>
+                </a:solidFill>
+                <a:latin typeface="맑은 고딕"/>
+                <a:ea typeface="맑은 고딕"/>
+              </a:rPr>
+              <a:t>트랙 ID 100 ~ 454 사용 (과제 범위 100 ~ 10000),  플롯 ID 10000 ~ 18119 사용 (과제 범위 10000 ~ 1000000)</a:t>
+            </a:r>
+          </a:p>
+        </p:txBody>
+      </p:sp>
+      <p:pic>
+        <p:nvPicPr>
+          <p:cNvPr id="36" name="Picture 35" descr="ui_score_p2.png"/>
+          <p:cNvPicPr>
+            <a:picLocks noChangeAspect="1"/>
+          </p:cNvPicPr>
+          <p:nvPr/>
+        </p:nvPicPr>
+        <p:blipFill>
+          <a:blip r:embed="rId3"/>
+          <a:stretch>
+            <a:fillRect/>
+          </a:stretch>
+        </p:blipFill>
+        <p:spPr>
+          <a:xfrm>
+            <a:off x="7589520" y="2286000"/>
+            <a:ext cx="3959352" cy="3196492"/>
+          </a:xfrm>
+          <a:prstGeom prst="rect">
+            <a:avLst/>
+          </a:prstGeom>
+          <a:ln w="9525">
+            <a:solidFill>
+              <a:srgbClr val="D2D9E5"/>
+            </a:solidFill>
+          </a:ln>
+        </p:spPr>
+      </p:pic>
+      <p:sp>
+        <p:nvSpPr>
+          <p:cNvPr id="37" name="TextBox 36"/>
+          <p:cNvSpPr txBox="1"/>
+          <p:nvPr/>
+        </p:nvSpPr>
+        <p:spPr>
+          <a:xfrm>
+            <a:off x="7589520" y="5514672"/>
+            <a:ext cx="3959352" cy="457200"/>
+          </a:xfrm>
+          <a:prstGeom prst="rect">
+            <a:avLst/>
+          </a:prstGeom>
+          <a:noFill/>
+        </p:spPr>
+        <p:txBody>
+          <a:bodyPr wrap="square" lIns="0" rIns="0" tIns="0" bIns="0" anchor="t">
+            <a:spAutoFit/>
+          </a:bodyPr>
+          <a:lstStyle/>
+          <a:p>
+            <a:pPr algn="l">
+              <a:spcAft>
+                <a:spcPts val="0"/>
+              </a:spcAft>
+            </a:pPr>
+            <a:r>
+              <a:rPr sz="1000" b="0" i="0">
+                <a:solidFill>
+                  <a:srgbClr val="4A5A7A"/>
+                </a:solidFill>
+                <a:latin typeface="맑은 고딕"/>
+                <a:ea typeface="맑은 고딕"/>
+              </a:rPr>
+              <a:t>스코어 확인 창: Flag 1 1 1 0 0 1 1</a:t>
+            </a:r>
+          </a:p>
+          <a:p>
+            <a:pPr algn="l">
+              <a:spcAft>
+                <a:spcPts val="0"/>
+              </a:spcAft>
+            </a:pPr>
+            <a:r>
+              <a:rPr sz="1000" b="0" i="0">
+                <a:solidFill>
+                  <a:srgbClr val="4A5A7A"/>
+                </a:solidFill>
+                <a:latin typeface="맑은 고딕"/>
+                <a:ea typeface="맑은 고딕"/>
+              </a:rPr>
+              <a:t>임시 → 확정 (5) → 메모리 → 다시 확정 (MemoryScore 0)</a:t>
+            </a:r>
+          </a:p>
+        </p:txBody>
+      </p:sp>
     </p:spTree>
   </p:cSld>
   <p:clrMapOvr>

--- a/Part5_Track_Init_Mgmt/ref/산출물/Chapter5_TrackInitMgmt.pptx
+++ b/Part5_Track_Init_Mgmt/ref/산출물/Chapter5_TrackInitMgmt.pptx
@@ -2467,7 +2467,17 @@
           </a:p>
           <a:p>
             <a:r>
-              <a:t>아래 그림처럼 각도 오차는 거리에 비례하는 위치 오차가 됩니다. 14킬로미터 거리에서 0.2도는 약 49미터입니다. 그래서 R은 시선 방향으로는 좁고 옆 방향으로는 넓은 타원이 됩니다. 플롯마다 거리와 방향이 다르기 때문에 R은 플롯마다 계산합니다.</a:t>
+              <a:t>R이 무엇을 뜻하는지는 아래 그림으로 보겠습니다. 레이다는 거리는 정확하게 재지만 방향은 조금씩 틀리고, 이 각도 오차는 왼쪽 그림처럼 손전등 빛과 같이 멀리 갈수록 옆으로 퍼집니다. 0.2도는 5킬로미터에서 약 17미터, 14킬로미터에서는 약 49미터가 됩니다. 반면 거리 오차는 어디서나 10미터입니다.</a:t>
+            </a:r>
+          </a:p>
+          <a:p>
+            <a:r>
+              <a:t>오른쪽은 14킬로미터 표적 주변을 실제 비율로 확대한 그림입니다. 같은 표적을 여러 번 재면 플롯이 점들처럼 흩어지는데, 이 흩어지는 크기와 모양이 R입니다. 거리 방향으로는 10미터로 좁고 옆 방향으로는 49미터로 넓은, 옆으로 긴 타원이 됩니다. 위아래인 고각 방향도 같은 원리입니다.</a:t>
+            </a:r>
+          </a:p>
+          <a:p>
+            <a:r>
+              <a:t>플롯마다 거리와 방향이 다르기 때문에 R은 플롯마다 계산합니다.</a:t>
             </a:r>
           </a:p>
         </p:txBody>
@@ -38301,7 +38311,7 @@
           <p:nvPr/>
         </p:nvPicPr>
         <p:blipFill>
-          <a:blip r:embed="rId2"/>
+          <a:blip r:embed="rId4"/>
           <a:stretch>
             <a:fillRect/>
           </a:stretch>
@@ -38351,7 +38361,7 @@
                 <a:latin typeface="맑은 고딕"/>
                 <a:ea typeface="맑은 고딕"/>
               </a:rPr>
-              <a:t>R 의 모양</a:t>
+              <a:t>R 이 뜻하는 것</a:t>
             </a:r>
           </a:p>
         </p:txBody>
@@ -38419,7 +38429,7 @@
         <p:spPr>
           <a:xfrm>
             <a:off x="8202168" y="4041648"/>
-            <a:ext cx="3364991" cy="676656"/>
+            <a:ext cx="3364991" cy="475488"/>
           </a:xfrm>
           <a:prstGeom prst="rect">
             <a:avLst/>
@@ -38445,7 +38455,7 @@
                 <a:latin typeface="맑은 고딕"/>
                 <a:ea typeface="맑은 고딕"/>
               </a:rPr>
-              <a:t>각도 오차 → 옆 방향 위치 오차</a:t>
+              <a:t>R = 플롯이 흩어지는 정도</a:t>
             </a:r>
           </a:p>
           <a:p>
@@ -38462,24 +38472,7 @@
                 <a:latin typeface="맑은 고딕"/>
                 <a:ea typeface="맑은 고딕"/>
               </a:rPr>
-              <a:t>위치 오차 ≈ 거리 r × σθ</a:t>
-            </a:r>
-          </a:p>
-          <a:p>
-            <a:pPr algn="l">
-              <a:spcAft>
-                <a:spcPts val="100"/>
-              </a:spcAft>
-            </a:pPr>
-            <a:r>
-              <a:rPr sz="1050" b="0" i="0">
-                <a:solidFill>
-                  <a:srgbClr val="4A5A7A"/>
-                </a:solidFill>
-                <a:latin typeface="맑은 고딕"/>
-                <a:ea typeface="맑은 고딕"/>
-              </a:rPr>
-              <a:t>14 km 에서 0.2° → 약 49 m</a:t>
+              <a:t>같은 표적을 여러 번 잴 때 흩어지는 크기 · 모양</a:t>
             </a:r>
           </a:p>
         </p:txBody>
@@ -38492,7 +38485,7 @@
         </p:nvSpPr>
         <p:spPr>
           <a:xfrm>
-            <a:off x="7818120" y="4791455"/>
+            <a:off x="7818120" y="4718303"/>
             <a:ext cx="256032" cy="256032"/>
           </a:xfrm>
           <a:prstGeom prst="ellipse">
@@ -38546,8 +38539,8 @@
         </p:nvSpPr>
         <p:spPr>
           <a:xfrm>
-            <a:off x="8202168" y="4773168"/>
-            <a:ext cx="3364991" cy="475488"/>
+            <a:off x="8202168" y="4700016"/>
+            <a:ext cx="3364991" cy="676656"/>
           </a:xfrm>
           <a:prstGeom prst="rect">
             <a:avLst/>
@@ -38573,7 +38566,7 @@
                 <a:latin typeface="맑은 고딕"/>
                 <a:ea typeface="맑은 고딕"/>
               </a:rPr>
-              <a:t>시선 방향으로 납작한 타원</a:t>
+              <a:t>거리는 정확, 방향은 멀수록 퍼짐</a:t>
             </a:r>
           </a:p>
           <a:p>
@@ -38590,7 +38583,24 @@
                 <a:latin typeface="맑은 고딕"/>
                 <a:ea typeface="맑은 고딕"/>
               </a:rPr>
-              <a:t>거리 방향 10 m, 옆 방향 약 49 m</a:t>
+              <a:t>거리 방향: 10 m (어디서나 같음)</a:t>
+            </a:r>
+          </a:p>
+          <a:p>
+            <a:pPr algn="l">
+              <a:spcAft>
+                <a:spcPts val="100"/>
+              </a:spcAft>
+            </a:pPr>
+            <a:r>
+              <a:rPr sz="1050" b="0" i="0">
+                <a:solidFill>
+                  <a:srgbClr val="4A5A7A"/>
+                </a:solidFill>
+                <a:latin typeface="맑은 고딕"/>
+                <a:ea typeface="맑은 고딕"/>
+              </a:rPr>
+              <a:t>옆 · 위아래: 거리 × 0.2° (14 km → 49 m)</a:t>
             </a:r>
           </a:p>
         </p:txBody>
@@ -38603,7 +38613,7 @@
         </p:nvSpPr>
         <p:spPr>
           <a:xfrm>
-            <a:off x="7818120" y="5431536"/>
+            <a:off x="7818120" y="5577840"/>
             <a:ext cx="256032" cy="256032"/>
           </a:xfrm>
           <a:prstGeom prst="ellipse">
@@ -38657,7 +38667,7 @@
         </p:nvSpPr>
         <p:spPr>
           <a:xfrm>
-            <a:off x="8202168" y="5413248"/>
+            <a:off x="8202168" y="5559552"/>
             <a:ext cx="3364991" cy="475488"/>
           </a:xfrm>
           <a:prstGeom prst="rect">
@@ -38684,7 +38694,7 @@
                 <a:latin typeface="맑은 고딕"/>
                 <a:ea typeface="맑은 고딕"/>
               </a:rPr>
-              <a:t>플롯마다 계산</a:t>
+              <a:t>그래서 옆으로 긴 타원, 플롯마다 계산</a:t>
             </a:r>
           </a:p>
           <a:p>
@@ -38701,7 +38711,7 @@
                 <a:latin typeface="맑은 고딕"/>
                 <a:ea typeface="맑은 고딕"/>
               </a:rPr>
-              <a:t>거리와 방향이 플롯마다 다르기 때문</a:t>
+              <a:t>거리 · 방향이 플롯마다 달라 R 도 다름</a:t>
             </a:r>
           </a:p>
         </p:txBody>

--- a/Part5_Track_Init_Mgmt/ref/산출물/Chapter5_TrackInitMgmt.pptx
+++ b/Part5_Track_Init_Mgmt/ref/산출물/Chapter5_TrackInitMgmt.pptx
@@ -2492,7 +2492,17 @@
           </a:p>
           <a:p>
             <a:r>
-              <a:t>아래 그림처럼 각도 오차는 거리에 비례하는 위치 오차가 됩니다. 14킬로미터 거리에서 0.2도는 약 49미터입니다. 그래서 R은 시선 방향으로는 좁고 옆 방향으로는 넓은 타원이 됩니다. 플롯마다 거리와 방향이 다르기 때문에 R은 플롯마다 계산합니다.</a:t>
+              <a:t>R이 무엇을 뜻하는지는 아래 그림으로 보겠습니다. 레이다는 거리는 정확하게 재지만 방향은 조금씩 틀리고, 이 각도 오차는 왼쪽 그림처럼 손전등 빛과 같이 멀리 갈수록 옆으로 퍼집니다. 0.2도는 5킬로미터에서 약 17미터, 14킬로미터에서는 약 49미터가 됩니다. 반면 거리 오차는 어디서나 10미터입니다.</a:t>
+            </a:r>
+          </a:p>
+          <a:p>
+            <a:r>
+              <a:t>오른쪽은 14킬로미터 표적 주변을 실제 비율로 확대한 그림입니다. 같은 표적을 여러 번 재면 플롯이 점들처럼 흩어지는데, 이 흩어지는 크기와 모양이 R입니다. 거리 방향으로는 10미터로 좁고 옆 방향으로는 49미터로 넓은, 옆으로 긴 타원이 됩니다. 위아래인 고각 방향도 같은 원리입니다.</a:t>
+            </a:r>
+          </a:p>
+          <a:p>
+            <a:r>
+              <a:t>플롯마다 거리와 방향이 다르기 때문에 R은 플롯마다 계산합니다.</a:t>
             </a:r>
           </a:p>
         </p:txBody>
@@ -37750,7 +37760,7 @@
           <p:nvPr/>
         </p:nvPicPr>
         <p:blipFill>
-          <a:blip r:embed="rId2"/>
+          <a:blip r:embed="rId4"/>
           <a:stretch>
             <a:fillRect/>
           </a:stretch>
@@ -37800,7 +37810,7 @@
                 <a:latin typeface="맑은 고딕"/>
                 <a:ea typeface="맑은 고딕"/>
               </a:rPr>
-              <a:t>R 의 모양</a:t>
+              <a:t>R 이 뜻하는 것</a:t>
             </a:r>
           </a:p>
         </p:txBody>
@@ -37868,7 +37878,7 @@
         <p:spPr>
           <a:xfrm>
             <a:off x="8202168" y="4041648"/>
-            <a:ext cx="3364991" cy="676656"/>
+            <a:ext cx="3364991" cy="475488"/>
           </a:xfrm>
           <a:prstGeom prst="rect">
             <a:avLst/>
@@ -37894,7 +37904,7 @@
                 <a:latin typeface="맑은 고딕"/>
                 <a:ea typeface="맑은 고딕"/>
               </a:rPr>
-              <a:t>각도 오차 → 옆 방향 위치 오차</a:t>
+              <a:t>R = 플롯이 흩어지는 정도</a:t>
             </a:r>
           </a:p>
           <a:p>
@@ -37911,24 +37921,7 @@
                 <a:latin typeface="맑은 고딕"/>
                 <a:ea typeface="맑은 고딕"/>
               </a:rPr>
-              <a:t>위치 오차 ≈ 거리 r × σθ</a:t>
-            </a:r>
-          </a:p>
-          <a:p>
-            <a:pPr algn="l">
-              <a:spcAft>
-                <a:spcPts val="100"/>
-              </a:spcAft>
-            </a:pPr>
-            <a:r>
-              <a:rPr sz="1050" b="0" i="0">
-                <a:solidFill>
-                  <a:srgbClr val="4A5A7A"/>
-                </a:solidFill>
-                <a:latin typeface="맑은 고딕"/>
-                <a:ea typeface="맑은 고딕"/>
-              </a:rPr>
-              <a:t>14 km 에서 0.2° → 약 49 m</a:t>
+              <a:t>같은 표적을 여러 번 잴 때 흩어지는 크기 · 모양</a:t>
             </a:r>
           </a:p>
         </p:txBody>
@@ -37941,7 +37934,7 @@
         </p:nvSpPr>
         <p:spPr>
           <a:xfrm>
-            <a:off x="7818120" y="4791455"/>
+            <a:off x="7818120" y="4718303"/>
             <a:ext cx="256032" cy="256032"/>
           </a:xfrm>
           <a:prstGeom prst="ellipse">
@@ -37995,8 +37988,8 @@
         </p:nvSpPr>
         <p:spPr>
           <a:xfrm>
-            <a:off x="8202168" y="4773168"/>
-            <a:ext cx="3364991" cy="475488"/>
+            <a:off x="8202168" y="4700016"/>
+            <a:ext cx="3364991" cy="676656"/>
           </a:xfrm>
           <a:prstGeom prst="rect">
             <a:avLst/>
@@ -38022,7 +38015,7 @@
                 <a:latin typeface="맑은 고딕"/>
                 <a:ea typeface="맑은 고딕"/>
               </a:rPr>
-              <a:t>시선 방향으로 납작한 타원</a:t>
+              <a:t>거리는 정확, 방향은 멀수록 퍼짐</a:t>
             </a:r>
           </a:p>
           <a:p>
@@ -38039,7 +38032,24 @@
                 <a:latin typeface="맑은 고딕"/>
                 <a:ea typeface="맑은 고딕"/>
               </a:rPr>
-              <a:t>거리 방향 10 m, 옆 방향 약 49 m</a:t>
+              <a:t>거리 방향: 10 m (어디서나 같음)</a:t>
+            </a:r>
+          </a:p>
+          <a:p>
+            <a:pPr algn="l">
+              <a:spcAft>
+                <a:spcPts val="100"/>
+              </a:spcAft>
+            </a:pPr>
+            <a:r>
+              <a:rPr sz="1050" b="0" i="0">
+                <a:solidFill>
+                  <a:srgbClr val="4A5A7A"/>
+                </a:solidFill>
+                <a:latin typeface="맑은 고딕"/>
+                <a:ea typeface="맑은 고딕"/>
+              </a:rPr>
+              <a:t>옆 · 위아래: 거리 × 0.2° (14 km → 49 m)</a:t>
             </a:r>
           </a:p>
         </p:txBody>
@@ -38052,7 +38062,7 @@
         </p:nvSpPr>
         <p:spPr>
           <a:xfrm>
-            <a:off x="7818120" y="5431536"/>
+            <a:off x="7818120" y="5577840"/>
             <a:ext cx="256032" cy="256032"/>
           </a:xfrm>
           <a:prstGeom prst="ellipse">
@@ -38106,7 +38116,7 @@
         </p:nvSpPr>
         <p:spPr>
           <a:xfrm>
-            <a:off x="8202168" y="5413248"/>
+            <a:off x="8202168" y="5559552"/>
             <a:ext cx="3364991" cy="475488"/>
           </a:xfrm>
           <a:prstGeom prst="rect">
@@ -38133,7 +38143,7 @@
                 <a:latin typeface="맑은 고딕"/>
                 <a:ea typeface="맑은 고딕"/>
               </a:rPr>
-              <a:t>플롯마다 계산</a:t>
+              <a:t>그래서 옆으로 긴 타원, 플롯마다 계산</a:t>
             </a:r>
           </a:p>
           <a:p>
@@ -38150,7 +38160,7 @@
                 <a:latin typeface="맑은 고딕"/>
                 <a:ea typeface="맑은 고딕"/>
               </a:rPr>
-              <a:t>거리와 방향이 플롯마다 다르기 때문</a:t>
+              <a:t>거리 · 방향이 플롯마다 달라 R 도 다름</a:t>
             </a:r>
           </a:p>
         </p:txBody>

--- a/Part5_Track_Init_Mgmt/ref/산출물/Chapter5_TrackInitMgmt.pptx
+++ b/Part5_Track_Init_Mgmt/ref/산출물/Chapter5_TrackInitMgmt.pptx
@@ -2487,7 +2487,12 @@
           </a:p>
           <a:p>
             <a:r>
-              <a:t>레이다는 거리와 각도로 측정하고 트랙은 직교 좌표로 관리하기 때문에, 오른쪽 위 식과 같이 변환합니다. 야코비안 J로 구좌표 오차를 안테나 직교 좌표로 옮기고, 회전 행렬 M으로 NED 좌표로 돌립니다.</a:t>
+              <a:t>레이다는 거리와 각도로 재고 트랙은 북, 동, 아래의 미터 좌표로 관리하기 때문에, 오른쪽 위 식처럼 바꿔 씁니다. 가운데 파란 괄호는 레이다 시선을 기준으로 본 오차 크기입니다. 거리 방향은 10미터 그대로이고, 각도 오차는 거리를 곱해 미터로 바꿉니다. 방위각 쪽의 cos el은 고각이 높을수록 같은 방위각 차이가 옆으로 덜 벌어지는 것을 반영한 값으로, 고각이 작으면 거의 1입니다.</a:t>
+            </a:r>
+          </a:p>
+          <a:p>
+            <a:r>
+              <a:t>앞뒤의 초록색 C는 시선 기준 축을 북, 동, 아래 축으로 돌리는 회전 행렬이고, 안테나가 향한 방향과 플랫폼 자세로 정해집니다. 앞뒤로 C를 곱하는 것은 타원의 모양은 그대로 두고 방향만 돌려 놓는다는 뜻입니다.</a:t>
             </a:r>
           </a:p>
           <a:p>
@@ -37498,8 +37503,8 @@
         </p:nvSpPr>
         <p:spPr>
           <a:xfrm>
-            <a:off x="6446520" y="2359152"/>
-            <a:ext cx="5029200" cy="1097280"/>
+            <a:off x="6400800" y="2340864"/>
+            <a:ext cx="5029200" cy="347472"/>
           </a:xfrm>
           <a:prstGeom prst="rect">
             <a:avLst/>
@@ -37507,231 +37512,10 @@
           <a:noFill/>
         </p:spPr>
         <p:txBody>
-          <a:bodyPr wrap="square" lIns="0" rIns="0" tIns="0" bIns="0" anchor="t">
+          <a:bodyPr wrap="square" lIns="0" rIns="0" tIns="0" bIns="0" anchor="ctr">
             <a:spAutoFit/>
           </a:bodyPr>
           <a:lstStyle/>
-          <a:p>
-            <a:pPr algn="l">
-              <a:spcAft>
-                <a:spcPts val="200"/>
-              </a:spcAft>
-            </a:pPr>
-            <a:r>
-              <a:rPr sz="1350" b="1" i="0">
-                <a:solidFill>
-                  <a:srgbClr val="1B2740"/>
-                </a:solidFill>
-                <a:latin typeface="Cambria Math"/>
-                <a:ea typeface="Cambria Math"/>
-              </a:rPr>
-              <a:t>R</a:t>
-            </a:r>
-            <a:r>
-              <a:rPr sz="1350" b="1" i="0" baseline="-25000">
-                <a:solidFill>
-                  <a:srgbClr val="1B2740"/>
-                </a:solidFill>
-                <a:latin typeface="Cambria Math"/>
-                <a:ea typeface="Cambria Math"/>
-              </a:rPr>
-              <a:t>ant</a:t>
-            </a:r>
-            <a:r>
-              <a:rPr sz="1350" b="1" i="0">
-                <a:solidFill>
-                  <a:srgbClr val="1B2740"/>
-                </a:solidFill>
-                <a:latin typeface="Cambria Math"/>
-                <a:ea typeface="Cambria Math"/>
-              </a:rPr>
-              <a:t> = J · diag( σ</a:t>
-            </a:r>
-            <a:r>
-              <a:rPr sz="1350" b="1" i="0" baseline="-25000">
-                <a:solidFill>
-                  <a:srgbClr val="1B2740"/>
-                </a:solidFill>
-                <a:latin typeface="Cambria Math"/>
-                <a:ea typeface="Cambria Math"/>
-              </a:rPr>
-              <a:t>r</a:t>
-            </a:r>
-            <a:r>
-              <a:rPr sz="1350" b="1" i="0" baseline="30000">
-                <a:solidFill>
-                  <a:srgbClr val="1B2740"/>
-                </a:solidFill>
-                <a:latin typeface="Cambria Math"/>
-                <a:ea typeface="Cambria Math"/>
-              </a:rPr>
-              <a:t>2</a:t>
-            </a:r>
-            <a:r>
-              <a:rPr sz="1350" b="1" i="0">
-                <a:solidFill>
-                  <a:srgbClr val="1B2740"/>
-                </a:solidFill>
-                <a:latin typeface="Cambria Math"/>
-                <a:ea typeface="Cambria Math"/>
-              </a:rPr>
-              <a:t>, σ</a:t>
-            </a:r>
-            <a:r>
-              <a:rPr sz="1350" b="1" i="0" baseline="-25000">
-                <a:solidFill>
-                  <a:srgbClr val="1B2740"/>
-                </a:solidFill>
-                <a:latin typeface="Cambria Math"/>
-                <a:ea typeface="Cambria Math"/>
-              </a:rPr>
-              <a:t>az</a:t>
-            </a:r>
-            <a:r>
-              <a:rPr sz="1350" b="1" i="0" baseline="30000">
-                <a:solidFill>
-                  <a:srgbClr val="1B2740"/>
-                </a:solidFill>
-                <a:latin typeface="Cambria Math"/>
-                <a:ea typeface="Cambria Math"/>
-              </a:rPr>
-              <a:t>2</a:t>
-            </a:r>
-            <a:r>
-              <a:rPr sz="1350" b="1" i="0">
-                <a:solidFill>
-                  <a:srgbClr val="1B2740"/>
-                </a:solidFill>
-                <a:latin typeface="Cambria Math"/>
-                <a:ea typeface="Cambria Math"/>
-              </a:rPr>
-              <a:t>, σ</a:t>
-            </a:r>
-            <a:r>
-              <a:rPr sz="1350" b="1" i="0" baseline="-25000">
-                <a:solidFill>
-                  <a:srgbClr val="1B2740"/>
-                </a:solidFill>
-                <a:latin typeface="Cambria Math"/>
-                <a:ea typeface="Cambria Math"/>
-              </a:rPr>
-              <a:t>el</a:t>
-            </a:r>
-            <a:r>
-              <a:rPr sz="1350" b="1" i="0" baseline="30000">
-                <a:solidFill>
-                  <a:srgbClr val="1B2740"/>
-                </a:solidFill>
-                <a:latin typeface="Cambria Math"/>
-                <a:ea typeface="Cambria Math"/>
-              </a:rPr>
-              <a:t>2</a:t>
-            </a:r>
-            <a:r>
-              <a:rPr sz="1350" b="1" i="0">
-                <a:solidFill>
-                  <a:srgbClr val="1B2740"/>
-                </a:solidFill>
-                <a:latin typeface="Cambria Math"/>
-                <a:ea typeface="Cambria Math"/>
-              </a:rPr>
-              <a:t> ) · J</a:t>
-            </a:r>
-            <a:r>
-              <a:rPr sz="1350" b="1" i="0" baseline="30000">
-                <a:solidFill>
-                  <a:srgbClr val="1B2740"/>
-                </a:solidFill>
-                <a:latin typeface="Cambria Math"/>
-                <a:ea typeface="Cambria Math"/>
-              </a:rPr>
-              <a:t>T</a:t>
-            </a:r>
-          </a:p>
-          <a:p>
-            <a:pPr algn="l">
-              <a:spcAft>
-                <a:spcPts val="600"/>
-              </a:spcAft>
-            </a:pPr>
-            <a:r>
-              <a:rPr sz="1050" b="0" i="0">
-                <a:solidFill>
-                  <a:srgbClr val="4A5A7A"/>
-                </a:solidFill>
-                <a:latin typeface="맑은 고딕"/>
-                <a:ea typeface="맑은 고딕"/>
-              </a:rPr>
-              <a:t>J : 구좌표 (r, az, el) → 안테나 직교 좌표의 야코비안</a:t>
-            </a:r>
-          </a:p>
-          <a:p>
-            <a:pPr algn="l">
-              <a:spcAft>
-                <a:spcPts val="200"/>
-              </a:spcAft>
-            </a:pPr>
-            <a:r>
-              <a:rPr sz="1350" b="1" i="0">
-                <a:solidFill>
-                  <a:srgbClr val="1B2740"/>
-                </a:solidFill>
-                <a:latin typeface="Cambria Math"/>
-                <a:ea typeface="Cambria Math"/>
-              </a:rPr>
-              <a:t>R</a:t>
-            </a:r>
-            <a:r>
-              <a:rPr sz="1350" b="1" i="0" baseline="-25000">
-                <a:solidFill>
-                  <a:srgbClr val="1B2740"/>
-                </a:solidFill>
-                <a:latin typeface="Cambria Math"/>
-                <a:ea typeface="Cambria Math"/>
-              </a:rPr>
-              <a:t>NED</a:t>
-            </a:r>
-            <a:r>
-              <a:rPr sz="1350" b="1" i="0">
-                <a:solidFill>
-                  <a:srgbClr val="1B2740"/>
-                </a:solidFill>
-                <a:latin typeface="Cambria Math"/>
-                <a:ea typeface="Cambria Math"/>
-              </a:rPr>
-              <a:t> = M · R</a:t>
-            </a:r>
-            <a:r>
-              <a:rPr sz="1350" b="1" i="0" baseline="-25000">
-                <a:solidFill>
-                  <a:srgbClr val="1B2740"/>
-                </a:solidFill>
-                <a:latin typeface="Cambria Math"/>
-                <a:ea typeface="Cambria Math"/>
-              </a:rPr>
-              <a:t>ant</a:t>
-            </a:r>
-            <a:r>
-              <a:rPr sz="1350" b="1" i="0">
-                <a:solidFill>
-                  <a:srgbClr val="1B2740"/>
-                </a:solidFill>
-                <a:latin typeface="Cambria Math"/>
-                <a:ea typeface="Cambria Math"/>
-              </a:rPr>
-              <a:t> · M</a:t>
-            </a:r>
-            <a:r>
-              <a:rPr sz="1350" b="1" i="0" baseline="30000">
-                <a:solidFill>
-                  <a:srgbClr val="1B2740"/>
-                </a:solidFill>
-                <a:latin typeface="Cambria Math"/>
-                <a:ea typeface="Cambria Math"/>
-              </a:rPr>
-              <a:t>T</a:t>
-            </a:r>
-          </a:p>
           <a:p>
             <a:pPr algn="l">
               <a:spcAft>
@@ -37739,21 +37523,427 @@
               </a:spcAft>
             </a:pPr>
             <a:r>
-              <a:rPr sz="1050" b="0" i="0">
+              <a:rPr sz="1400" b="1" i="0">
+                <a:solidFill>
+                  <a:srgbClr val="1B2740"/>
+                </a:solidFill>
+                <a:latin typeface="Cambria Math"/>
+                <a:ea typeface="Cambria Math"/>
+              </a:rPr>
+              <a:t>R</a:t>
+            </a:r>
+            <a:r>
+              <a:rPr sz="1400" b="1" i="0" baseline="-25000">
+                <a:solidFill>
+                  <a:srgbClr val="1B2740"/>
+                </a:solidFill>
+                <a:latin typeface="Cambria Math"/>
+                <a:ea typeface="Cambria Math"/>
+              </a:rPr>
+              <a:t>NED</a:t>
+            </a:r>
+            <a:r>
+              <a:rPr sz="1400" b="1" i="0">
+                <a:solidFill>
+                  <a:srgbClr val="1B2740"/>
+                </a:solidFill>
+                <a:latin typeface="Cambria Math"/>
+                <a:ea typeface="Cambria Math"/>
+              </a:rPr>
+              <a:t> = </a:t>
+            </a:r>
+            <a:r>
+              <a:rPr sz="1400" b="1" i="0">
+                <a:solidFill>
+                  <a:srgbClr val="059669"/>
+                </a:solidFill>
+                <a:latin typeface="Cambria Math"/>
+                <a:ea typeface="Cambria Math"/>
+              </a:rPr>
+              <a:t>C</a:t>
+            </a:r>
+            <a:r>
+              <a:rPr sz="1400" b="1" i="0">
+                <a:solidFill>
+                  <a:srgbClr val="2563EB"/>
+                </a:solidFill>
+                <a:latin typeface="Cambria Math"/>
+                <a:ea typeface="Cambria Math"/>
+              </a:rPr>
+              <a:t> · diag( σ</a:t>
+            </a:r>
+            <a:r>
+              <a:rPr sz="1400" b="1" i="0" baseline="-25000">
+                <a:solidFill>
+                  <a:srgbClr val="2563EB"/>
+                </a:solidFill>
+                <a:latin typeface="Cambria Math"/>
+                <a:ea typeface="Cambria Math"/>
+              </a:rPr>
+              <a:t>r</a:t>
+            </a:r>
+            <a:r>
+              <a:rPr sz="1400" b="1" i="0" baseline="30000">
+                <a:solidFill>
+                  <a:srgbClr val="2563EB"/>
+                </a:solidFill>
+                <a:latin typeface="Cambria Math"/>
+                <a:ea typeface="Cambria Math"/>
+              </a:rPr>
+              <a:t>2</a:t>
+            </a:r>
+            <a:r>
+              <a:rPr sz="1400" b="1" i="0">
+                <a:solidFill>
+                  <a:srgbClr val="2563EB"/>
+                </a:solidFill>
+                <a:latin typeface="Cambria Math"/>
+                <a:ea typeface="Cambria Math"/>
+              </a:rPr>
+              <a:t>,  (r cos el · σ</a:t>
+            </a:r>
+            <a:r>
+              <a:rPr sz="1400" b="1" i="0" baseline="-25000">
+                <a:solidFill>
+                  <a:srgbClr val="2563EB"/>
+                </a:solidFill>
+                <a:latin typeface="Cambria Math"/>
+                <a:ea typeface="Cambria Math"/>
+              </a:rPr>
+              <a:t>az</a:t>
+            </a:r>
+            <a:r>
+              <a:rPr sz="1400" b="1" i="0">
+                <a:solidFill>
+                  <a:srgbClr val="2563EB"/>
+                </a:solidFill>
+                <a:latin typeface="Cambria Math"/>
+                <a:ea typeface="Cambria Math"/>
+              </a:rPr>
+              <a:t>)</a:t>
+            </a:r>
+            <a:r>
+              <a:rPr sz="1400" b="1" i="0" baseline="30000">
+                <a:solidFill>
+                  <a:srgbClr val="2563EB"/>
+                </a:solidFill>
+                <a:latin typeface="Cambria Math"/>
+                <a:ea typeface="Cambria Math"/>
+              </a:rPr>
+              <a:t>2</a:t>
+            </a:r>
+            <a:r>
+              <a:rPr sz="1400" b="1" i="0">
+                <a:solidFill>
+                  <a:srgbClr val="2563EB"/>
+                </a:solidFill>
+                <a:latin typeface="Cambria Math"/>
+                <a:ea typeface="Cambria Math"/>
+              </a:rPr>
+              <a:t>,  (r · σ</a:t>
+            </a:r>
+            <a:r>
+              <a:rPr sz="1400" b="1" i="0" baseline="-25000">
+                <a:solidFill>
+                  <a:srgbClr val="2563EB"/>
+                </a:solidFill>
+                <a:latin typeface="Cambria Math"/>
+                <a:ea typeface="Cambria Math"/>
+              </a:rPr>
+              <a:t>el</a:t>
+            </a:r>
+            <a:r>
+              <a:rPr sz="1400" b="1" i="0">
+                <a:solidFill>
+                  <a:srgbClr val="2563EB"/>
+                </a:solidFill>
+                <a:latin typeface="Cambria Math"/>
+                <a:ea typeface="Cambria Math"/>
+              </a:rPr>
+              <a:t>)</a:t>
+            </a:r>
+            <a:r>
+              <a:rPr sz="1400" b="1" i="0" baseline="30000">
+                <a:solidFill>
+                  <a:srgbClr val="2563EB"/>
+                </a:solidFill>
+                <a:latin typeface="Cambria Math"/>
+                <a:ea typeface="Cambria Math"/>
+              </a:rPr>
+              <a:t>2</a:t>
+            </a:r>
+            <a:r>
+              <a:rPr sz="1400" b="1" i="0">
+                <a:solidFill>
+                  <a:srgbClr val="2563EB"/>
+                </a:solidFill>
+                <a:latin typeface="Cambria Math"/>
+                <a:ea typeface="Cambria Math"/>
+              </a:rPr>
+              <a:t> ) · </a:t>
+            </a:r>
+            <a:r>
+              <a:rPr sz="1400" b="1" i="0">
+                <a:solidFill>
+                  <a:srgbClr val="059669"/>
+                </a:solidFill>
+                <a:latin typeface="Cambria Math"/>
+                <a:ea typeface="Cambria Math"/>
+              </a:rPr>
+              <a:t>C</a:t>
+            </a:r>
+            <a:r>
+              <a:rPr sz="1400" b="1" i="0" baseline="30000">
+                <a:solidFill>
+                  <a:srgbClr val="059669"/>
+                </a:solidFill>
+                <a:latin typeface="Cambria Math"/>
+                <a:ea typeface="Cambria Math"/>
+              </a:rPr>
+              <a:t>T</a:t>
+            </a:r>
+          </a:p>
+        </p:txBody>
+      </p:sp>
+      <p:sp>
+        <p:nvSpPr>
+          <p:cNvPr id="38" name="Rounded Rectangle 37"/>
+          <p:cNvSpPr/>
+          <p:nvPr/>
+        </p:nvSpPr>
+        <p:spPr>
+          <a:xfrm>
+            <a:off x="6400800" y="2734056"/>
+            <a:ext cx="841248" cy="210312"/>
+          </a:xfrm>
+          <a:prstGeom prst="roundRect">
+            <a:avLst>
+              <a:gd name="adj" fmla="val 25000"/>
+            </a:avLst>
+          </a:prstGeom>
+          <a:solidFill>
+            <a:srgbClr val="FFFFFF"/>
+          </a:solidFill>
+          <a:ln w="9525">
+            <a:solidFill>
+              <a:srgbClr val="2563EB"/>
+            </a:solidFill>
+          </a:ln>
+          <a:effectLst/>
+        </p:spPr>
+        <p:style>
+          <a:lnRef idx="1">
+            <a:schemeClr val="accent1"/>
+          </a:lnRef>
+          <a:fillRef idx="3">
+            <a:schemeClr val="accent1"/>
+          </a:fillRef>
+          <a:effectRef idx="2">
+            <a:schemeClr val="accent1"/>
+          </a:effectRef>
+          <a:fontRef idx="minor">
+            <a:schemeClr val="lt1"/>
+          </a:fontRef>
+        </p:style>
+        <p:txBody>
+          <a:bodyPr rtlCol="0" anchor="ctr" lIns="36576" rIns="36576" tIns="0" bIns="0" wrap="square"/>
+          <a:lstStyle/>
+          <a:p>
+            <a:pPr algn="ctr"/>
+            <a:r>
+              <a:rPr sz="950" b="1" i="0">
+                <a:solidFill>
+                  <a:srgbClr val="2563EB"/>
+                </a:solidFill>
+                <a:latin typeface="맑은 고딕"/>
+                <a:ea typeface="맑은 고딕"/>
+              </a:rPr>
+              <a:t>오차 크기</a:t>
+            </a:r>
+          </a:p>
+        </p:txBody>
+      </p:sp>
+      <p:sp>
+        <p:nvSpPr>
+          <p:cNvPr id="39" name="TextBox 38"/>
+          <p:cNvSpPr txBox="1"/>
+          <p:nvPr/>
+        </p:nvSpPr>
+        <p:spPr>
+          <a:xfrm>
+            <a:off x="7333488" y="2734056"/>
+            <a:ext cx="4160520" cy="210312"/>
+          </a:xfrm>
+          <a:prstGeom prst="rect">
+            <a:avLst/>
+          </a:prstGeom>
+          <a:noFill/>
+        </p:spPr>
+        <p:txBody>
+          <a:bodyPr wrap="square" lIns="0" rIns="0" tIns="0" bIns="0" anchor="ctr">
+            <a:spAutoFit/>
+          </a:bodyPr>
+          <a:lstStyle/>
+          <a:p>
+            <a:pPr algn="l">
+              <a:spcAft>
+                <a:spcPts val="0"/>
+              </a:spcAft>
+            </a:pPr>
+            <a:r>
+              <a:rPr sz="1000" b="0" i="0">
+                <a:solidFill>
+                  <a:srgbClr val="1B2740"/>
+                </a:solidFill>
+                <a:latin typeface="맑은 고딕"/>
+                <a:ea typeface="맑은 고딕"/>
+              </a:rPr>
+              <a:t>레이다 시선 기준 거리 · 옆 · 위아래 오차. 각도 × 거리 = 미터</a:t>
+            </a:r>
+          </a:p>
+        </p:txBody>
+      </p:sp>
+      <p:sp>
+        <p:nvSpPr>
+          <p:cNvPr id="40" name="Rounded Rectangle 39"/>
+          <p:cNvSpPr/>
+          <p:nvPr/>
+        </p:nvSpPr>
+        <p:spPr>
+          <a:xfrm>
+            <a:off x="6400800" y="2980944"/>
+            <a:ext cx="841248" cy="210312"/>
+          </a:xfrm>
+          <a:prstGeom prst="roundRect">
+            <a:avLst>
+              <a:gd name="adj" fmla="val 25000"/>
+            </a:avLst>
+          </a:prstGeom>
+          <a:solidFill>
+            <a:srgbClr val="FFFFFF"/>
+          </a:solidFill>
+          <a:ln w="9525">
+            <a:solidFill>
+              <a:srgbClr val="059669"/>
+            </a:solidFill>
+          </a:ln>
+          <a:effectLst/>
+        </p:spPr>
+        <p:style>
+          <a:lnRef idx="1">
+            <a:schemeClr val="accent1"/>
+          </a:lnRef>
+          <a:fillRef idx="3">
+            <a:schemeClr val="accent1"/>
+          </a:fillRef>
+          <a:effectRef idx="2">
+            <a:schemeClr val="accent1"/>
+          </a:effectRef>
+          <a:fontRef idx="minor">
+            <a:schemeClr val="lt1"/>
+          </a:fontRef>
+        </p:style>
+        <p:txBody>
+          <a:bodyPr rtlCol="0" anchor="ctr" lIns="36576" rIns="36576" tIns="0" bIns="0" wrap="square"/>
+          <a:lstStyle/>
+          <a:p>
+            <a:pPr algn="ctr"/>
+            <a:r>
+              <a:rPr sz="950" b="1" i="0">
+                <a:solidFill>
+                  <a:srgbClr val="059669"/>
+                </a:solidFill>
+                <a:latin typeface="맑은 고딕"/>
+                <a:ea typeface="맑은 고딕"/>
+              </a:rPr>
+              <a:t>회전 C</a:t>
+            </a:r>
+          </a:p>
+        </p:txBody>
+      </p:sp>
+      <p:sp>
+        <p:nvSpPr>
+          <p:cNvPr id="41" name="TextBox 40"/>
+          <p:cNvSpPr txBox="1"/>
+          <p:nvPr/>
+        </p:nvSpPr>
+        <p:spPr>
+          <a:xfrm>
+            <a:off x="7333488" y="2980944"/>
+            <a:ext cx="4160520" cy="210312"/>
+          </a:xfrm>
+          <a:prstGeom prst="rect">
+            <a:avLst/>
+          </a:prstGeom>
+          <a:noFill/>
+        </p:spPr>
+        <p:txBody>
+          <a:bodyPr wrap="square" lIns="0" rIns="0" tIns="0" bIns="0" anchor="ctr">
+            <a:spAutoFit/>
+          </a:bodyPr>
+          <a:lstStyle/>
+          <a:p>
+            <a:pPr algn="l">
+              <a:spcAft>
+                <a:spcPts val="0"/>
+              </a:spcAft>
+            </a:pPr>
+            <a:r>
+              <a:rPr sz="1000" b="0" i="0">
+                <a:solidFill>
+                  <a:srgbClr val="1B2740"/>
+                </a:solidFill>
+                <a:latin typeface="맑은 고딕"/>
+                <a:ea typeface="맑은 고딕"/>
+              </a:rPr>
+              <a:t>시선 기준 축 → 북 · 동 · 아래 축 (안테나 방향 + 플랫폼 자세)</a:t>
+            </a:r>
+          </a:p>
+        </p:txBody>
+      </p:sp>
+      <p:sp>
+        <p:nvSpPr>
+          <p:cNvPr id="42" name="TextBox 41"/>
+          <p:cNvSpPr txBox="1"/>
+          <p:nvPr/>
+        </p:nvSpPr>
+        <p:spPr>
+          <a:xfrm>
+            <a:off x="6400800" y="3246120"/>
+            <a:ext cx="5029200" cy="210312"/>
+          </a:xfrm>
+          <a:prstGeom prst="rect">
+            <a:avLst/>
+          </a:prstGeom>
+          <a:noFill/>
+        </p:spPr>
+        <p:txBody>
+          <a:bodyPr wrap="square" lIns="0" rIns="0" tIns="0" bIns="0" anchor="ctr">
+            <a:spAutoFit/>
+          </a:bodyPr>
+          <a:lstStyle/>
+          <a:p>
+            <a:pPr algn="l">
+              <a:spcAft>
+                <a:spcPts val="0"/>
+              </a:spcAft>
+            </a:pPr>
+            <a:r>
+              <a:rPr sz="950" b="0" i="0">
                 <a:solidFill>
                   <a:srgbClr val="4A5A7A"/>
                 </a:solidFill>
                 <a:latin typeface="맑은 고딕"/>
                 <a:ea typeface="맑은 고딕"/>
               </a:rPr>
-              <a:t>M : 안테나 → 동체 → NED 회전 (플랫폼 자세)</a:t>
+              <a:t>앞뒤로 C 를 곱하면 타원 모양은 그대로, 방향만 북 · 동 · 아래로 돌려 놓음</a:t>
             </a:r>
           </a:p>
         </p:txBody>
       </p:sp>
       <p:pic>
         <p:nvPicPr>
-          <p:cNvPr id="38" name="Picture 37" descr="fig_rcov.png"/>
+          <p:cNvPr id="43" name="Picture 42" descr="fig_rcov.png"/>
           <p:cNvPicPr>
             <a:picLocks noChangeAspect="1"/>
           </p:cNvPicPr>
@@ -37777,7 +37967,7 @@
       </p:pic>
       <p:sp>
         <p:nvSpPr>
-          <p:cNvPr id="39" name="TextBox 38"/>
+          <p:cNvPr id="44" name="TextBox 43"/>
           <p:cNvSpPr txBox="1"/>
           <p:nvPr/>
         </p:nvSpPr>
@@ -37817,7 +38007,7 @@
       </p:sp>
       <p:sp>
         <p:nvSpPr>
-          <p:cNvPr id="40" name="Oval 39"/>
+          <p:cNvPr id="45" name="Oval 44"/>
           <p:cNvSpPr/>
           <p:nvPr/>
         </p:nvSpPr>
@@ -37871,7 +38061,7 @@
       </p:sp>
       <p:sp>
         <p:nvSpPr>
-          <p:cNvPr id="41" name="TextBox 40"/>
+          <p:cNvPr id="46" name="TextBox 45"/>
           <p:cNvSpPr txBox="1"/>
           <p:nvPr/>
         </p:nvSpPr>
@@ -37928,7 +38118,7 @@
       </p:sp>
       <p:sp>
         <p:nvSpPr>
-          <p:cNvPr id="42" name="Oval 41"/>
+          <p:cNvPr id="47" name="Oval 46"/>
           <p:cNvSpPr/>
           <p:nvPr/>
         </p:nvSpPr>
@@ -37982,7 +38172,7 @@
       </p:sp>
       <p:sp>
         <p:nvSpPr>
-          <p:cNvPr id="43" name="TextBox 42"/>
+          <p:cNvPr id="48" name="TextBox 47"/>
           <p:cNvSpPr txBox="1"/>
           <p:nvPr/>
         </p:nvSpPr>
@@ -38056,7 +38246,7 @@
       </p:sp>
       <p:sp>
         <p:nvSpPr>
-          <p:cNvPr id="44" name="Oval 43"/>
+          <p:cNvPr id="49" name="Oval 48"/>
           <p:cNvSpPr/>
           <p:nvPr/>
         </p:nvSpPr>
@@ -38110,7 +38300,7 @@
       </p:sp>
       <p:sp>
         <p:nvSpPr>
-          <p:cNvPr id="45" name="TextBox 44"/>
+          <p:cNvPr id="50" name="TextBox 49"/>
           <p:cNvSpPr txBox="1"/>
           <p:nvPr/>
         </p:nvSpPr>

--- a/Part5_Track_Init_Mgmt/ref/산출물/Chapter5_TrackInitMgmt.pptx
+++ b/Part5_Track_Init_Mgmt/ref/산출물/Chapter5_TrackInitMgmt.pptx
@@ -2482,7 +2482,7 @@
           </a:p>
           <a:p>
             <a:r>
-              <a:t>과제에서는 R을 구성하는 표준편차로 거리 10미터, 방위각과 고각 0.2도를 주었습니다.</a:t>
+              <a:t>과제 4에서는 SNR로 거리와 각도의 표준편차를 계산해 플롯을 만들었습니다. SNR 20에서 거리 4.74미터, 방위각 0.48도, 고각 0.49도였습니다. 하지만 트랙 초기화에 쓰는 R의 표준편차는 이번 과제에서 거리 10미터, 방위각과 고각 0.2도로 값을 정해 주었기 때문에, SNR로 계산한 값이 아니라 과제에서 준 이 값을 그대로 사용했습니다.</a:t>
             </a:r>
           </a:p>
           <a:p>
@@ -36984,7 +36984,7 @@
                 <a:latin typeface="맑은 고딕"/>
                 <a:ea typeface="맑은 고딕"/>
               </a:rPr>
-              <a:t>P 를 만들려면 플롯 하나의 위치 오차 R 이 필요합니다. 과제가 준 구좌표 표준편차를 VC-NED 직교 좌표 공분산으로 바꿔 씁니다.</a:t>
+              <a:t>P 를 만들려면 플롯 하나의 위치 오차 R 이 필요합니다. 과제가 정해 준 표준편차로 R 을 만들어 VC-NED 좌표로 바꿉니다.</a:t>
             </a:r>
           </a:p>
         </p:txBody>
@@ -37046,7 +37046,7 @@
         <p:spPr>
           <a:xfrm>
             <a:off x="640080" y="2286000"/>
-            <a:ext cx="1691640" cy="914400"/>
+            <a:ext cx="1691640" cy="768096"/>
           </a:xfrm>
           <a:prstGeom prst="roundRect">
             <a:avLst>
@@ -37089,8 +37089,8 @@
         </p:nvSpPr>
         <p:spPr>
           <a:xfrm>
-            <a:off x="640080" y="2340864"/>
-            <a:ext cx="1691640" cy="256032"/>
+            <a:off x="640080" y="2322576"/>
+            <a:ext cx="1691640" cy="237744"/>
           </a:xfrm>
           <a:prstGeom prst="rect">
             <a:avLst/>
@@ -37129,8 +37129,8 @@
         </p:nvSpPr>
         <p:spPr>
           <a:xfrm>
-            <a:off x="640080" y="2578608"/>
-            <a:ext cx="1691640" cy="548640"/>
+            <a:off x="640080" y="2523744"/>
+            <a:ext cx="1691640" cy="475488"/>
           </a:xfrm>
           <a:prstGeom prst="rect">
             <a:avLst/>
@@ -37149,7 +37149,7 @@
               </a:spcAft>
             </a:pPr>
             <a:r>
-              <a:rPr sz="2600" b="1" i="0">
+              <a:rPr sz="2400" b="1" i="0">
                 <a:solidFill>
                   <a:srgbClr val="2563EB"/>
                 </a:solidFill>
@@ -37170,7 +37170,7 @@
         <p:spPr>
           <a:xfrm>
             <a:off x="2468880" y="2286000"/>
-            <a:ext cx="1691640" cy="914400"/>
+            <a:ext cx="1691640" cy="768096"/>
           </a:xfrm>
           <a:prstGeom prst="roundRect">
             <a:avLst>
@@ -37213,8 +37213,8 @@
         </p:nvSpPr>
         <p:spPr>
           <a:xfrm>
-            <a:off x="2468880" y="2340864"/>
-            <a:ext cx="1691640" cy="256032"/>
+            <a:off x="2468880" y="2322576"/>
+            <a:ext cx="1691640" cy="237744"/>
           </a:xfrm>
           <a:prstGeom prst="rect">
             <a:avLst/>
@@ -37253,8 +37253,8 @@
         </p:nvSpPr>
         <p:spPr>
           <a:xfrm>
-            <a:off x="2468880" y="2578608"/>
-            <a:ext cx="1691640" cy="548640"/>
+            <a:off x="2468880" y="2523744"/>
+            <a:ext cx="1691640" cy="475488"/>
           </a:xfrm>
           <a:prstGeom prst="rect">
             <a:avLst/>
@@ -37273,7 +37273,7 @@
               </a:spcAft>
             </a:pPr>
             <a:r>
-              <a:rPr sz="2600" b="1" i="0">
+              <a:rPr sz="2400" b="1" i="0">
                 <a:solidFill>
                   <a:srgbClr val="2563EB"/>
                 </a:solidFill>
@@ -37294,7 +37294,7 @@
         <p:spPr>
           <a:xfrm>
             <a:off x="4297680" y="2286000"/>
-            <a:ext cx="1691640" cy="914400"/>
+            <a:ext cx="1691640" cy="768096"/>
           </a:xfrm>
           <a:prstGeom prst="roundRect">
             <a:avLst>
@@ -37337,8 +37337,8 @@
         </p:nvSpPr>
         <p:spPr>
           <a:xfrm>
-            <a:off x="4297680" y="2340864"/>
-            <a:ext cx="1691640" cy="256032"/>
+            <a:off x="4297680" y="2322576"/>
+            <a:ext cx="1691640" cy="237744"/>
           </a:xfrm>
           <a:prstGeom prst="rect">
             <a:avLst/>
@@ -37377,8 +37377,8 @@
         </p:nvSpPr>
         <p:spPr>
           <a:xfrm>
-            <a:off x="4297680" y="2578608"/>
-            <a:ext cx="1691640" cy="548640"/>
+            <a:off x="4297680" y="2523744"/>
+            <a:ext cx="1691640" cy="475488"/>
           </a:xfrm>
           <a:prstGeom prst="rect">
             <a:avLst/>
@@ -37397,7 +37397,7 @@
               </a:spcAft>
             </a:pPr>
             <a:r>
-              <a:rPr sz="2600" b="1" i="0">
+              <a:rPr sz="2400" b="1" i="0">
                 <a:solidFill>
                   <a:srgbClr val="2563EB"/>
                 </a:solidFill>
@@ -37411,14 +37411,72 @@
       </p:sp>
       <p:sp>
         <p:nvSpPr>
-          <p:cNvPr id="35" name="TextBox 34"/>
+          <p:cNvPr id="35" name="Rounded Rectangle 34"/>
+          <p:cNvSpPr/>
+          <p:nvPr/>
+        </p:nvSpPr>
+        <p:spPr>
+          <a:xfrm>
+            <a:off x="640080" y="3118104"/>
+            <a:ext cx="987552" cy="192024"/>
+          </a:xfrm>
+          <a:prstGeom prst="roundRect">
+            <a:avLst>
+              <a:gd name="adj" fmla="val 25000"/>
+            </a:avLst>
+          </a:prstGeom>
+          <a:solidFill>
+            <a:srgbClr val="FFFFFF"/>
+          </a:solidFill>
+          <a:ln w="9525">
+            <a:solidFill>
+              <a:srgbClr val="2563EB"/>
+            </a:solidFill>
+          </a:ln>
+          <a:effectLst/>
+        </p:spPr>
+        <p:style>
+          <a:lnRef idx="1">
+            <a:schemeClr val="accent1"/>
+          </a:lnRef>
+          <a:fillRef idx="3">
+            <a:schemeClr val="accent1"/>
+          </a:fillRef>
+          <a:effectRef idx="2">
+            <a:schemeClr val="accent1"/>
+          </a:effectRef>
+          <a:fontRef idx="minor">
+            <a:schemeClr val="lt1"/>
+          </a:fontRef>
+        </p:style>
+        <p:txBody>
+          <a:bodyPr rtlCol="0" anchor="ctr" lIns="36576" rIns="36576" tIns="0" bIns="0" wrap="square"/>
+          <a:lstStyle/>
+          <a:p>
+            <a:pPr algn="ctr"/>
+            <a:r>
+              <a:rPr sz="900" b="1" i="0">
+                <a:solidFill>
+                  <a:srgbClr val="2563EB"/>
+                </a:solidFill>
+                <a:latin typeface="맑은 고딕"/>
+                <a:ea typeface="맑은 고딕"/>
+              </a:rPr>
+              <a:t>과제 5 지정값</a:t>
+            </a:r>
+          </a:p>
+        </p:txBody>
+      </p:sp>
+      <p:sp>
+        <p:nvSpPr>
+          <p:cNvPr id="36" name="TextBox 35"/>
           <p:cNvSpPr txBox="1"/>
           <p:nvPr/>
         </p:nvSpPr>
         <p:spPr>
           <a:xfrm>
-            <a:off x="640080" y="3246120"/>
-            <a:ext cx="5394960" cy="274320"/>
+            <a:off x="1719072" y="3118104"/>
+            <a:ext cx="4297680" cy="192024"/>
           </a:xfrm>
           <a:prstGeom prst="rect">
             <a:avLst/>
@@ -37426,7 +37484,7 @@
           <a:noFill/>
         </p:spPr>
         <p:txBody>
-          <a:bodyPr wrap="square" lIns="0" rIns="0" tIns="0" bIns="0" anchor="t">
+          <a:bodyPr wrap="square" lIns="0" rIns="0" tIns="0" bIns="0" anchor="ctr">
             <a:spAutoFit/>
           </a:bodyPr>
           <a:lstStyle/>
@@ -37437,21 +37495,119 @@
               </a:spcAft>
             </a:pPr>
             <a:r>
-              <a:rPr sz="1050" b="0" i="0">
+              <a:rPr sz="1000" b="0" i="0">
+                <a:solidFill>
+                  <a:srgbClr val="1B2740"/>
+                </a:solidFill>
+                <a:latin typeface="맑은 고딕"/>
+                <a:ea typeface="맑은 고딕"/>
+              </a:rPr>
+              <a:t>트랙 초기화 (초기 오차 공분산) 용 R 의 표준편차</a:t>
+            </a:r>
+          </a:p>
+        </p:txBody>
+      </p:sp>
+      <p:sp>
+        <p:nvSpPr>
+          <p:cNvPr id="37" name="Rounded Rectangle 36"/>
+          <p:cNvSpPr/>
+          <p:nvPr/>
+        </p:nvSpPr>
+        <p:spPr>
+          <a:xfrm>
+            <a:off x="640080" y="3332988"/>
+            <a:ext cx="987552" cy="192024"/>
+          </a:xfrm>
+          <a:prstGeom prst="roundRect">
+            <a:avLst>
+              <a:gd name="adj" fmla="val 25000"/>
+            </a:avLst>
+          </a:prstGeom>
+          <a:solidFill>
+            <a:srgbClr val="FFFFFF"/>
+          </a:solidFill>
+          <a:ln w="9525">
+            <a:solidFill>
+              <a:srgbClr val="6B7280"/>
+            </a:solidFill>
+          </a:ln>
+          <a:effectLst/>
+        </p:spPr>
+        <p:style>
+          <a:lnRef idx="1">
+            <a:schemeClr val="accent1"/>
+          </a:lnRef>
+          <a:fillRef idx="3">
+            <a:schemeClr val="accent1"/>
+          </a:fillRef>
+          <a:effectRef idx="2">
+            <a:schemeClr val="accent1"/>
+          </a:effectRef>
+          <a:fontRef idx="minor">
+            <a:schemeClr val="lt1"/>
+          </a:fontRef>
+        </p:style>
+        <p:txBody>
+          <a:bodyPr rtlCol="0" anchor="ctr" lIns="36576" rIns="36576" tIns="0" bIns="0" wrap="square"/>
+          <a:lstStyle/>
+          <a:p>
+            <a:pPr algn="ctr"/>
+            <a:r>
+              <a:rPr sz="900" b="1" i="0">
+                <a:solidFill>
+                  <a:srgbClr val="6B7280"/>
+                </a:solidFill>
+                <a:latin typeface="맑은 고딕"/>
+                <a:ea typeface="맑은 고딕"/>
+              </a:rPr>
+              <a:t>과제 4 SNR</a:t>
+            </a:r>
+          </a:p>
+        </p:txBody>
+      </p:sp>
+      <p:sp>
+        <p:nvSpPr>
+          <p:cNvPr id="38" name="TextBox 37"/>
+          <p:cNvSpPr txBox="1"/>
+          <p:nvPr/>
+        </p:nvSpPr>
+        <p:spPr>
+          <a:xfrm>
+            <a:off x="1719072" y="3332988"/>
+            <a:ext cx="4297680" cy="192024"/>
+          </a:xfrm>
+          <a:prstGeom prst="rect">
+            <a:avLst/>
+          </a:prstGeom>
+          <a:noFill/>
+        </p:spPr>
+        <p:txBody>
+          <a:bodyPr wrap="square" lIns="0" rIns="0" tIns="0" bIns="0" anchor="ctr">
+            <a:spAutoFit/>
+          </a:bodyPr>
+          <a:lstStyle/>
+          <a:p>
+            <a:pPr algn="l">
+              <a:spcAft>
+                <a:spcPts val="0"/>
+              </a:spcAft>
+            </a:pPr>
+            <a:r>
+              <a:rPr sz="1000" b="0" i="0">
                 <a:solidFill>
                   <a:srgbClr val="4A5A7A"/>
                 </a:solidFill>
                 <a:latin typeface="맑은 고딕"/>
                 <a:ea typeface="맑은 고딕"/>
               </a:rPr>
-              <a:t>과제 조건: 트랙 초기화 (초기 오차 공분산) 에 쓰는 R 의 표준편차</a:t>
-            </a:r>
-          </a:p>
-        </p:txBody>
-      </p:sp>
-      <p:sp>
-        <p:nvSpPr>
-          <p:cNvPr id="36" name="Rounded Rectangle 35"/>
+              <a:t>플롯 모의 잡음은 SNR 20 으로 계산: 4.74 m · 0.48° · 0.49° (R 과 별개)</a:t>
+            </a:r>
+          </a:p>
+        </p:txBody>
+      </p:sp>
+      <p:sp>
+        <p:nvSpPr>
+          <p:cNvPr id="39" name="Rounded Rectangle 38"/>
           <p:cNvSpPr/>
           <p:nvPr/>
         </p:nvSpPr>
@@ -37497,7 +37653,7 @@
       </p:sp>
       <p:sp>
         <p:nvSpPr>
-          <p:cNvPr id="37" name="TextBox 36"/>
+          <p:cNvPr id="40" name="TextBox 39"/>
           <p:cNvSpPr txBox="1"/>
           <p:nvPr/>
         </p:nvSpPr>
@@ -37707,7 +37863,7 @@
       </p:sp>
       <p:sp>
         <p:nvSpPr>
-          <p:cNvPr id="38" name="Rounded Rectangle 37"/>
+          <p:cNvPr id="41" name="Rounded Rectangle 40"/>
           <p:cNvSpPr/>
           <p:nvPr/>
         </p:nvSpPr>
@@ -37765,7 +37921,7 @@
       </p:sp>
       <p:sp>
         <p:nvSpPr>
-          <p:cNvPr id="39" name="TextBox 38"/>
+          <p:cNvPr id="42" name="TextBox 41"/>
           <p:cNvSpPr txBox="1"/>
           <p:nvPr/>
         </p:nvSpPr>
@@ -37805,7 +37961,7 @@
       </p:sp>
       <p:sp>
         <p:nvSpPr>
-          <p:cNvPr id="40" name="Rounded Rectangle 39"/>
+          <p:cNvPr id="43" name="Rounded Rectangle 42"/>
           <p:cNvSpPr/>
           <p:nvPr/>
         </p:nvSpPr>
@@ -37863,7 +38019,7 @@
       </p:sp>
       <p:sp>
         <p:nvSpPr>
-          <p:cNvPr id="41" name="TextBox 40"/>
+          <p:cNvPr id="44" name="TextBox 43"/>
           <p:cNvSpPr txBox="1"/>
           <p:nvPr/>
         </p:nvSpPr>
@@ -37903,7 +38059,7 @@
       </p:sp>
       <p:sp>
         <p:nvSpPr>
-          <p:cNvPr id="42" name="TextBox 41"/>
+          <p:cNvPr id="45" name="TextBox 44"/>
           <p:cNvSpPr txBox="1"/>
           <p:nvPr/>
         </p:nvSpPr>
@@ -37943,7 +38099,7 @@
       </p:sp>
       <p:pic>
         <p:nvPicPr>
-          <p:cNvPr id="43" name="Picture 42" descr="fig_rcov.png"/>
+          <p:cNvPr id="46" name="Picture 45" descr="fig_rcov.png"/>
           <p:cNvPicPr>
             <a:picLocks noChangeAspect="1"/>
           </p:cNvPicPr>
@@ -37967,7 +38123,7 @@
       </p:pic>
       <p:sp>
         <p:nvSpPr>
-          <p:cNvPr id="44" name="TextBox 43"/>
+          <p:cNvPr id="47" name="TextBox 46"/>
           <p:cNvSpPr txBox="1"/>
           <p:nvPr/>
         </p:nvSpPr>
@@ -38007,7 +38163,7 @@
       </p:sp>
       <p:sp>
         <p:nvSpPr>
-          <p:cNvPr id="45" name="Oval 44"/>
+          <p:cNvPr id="48" name="Oval 47"/>
           <p:cNvSpPr/>
           <p:nvPr/>
         </p:nvSpPr>
@@ -38061,7 +38217,7 @@
       </p:sp>
       <p:sp>
         <p:nvSpPr>
-          <p:cNvPr id="46" name="TextBox 45"/>
+          <p:cNvPr id="49" name="TextBox 48"/>
           <p:cNvSpPr txBox="1"/>
           <p:nvPr/>
         </p:nvSpPr>
@@ -38118,7 +38274,7 @@
       </p:sp>
       <p:sp>
         <p:nvSpPr>
-          <p:cNvPr id="47" name="Oval 46"/>
+          <p:cNvPr id="50" name="Oval 49"/>
           <p:cNvSpPr/>
           <p:nvPr/>
         </p:nvSpPr>
@@ -38172,7 +38328,7 @@
       </p:sp>
       <p:sp>
         <p:nvSpPr>
-          <p:cNvPr id="48" name="TextBox 47"/>
+          <p:cNvPr id="51" name="TextBox 50"/>
           <p:cNvSpPr txBox="1"/>
           <p:nvPr/>
         </p:nvSpPr>
@@ -38246,7 +38402,7 @@
       </p:sp>
       <p:sp>
         <p:nvSpPr>
-          <p:cNvPr id="49" name="Oval 48"/>
+          <p:cNvPr id="52" name="Oval 51"/>
           <p:cNvSpPr/>
           <p:nvPr/>
         </p:nvSpPr>
@@ -38300,7 +38456,7 @@
       </p:sp>
       <p:sp>
         <p:nvSpPr>
-          <p:cNvPr id="50" name="TextBox 49"/>
+          <p:cNvPr id="53" name="TextBox 52"/>
           <p:cNvSpPr txBox="1"/>
           <p:nvPr/>
         </p:nvSpPr>

--- a/Part5_Track_Init_Mgmt/ref/산출물/Chapter5_TrackInitMgmt.pptx
+++ b/Part5_Track_Init_Mgmt/ref/산출물/Chapter5_TrackInitMgmt.pptx
@@ -2487,22 +2487,27 @@
           </a:p>
           <a:p>
             <a:r>
-              <a:t>레이다는 거리와 각도로 재고 트랙은 북, 동, 아래의 미터 좌표로 관리하기 때문에, 오른쪽 위 식처럼 바꿔 씁니다. 가운데 파란 괄호는 레이다 시선을 기준으로 본 오차 크기입니다. 거리 방향은 10미터 그대로이고, 각도 오차는 거리를 곱해 미터로 바꿉니다. 방위각 쪽의 cos el은 고각이 높을수록 같은 방위각 차이가 옆으로 덜 벌어지는 것을 반영한 값으로, 고각이 작으면 거의 1입니다.</a:t>
-            </a:r>
-          </a:p>
-          <a:p>
-            <a:r>
-              <a:t>앞뒤의 초록색 C는 시선 기준 축을 북, 동, 아래 축으로 돌리는 회전 행렬이고, 안테나가 향한 방향과 플랫폼 자세로 정해집니다. 앞뒤로 C를 곱하는 것은 타원의 모양은 그대로 두고 방향만 돌려 놓는다는 뜻입니다.</a:t>
-            </a:r>
-          </a:p>
-          <a:p>
-            <a:r>
-              <a:t>R이 무엇을 뜻하는지는 아래 그림으로 보겠습니다. 레이다는 거리는 정확하게 재지만 방향은 조금씩 틀리고, 이 각도 오차는 왼쪽 그림처럼 손전등 빛과 같이 멀리 갈수록 옆으로 퍼집니다. 0.2도는 5킬로미터에서 약 17미터, 14킬로미터에서는 약 49미터가 됩니다. 반면 거리 오차는 어디서나 10미터입니다.</a:t>
-            </a:r>
-          </a:p>
-          <a:p>
-            <a:r>
-              <a:t>오른쪽은 14킬로미터 표적 주변을 실제 비율로 확대한 그림입니다. 같은 표적을 여러 번 재면 플롯이 점들처럼 흩어지는데, 이 흩어지는 크기와 모양이 R입니다. 거리 방향으로는 10미터로 좁고 옆 방향으로는 49미터로 넓은, 옆으로 긴 타원이 됩니다. 위아래인 고각 방향도 같은 원리입니다.</a:t>
+              <a:t>R이 무엇을 뜻하는지는 아래 그림으로 보겠습니다. 레이다는 거리는 정확하게 재지만 방향은 조금씩 틀리고, 이 각도 오차는 1번 그림처럼 손전등 빛과 같이 멀리 갈수록 옆으로 퍼집니다. 0.2도는 5킬로미터에서 약 17미터, 14킬로미터에서는 약 49미터가 됩니다. 반면 거리 오차는 어디서나 10미터입니다.</a:t>
+            </a:r>
+          </a:p>
+          <a:p>
+            <a:r>
+              <a:t>2번 그림은 14킬로미터 표적 주변을 실제 비율로 확대한 것입니다. 같은 표적을 여러 번 재면 플롯이 점들처럼 흩어지는데, 이 흩어지는 크기와 모양이 R입니다. 거리 방향으로는 10미터로 좁고 옆 방향으로는 49미터로 넓은, 옆으로 긴 타원이 됩니다. 위아래인 고각 방향도 같은 원리입니다.</a:t>
+            </a:r>
+          </a:p>
+          <a:p>
+            <a:r>
+              <a:t>오른쪽 아래는 R을 실제로 계산하는 행렬식입니다. 위 줄은 플롯 위치를 바꾸는 식으로, 이전 과제의 좌표 변환 함수 세 개를 그대로 이은 것입니다. 구좌표를 안테나 직교 좌표로 바꾸는 s, 그리고 안테나에서 동체로, 동체에서 북, 동, 아래로 돌리는 회전 두 개입니다.</a:t>
+            </a:r>
+          </a:p>
+          <a:p>
+            <a:r>
+              <a:t>아래 줄이 공분산을 바꾸는 식입니다. 행렬을 곱하는 변환은 공분산의 앞뒤로 같은 행렬을 곱하면 되므로, 회전 두 개는 위 줄과 같은 행렬을 그대로 씁니다. 다만 구좌표 변환 s는 곡선이라서, 측정 지점에서의 기울기인 G로 바꿔 씁니다.</a:t>
+            </a:r>
+          </a:p>
+          <a:p>
+            <a:r>
+              <a:t>G의 세 열은 거리, 방위각, 고각이 조금 변할 때 위치가 움직이는 방향과 크기이고, 크기가 각각 1, r cos el, r입니다. 그래서 각도 오차에 거리를 곱한 값이 미터 오차가 되고, 14킬로미터 표적이면 10미터, 49미터, 49미터로 2번 그림의 타원과 같습니다. 방위각 쪽의 cos el은 고각이 높을수록 같은 방위각 차이가 옆으로 덜 벌어지는 것을 반영한 값으로, 고각이 작으면 거의 1입니다.</a:t>
             </a:r>
           </a:p>
           <a:p>
@@ -37659,8 +37664,8 @@
         </p:nvSpPr>
         <p:spPr>
           <a:xfrm>
-            <a:off x="6400800" y="2340864"/>
-            <a:ext cx="5029200" cy="347472"/>
+            <a:off x="6400800" y="2331720"/>
+            <a:ext cx="5029200" cy="256032"/>
           </a:xfrm>
           <a:prstGeom prst="rect">
             <a:avLst/>
@@ -37668,7 +37673,7 @@
           <a:noFill/>
         </p:spPr>
         <p:txBody>
-          <a:bodyPr wrap="square" lIns="0" rIns="0" tIns="0" bIns="0" anchor="ctr">
+          <a:bodyPr wrap="square" lIns="0" rIns="0" tIns="0" bIns="0" anchor="t">
             <a:spAutoFit/>
           </a:bodyPr>
           <a:lstStyle/>
@@ -37679,211 +37684,37 @@
               </a:spcAft>
             </a:pPr>
             <a:r>
-              <a:rPr sz="1400" b="1" i="0">
-                <a:solidFill>
-                  <a:srgbClr val="1B2740"/>
-                </a:solidFill>
-                <a:latin typeface="Cambria Math"/>
-                <a:ea typeface="Cambria Math"/>
-              </a:rPr>
-              <a:t>R</a:t>
-            </a:r>
-            <a:r>
-              <a:rPr sz="1400" b="1" i="0" baseline="-25000">
-                <a:solidFill>
-                  <a:srgbClr val="1B2740"/>
-                </a:solidFill>
-                <a:latin typeface="Cambria Math"/>
-                <a:ea typeface="Cambria Math"/>
-              </a:rPr>
-              <a:t>NED</a:t>
-            </a:r>
-            <a:r>
-              <a:rPr sz="1400" b="1" i="0">
-                <a:solidFill>
-                  <a:srgbClr val="1B2740"/>
-                </a:solidFill>
-                <a:latin typeface="Cambria Math"/>
-                <a:ea typeface="Cambria Math"/>
-              </a:rPr>
-              <a:t> = </a:t>
-            </a:r>
-            <a:r>
-              <a:rPr sz="1400" b="1" i="0">
-                <a:solidFill>
-                  <a:srgbClr val="059669"/>
-                </a:solidFill>
-                <a:latin typeface="Cambria Math"/>
-                <a:ea typeface="Cambria Math"/>
-              </a:rPr>
-              <a:t>C</a:t>
-            </a:r>
-            <a:r>
-              <a:rPr sz="1400" b="1" i="0">
-                <a:solidFill>
-                  <a:srgbClr val="2563EB"/>
-                </a:solidFill>
-                <a:latin typeface="Cambria Math"/>
-                <a:ea typeface="Cambria Math"/>
-              </a:rPr>
-              <a:t> · diag( σ</a:t>
-            </a:r>
-            <a:r>
-              <a:rPr sz="1400" b="1" i="0" baseline="-25000">
-                <a:solidFill>
-                  <a:srgbClr val="2563EB"/>
-                </a:solidFill>
-                <a:latin typeface="Cambria Math"/>
-                <a:ea typeface="Cambria Math"/>
-              </a:rPr>
-              <a:t>r</a:t>
-            </a:r>
-            <a:r>
-              <a:rPr sz="1400" b="1" i="0" baseline="30000">
-                <a:solidFill>
-                  <a:srgbClr val="2563EB"/>
-                </a:solidFill>
-                <a:latin typeface="Cambria Math"/>
-                <a:ea typeface="Cambria Math"/>
-              </a:rPr>
-              <a:t>2</a:t>
-            </a:r>
-            <a:r>
-              <a:rPr sz="1400" b="1" i="0">
-                <a:solidFill>
-                  <a:srgbClr val="2563EB"/>
-                </a:solidFill>
-                <a:latin typeface="Cambria Math"/>
-                <a:ea typeface="Cambria Math"/>
-              </a:rPr>
-              <a:t>,  (r cos el · σ</a:t>
-            </a:r>
-            <a:r>
-              <a:rPr sz="1400" b="1" i="0" baseline="-25000">
-                <a:solidFill>
-                  <a:srgbClr val="2563EB"/>
-                </a:solidFill>
-                <a:latin typeface="Cambria Math"/>
-                <a:ea typeface="Cambria Math"/>
-              </a:rPr>
-              <a:t>az</a:t>
-            </a:r>
-            <a:r>
-              <a:rPr sz="1400" b="1" i="0">
-                <a:solidFill>
-                  <a:srgbClr val="2563EB"/>
-                </a:solidFill>
-                <a:latin typeface="Cambria Math"/>
-                <a:ea typeface="Cambria Math"/>
-              </a:rPr>
-              <a:t>)</a:t>
-            </a:r>
-            <a:r>
-              <a:rPr sz="1400" b="1" i="0" baseline="30000">
-                <a:solidFill>
-                  <a:srgbClr val="2563EB"/>
-                </a:solidFill>
-                <a:latin typeface="Cambria Math"/>
-                <a:ea typeface="Cambria Math"/>
-              </a:rPr>
-              <a:t>2</a:t>
-            </a:r>
-            <a:r>
-              <a:rPr sz="1400" b="1" i="0">
-                <a:solidFill>
-                  <a:srgbClr val="2563EB"/>
-                </a:solidFill>
-                <a:latin typeface="Cambria Math"/>
-                <a:ea typeface="Cambria Math"/>
-              </a:rPr>
-              <a:t>,  (r · σ</a:t>
-            </a:r>
-            <a:r>
-              <a:rPr sz="1400" b="1" i="0" baseline="-25000">
-                <a:solidFill>
-                  <a:srgbClr val="2563EB"/>
-                </a:solidFill>
-                <a:latin typeface="Cambria Math"/>
-                <a:ea typeface="Cambria Math"/>
-              </a:rPr>
-              <a:t>el</a:t>
-            </a:r>
-            <a:r>
-              <a:rPr sz="1400" b="1" i="0">
-                <a:solidFill>
-                  <a:srgbClr val="2563EB"/>
-                </a:solidFill>
-                <a:latin typeface="Cambria Math"/>
-                <a:ea typeface="Cambria Math"/>
-              </a:rPr>
-              <a:t>)</a:t>
-            </a:r>
-            <a:r>
-              <a:rPr sz="1400" b="1" i="0" baseline="30000">
-                <a:solidFill>
-                  <a:srgbClr val="2563EB"/>
-                </a:solidFill>
-                <a:latin typeface="Cambria Math"/>
-                <a:ea typeface="Cambria Math"/>
-              </a:rPr>
-              <a:t>2</a:t>
-            </a:r>
-            <a:r>
-              <a:rPr sz="1400" b="1" i="0">
-                <a:solidFill>
-                  <a:srgbClr val="2563EB"/>
-                </a:solidFill>
-                <a:latin typeface="Cambria Math"/>
-                <a:ea typeface="Cambria Math"/>
-              </a:rPr>
-              <a:t> ) · </a:t>
-            </a:r>
-            <a:r>
-              <a:rPr sz="1400" b="1" i="0">
-                <a:solidFill>
-                  <a:srgbClr val="059669"/>
-                </a:solidFill>
-                <a:latin typeface="Cambria Math"/>
-                <a:ea typeface="Cambria Math"/>
-              </a:rPr>
-              <a:t>C</a:t>
-            </a:r>
-            <a:r>
-              <a:rPr sz="1400" b="1" i="0" baseline="30000">
-                <a:solidFill>
-                  <a:srgbClr val="059669"/>
-                </a:solidFill>
-                <a:latin typeface="Cambria Math"/>
-                <a:ea typeface="Cambria Math"/>
-              </a:rPr>
-              <a:t>T</a:t>
-            </a:r>
-          </a:p>
-        </p:txBody>
-      </p:sp>
-      <p:sp>
-        <p:nvSpPr>
-          <p:cNvPr id="41" name="Rounded Rectangle 40"/>
+              <a:rPr sz="1150" b="1" i="0">
+                <a:solidFill>
+                  <a:srgbClr val="1B2740"/>
+                </a:solidFill>
+                <a:latin typeface="맑은 고딕"/>
+                <a:ea typeface="맑은 고딕"/>
+              </a:rPr>
+              <a:t>R 이 뜻하는 것</a:t>
+            </a:r>
+          </a:p>
+        </p:txBody>
+      </p:sp>
+      <p:sp>
+        <p:nvSpPr>
+          <p:cNvPr id="41" name="Oval 40"/>
           <p:cNvSpPr/>
           <p:nvPr/>
         </p:nvSpPr>
         <p:spPr>
           <a:xfrm>
-            <a:off x="6400800" y="2734056"/>
-            <a:ext cx="841248" cy="210312"/>
-          </a:xfrm>
-          <a:prstGeom prst="roundRect">
-            <a:avLst>
-              <a:gd name="adj" fmla="val 25000"/>
-            </a:avLst>
+            <a:off x="6400800" y="2660903"/>
+            <a:ext cx="201168" cy="201168"/>
+          </a:xfrm>
+          <a:prstGeom prst="ellipse">
+            <a:avLst/>
           </a:prstGeom>
           <a:solidFill>
-            <a:srgbClr val="FFFFFF"/>
+            <a:srgbClr val="DC2626"/>
           </a:solidFill>
-          <a:ln w="9525">
-            <a:solidFill>
-              <a:srgbClr val="2563EB"/>
-            </a:solidFill>
+          <a:ln>
+            <a:noFill/>
           </a:ln>
           <a:effectLst/>
         </p:spPr>
@@ -37902,19 +37733,19 @@
           </a:fontRef>
         </p:style>
         <p:txBody>
-          <a:bodyPr rtlCol="0" anchor="ctr" lIns="36576" rIns="36576" tIns="0" bIns="0" wrap="square"/>
+          <a:bodyPr rtlCol="0" anchor="ctr" lIns="0" rIns="0" tIns="0" bIns="0"/>
           <a:lstStyle/>
           <a:p>
             <a:pPr algn="ctr"/>
             <a:r>
-              <a:rPr sz="950" b="1" i="0">
-                <a:solidFill>
-                  <a:srgbClr val="2563EB"/>
-                </a:solidFill>
-                <a:latin typeface="맑은 고딕"/>
-                <a:ea typeface="맑은 고딕"/>
-              </a:rPr>
-              <a:t>오차 크기</a:t>
+              <a:rPr sz="850" b="1" i="0">
+                <a:solidFill>
+                  <a:srgbClr val="FFFFFF"/>
+                </a:solidFill>
+                <a:latin typeface="맑은 고딕"/>
+                <a:ea typeface="맑은 고딕"/>
+              </a:rPr>
+              <a:t>1</a:t>
             </a:r>
           </a:p>
         </p:txBody>
@@ -37927,8 +37758,8 @@
         </p:nvSpPr>
         <p:spPr>
           <a:xfrm>
-            <a:off x="7333488" y="2734056"/>
-            <a:ext cx="4160520" cy="210312"/>
+            <a:off x="6693408" y="2633472"/>
+            <a:ext cx="4800600" cy="256032"/>
           </a:xfrm>
           <a:prstGeom prst="rect">
             <a:avLst/>
@@ -37947,41 +37778,47 @@
               </a:spcAft>
             </a:pPr>
             <a:r>
-              <a:rPr sz="1000" b="0" i="0">
-                <a:solidFill>
-                  <a:srgbClr val="1B2740"/>
-                </a:solidFill>
-                <a:latin typeface="맑은 고딕"/>
-                <a:ea typeface="맑은 고딕"/>
-              </a:rPr>
-              <a:t>레이다 시선 기준 거리 · 옆 · 위아래 오차. 각도 × 거리 = 미터</a:t>
-            </a:r>
-          </a:p>
-        </p:txBody>
-      </p:sp>
-      <p:sp>
-        <p:nvSpPr>
-          <p:cNvPr id="43" name="Rounded Rectangle 42"/>
+              <a:rPr sz="1050" b="1" i="0">
+                <a:solidFill>
+                  <a:srgbClr val="1B2740"/>
+                </a:solidFill>
+                <a:latin typeface="맑은 고딕"/>
+                <a:ea typeface="맑은 고딕"/>
+              </a:rPr>
+              <a:t>R = 플롯이 흩어지는 정도   </a:t>
+            </a:r>
+            <a:r>
+              <a:rPr sz="950" b="0" i="0">
+                <a:solidFill>
+                  <a:srgbClr val="4A5A7A"/>
+                </a:solidFill>
+                <a:latin typeface="맑은 고딕"/>
+                <a:ea typeface="맑은 고딕"/>
+              </a:rPr>
+              <a:t>같은 표적을 여러 번 잴 때 흩어지는 크기 · 모양</a:t>
+            </a:r>
+          </a:p>
+        </p:txBody>
+      </p:sp>
+      <p:sp>
+        <p:nvSpPr>
+          <p:cNvPr id="43" name="Oval 42"/>
           <p:cNvSpPr/>
           <p:nvPr/>
         </p:nvSpPr>
         <p:spPr>
           <a:xfrm>
-            <a:off x="6400800" y="2980944"/>
-            <a:ext cx="841248" cy="210312"/>
-          </a:xfrm>
-          <a:prstGeom prst="roundRect">
-            <a:avLst>
-              <a:gd name="adj" fmla="val 25000"/>
-            </a:avLst>
+            <a:off x="6400800" y="2935223"/>
+            <a:ext cx="201168" cy="201168"/>
+          </a:xfrm>
+          <a:prstGeom prst="ellipse">
+            <a:avLst/>
           </a:prstGeom>
           <a:solidFill>
-            <a:srgbClr val="FFFFFF"/>
+            <a:srgbClr val="D97706"/>
           </a:solidFill>
-          <a:ln w="9525">
-            <a:solidFill>
-              <a:srgbClr val="059669"/>
-            </a:solidFill>
+          <a:ln>
+            <a:noFill/>
           </a:ln>
           <a:effectLst/>
         </p:spPr>
@@ -38000,19 +37837,19 @@
           </a:fontRef>
         </p:style>
         <p:txBody>
-          <a:bodyPr rtlCol="0" anchor="ctr" lIns="36576" rIns="36576" tIns="0" bIns="0" wrap="square"/>
+          <a:bodyPr rtlCol="0" anchor="ctr" lIns="0" rIns="0" tIns="0" bIns="0"/>
           <a:lstStyle/>
           <a:p>
             <a:pPr algn="ctr"/>
             <a:r>
-              <a:rPr sz="950" b="1" i="0">
-                <a:solidFill>
-                  <a:srgbClr val="059669"/>
-                </a:solidFill>
-                <a:latin typeface="맑은 고딕"/>
-                <a:ea typeface="맑은 고딕"/>
-              </a:rPr>
-              <a:t>회전 C</a:t>
+              <a:rPr sz="850" b="1" i="0">
+                <a:solidFill>
+                  <a:srgbClr val="FFFFFF"/>
+                </a:solidFill>
+                <a:latin typeface="맑은 고딕"/>
+                <a:ea typeface="맑은 고딕"/>
+              </a:rPr>
+              <a:t>2</a:t>
             </a:r>
           </a:p>
         </p:txBody>
@@ -38025,8 +37862,8 @@
         </p:nvSpPr>
         <p:spPr>
           <a:xfrm>
-            <a:off x="7333488" y="2980944"/>
-            <a:ext cx="4160520" cy="210312"/>
+            <a:off x="6693408" y="2907791"/>
+            <a:ext cx="4800600" cy="256032"/>
           </a:xfrm>
           <a:prstGeom prst="rect">
             <a:avLst/>
@@ -38045,28 +37882,92 @@
               </a:spcAft>
             </a:pPr>
             <a:r>
-              <a:rPr sz="1000" b="0" i="0">
-                <a:solidFill>
-                  <a:srgbClr val="1B2740"/>
-                </a:solidFill>
-                <a:latin typeface="맑은 고딕"/>
-                <a:ea typeface="맑은 고딕"/>
-              </a:rPr>
-              <a:t>시선 기준 축 → 북 · 동 · 아래 축 (안테나 방향 + 플랫폼 자세)</a:t>
-            </a:r>
-          </a:p>
-        </p:txBody>
-      </p:sp>
-      <p:sp>
-        <p:nvSpPr>
-          <p:cNvPr id="45" name="TextBox 44"/>
+              <a:rPr sz="1050" b="1" i="0">
+                <a:solidFill>
+                  <a:srgbClr val="1B2740"/>
+                </a:solidFill>
+                <a:latin typeface="맑은 고딕"/>
+                <a:ea typeface="맑은 고딕"/>
+              </a:rPr>
+              <a:t>거리는 정확, 방향은 멀수록 퍼짐   </a:t>
+            </a:r>
+            <a:r>
+              <a:rPr sz="950" b="0" i="0">
+                <a:solidFill>
+                  <a:srgbClr val="4A5A7A"/>
+                </a:solidFill>
+                <a:latin typeface="맑은 고딕"/>
+                <a:ea typeface="맑은 고딕"/>
+              </a:rPr>
+              <a:t>거리 10 m 그대로, 옆 · 위아래 = 거리 × 0.2°</a:t>
+            </a:r>
+          </a:p>
+        </p:txBody>
+      </p:sp>
+      <p:sp>
+        <p:nvSpPr>
+          <p:cNvPr id="45" name="Oval 44"/>
+          <p:cNvSpPr/>
+          <p:nvPr/>
+        </p:nvSpPr>
+        <p:spPr>
+          <a:xfrm>
+            <a:off x="6400800" y="3209544"/>
+            <a:ext cx="201168" cy="201168"/>
+          </a:xfrm>
+          <a:prstGeom prst="ellipse">
+            <a:avLst/>
+          </a:prstGeom>
+          <a:solidFill>
+            <a:srgbClr val="059669"/>
+          </a:solidFill>
+          <a:ln>
+            <a:noFill/>
+          </a:ln>
+          <a:effectLst/>
+        </p:spPr>
+        <p:style>
+          <a:lnRef idx="1">
+            <a:schemeClr val="accent1"/>
+          </a:lnRef>
+          <a:fillRef idx="3">
+            <a:schemeClr val="accent1"/>
+          </a:fillRef>
+          <a:effectRef idx="2">
+            <a:schemeClr val="accent1"/>
+          </a:effectRef>
+          <a:fontRef idx="minor">
+            <a:schemeClr val="lt1"/>
+          </a:fontRef>
+        </p:style>
+        <p:txBody>
+          <a:bodyPr rtlCol="0" anchor="ctr" lIns="0" rIns="0" tIns="0" bIns="0"/>
+          <a:lstStyle/>
+          <a:p>
+            <a:pPr algn="ctr"/>
+            <a:r>
+              <a:rPr sz="850" b="1" i="0">
+                <a:solidFill>
+                  <a:srgbClr val="FFFFFF"/>
+                </a:solidFill>
+                <a:latin typeface="맑은 고딕"/>
+                <a:ea typeface="맑은 고딕"/>
+              </a:rPr>
+              <a:t>3</a:t>
+            </a:r>
+          </a:p>
+        </p:txBody>
+      </p:sp>
+      <p:sp>
+        <p:nvSpPr>
+          <p:cNvPr id="46" name="TextBox 45"/>
           <p:cNvSpPr txBox="1"/>
           <p:nvPr/>
         </p:nvSpPr>
         <p:spPr>
           <a:xfrm>
-            <a:off x="6400800" y="3246120"/>
-            <a:ext cx="5029200" cy="210312"/>
+            <a:off x="6693408" y="3182112"/>
+            <a:ext cx="4800600" cy="256032"/>
           </a:xfrm>
           <a:prstGeom prst="rect">
             <a:avLst/>
@@ -38085,6 +37986,16 @@
               </a:spcAft>
             </a:pPr>
             <a:r>
+              <a:rPr sz="1050" b="1" i="0">
+                <a:solidFill>
+                  <a:srgbClr val="1B2740"/>
+                </a:solidFill>
+                <a:latin typeface="맑은 고딕"/>
+                <a:ea typeface="맑은 고딕"/>
+              </a:rPr>
+              <a:t>그래서 옆으로 긴 타원   </a:t>
+            </a:r>
+            <a:r>
               <a:rPr sz="950" b="0" i="0">
                 <a:solidFill>
                   <a:srgbClr val="4A5A7A"/>
@@ -38092,14 +38003,14 @@
                 <a:latin typeface="맑은 고딕"/>
                 <a:ea typeface="맑은 고딕"/>
               </a:rPr>
-              <a:t>앞뒤로 C 를 곱하면 타원 모양은 그대로, 방향만 북 · 동 · 아래로 돌려 놓음</a:t>
+              <a:t>거리 · 방향이 플롯마다 달라 R 도 플롯마다 계산</a:t>
             </a:r>
           </a:p>
         </p:txBody>
       </p:sp>
       <p:pic>
         <p:nvPicPr>
-          <p:cNvPr id="46" name="Picture 45" descr="fig_rcov.png"/>
+          <p:cNvPr id="47" name="Picture 46" descr="fig_rcov.png"/>
           <p:cNvPicPr>
             <a:picLocks noChangeAspect="1"/>
           </p:cNvPicPr>
@@ -38123,14 +38034,14 @@
       </p:pic>
       <p:sp>
         <p:nvSpPr>
-          <p:cNvPr id="47" name="TextBox 46"/>
+          <p:cNvPr id="48" name="TextBox 47"/>
           <p:cNvSpPr txBox="1"/>
           <p:nvPr/>
         </p:nvSpPr>
         <p:spPr>
           <a:xfrm>
-            <a:off x="7818120" y="3703320"/>
-            <a:ext cx="3749039" cy="274320"/>
+            <a:off x="7818120" y="3630168"/>
+            <a:ext cx="3749039" cy="256032"/>
           </a:xfrm>
           <a:prstGeom prst="rect">
             <a:avLst/>
@@ -38138,7 +38049,7 @@
           <a:noFill/>
         </p:spPr>
         <p:txBody>
-          <a:bodyPr wrap="square" lIns="0" rIns="0" tIns="0" bIns="0" anchor="t">
+          <a:bodyPr wrap="square" lIns="0" rIns="0" tIns="0" bIns="0" anchor="ctr">
             <a:spAutoFit/>
           </a:bodyPr>
           <a:lstStyle/>
@@ -38156,361 +38067,45 @@
                 <a:latin typeface="맑은 고딕"/>
                 <a:ea typeface="맑은 고딕"/>
               </a:rPr>
-              <a:t>R 이 뜻하는 것</a:t>
-            </a:r>
-          </a:p>
-        </p:txBody>
-      </p:sp>
-      <p:sp>
-        <p:nvSpPr>
-          <p:cNvPr id="48" name="Oval 47"/>
-          <p:cNvSpPr/>
-          <p:nvPr/>
-        </p:nvSpPr>
-        <p:spPr>
-          <a:xfrm>
-            <a:off x="7818120" y="4059935"/>
-            <a:ext cx="256032" cy="256032"/>
-          </a:xfrm>
-          <a:prstGeom prst="ellipse">
-            <a:avLst/>
-          </a:prstGeom>
-          <a:solidFill>
-            <a:srgbClr val="DC2626"/>
-          </a:solidFill>
-          <a:ln>
-            <a:noFill/>
-          </a:ln>
-          <a:effectLst/>
-        </p:spPr>
-        <p:style>
-          <a:lnRef idx="1">
-            <a:schemeClr val="accent1"/>
-          </a:lnRef>
-          <a:fillRef idx="3">
-            <a:schemeClr val="accent1"/>
-          </a:fillRef>
-          <a:effectRef idx="2">
-            <a:schemeClr val="accent1"/>
-          </a:effectRef>
-          <a:fontRef idx="minor">
-            <a:schemeClr val="lt1"/>
-          </a:fontRef>
-        </p:style>
-        <p:txBody>
-          <a:bodyPr rtlCol="0" anchor="ctr" lIns="0" rIns="0" tIns="0" bIns="0"/>
-          <a:lstStyle/>
-          <a:p>
-            <a:pPr algn="ctr"/>
-            <a:r>
-              <a:rPr sz="950" b="1" i="0">
-                <a:solidFill>
-                  <a:srgbClr val="FFFFFF"/>
-                </a:solidFill>
-                <a:latin typeface="맑은 고딕"/>
-                <a:ea typeface="맑은 고딕"/>
-              </a:rPr>
-              <a:t>1</a:t>
-            </a:r>
-          </a:p>
-        </p:txBody>
-      </p:sp>
-      <p:sp>
-        <p:nvSpPr>
-          <p:cNvPr id="49" name="TextBox 48"/>
-          <p:cNvSpPr txBox="1"/>
-          <p:nvPr/>
-        </p:nvSpPr>
-        <p:spPr>
-          <a:xfrm>
-            <a:off x="8202168" y="4041648"/>
-            <a:ext cx="3364991" cy="475488"/>
+              <a:t>R 계산 행렬식   </a:t>
+            </a:r>
+            <a:r>
+              <a:rPr sz="950" b="0" i="0">
+                <a:solidFill>
+                  <a:srgbClr val="8794AC"/>
+                </a:solidFill>
+                <a:latin typeface="맑은 고딕"/>
+                <a:ea typeface="맑은 고딕"/>
+              </a:rPr>
+              <a:t>이전 과제 좌표 변환과 같은 행렬</a:t>
+            </a:r>
+          </a:p>
+        </p:txBody>
+      </p:sp>
+      <p:pic>
+        <p:nvPicPr>
+          <p:cNvPr id="49" name="Picture 48" descr="fig_rmatrix.png"/>
+          <p:cNvPicPr>
+            <a:picLocks noChangeAspect="1"/>
+          </p:cNvPicPr>
+          <p:nvPr/>
+        </p:nvPicPr>
+        <p:blipFill>
+          <a:blip r:embed="rId2"/>
+          <a:stretch>
+            <a:fillRect/>
+          </a:stretch>
+        </p:blipFill>
+        <p:spPr>
+          <a:xfrm>
+            <a:off x="7754112" y="3877056"/>
+            <a:ext cx="3794760" cy="2394065"/>
           </a:xfrm>
           <a:prstGeom prst="rect">
             <a:avLst/>
           </a:prstGeom>
-          <a:noFill/>
-        </p:spPr>
-        <p:txBody>
-          <a:bodyPr wrap="square" lIns="0" rIns="0" tIns="0" bIns="0" anchor="t">
-            <a:spAutoFit/>
-          </a:bodyPr>
-          <a:lstStyle/>
-          <a:p>
-            <a:pPr algn="l">
-              <a:spcAft>
-                <a:spcPts val="200"/>
-              </a:spcAft>
-            </a:pPr>
-            <a:r>
-              <a:rPr sz="1150" b="1" i="0">
-                <a:solidFill>
-                  <a:srgbClr val="1B2740"/>
-                </a:solidFill>
-                <a:latin typeface="맑은 고딕"/>
-                <a:ea typeface="맑은 고딕"/>
-              </a:rPr>
-              <a:t>R = 플롯이 흩어지는 정도</a:t>
-            </a:r>
-          </a:p>
-          <a:p>
-            <a:pPr algn="l">
-              <a:spcAft>
-                <a:spcPts val="100"/>
-              </a:spcAft>
-            </a:pPr>
-            <a:r>
-              <a:rPr sz="1050" b="0" i="0">
-                <a:solidFill>
-                  <a:srgbClr val="4A5A7A"/>
-                </a:solidFill>
-                <a:latin typeface="맑은 고딕"/>
-                <a:ea typeface="맑은 고딕"/>
-              </a:rPr>
-              <a:t>같은 표적을 여러 번 잴 때 흩어지는 크기 · 모양</a:t>
-            </a:r>
-          </a:p>
-        </p:txBody>
-      </p:sp>
-      <p:sp>
-        <p:nvSpPr>
-          <p:cNvPr id="50" name="Oval 49"/>
-          <p:cNvSpPr/>
-          <p:nvPr/>
-        </p:nvSpPr>
-        <p:spPr>
-          <a:xfrm>
-            <a:off x="7818120" y="4718303"/>
-            <a:ext cx="256032" cy="256032"/>
-          </a:xfrm>
-          <a:prstGeom prst="ellipse">
-            <a:avLst/>
-          </a:prstGeom>
-          <a:solidFill>
-            <a:srgbClr val="D97706"/>
-          </a:solidFill>
-          <a:ln>
-            <a:noFill/>
-          </a:ln>
-          <a:effectLst/>
-        </p:spPr>
-        <p:style>
-          <a:lnRef idx="1">
-            <a:schemeClr val="accent1"/>
-          </a:lnRef>
-          <a:fillRef idx="3">
-            <a:schemeClr val="accent1"/>
-          </a:fillRef>
-          <a:effectRef idx="2">
-            <a:schemeClr val="accent1"/>
-          </a:effectRef>
-          <a:fontRef idx="minor">
-            <a:schemeClr val="lt1"/>
-          </a:fontRef>
-        </p:style>
-        <p:txBody>
-          <a:bodyPr rtlCol="0" anchor="ctr" lIns="0" rIns="0" tIns="0" bIns="0"/>
-          <a:lstStyle/>
-          <a:p>
-            <a:pPr algn="ctr"/>
-            <a:r>
-              <a:rPr sz="950" b="1" i="0">
-                <a:solidFill>
-                  <a:srgbClr val="FFFFFF"/>
-                </a:solidFill>
-                <a:latin typeface="맑은 고딕"/>
-                <a:ea typeface="맑은 고딕"/>
-              </a:rPr>
-              <a:t>2</a:t>
-            </a:r>
-          </a:p>
-        </p:txBody>
-      </p:sp>
-      <p:sp>
-        <p:nvSpPr>
-          <p:cNvPr id="51" name="TextBox 50"/>
-          <p:cNvSpPr txBox="1"/>
-          <p:nvPr/>
-        </p:nvSpPr>
-        <p:spPr>
-          <a:xfrm>
-            <a:off x="8202168" y="4700016"/>
-            <a:ext cx="3364991" cy="676656"/>
-          </a:xfrm>
-          <a:prstGeom prst="rect">
-            <a:avLst/>
-          </a:prstGeom>
-          <a:noFill/>
-        </p:spPr>
-        <p:txBody>
-          <a:bodyPr wrap="square" lIns="0" rIns="0" tIns="0" bIns="0" anchor="t">
-            <a:spAutoFit/>
-          </a:bodyPr>
-          <a:lstStyle/>
-          <a:p>
-            <a:pPr algn="l">
-              <a:spcAft>
-                <a:spcPts val="200"/>
-              </a:spcAft>
-            </a:pPr>
-            <a:r>
-              <a:rPr sz="1150" b="1" i="0">
-                <a:solidFill>
-                  <a:srgbClr val="1B2740"/>
-                </a:solidFill>
-                <a:latin typeface="맑은 고딕"/>
-                <a:ea typeface="맑은 고딕"/>
-              </a:rPr>
-              <a:t>거리는 정확, 방향은 멀수록 퍼짐</a:t>
-            </a:r>
-          </a:p>
-          <a:p>
-            <a:pPr algn="l">
-              <a:spcAft>
-                <a:spcPts val="100"/>
-              </a:spcAft>
-            </a:pPr>
-            <a:r>
-              <a:rPr sz="1050" b="0" i="0">
-                <a:solidFill>
-                  <a:srgbClr val="4A5A7A"/>
-                </a:solidFill>
-                <a:latin typeface="맑은 고딕"/>
-                <a:ea typeface="맑은 고딕"/>
-              </a:rPr>
-              <a:t>거리 방향: 10 m (어디서나 같음)</a:t>
-            </a:r>
-          </a:p>
-          <a:p>
-            <a:pPr algn="l">
-              <a:spcAft>
-                <a:spcPts val="100"/>
-              </a:spcAft>
-            </a:pPr>
-            <a:r>
-              <a:rPr sz="1050" b="0" i="0">
-                <a:solidFill>
-                  <a:srgbClr val="4A5A7A"/>
-                </a:solidFill>
-                <a:latin typeface="맑은 고딕"/>
-                <a:ea typeface="맑은 고딕"/>
-              </a:rPr>
-              <a:t>옆 · 위아래: 거리 × 0.2° (14 km → 49 m)</a:t>
-            </a:r>
-          </a:p>
-        </p:txBody>
-      </p:sp>
-      <p:sp>
-        <p:nvSpPr>
-          <p:cNvPr id="52" name="Oval 51"/>
-          <p:cNvSpPr/>
-          <p:nvPr/>
-        </p:nvSpPr>
-        <p:spPr>
-          <a:xfrm>
-            <a:off x="7818120" y="5577840"/>
-            <a:ext cx="256032" cy="256032"/>
-          </a:xfrm>
-          <a:prstGeom prst="ellipse">
-            <a:avLst/>
-          </a:prstGeom>
-          <a:solidFill>
-            <a:srgbClr val="059669"/>
-          </a:solidFill>
-          <a:ln>
-            <a:noFill/>
-          </a:ln>
-          <a:effectLst/>
-        </p:spPr>
-        <p:style>
-          <a:lnRef idx="1">
-            <a:schemeClr val="accent1"/>
-          </a:lnRef>
-          <a:fillRef idx="3">
-            <a:schemeClr val="accent1"/>
-          </a:fillRef>
-          <a:effectRef idx="2">
-            <a:schemeClr val="accent1"/>
-          </a:effectRef>
-          <a:fontRef idx="minor">
-            <a:schemeClr val="lt1"/>
-          </a:fontRef>
-        </p:style>
-        <p:txBody>
-          <a:bodyPr rtlCol="0" anchor="ctr" lIns="0" rIns="0" tIns="0" bIns="0"/>
-          <a:lstStyle/>
-          <a:p>
-            <a:pPr algn="ctr"/>
-            <a:r>
-              <a:rPr sz="950" b="1" i="0">
-                <a:solidFill>
-                  <a:srgbClr val="FFFFFF"/>
-                </a:solidFill>
-                <a:latin typeface="맑은 고딕"/>
-                <a:ea typeface="맑은 고딕"/>
-              </a:rPr>
-              <a:t>3</a:t>
-            </a:r>
-          </a:p>
-        </p:txBody>
-      </p:sp>
-      <p:sp>
-        <p:nvSpPr>
-          <p:cNvPr id="53" name="TextBox 52"/>
-          <p:cNvSpPr txBox="1"/>
-          <p:nvPr/>
-        </p:nvSpPr>
-        <p:spPr>
-          <a:xfrm>
-            <a:off x="8202168" y="5559552"/>
-            <a:ext cx="3364991" cy="475488"/>
-          </a:xfrm>
-          <a:prstGeom prst="rect">
-            <a:avLst/>
-          </a:prstGeom>
-          <a:noFill/>
-        </p:spPr>
-        <p:txBody>
-          <a:bodyPr wrap="square" lIns="0" rIns="0" tIns="0" bIns="0" anchor="t">
-            <a:spAutoFit/>
-          </a:bodyPr>
-          <a:lstStyle/>
-          <a:p>
-            <a:pPr algn="l">
-              <a:spcAft>
-                <a:spcPts val="200"/>
-              </a:spcAft>
-            </a:pPr>
-            <a:r>
-              <a:rPr sz="1150" b="1" i="0">
-                <a:solidFill>
-                  <a:srgbClr val="1B2740"/>
-                </a:solidFill>
-                <a:latin typeface="맑은 고딕"/>
-                <a:ea typeface="맑은 고딕"/>
-              </a:rPr>
-              <a:t>그래서 옆으로 긴 타원, 플롯마다 계산</a:t>
-            </a:r>
-          </a:p>
-          <a:p>
-            <a:pPr algn="l">
-              <a:spcAft>
-                <a:spcPts val="100"/>
-              </a:spcAft>
-            </a:pPr>
-            <a:r>
-              <a:rPr sz="1050" b="0" i="0">
-                <a:solidFill>
-                  <a:srgbClr val="4A5A7A"/>
-                </a:solidFill>
-                <a:latin typeface="맑은 고딕"/>
-                <a:ea typeface="맑은 고딕"/>
-              </a:rPr>
-              <a:t>거리 · 방향이 플롯마다 달라 R 도 다름</a:t>
-            </a:r>
-          </a:p>
-        </p:txBody>
-      </p:sp>
+        </p:spPr>
+      </p:pic>
     </p:spTree>
   </p:cSld>
   <p:clrMapOvr>

--- a/Part5_Track_Init_Mgmt/ref/산출물/Chapter5_TrackInitMgmt.pptx
+++ b/Part5_Track_Init_Mgmt/ref/산출물/Chapter5_TrackInitMgmt.pptx
@@ -1882,22 +1882,27 @@
           <a:lstStyle/>
           <a:p>
             <a:r>
-              <a:t>전체 116초 동안의 트랙 생성 결과입니다.</a:t>
-            </a:r>
-          </a:p>
-          <a:p>
-            <a:r>
-              <a:t>위쪽의 세로선 하나가 트랙 하나가 개시된 시각입니다. 표적 1에서 117개, 표적 2에서 235개, 클러터끼리 3개로 모두 355개의 트랙이 개시되었습니다.</a:t>
-            </a:r>
-          </a:p>
-          <a:p>
-            <a:r>
-              <a:t>아래쪽은 스캔마다 트랙 표에 남아 있는 트랙 수입니다. 연관이 없어 모든 트랙의 TrackScore가 2, 1, 0으로 내려가고, 개시 두 스캔 뒤 삭제되므로 많아야 4개입니다.</a:t>
-            </a:r>
-          </a:p>
-          <a:p>
-            <a:r>
-              <a:t>같은 이유로 시뮬레이션에서는 확정과 메모리 상태가 나타나지 않습니다. 이 두 상태는 오른쪽의 스코어 확인 창으로 확인했습니다. Assigned_Flag 순서를 입력하면 코어의 스코어 함수를 그대로 호출해 결과를 표시합니다. 1, 1, 1을 입력하면 TrackScore 5에서 확정되고, 0, 0이 이어지면 메모리 트랙으로 전환되며, 다시 1이 들어오면 바로 확정으로 돌아가고 MemoryScore가 0이 됩니다.</a:t>
+              <a:t>전체 116초 동안의 트랙 결과입니다. 표적 1에서 117개, 표적 2에서 235개, 클러터끼리 3개로 모두 355개의 트랙이 개시되었고, 모든 트랙이 같은 일생을 거칩니다.</a:t>
+            </a:r>
+          </a:p>
+          <a:p>
+            <a:r>
+              <a:t>왼쪽 위 그림은 처음 10초 동안 생긴 트랙 22개를 줄 하나씩 그린 것입니다. 칸 하나가 스캔 하나이고, 주황 칸 두 개가 임시 상태, 회색 칸 하나가 삭제 상태입니다.</a:t>
+            </a:r>
+          </a:p>
+          <a:p>
+            <a:r>
+              <a:t>아래는 첫 줄인 트랙 100의 경우입니다. 스캔 10에 플롯 두 개로 점수 2로 개시되고, 연관이 없으니 스캔 11에서 1, 스캔 12에서 0이 되어 삭제 상태가 되고, 스캔 13을 처리할 때 표에서 빠집니다.</a:t>
+            </a:r>
+          </a:p>
+          <a:p>
+            <a:r>
+              <a:t>트랙 ID는 표적과 관계없이 만들어진 순서대로 붙습니다. 그래서 100은 표적 2, 101은 표적 1의 트랙이고, 100이 끝나는 시점과 101이 시작되는 시점은 관계가 없습니다. 같은 표적에서는 개시에 쓴 플롯을 다시 쓰지 않기 때문에 다음 트랙이 빨라도 두 스캔 뒤, 즉 앞 트랙이 삭제되는 스캔에 생깁니다. 그림의 104와 105가 그 예입니다. 실제로는 플롯 잡음 때문에 게이트를 통과하지 못하는 스캔이 많아, 표적 1은 평균 9.8 스캔, 표적 2는 평균 4.9 스캔마다 트랙이 생겼습니다.</a:t>
+            </a:r>
+          </a:p>
+          <a:p>
+            <a:r>
+              <a:t>연관이 없기 때문에 시뮬레이션에서는 확정과 메모리 상태가 나타나지 않습니다. 이 두 상태는 오른쪽의 스코어 확인 창으로 확인했습니다. Assigned_Flag 순서를 입력하면 코어의 스코어 함수를 그대로 호출해 결과를 표시합니다. 1, 1, 1을 입력하면 TrackScore 5에서 확정되고, 0, 0이 이어지면 메모리 트랙으로 전환되며, 다시 1이 들어오면 바로 확정으로 돌아가고 MemoryScore가 0이 됩니다.</a:t>
             </a:r>
           </a:p>
           <a:p>
@@ -31790,7 +31795,7 @@
                 <a:latin typeface="맑은 고딕"/>
                 <a:ea typeface="맑은 고딕"/>
               </a:rPr>
-              <a:t>연관이 없어 모든 트랙이 2 → 1 → 0 으로 내려가 개시 두 스캔 뒤 삭제됩니다. 확정 · 메모리 전환은 스코어 확인 창에 Flag 를 넣어 확인했습니다.</a:t>
+              <a:t>트랙 355 개 (표적 1 117 · 표적 2 235 · 클러터끼리 3) 가 모두 같은 일생을 거칩니다: 개시 → 두 스캔 뒤 삭제. 확정 · 메모리 전환은 스코어 확인 창에 Flag 를 넣어 확인했습니다.</a:t>
             </a:r>
           </a:p>
         </p:txBody>
@@ -31845,22 +31850,22 @@
       </p:sp>
       <p:pic>
         <p:nvPicPr>
-          <p:cNvPr id="26" name="Picture 25" descr="fig_life.png"/>
+          <p:cNvPr id="26" name="Picture 25" descr="fig_lifeline.png"/>
           <p:cNvPicPr>
             <a:picLocks noChangeAspect="1"/>
           </p:cNvPicPr>
           <p:nvPr/>
         </p:nvPicPr>
         <p:blipFill>
-          <a:blip r:embed="rId2"/>
+          <a:blip r:embed="rId5"/>
           <a:stretch>
             <a:fillRect/>
           </a:stretch>
         </p:blipFill>
         <p:spPr>
           <a:xfrm>
-            <a:off x="566928" y="2240280"/>
-            <a:ext cx="6766560" cy="2606040"/>
+            <a:off x="603504" y="2240280"/>
+            <a:ext cx="6812280" cy="2606040"/>
           </a:xfrm>
           <a:prstGeom prst="rect">
             <a:avLst/>
@@ -31875,8 +31880,8 @@
         </p:nvSpPr>
         <p:spPr>
           <a:xfrm>
-            <a:off x="640080" y="4937760"/>
-            <a:ext cx="1600200" cy="502920"/>
+            <a:off x="640080" y="4882896"/>
+            <a:ext cx="6766560" cy="237744"/>
           </a:xfrm>
           <a:prstGeom prst="rect">
             <a:avLst/>
@@ -31895,28 +31900,118 @@
               </a:spcAft>
             </a:pPr>
             <a:r>
-              <a:rPr sz="2400" b="1" i="0">
-                <a:solidFill>
-                  <a:srgbClr val="1B2740"/>
-                </a:solidFill>
-                <a:latin typeface="Arial"/>
-                <a:ea typeface="맑은 고딕"/>
-              </a:rPr>
-              <a:t>355</a:t>
-            </a:r>
-          </a:p>
-        </p:txBody>
-      </p:sp>
-      <p:sp>
-        <p:nvSpPr>
-          <p:cNvPr id="28" name="TextBox 27"/>
+              <a:rPr sz="1100" b="1" i="0">
+                <a:solidFill>
+                  <a:srgbClr val="1B2740"/>
+                </a:solidFill>
+                <a:latin typeface="맑은 고딕"/>
+                <a:ea typeface="맑은 고딕"/>
+              </a:rPr>
+              <a:t>트랙 100 의 경우  (표적 2, 위 그림의 첫 줄)</a:t>
+            </a:r>
+          </a:p>
+        </p:txBody>
+      </p:sp>
+      <p:sp>
+        <p:nvSpPr>
+          <p:cNvPr id="28" name="Rounded Rectangle 27"/>
+          <p:cNvSpPr/>
+          <p:nvPr/>
+        </p:nvSpPr>
+        <p:spPr>
+          <a:xfrm>
+            <a:off x="603504" y="5175504"/>
+            <a:ext cx="1552194" cy="1005840"/>
+          </a:xfrm>
+          <a:prstGeom prst="roundRect">
+            <a:avLst>
+              <a:gd name="adj" fmla="val 8000"/>
+            </a:avLst>
+          </a:prstGeom>
+          <a:solidFill>
+            <a:srgbClr val="FFFFFF"/>
+          </a:solidFill>
+          <a:ln w="17780">
+            <a:solidFill>
+              <a:srgbClr val="D97706"/>
+            </a:solidFill>
+          </a:ln>
+          <a:effectLst/>
+        </p:spPr>
+        <p:style>
+          <a:lnRef idx="1">
+            <a:schemeClr val="accent1"/>
+          </a:lnRef>
+          <a:fillRef idx="3">
+            <a:schemeClr val="accent1"/>
+          </a:fillRef>
+          <a:effectRef idx="2">
+            <a:schemeClr val="accent1"/>
+          </a:effectRef>
+          <a:fontRef idx="minor">
+            <a:schemeClr val="lt1"/>
+          </a:fontRef>
+        </p:style>
+        <p:txBody>
+          <a:bodyPr rtlCol="0" anchor="ctr"/>
+          <a:lstStyle/>
+          <a:p/>
+        </p:txBody>
+      </p:sp>
+      <p:sp>
+        <p:nvSpPr>
+          <p:cNvPr id="29" name="Rectangle 28"/>
+          <p:cNvSpPr/>
+          <p:nvPr/>
+        </p:nvSpPr>
+        <p:spPr>
+          <a:xfrm>
+            <a:off x="713232" y="5276088"/>
+            <a:ext cx="182880" cy="182880"/>
+          </a:xfrm>
+          <a:prstGeom prst="rect">
+            <a:avLst/>
+          </a:prstGeom>
+          <a:solidFill>
+            <a:srgbClr val="FFFFFF"/>
+          </a:solidFill>
+          <a:ln w="17780">
+            <a:solidFill>
+              <a:srgbClr val="D97706"/>
+            </a:solidFill>
+          </a:ln>
+          <a:effectLst/>
+        </p:spPr>
+        <p:style>
+          <a:lnRef idx="1">
+            <a:schemeClr val="accent1"/>
+          </a:lnRef>
+          <a:fillRef idx="3">
+            <a:schemeClr val="accent1"/>
+          </a:fillRef>
+          <a:effectRef idx="2">
+            <a:schemeClr val="accent1"/>
+          </a:effectRef>
+          <a:fontRef idx="minor">
+            <a:schemeClr val="lt1"/>
+          </a:fontRef>
+        </p:style>
+        <p:txBody>
+          <a:bodyPr rtlCol="0" anchor="ctr"/>
+          <a:lstStyle/>
+          <a:p/>
+        </p:txBody>
+      </p:sp>
+      <p:sp>
+        <p:nvSpPr>
+          <p:cNvPr id="30" name="TextBox 29"/>
           <p:cNvSpPr txBox="1"/>
           <p:nvPr/>
         </p:nvSpPr>
         <p:spPr>
           <a:xfrm>
-            <a:off x="640080" y="5440680"/>
-            <a:ext cx="1600200" cy="274320"/>
+            <a:off x="987552" y="5239512"/>
+            <a:ext cx="1094994" cy="237744"/>
           </a:xfrm>
           <a:prstGeom prst="rect">
             <a:avLst/>
@@ -31924,7 +32019,7 @@
           <a:noFill/>
         </p:spPr>
         <p:txBody>
-          <a:bodyPr wrap="square" lIns="0" rIns="0" tIns="0" bIns="0" anchor="t">
+          <a:bodyPr wrap="square" lIns="0" rIns="0" tIns="0" bIns="0" anchor="ctr">
             <a:spAutoFit/>
           </a:bodyPr>
           <a:lstStyle/>
@@ -31935,28 +32030,28 @@
               </a:spcAft>
             </a:pPr>
             <a:r>
-              <a:rPr sz="1000" b="0" i="0">
-                <a:solidFill>
-                  <a:srgbClr val="4A5A7A"/>
-                </a:solidFill>
-                <a:latin typeface="맑은 고딕"/>
-                <a:ea typeface="맑은 고딕"/>
-              </a:rPr>
-              <a:t>만든 트랙</a:t>
-            </a:r>
-          </a:p>
-        </p:txBody>
-      </p:sp>
-      <p:sp>
-        <p:nvSpPr>
-          <p:cNvPr id="29" name="TextBox 28"/>
+              <a:rPr sz="1100" b="1" i="0">
+                <a:solidFill>
+                  <a:srgbClr val="1B2740"/>
+                </a:solidFill>
+                <a:latin typeface="맑은 고딕"/>
+                <a:ea typeface="맑은 고딕"/>
+              </a:rPr>
+              <a:t>스캔 10</a:t>
+            </a:r>
+          </a:p>
+        </p:txBody>
+      </p:sp>
+      <p:sp>
+        <p:nvSpPr>
+          <p:cNvPr id="31" name="TextBox 30"/>
           <p:cNvSpPr txBox="1"/>
           <p:nvPr/>
         </p:nvSpPr>
         <p:spPr>
           <a:xfrm>
-            <a:off x="2331720" y="4937760"/>
-            <a:ext cx="1600200" cy="502920"/>
+            <a:off x="713232" y="5541264"/>
+            <a:ext cx="1369314" cy="237744"/>
           </a:xfrm>
           <a:prstGeom prst="rect">
             <a:avLst/>
@@ -31975,28 +32070,28 @@
               </a:spcAft>
             </a:pPr>
             <a:r>
-              <a:rPr sz="2400" b="1" i="0">
-                <a:solidFill>
-                  <a:srgbClr val="2563EB"/>
-                </a:solidFill>
-                <a:latin typeface="Arial"/>
-                <a:ea typeface="맑은 고딕"/>
-              </a:rPr>
-              <a:t>352</a:t>
-            </a:r>
-          </a:p>
-        </p:txBody>
-      </p:sp>
-      <p:sp>
-        <p:nvSpPr>
-          <p:cNvPr id="30" name="TextBox 29"/>
+              <a:rPr sz="1050" b="1" i="0">
+                <a:solidFill>
+                  <a:srgbClr val="D97706"/>
+                </a:solidFill>
+                <a:latin typeface="맑은 고딕"/>
+                <a:ea typeface="맑은 고딕"/>
+              </a:rPr>
+              <a:t>TrackScore 2</a:t>
+            </a:r>
+          </a:p>
+        </p:txBody>
+      </p:sp>
+      <p:sp>
+        <p:nvSpPr>
+          <p:cNvPr id="32" name="TextBox 31"/>
           <p:cNvSpPr txBox="1"/>
           <p:nvPr/>
         </p:nvSpPr>
         <p:spPr>
           <a:xfrm>
-            <a:off x="2331720" y="5440680"/>
-            <a:ext cx="1600200" cy="274320"/>
+            <a:off x="713232" y="5797296"/>
+            <a:ext cx="1369314" cy="329184"/>
           </a:xfrm>
           <a:prstGeom prst="rect">
             <a:avLst/>
@@ -32015,39 +32110,16 @@
               </a:spcAft>
             </a:pPr>
             <a:r>
-              <a:rPr sz="1000" b="0" i="0">
+              <a:rPr sz="900" b="0" i="0">
                 <a:solidFill>
                   <a:srgbClr val="4A5A7A"/>
                 </a:solidFill>
                 <a:latin typeface="맑은 고딕"/>
                 <a:ea typeface="맑은 고딕"/>
               </a:rPr>
-              <a:t>같은 표적 플롯 쌍</a:t>
-            </a:r>
-          </a:p>
-        </p:txBody>
-      </p:sp>
-      <p:sp>
-        <p:nvSpPr>
-          <p:cNvPr id="31" name="TextBox 30"/>
-          <p:cNvSpPr txBox="1"/>
-          <p:nvPr/>
-        </p:nvSpPr>
-        <p:spPr>
-          <a:xfrm>
-            <a:off x="4023360" y="4937760"/>
-            <a:ext cx="1600200" cy="502920"/>
-          </a:xfrm>
-          <a:prstGeom prst="rect">
-            <a:avLst/>
-          </a:prstGeom>
-          <a:noFill/>
-        </p:spPr>
-        <p:txBody>
-          <a:bodyPr wrap="square" lIns="0" rIns="0" tIns="0" bIns="0" anchor="t">
-            <a:spAutoFit/>
-          </a:bodyPr>
-          <a:lstStyle/>
+              <a:t>두 플롯으로 개시</a:t>
+            </a:r>
+          </a:p>
           <a:p>
             <a:pPr algn="l">
               <a:spcAft>
@@ -32055,28 +32127,154 @@
               </a:spcAft>
             </a:pPr>
             <a:r>
-              <a:rPr sz="2400" b="1" i="0">
-                <a:solidFill>
-                  <a:srgbClr val="6B7280"/>
-                </a:solidFill>
-                <a:latin typeface="Arial"/>
-                <a:ea typeface="맑은 고딕"/>
-              </a:rPr>
-              <a:t>3</a:t>
-            </a:r>
-          </a:p>
-        </p:txBody>
-      </p:sp>
-      <p:sp>
-        <p:nvSpPr>
-          <p:cNvPr id="32" name="TextBox 31"/>
+              <a:rPr sz="900" b="0" i="0">
+                <a:solidFill>
+                  <a:srgbClr val="4A5A7A"/>
+                </a:solidFill>
+                <a:latin typeface="맑은 고딕"/>
+                <a:ea typeface="맑은 고딕"/>
+              </a:rPr>
+              <a:t>(10067 + 10074)</a:t>
+            </a:r>
+          </a:p>
+        </p:txBody>
+      </p:sp>
+      <p:cxnSp>
+        <p:nvCxnSpPr>
+          <p:cNvPr id="33" name="Connector 32"/>
+          <p:cNvCxnSpPr/>
+          <p:nvPr/>
+        </p:nvCxnSpPr>
+        <p:spPr>
+          <a:xfrm>
+            <a:off x="2173986" y="5678424"/>
+            <a:ext cx="164592" cy="0"/>
+          </a:xfrm>
+          <a:prstGeom prst="line">
+            <a:avLst/>
+          </a:prstGeom>
+          <a:ln w="15240">
+            <a:solidFill>
+              <a:srgbClr val="AEB9CC"/>
+            </a:solidFill>
+            <a:tailEnd type="triangle" w="med" len="med"/>
+          </a:ln>
+        </p:spPr>
+        <p:style>
+          <a:lnRef idx="2">
+            <a:schemeClr val="accent1"/>
+          </a:lnRef>
+          <a:fillRef idx="0">
+            <a:schemeClr val="accent1"/>
+          </a:fillRef>
+          <a:effectRef idx="1">
+            <a:schemeClr val="accent1"/>
+          </a:effectRef>
+          <a:fontRef idx="minor">
+            <a:schemeClr val="tx1"/>
+          </a:fontRef>
+        </p:style>
+      </p:cxnSp>
+      <p:sp>
+        <p:nvSpPr>
+          <p:cNvPr id="34" name="Rounded Rectangle 33"/>
+          <p:cNvSpPr/>
+          <p:nvPr/>
+        </p:nvSpPr>
+        <p:spPr>
+          <a:xfrm>
+            <a:off x="2356866" y="5175504"/>
+            <a:ext cx="1552194" cy="1005840"/>
+          </a:xfrm>
+          <a:prstGeom prst="roundRect">
+            <a:avLst>
+              <a:gd name="adj" fmla="val 8000"/>
+            </a:avLst>
+          </a:prstGeom>
+          <a:solidFill>
+            <a:srgbClr val="FFFFFF"/>
+          </a:solidFill>
+          <a:ln w="17780">
+            <a:solidFill>
+              <a:srgbClr val="D97706"/>
+            </a:solidFill>
+          </a:ln>
+          <a:effectLst/>
+        </p:spPr>
+        <p:style>
+          <a:lnRef idx="1">
+            <a:schemeClr val="accent1"/>
+          </a:lnRef>
+          <a:fillRef idx="3">
+            <a:schemeClr val="accent1"/>
+          </a:fillRef>
+          <a:effectRef idx="2">
+            <a:schemeClr val="accent1"/>
+          </a:effectRef>
+          <a:fontRef idx="minor">
+            <a:schemeClr val="lt1"/>
+          </a:fontRef>
+        </p:style>
+        <p:txBody>
+          <a:bodyPr rtlCol="0" anchor="ctr"/>
+          <a:lstStyle/>
+          <a:p/>
+        </p:txBody>
+      </p:sp>
+      <p:sp>
+        <p:nvSpPr>
+          <p:cNvPr id="35" name="Rectangle 34"/>
+          <p:cNvSpPr/>
+          <p:nvPr/>
+        </p:nvSpPr>
+        <p:spPr>
+          <a:xfrm>
+            <a:off x="2466594" y="5276088"/>
+            <a:ext cx="182880" cy="182880"/>
+          </a:xfrm>
+          <a:prstGeom prst="rect">
+            <a:avLst/>
+          </a:prstGeom>
+          <a:solidFill>
+            <a:srgbClr val="FFFFFF"/>
+          </a:solidFill>
+          <a:ln w="17780">
+            <a:solidFill>
+              <a:srgbClr val="D97706"/>
+            </a:solidFill>
+          </a:ln>
+          <a:effectLst/>
+        </p:spPr>
+        <p:style>
+          <a:lnRef idx="1">
+            <a:schemeClr val="accent1"/>
+          </a:lnRef>
+          <a:fillRef idx="3">
+            <a:schemeClr val="accent1"/>
+          </a:fillRef>
+          <a:effectRef idx="2">
+            <a:schemeClr val="accent1"/>
+          </a:effectRef>
+          <a:fontRef idx="minor">
+            <a:schemeClr val="lt1"/>
+          </a:fontRef>
+        </p:style>
+        <p:txBody>
+          <a:bodyPr rtlCol="0" anchor="ctr"/>
+          <a:lstStyle/>
+          <a:p/>
+        </p:txBody>
+      </p:sp>
+      <p:sp>
+        <p:nvSpPr>
+          <p:cNvPr id="36" name="TextBox 35"/>
           <p:cNvSpPr txBox="1"/>
           <p:nvPr/>
         </p:nvSpPr>
         <p:spPr>
           <a:xfrm>
-            <a:off x="4023360" y="5440680"/>
-            <a:ext cx="1600200" cy="274320"/>
+            <a:off x="2740914" y="5239512"/>
+            <a:ext cx="1094994" cy="237744"/>
           </a:xfrm>
           <a:prstGeom prst="rect">
             <a:avLst/>
@@ -32084,7 +32282,7 @@
           <a:noFill/>
         </p:spPr>
         <p:txBody>
-          <a:bodyPr wrap="square" lIns="0" rIns="0" tIns="0" bIns="0" anchor="t">
+          <a:bodyPr wrap="square" lIns="0" rIns="0" tIns="0" bIns="0" anchor="ctr">
             <a:spAutoFit/>
           </a:bodyPr>
           <a:lstStyle/>
@@ -32095,28 +32293,28 @@
               </a:spcAft>
             </a:pPr>
             <a:r>
-              <a:rPr sz="1000" b="0" i="0">
-                <a:solidFill>
-                  <a:srgbClr val="4A5A7A"/>
-                </a:solidFill>
-                <a:latin typeface="맑은 고딕"/>
-                <a:ea typeface="맑은 고딕"/>
-              </a:rPr>
-              <a:t>클러터끼리 쌍</a:t>
-            </a:r>
-          </a:p>
-        </p:txBody>
-      </p:sp>
-      <p:sp>
-        <p:nvSpPr>
-          <p:cNvPr id="33" name="TextBox 32"/>
+              <a:rPr sz="1100" b="1" i="0">
+                <a:solidFill>
+                  <a:srgbClr val="1B2740"/>
+                </a:solidFill>
+                <a:latin typeface="맑은 고딕"/>
+                <a:ea typeface="맑은 고딕"/>
+              </a:rPr>
+              <a:t>스캔 11</a:t>
+            </a:r>
+          </a:p>
+        </p:txBody>
+      </p:sp>
+      <p:sp>
+        <p:nvSpPr>
+          <p:cNvPr id="37" name="TextBox 36"/>
           <p:cNvSpPr txBox="1"/>
           <p:nvPr/>
         </p:nvSpPr>
         <p:spPr>
           <a:xfrm>
-            <a:off x="5715000" y="4937760"/>
-            <a:ext cx="1600200" cy="502920"/>
+            <a:off x="2466594" y="5541264"/>
+            <a:ext cx="1369314" cy="237744"/>
           </a:xfrm>
           <a:prstGeom prst="rect">
             <a:avLst/>
@@ -32135,28 +32333,28 @@
               </a:spcAft>
             </a:pPr>
             <a:r>
-              <a:rPr sz="2400" b="1" i="0">
+              <a:rPr sz="1050" b="1" i="0">
                 <a:solidFill>
                   <a:srgbClr val="D97706"/>
                 </a:solidFill>
-                <a:latin typeface="Arial"/>
-                <a:ea typeface="맑은 고딕"/>
-              </a:rPr>
-              <a:t>4</a:t>
-            </a:r>
-          </a:p>
-        </p:txBody>
-      </p:sp>
-      <p:sp>
-        <p:nvSpPr>
-          <p:cNvPr id="34" name="TextBox 33"/>
+                <a:latin typeface="맑은 고딕"/>
+                <a:ea typeface="맑은 고딕"/>
+              </a:rPr>
+              <a:t>TrackScore 1</a:t>
+            </a:r>
+          </a:p>
+        </p:txBody>
+      </p:sp>
+      <p:sp>
+        <p:nvSpPr>
+          <p:cNvPr id="38" name="TextBox 37"/>
           <p:cNvSpPr txBox="1"/>
           <p:nvPr/>
         </p:nvSpPr>
         <p:spPr>
           <a:xfrm>
-            <a:off x="5715000" y="5440680"/>
-            <a:ext cx="1600200" cy="274320"/>
+            <a:off x="2466594" y="5797296"/>
+            <a:ext cx="1369314" cy="329184"/>
           </a:xfrm>
           <a:prstGeom prst="rect">
             <a:avLst/>
@@ -32175,28 +32373,224 @@
               </a:spcAft>
             </a:pPr>
             <a:r>
-              <a:rPr sz="1000" b="0" i="0">
+              <a:rPr sz="900" b="0" i="0">
                 <a:solidFill>
                   <a:srgbClr val="4A5A7A"/>
                 </a:solidFill>
                 <a:latin typeface="맑은 고딕"/>
                 <a:ea typeface="맑은 고딕"/>
               </a:rPr>
-              <a:t>표의 최대 트랙 수</a:t>
-            </a:r>
-          </a:p>
-        </p:txBody>
-      </p:sp>
-      <p:sp>
-        <p:nvSpPr>
-          <p:cNvPr id="35" name="TextBox 34"/>
+              <a:t>Assigned_Flag 0 → −1</a:t>
+            </a:r>
+          </a:p>
+        </p:txBody>
+      </p:sp>
+      <p:cxnSp>
+        <p:nvCxnSpPr>
+          <p:cNvPr id="39" name="Connector 38"/>
+          <p:cNvCxnSpPr/>
+          <p:nvPr/>
+        </p:nvCxnSpPr>
+        <p:spPr>
+          <a:xfrm>
+            <a:off x="3927348" y="5678424"/>
+            <a:ext cx="164592" cy="0"/>
+          </a:xfrm>
+          <a:prstGeom prst="line">
+            <a:avLst/>
+          </a:prstGeom>
+          <a:ln w="15240">
+            <a:solidFill>
+              <a:srgbClr val="AEB9CC"/>
+            </a:solidFill>
+            <a:tailEnd type="triangle" w="med" len="med"/>
+          </a:ln>
+        </p:spPr>
+        <p:style>
+          <a:lnRef idx="2">
+            <a:schemeClr val="accent1"/>
+          </a:lnRef>
+          <a:fillRef idx="0">
+            <a:schemeClr val="accent1"/>
+          </a:fillRef>
+          <a:effectRef idx="1">
+            <a:schemeClr val="accent1"/>
+          </a:effectRef>
+          <a:fontRef idx="minor">
+            <a:schemeClr val="tx1"/>
+          </a:fontRef>
+        </p:style>
+      </p:cxnSp>
+      <p:sp>
+        <p:nvSpPr>
+          <p:cNvPr id="40" name="Rounded Rectangle 39"/>
+          <p:cNvSpPr/>
+          <p:nvPr/>
+        </p:nvSpPr>
+        <p:spPr>
+          <a:xfrm>
+            <a:off x="4110228" y="5175504"/>
+            <a:ext cx="1552194" cy="1005840"/>
+          </a:xfrm>
+          <a:prstGeom prst="roundRect">
+            <a:avLst>
+              <a:gd name="adj" fmla="val 8000"/>
+            </a:avLst>
+          </a:prstGeom>
+          <a:solidFill>
+            <a:srgbClr val="FFFFFF"/>
+          </a:solidFill>
+          <a:ln w="17780">
+            <a:solidFill>
+              <a:srgbClr val="6B7280"/>
+            </a:solidFill>
+          </a:ln>
+          <a:effectLst/>
+        </p:spPr>
+        <p:style>
+          <a:lnRef idx="1">
+            <a:schemeClr val="accent1"/>
+          </a:lnRef>
+          <a:fillRef idx="3">
+            <a:schemeClr val="accent1"/>
+          </a:fillRef>
+          <a:effectRef idx="2">
+            <a:schemeClr val="accent1"/>
+          </a:effectRef>
+          <a:fontRef idx="minor">
+            <a:schemeClr val="lt1"/>
+          </a:fontRef>
+        </p:style>
+        <p:txBody>
+          <a:bodyPr rtlCol="0" anchor="ctr"/>
+          <a:lstStyle/>
+          <a:p/>
+        </p:txBody>
+      </p:sp>
+      <p:sp>
+        <p:nvSpPr>
+          <p:cNvPr id="41" name="Rectangle 40"/>
+          <p:cNvSpPr/>
+          <p:nvPr/>
+        </p:nvSpPr>
+        <p:spPr>
+          <a:xfrm>
+            <a:off x="4219956" y="5276088"/>
+            <a:ext cx="182880" cy="182880"/>
+          </a:xfrm>
+          <a:prstGeom prst="rect">
+            <a:avLst/>
+          </a:prstGeom>
+          <a:solidFill>
+            <a:srgbClr val="FFFFFF"/>
+          </a:solidFill>
+          <a:ln w="17780">
+            <a:solidFill>
+              <a:srgbClr val="6B7280"/>
+            </a:solidFill>
+          </a:ln>
+          <a:effectLst/>
+        </p:spPr>
+        <p:style>
+          <a:lnRef idx="1">
+            <a:schemeClr val="accent1"/>
+          </a:lnRef>
+          <a:fillRef idx="3">
+            <a:schemeClr val="accent1"/>
+          </a:fillRef>
+          <a:effectRef idx="2">
+            <a:schemeClr val="accent1"/>
+          </a:effectRef>
+          <a:fontRef idx="minor">
+            <a:schemeClr val="lt1"/>
+          </a:fontRef>
+        </p:style>
+        <p:txBody>
+          <a:bodyPr rtlCol="0" anchor="ctr"/>
+          <a:lstStyle/>
+          <a:p/>
+        </p:txBody>
+      </p:sp>
+      <p:cxnSp>
+        <p:nvCxnSpPr>
+          <p:cNvPr id="42" name="Connector 41"/>
+          <p:cNvCxnSpPr/>
+          <p:nvPr/>
+        </p:nvCxnSpPr>
+        <p:spPr>
+          <a:xfrm>
+            <a:off x="4219956" y="5276088"/>
+            <a:ext cx="182880" cy="182880"/>
+          </a:xfrm>
+          <a:prstGeom prst="line">
+            <a:avLst/>
+          </a:prstGeom>
+          <a:ln w="12700">
+            <a:solidFill>
+              <a:srgbClr val="6B7280"/>
+            </a:solidFill>
+          </a:ln>
+        </p:spPr>
+        <p:style>
+          <a:lnRef idx="2">
+            <a:schemeClr val="accent1"/>
+          </a:lnRef>
+          <a:fillRef idx="0">
+            <a:schemeClr val="accent1"/>
+          </a:fillRef>
+          <a:effectRef idx="1">
+            <a:schemeClr val="accent1"/>
+          </a:effectRef>
+          <a:fontRef idx="minor">
+            <a:schemeClr val="tx1"/>
+          </a:fontRef>
+        </p:style>
+      </p:cxnSp>
+      <p:cxnSp>
+        <p:nvCxnSpPr>
+          <p:cNvPr id="43" name="Connector 42"/>
+          <p:cNvCxnSpPr/>
+          <p:nvPr/>
+        </p:nvCxnSpPr>
+        <p:spPr>
+          <a:xfrm flipV="1">
+            <a:off x="4219956" y="5276088"/>
+            <a:ext cx="182880" cy="182880"/>
+          </a:xfrm>
+          <a:prstGeom prst="line">
+            <a:avLst/>
+          </a:prstGeom>
+          <a:ln w="12700">
+            <a:solidFill>
+              <a:srgbClr val="6B7280"/>
+            </a:solidFill>
+          </a:ln>
+        </p:spPr>
+        <p:style>
+          <a:lnRef idx="2">
+            <a:schemeClr val="accent1"/>
+          </a:lnRef>
+          <a:fillRef idx="0">
+            <a:schemeClr val="accent1"/>
+          </a:fillRef>
+          <a:effectRef idx="1">
+            <a:schemeClr val="accent1"/>
+          </a:effectRef>
+          <a:fontRef idx="minor">
+            <a:schemeClr val="tx1"/>
+          </a:fontRef>
+        </p:style>
+      </p:cxnSp>
+      <p:sp>
+        <p:nvSpPr>
+          <p:cNvPr id="44" name="TextBox 43"/>
           <p:cNvSpPr txBox="1"/>
           <p:nvPr/>
         </p:nvSpPr>
         <p:spPr>
           <a:xfrm>
-            <a:off x="640080" y="5779008"/>
-            <a:ext cx="6675120" cy="457200"/>
+            <a:off x="4494276" y="5239512"/>
+            <a:ext cx="1094994" cy="237744"/>
           </a:xfrm>
           <a:prstGeom prst="rect">
             <a:avLst/>
@@ -32204,7 +32598,7 @@
           <a:noFill/>
         </p:spPr>
         <p:txBody>
-          <a:bodyPr wrap="square" lIns="0" rIns="0" tIns="0" bIns="0" anchor="t">
+          <a:bodyPr wrap="square" lIns="0" rIns="0" tIns="0" bIns="0" anchor="ctr">
             <a:spAutoFit/>
           </a:bodyPr>
           <a:lstStyle/>
@@ -32215,21 +32609,303 @@
               </a:spcAft>
             </a:pPr>
             <a:r>
-              <a:rPr sz="1000" b="0" i="0">
+              <a:rPr sz="1100" b="1" i="0">
+                <a:solidFill>
+                  <a:srgbClr val="1B2740"/>
+                </a:solidFill>
+                <a:latin typeface="맑은 고딕"/>
+                <a:ea typeface="맑은 고딕"/>
+              </a:rPr>
+              <a:t>스캔 12</a:t>
+            </a:r>
+          </a:p>
+        </p:txBody>
+      </p:sp>
+      <p:sp>
+        <p:nvSpPr>
+          <p:cNvPr id="45" name="TextBox 44"/>
+          <p:cNvSpPr txBox="1"/>
+          <p:nvPr/>
+        </p:nvSpPr>
+        <p:spPr>
+          <a:xfrm>
+            <a:off x="4219956" y="5541264"/>
+            <a:ext cx="1369314" cy="237744"/>
+          </a:xfrm>
+          <a:prstGeom prst="rect">
+            <a:avLst/>
+          </a:prstGeom>
+          <a:noFill/>
+        </p:spPr>
+        <p:txBody>
+          <a:bodyPr wrap="square" lIns="0" rIns="0" tIns="0" bIns="0" anchor="t">
+            <a:spAutoFit/>
+          </a:bodyPr>
+          <a:lstStyle/>
+          <a:p>
+            <a:pPr algn="l">
+              <a:spcAft>
+                <a:spcPts val="0"/>
+              </a:spcAft>
+            </a:pPr>
+            <a:r>
+              <a:rPr sz="1050" b="1" i="0">
+                <a:solidFill>
+                  <a:srgbClr val="6B7280"/>
+                </a:solidFill>
+                <a:latin typeface="맑은 고딕"/>
+                <a:ea typeface="맑은 고딕"/>
+              </a:rPr>
+              <a:t>TrackScore 0</a:t>
+            </a:r>
+          </a:p>
+        </p:txBody>
+      </p:sp>
+      <p:sp>
+        <p:nvSpPr>
+          <p:cNvPr id="46" name="TextBox 45"/>
+          <p:cNvSpPr txBox="1"/>
+          <p:nvPr/>
+        </p:nvSpPr>
+        <p:spPr>
+          <a:xfrm>
+            <a:off x="4219956" y="5797296"/>
+            <a:ext cx="1369314" cy="329184"/>
+          </a:xfrm>
+          <a:prstGeom prst="rect">
+            <a:avLst/>
+          </a:prstGeom>
+          <a:noFill/>
+        </p:spPr>
+        <p:txBody>
+          <a:bodyPr wrap="square" lIns="0" rIns="0" tIns="0" bIns="0" anchor="t">
+            <a:spAutoFit/>
+          </a:bodyPr>
+          <a:lstStyle/>
+          <a:p>
+            <a:pPr algn="l">
+              <a:spcAft>
+                <a:spcPts val="0"/>
+              </a:spcAft>
+            </a:pPr>
+            <a:r>
+              <a:rPr sz="900" b="0" i="0">
                 <a:solidFill>
                   <a:srgbClr val="4A5A7A"/>
                 </a:solidFill>
                 <a:latin typeface="맑은 고딕"/>
                 <a:ea typeface="맑은 고딕"/>
               </a:rPr>
-              <a:t>트랙 ID 100 ~ 454 사용 (과제 범위 100 ~ 10000),  플롯 ID 10000 ~ 18119 사용 (과제 범위 10000 ~ 1000000)</a:t>
+              <a:t>0 이하라 삭제 상태 (4)</a:t>
+            </a:r>
+          </a:p>
+        </p:txBody>
+      </p:sp>
+      <p:cxnSp>
+        <p:nvCxnSpPr>
+          <p:cNvPr id="47" name="Connector 46"/>
+          <p:cNvCxnSpPr/>
+          <p:nvPr/>
+        </p:nvCxnSpPr>
+        <p:spPr>
+          <a:xfrm>
+            <a:off x="5680709" y="5678424"/>
+            <a:ext cx="164593" cy="0"/>
+          </a:xfrm>
+          <a:prstGeom prst="line">
+            <a:avLst/>
+          </a:prstGeom>
+          <a:ln w="15240">
+            <a:solidFill>
+              <a:srgbClr val="AEB9CC"/>
+            </a:solidFill>
+            <a:tailEnd type="triangle" w="med" len="med"/>
+          </a:ln>
+        </p:spPr>
+        <p:style>
+          <a:lnRef idx="2">
+            <a:schemeClr val="accent1"/>
+          </a:lnRef>
+          <a:fillRef idx="0">
+            <a:schemeClr val="accent1"/>
+          </a:fillRef>
+          <a:effectRef idx="1">
+            <a:schemeClr val="accent1"/>
+          </a:effectRef>
+          <a:fontRef idx="minor">
+            <a:schemeClr val="tx1"/>
+          </a:fontRef>
+        </p:style>
+      </p:cxnSp>
+      <p:sp>
+        <p:nvSpPr>
+          <p:cNvPr id="48" name="Rounded Rectangle 47"/>
+          <p:cNvSpPr/>
+          <p:nvPr/>
+        </p:nvSpPr>
+        <p:spPr>
+          <a:xfrm>
+            <a:off x="5863590" y="5175504"/>
+            <a:ext cx="1552194" cy="1005840"/>
+          </a:xfrm>
+          <a:prstGeom prst="roundRect">
+            <a:avLst>
+              <a:gd name="adj" fmla="val 8000"/>
+            </a:avLst>
+          </a:prstGeom>
+          <a:solidFill>
+            <a:srgbClr val="FFFFFF"/>
+          </a:solidFill>
+          <a:ln w="17780">
+            <a:solidFill>
+              <a:srgbClr val="AEB9CC"/>
+            </a:solidFill>
+          </a:ln>
+          <a:effectLst/>
+        </p:spPr>
+        <p:style>
+          <a:lnRef idx="1">
+            <a:schemeClr val="accent1"/>
+          </a:lnRef>
+          <a:fillRef idx="3">
+            <a:schemeClr val="accent1"/>
+          </a:fillRef>
+          <a:effectRef idx="2">
+            <a:schemeClr val="accent1"/>
+          </a:effectRef>
+          <a:fontRef idx="minor">
+            <a:schemeClr val="lt1"/>
+          </a:fontRef>
+        </p:style>
+        <p:txBody>
+          <a:bodyPr rtlCol="0" anchor="ctr"/>
+          <a:lstStyle/>
+          <a:p/>
+        </p:txBody>
+      </p:sp>
+      <p:sp>
+        <p:nvSpPr>
+          <p:cNvPr id="49" name="TextBox 48"/>
+          <p:cNvSpPr txBox="1"/>
+          <p:nvPr/>
+        </p:nvSpPr>
+        <p:spPr>
+          <a:xfrm>
+            <a:off x="6247638" y="5239512"/>
+            <a:ext cx="1094994" cy="237744"/>
+          </a:xfrm>
+          <a:prstGeom prst="rect">
+            <a:avLst/>
+          </a:prstGeom>
+          <a:noFill/>
+        </p:spPr>
+        <p:txBody>
+          <a:bodyPr wrap="square" lIns="0" rIns="0" tIns="0" bIns="0" anchor="ctr">
+            <a:spAutoFit/>
+          </a:bodyPr>
+          <a:lstStyle/>
+          <a:p>
+            <a:pPr algn="l">
+              <a:spcAft>
+                <a:spcPts val="0"/>
+              </a:spcAft>
+            </a:pPr>
+            <a:r>
+              <a:rPr sz="1100" b="1" i="0">
+                <a:solidFill>
+                  <a:srgbClr val="1B2740"/>
+                </a:solidFill>
+                <a:latin typeface="맑은 고딕"/>
+                <a:ea typeface="맑은 고딕"/>
+              </a:rPr>
+              <a:t>스캔 13</a:t>
+            </a:r>
+          </a:p>
+        </p:txBody>
+      </p:sp>
+      <p:sp>
+        <p:nvSpPr>
+          <p:cNvPr id="50" name="TextBox 49"/>
+          <p:cNvSpPr txBox="1"/>
+          <p:nvPr/>
+        </p:nvSpPr>
+        <p:spPr>
+          <a:xfrm>
+            <a:off x="5973318" y="5541264"/>
+            <a:ext cx="1369314" cy="237744"/>
+          </a:xfrm>
+          <a:prstGeom prst="rect">
+            <a:avLst/>
+          </a:prstGeom>
+          <a:noFill/>
+        </p:spPr>
+        <p:txBody>
+          <a:bodyPr wrap="square" lIns="0" rIns="0" tIns="0" bIns="0" anchor="t">
+            <a:spAutoFit/>
+          </a:bodyPr>
+          <a:lstStyle/>
+          <a:p>
+            <a:pPr algn="l">
+              <a:spcAft>
+                <a:spcPts val="0"/>
+              </a:spcAft>
+            </a:pPr>
+            <a:r>
+              <a:rPr sz="1050" b="1" i="0">
+                <a:solidFill>
+                  <a:srgbClr val="4A5A7A"/>
+                </a:solidFill>
+                <a:latin typeface="맑은 고딕"/>
+                <a:ea typeface="맑은 고딕"/>
+              </a:rPr>
+              <a:t>표에 없음</a:t>
+            </a:r>
+          </a:p>
+        </p:txBody>
+      </p:sp>
+      <p:sp>
+        <p:nvSpPr>
+          <p:cNvPr id="51" name="TextBox 50"/>
+          <p:cNvSpPr txBox="1"/>
+          <p:nvPr/>
+        </p:nvSpPr>
+        <p:spPr>
+          <a:xfrm>
+            <a:off x="5973318" y="5797296"/>
+            <a:ext cx="1369314" cy="329184"/>
+          </a:xfrm>
+          <a:prstGeom prst="rect">
+            <a:avLst/>
+          </a:prstGeom>
+          <a:noFill/>
+        </p:spPr>
+        <p:txBody>
+          <a:bodyPr wrap="square" lIns="0" rIns="0" tIns="0" bIns="0" anchor="t">
+            <a:spAutoFit/>
+          </a:bodyPr>
+          <a:lstStyle/>
+          <a:p>
+            <a:pPr algn="l">
+              <a:spcAft>
+                <a:spcPts val="0"/>
+              </a:spcAft>
+            </a:pPr>
+            <a:r>
+              <a:rPr sz="900" b="0" i="0">
+                <a:solidFill>
+                  <a:srgbClr val="4A5A7A"/>
+                </a:solidFill>
+                <a:latin typeface="맑은 고딕"/>
+                <a:ea typeface="맑은 고딕"/>
+              </a:rPr>
+              <a:t>처리 시작 때 표에서 뺌</a:t>
             </a:r>
           </a:p>
         </p:txBody>
       </p:sp>
       <p:pic>
         <p:nvPicPr>
-          <p:cNvPr id="36" name="Picture 35" descr="ui_score_p2.png"/>
+          <p:cNvPr id="52" name="Picture 51" descr="ui_score_p2.png"/>
           <p:cNvPicPr>
             <a:picLocks noChangeAspect="1"/>
           </p:cNvPicPr>
@@ -32258,14 +32934,14 @@
       </p:pic>
       <p:sp>
         <p:nvSpPr>
-          <p:cNvPr id="37" name="TextBox 36"/>
+          <p:cNvPr id="53" name="TextBox 52"/>
           <p:cNvSpPr txBox="1"/>
           <p:nvPr/>
         </p:nvSpPr>
         <p:spPr>
           <a:xfrm>
             <a:off x="7589520" y="5514672"/>
-            <a:ext cx="3959352" cy="457200"/>
+            <a:ext cx="3959352" cy="640080"/>
           </a:xfrm>
           <a:prstGeom prst="rect">
             <a:avLst/>
@@ -32309,6 +32985,23 @@
                 <a:ea typeface="맑은 고딕"/>
               </a:rPr>
               <a:t>임시 → 확정 (5) → 메모리 → 다시 확정 (MemoryScore 0)</a:t>
+            </a:r>
+          </a:p>
+          <a:p>
+            <a:pPr algn="l">
+              <a:spcAft>
+                <a:spcPts val="0"/>
+              </a:spcAft>
+            </a:pPr>
+            <a:r>
+              <a:rPr sz="1000" b="0" i="0">
+                <a:solidFill>
+                  <a:srgbClr val="4A5A7A"/>
+                </a:solidFill>
+                <a:latin typeface="맑은 고딕"/>
+                <a:ea typeface="맑은 고딕"/>
+              </a:rPr>
+              <a:t>트랙 ID 100 ~ 454 · 플롯 ID 10000 ~ 18119 (과제 범위 안)</a:t>
             </a:r>
           </a:p>
         </p:txBody>

--- a/Part5_Track_Init_Mgmt/ref/산출물/Chapter5_TrackInitMgmt.pptx
+++ b/Part5_Track_Init_Mgmt/ref/산출물/Chapter5_TrackInitMgmt.pptx
@@ -1630,6 +1630,11 @@
               <a:t>오른쪽은 스캔 701 시점의 실행 화면입니다. 위쪽이 2D와 3D 그림, 왼쪽 아래가 송수신과 트랙 요약, 오른쪽 아래가 현재 스캔의 트랙 표입니다. 플롯 메시지 1,160개를 모두 송수신해 처리한 것을 확인했습니다.</a:t>
             </a:r>
           </a:p>
+          <a:p>
+            <a:r>
+              <a:t>왼쪽 아래에는 결과 그림을 만든 방법을 정리했습니다. 파란 표시는 TargetSimUI를 실행해 화면을 캡처한 그림이고, 초록 표시는 같은 결과를 CSV로 저장해 Python으로 그린 그림입니다. 이어지는 슬라이드의 그림 아래에도 같은 표시를 붙였습니다.</a:t>
+            </a:r>
+          </a:p>
         </p:txBody>
       </p:sp>
       <p:sp>
@@ -1697,7 +1702,7 @@
           <a:lstStyle/>
           <a:p>
             <a:r>
-              <a:t>시뮬레이션 중간인 스캔 701, 70.1초 시점의 화면입니다. 과제의 결과 화면 조건대로 True, Plot, Track 심볼을 한 그림에 함께 표시했습니다.</a:t>
+              <a:t>시뮬레이션 중간인 스캔 701, 70.1초 시점의 화면입니다. 이 그림은 구현한 TargetSimUI의 2D, 3D 보기 화면을 캡처한 것으로, 그림 영역만 잘라 크게 보였고 다른 편집은 하지 않았습니다. 과제의 결과 화면 조건대로 True, Plot, Track 심볼을 프로그램이 한 그림에 함께 그립니다.</a:t>
             </a:r>
           </a:p>
           <a:p>
@@ -1712,7 +1717,7 @@
           </a:p>
           <a:p>
             <a:r>
-              <a:t>아래 기호는 화면 범례와 같습니다.</a:t>
+              <a:t>아래 칸은 그림의 기호와, 프로그램이 그 기호를 그릴 때 쓰는 데이터입니다. 참값 궤적은 과제 3의 궤적 계산 결과로, 플롯과 클러터는 측정 모의 결과로 그리고, 이번 스캔의 큰 점은 데이터 처리 쓰레드가 UDP로 받은 플롯입니다. 트랙 심볼은 프로그램 화면 아래쪽 트랙 표와 같은 값으로 그립니다. 그리는 코드는 TrajectoryPlot.cpp입니다.</a:t>
             </a:r>
           </a:p>
         </p:txBody>
@@ -1815,6 +1820,11 @@
               <a:t>오른쪽 아래 트랙 표에서도 451은 임시 상태에 점수 2, 450은 삭제 상태에 점수 0인 것을 확인할 수 있습니다.</a:t>
             </a:r>
           </a:p>
+          <a:p>
+            <a:r>
+              <a:t>이 그림은 화면 캡처가 아니라 결과 데이터로 그린 그림입니다. 같은 Core 코드를 실행해 스캔마다 받은 플롯과 트랙 표를 CSV로 저장했고, 그중 스캔 1152부터 1154까지의 값을 Python으로 그렸습니다. CSV 값은 프로그램의 트랙 표와 같습니다. 스캔 701과 1159에서 트랙 ID, 상태, 점수, 위치, 속도를 대조해 확인했습니다.</a:t>
+            </a:r>
+          </a:p>
         </p:txBody>
       </p:sp>
       <p:sp>
@@ -1887,7 +1897,7 @@
           </a:p>
           <a:p>
             <a:r>
-              <a:t>왼쪽 위 그림은 처음 10초 동안 생긴 트랙 22개를 줄 하나씩 그린 것입니다. 칸 하나가 스캔 하나이고, 주황 칸 두 개가 임시 상태, 회색 칸 하나가 삭제 상태입니다.</a:t>
+              <a:t>왼쪽 위 그림은 저장한 트랙 CSV에서 처음 10초 동안 생긴 트랙 22개를 골라 줄 하나씩 그린 것입니다. 칸 하나가 스캔 하나이고, 주황 칸 두 개가 임시 상태, 회색 칸 하나가 삭제 상태입니다.</a:t>
             </a:r>
           </a:p>
           <a:p>
@@ -1902,7 +1912,7 @@
           </a:p>
           <a:p>
             <a:r>
-              <a:t>연관이 없기 때문에 시뮬레이션에서는 확정과 메모리 상태가 나타나지 않습니다. 이 두 상태는 오른쪽의 스코어 확인 창으로 확인했습니다. Assigned_Flag 순서를 입력하면 코어의 스코어 함수를 그대로 호출해 결과를 표시합니다. 1, 1, 1을 입력하면 TrackScore 5에서 확정되고, 0, 0이 이어지면 메모리 트랙으로 전환되며, 다시 1이 들어오면 바로 확정으로 돌아가고 MemoryScore가 0이 됩니다.</a:t>
+              <a:t>연관이 없기 때문에 시뮬레이션에서는 확정과 메모리 상태가 나타나지 않습니다. 이 두 상태는 오른쪽의 스코어 확인 창으로 확인했고, 이 창은 프로그램 화면을 캡처한 것입니다. Assigned_Flag 순서를 입력하면 코어의 스코어 함수를 그대로 호출해 결과를 표시합니다. 1, 1, 1을 입력하면 TrackScore 5에서 확정되고, 0, 0이 이어지면 메모리 트랙으로 전환되며, 다시 1이 들어오면 바로 확정으로 돌아가고 MemoryScore가 0이 됩니다.</a:t>
             </a:r>
           </a:p>
           <a:p>
@@ -1977,7 +1987,7 @@
           <a:lstStyle/>
           <a:p>
             <a:r>
-              <a:t>마지막으로 시뮬레이션을 끝까지 실행한 화면입니다. 스캔 1159, 115.9초 시점입니다.</a:t>
+              <a:t>마지막으로 시뮬레이션을 끝까지 실행한 화면입니다. 스캔 1159, 115.9초 시점의 TargetSimUI 화면을 캡처했습니다.</a:t>
             </a:r>
           </a:p>
           <a:p>
@@ -30018,9 +30028,287 @@
           </a:p>
         </p:txBody>
       </p:sp>
+      <p:sp>
+        <p:nvSpPr>
+          <p:cNvPr id="50" name="Rounded Rectangle 49"/>
+          <p:cNvSpPr/>
+          <p:nvPr/>
+        </p:nvSpPr>
+        <p:spPr>
+          <a:xfrm>
+            <a:off x="640080" y="5468112"/>
+            <a:ext cx="4050791" cy="786384"/>
+          </a:xfrm>
+          <a:prstGeom prst="roundRect">
+            <a:avLst>
+              <a:gd name="adj" fmla="val 8000"/>
+            </a:avLst>
+          </a:prstGeom>
+          <a:solidFill>
+            <a:srgbClr val="F7F9FC"/>
+          </a:solidFill>
+          <a:ln w="9525">
+            <a:solidFill>
+              <a:srgbClr val="D2D9E5"/>
+            </a:solidFill>
+          </a:ln>
+          <a:effectLst/>
+        </p:spPr>
+        <p:style>
+          <a:lnRef idx="1">
+            <a:schemeClr val="accent1"/>
+          </a:lnRef>
+          <a:fillRef idx="3">
+            <a:schemeClr val="accent1"/>
+          </a:fillRef>
+          <a:effectRef idx="2">
+            <a:schemeClr val="accent1"/>
+          </a:effectRef>
+          <a:fontRef idx="minor">
+            <a:schemeClr val="lt1"/>
+          </a:fontRef>
+        </p:style>
+        <p:txBody>
+          <a:bodyPr rtlCol="0" anchor="ctr"/>
+          <a:lstStyle/>
+          <a:p/>
+        </p:txBody>
+      </p:sp>
+      <p:sp>
+        <p:nvSpPr>
+          <p:cNvPr id="51" name="TextBox 50"/>
+          <p:cNvSpPr txBox="1"/>
+          <p:nvPr/>
+        </p:nvSpPr>
+        <p:spPr>
+          <a:xfrm>
+            <a:off x="777240" y="5522976"/>
+            <a:ext cx="3794760" cy="219456"/>
+          </a:xfrm>
+          <a:prstGeom prst="rect">
+            <a:avLst/>
+          </a:prstGeom>
+          <a:noFill/>
+        </p:spPr>
+        <p:txBody>
+          <a:bodyPr wrap="square" lIns="0" rIns="0" tIns="0" bIns="0" anchor="t">
+            <a:spAutoFit/>
+          </a:bodyPr>
+          <a:lstStyle/>
+          <a:p>
+            <a:pPr algn="l">
+              <a:spcAft>
+                <a:spcPts val="0"/>
+              </a:spcAft>
+            </a:pPr>
+            <a:r>
+              <a:rPr sz="1050" b="1" i="0">
+                <a:solidFill>
+                  <a:srgbClr val="1B2740"/>
+                </a:solidFill>
+                <a:latin typeface="맑은 고딕"/>
+                <a:ea typeface="맑은 고딕"/>
+              </a:rPr>
+              <a:t>결과 그림을 만든 방법 (그림 아래에 표시)</a:t>
+            </a:r>
+          </a:p>
+        </p:txBody>
+      </p:sp>
+      <p:sp>
+        <p:nvSpPr>
+          <p:cNvPr id="52" name="Rounded Rectangle 51"/>
+          <p:cNvSpPr/>
+          <p:nvPr/>
+        </p:nvSpPr>
+        <p:spPr>
+          <a:xfrm>
+            <a:off x="777240" y="5769864"/>
+            <a:ext cx="841248" cy="201168"/>
+          </a:xfrm>
+          <a:prstGeom prst="roundRect">
+            <a:avLst>
+              <a:gd name="adj" fmla="val 50000"/>
+            </a:avLst>
+          </a:prstGeom>
+          <a:solidFill>
+            <a:srgbClr val="2563EB"/>
+          </a:solidFill>
+          <a:ln>
+            <a:noFill/>
+          </a:ln>
+          <a:effectLst/>
+        </p:spPr>
+        <p:style>
+          <a:lnRef idx="1">
+            <a:schemeClr val="accent1"/>
+          </a:lnRef>
+          <a:fillRef idx="3">
+            <a:schemeClr val="accent1"/>
+          </a:fillRef>
+          <a:effectRef idx="2">
+            <a:schemeClr val="accent1"/>
+          </a:effectRef>
+          <a:fontRef idx="minor">
+            <a:schemeClr val="lt1"/>
+          </a:fontRef>
+        </p:style>
+        <p:txBody>
+          <a:bodyPr rtlCol="0" anchor="ctr" lIns="36576" rIns="36576" tIns="0" bIns="0" wrap="square"/>
+          <a:lstStyle/>
+          <a:p>
+            <a:pPr algn="ctr"/>
+            <a:r>
+              <a:rPr sz="850" b="1" i="0">
+                <a:solidFill>
+                  <a:srgbClr val="FFFFFF"/>
+                </a:solidFill>
+                <a:latin typeface="맑은 고딕"/>
+                <a:ea typeface="맑은 고딕"/>
+              </a:rPr>
+              <a:t>프로그램 화면</a:t>
+            </a:r>
+          </a:p>
+        </p:txBody>
+      </p:sp>
+      <p:sp>
+        <p:nvSpPr>
+          <p:cNvPr id="53" name="TextBox 52"/>
+          <p:cNvSpPr txBox="1"/>
+          <p:nvPr/>
+        </p:nvSpPr>
+        <p:spPr>
+          <a:xfrm>
+            <a:off x="1691640" y="5760720"/>
+            <a:ext cx="2880360" cy="219456"/>
+          </a:xfrm>
+          <a:prstGeom prst="rect">
+            <a:avLst/>
+          </a:prstGeom>
+          <a:noFill/>
+        </p:spPr>
+        <p:txBody>
+          <a:bodyPr wrap="square" lIns="0" rIns="0" tIns="0" bIns="0" anchor="ctr">
+            <a:spAutoFit/>
+          </a:bodyPr>
+          <a:lstStyle/>
+          <a:p>
+            <a:pPr algn="l">
+              <a:spcAft>
+                <a:spcPts val="0"/>
+              </a:spcAft>
+            </a:pPr>
+            <a:r>
+              <a:rPr sz="950" b="0" i="0">
+                <a:solidFill>
+                  <a:srgbClr val="4A5A7A"/>
+                </a:solidFill>
+                <a:latin typeface="맑은 고딕"/>
+                <a:ea typeface="맑은 고딕"/>
+              </a:rPr>
+              <a:t>TargetSimUI 를 실행해 화면을 캡처</a:t>
+            </a:r>
+          </a:p>
+        </p:txBody>
+      </p:sp>
+      <p:sp>
+        <p:nvSpPr>
+          <p:cNvPr id="54" name="Rounded Rectangle 53"/>
+          <p:cNvSpPr/>
+          <p:nvPr/>
+        </p:nvSpPr>
+        <p:spPr>
+          <a:xfrm>
+            <a:off x="777240" y="5998464"/>
+            <a:ext cx="841248" cy="201168"/>
+          </a:xfrm>
+          <a:prstGeom prst="roundRect">
+            <a:avLst>
+              <a:gd name="adj" fmla="val 50000"/>
+            </a:avLst>
+          </a:prstGeom>
+          <a:solidFill>
+            <a:srgbClr val="059669"/>
+          </a:solidFill>
+          <a:ln>
+            <a:noFill/>
+          </a:ln>
+          <a:effectLst/>
+        </p:spPr>
+        <p:style>
+          <a:lnRef idx="1">
+            <a:schemeClr val="accent1"/>
+          </a:lnRef>
+          <a:fillRef idx="3">
+            <a:schemeClr val="accent1"/>
+          </a:fillRef>
+          <a:effectRef idx="2">
+            <a:schemeClr val="accent1"/>
+          </a:effectRef>
+          <a:fontRef idx="minor">
+            <a:schemeClr val="lt1"/>
+          </a:fontRef>
+        </p:style>
+        <p:txBody>
+          <a:bodyPr rtlCol="0" anchor="ctr" lIns="36576" rIns="36576" tIns="0" bIns="0" wrap="square"/>
+          <a:lstStyle/>
+          <a:p>
+            <a:pPr algn="ctr"/>
+            <a:r>
+              <a:rPr sz="850" b="1" i="0">
+                <a:solidFill>
+                  <a:srgbClr val="FFFFFF"/>
+                </a:solidFill>
+                <a:latin typeface="맑은 고딕"/>
+                <a:ea typeface="맑은 고딕"/>
+              </a:rPr>
+              <a:t>결과 데이터</a:t>
+            </a:r>
+          </a:p>
+        </p:txBody>
+      </p:sp>
+      <p:sp>
+        <p:nvSpPr>
+          <p:cNvPr id="55" name="TextBox 54"/>
+          <p:cNvSpPr txBox="1"/>
+          <p:nvPr/>
+        </p:nvSpPr>
+        <p:spPr>
+          <a:xfrm>
+            <a:off x="1691640" y="5989320"/>
+            <a:ext cx="2880360" cy="219456"/>
+          </a:xfrm>
+          <a:prstGeom prst="rect">
+            <a:avLst/>
+          </a:prstGeom>
+          <a:noFill/>
+        </p:spPr>
+        <p:txBody>
+          <a:bodyPr wrap="square" lIns="0" rIns="0" tIns="0" bIns="0" anchor="ctr">
+            <a:spAutoFit/>
+          </a:bodyPr>
+          <a:lstStyle/>
+          <a:p>
+            <a:pPr algn="l">
+              <a:spcAft>
+                <a:spcPts val="0"/>
+              </a:spcAft>
+            </a:pPr>
+            <a:r>
+              <a:rPr sz="950" b="0" i="0">
+                <a:solidFill>
+                  <a:srgbClr val="4A5A7A"/>
+                </a:solidFill>
+                <a:latin typeface="맑은 고딕"/>
+                <a:ea typeface="맑은 고딕"/>
+              </a:rPr>
+              <a:t>같은 결과를 CSV 로 저장해 Python 으로 그림</a:t>
+            </a:r>
+          </a:p>
+        </p:txBody>
+      </p:sp>
       <p:pic>
         <p:nvPicPr>
-          <p:cNvPr id="50" name="Picture 49" descr="ui_s701_both.png"/>
+          <p:cNvPr id="56" name="Picture 55" descr="ui_s701_both.png"/>
           <p:cNvPicPr>
             <a:picLocks noChangeAspect="1"/>
           </p:cNvPicPr>
@@ -30047,36 +30335,6 @@
           </a:ln>
         </p:spPr>
       </p:pic>
-      <p:sp>
-        <p:nvSpPr>
-          <p:cNvPr id="51" name="TextBox 50"/>
-          <p:cNvSpPr txBox="1"/>
-          <p:nvPr/>
-        </p:nvSpPr>
-        <p:spPr>
-          <a:xfrm>
-            <a:off x="4892040" y="6236208"/>
-            <a:ext cx="6656832" cy="228600"/>
-          </a:xfrm>
-          <a:prstGeom prst="rect">
-            <a:avLst/>
-          </a:prstGeom>
-          <a:noFill/>
-        </p:spPr>
-        <p:txBody>
-          <a:bodyPr wrap="square" lIns="0" rIns="0" tIns="0" bIns="0" anchor="t">
-            <a:spAutoFit/>
-          </a:bodyPr>
-          <a:lstStyle/>
-          <a:p>
-            <a:pPr algn="l">
-              <a:spcAft>
-                <a:spcPts val="0"/>
-              </a:spcAft>
-            </a:pPr>
-          </a:p>
-        </p:txBody>
-      </p:sp>
     </p:spTree>
   </p:cSld>
   <p:clrMapOvr>
@@ -30174,7 +30432,7 @@
                 <a:latin typeface="맑은 고딕"/>
                 <a:ea typeface="맑은 고딕"/>
               </a:rPr>
-              <a:t>스캔 701 (70.1 s) 화면. 참값 궤적, 지금까지의 플롯 · 클러터, 지금 스캔의 트랙 심볼을 한 그림에 겹쳐 그립니다.</a:t>
+              <a:t>TargetSimUI 의 2D · 3D 보기가 스캔 701 (70.1 s) 에 그린 화면입니다. 그림 영역만 잘라 키웠고 다른 편집은 하지 않았습니다.</a:t>
             </a:r>
           </a:p>
         </p:txBody>
@@ -30236,15 +30494,15 @@
           <p:nvPr/>
         </p:nvPicPr>
         <p:blipFill>
-          <a:blip r:embed="rId2"/>
+          <a:blip r:embed="rId5"/>
           <a:stretch>
             <a:fillRect/>
           </a:stretch>
         </p:blipFill>
         <p:spPr>
           <a:xfrm>
-            <a:off x="640080" y="2286000"/>
-            <a:ext cx="5349240" cy="3410140"/>
+            <a:off x="640080" y="2240280"/>
+            <a:ext cx="5029200" cy="3206115"/>
           </a:xfrm>
           <a:prstGeom prst="rect">
             <a:avLst/>
@@ -30265,15 +30523,15 @@
           <p:nvPr/>
         </p:nvPicPr>
         <p:blipFill>
-          <a:blip r:embed="rId3"/>
+          <a:blip r:embed="rId6"/>
           <a:stretch>
             <a:fillRect/>
           </a:stretch>
         </p:blipFill>
         <p:spPr>
           <a:xfrm>
-            <a:off x="6199632" y="2286000"/>
-            <a:ext cx="5349240" cy="3387852"/>
+            <a:off x="6519672" y="2240280"/>
+            <a:ext cx="5029200" cy="3185160"/>
           </a:xfrm>
           <a:prstGeom prst="rect">
             <a:avLst/>
@@ -30287,14 +30545,70 @@
       </p:pic>
       <p:sp>
         <p:nvSpPr>
-          <p:cNvPr id="28" name="TextBox 27"/>
+          <p:cNvPr id="28" name="Rounded Rectangle 27"/>
+          <p:cNvSpPr/>
+          <p:nvPr/>
+        </p:nvSpPr>
+        <p:spPr>
+          <a:xfrm>
+            <a:off x="640080" y="5492115"/>
+            <a:ext cx="841248" cy="201168"/>
+          </a:xfrm>
+          <a:prstGeom prst="roundRect">
+            <a:avLst>
+              <a:gd name="adj" fmla="val 50000"/>
+            </a:avLst>
+          </a:prstGeom>
+          <a:solidFill>
+            <a:srgbClr val="2563EB"/>
+          </a:solidFill>
+          <a:ln>
+            <a:noFill/>
+          </a:ln>
+          <a:effectLst/>
+        </p:spPr>
+        <p:style>
+          <a:lnRef idx="1">
+            <a:schemeClr val="accent1"/>
+          </a:lnRef>
+          <a:fillRef idx="3">
+            <a:schemeClr val="accent1"/>
+          </a:fillRef>
+          <a:effectRef idx="2">
+            <a:schemeClr val="accent1"/>
+          </a:effectRef>
+          <a:fontRef idx="minor">
+            <a:schemeClr val="lt1"/>
+          </a:fontRef>
+        </p:style>
+        <p:txBody>
+          <a:bodyPr rtlCol="0" anchor="ctr" lIns="36576" rIns="36576" tIns="0" bIns="0" wrap="square"/>
+          <a:lstStyle/>
+          <a:p>
+            <a:pPr algn="ctr"/>
+            <a:r>
+              <a:rPr sz="850" b="1" i="0">
+                <a:solidFill>
+                  <a:srgbClr val="FFFFFF"/>
+                </a:solidFill>
+                <a:latin typeface="맑은 고딕"/>
+                <a:ea typeface="맑은 고딕"/>
+              </a:rPr>
+              <a:t>프로그램 화면</a:t>
+            </a:r>
+          </a:p>
+        </p:txBody>
+      </p:sp>
+      <p:sp>
+        <p:nvSpPr>
+          <p:cNvPr id="29" name="TextBox 28"/>
           <p:cNvSpPr txBox="1"/>
           <p:nvPr/>
         </p:nvSpPr>
         <p:spPr>
           <a:xfrm>
-            <a:off x="640080" y="5741860"/>
-            <a:ext cx="5349240" cy="228600"/>
+            <a:off x="1554480" y="5482971"/>
+            <a:ext cx="4114800" cy="219456"/>
           </a:xfrm>
           <a:prstGeom prst="rect">
             <a:avLst/>
@@ -30302,7 +30616,7 @@
           <a:noFill/>
         </p:spPr>
         <p:txBody>
-          <a:bodyPr wrap="square" lIns="0" rIns="0" tIns="0" bIns="0" anchor="t">
+          <a:bodyPr wrap="square" lIns="0" rIns="0" tIns="0" bIns="0" anchor="ctr">
             <a:spAutoFit/>
           </a:bodyPr>
           <a:lstStyle/>
@@ -30313,28 +30627,84 @@
               </a:spcAft>
             </a:pPr>
             <a:r>
-              <a:rPr sz="1000" b="0" i="0">
+              <a:rPr sz="950" b="0" i="0">
                 <a:solidFill>
                   <a:srgbClr val="4A5A7A"/>
                 </a:solidFill>
                 <a:latin typeface="맑은 고딕"/>
                 <a:ea typeface="맑은 고딕"/>
               </a:rPr>
-              <a:t>2D: 위경도 격자 위 동-북 평면</a:t>
-            </a:r>
-          </a:p>
-        </p:txBody>
-      </p:sp>
-      <p:sp>
-        <p:nvSpPr>
-          <p:cNvPr id="29" name="TextBox 28"/>
+              <a:t>2D 보기: 위경도 격자 위 동-북 평면</a:t>
+            </a:r>
+          </a:p>
+        </p:txBody>
+      </p:sp>
+      <p:sp>
+        <p:nvSpPr>
+          <p:cNvPr id="30" name="Rounded Rectangle 29"/>
+          <p:cNvSpPr/>
+          <p:nvPr/>
+        </p:nvSpPr>
+        <p:spPr>
+          <a:xfrm>
+            <a:off x="6519672" y="5492115"/>
+            <a:ext cx="841248" cy="201168"/>
+          </a:xfrm>
+          <a:prstGeom prst="roundRect">
+            <a:avLst>
+              <a:gd name="adj" fmla="val 50000"/>
+            </a:avLst>
+          </a:prstGeom>
+          <a:solidFill>
+            <a:srgbClr val="2563EB"/>
+          </a:solidFill>
+          <a:ln>
+            <a:noFill/>
+          </a:ln>
+          <a:effectLst/>
+        </p:spPr>
+        <p:style>
+          <a:lnRef idx="1">
+            <a:schemeClr val="accent1"/>
+          </a:lnRef>
+          <a:fillRef idx="3">
+            <a:schemeClr val="accent1"/>
+          </a:fillRef>
+          <a:effectRef idx="2">
+            <a:schemeClr val="accent1"/>
+          </a:effectRef>
+          <a:fontRef idx="minor">
+            <a:schemeClr val="lt1"/>
+          </a:fontRef>
+        </p:style>
+        <p:txBody>
+          <a:bodyPr rtlCol="0" anchor="ctr" lIns="36576" rIns="36576" tIns="0" bIns="0" wrap="square"/>
+          <a:lstStyle/>
+          <a:p>
+            <a:pPr algn="ctr"/>
+            <a:r>
+              <a:rPr sz="850" b="1" i="0">
+                <a:solidFill>
+                  <a:srgbClr val="FFFFFF"/>
+                </a:solidFill>
+                <a:latin typeface="맑은 고딕"/>
+                <a:ea typeface="맑은 고딕"/>
+              </a:rPr>
+              <a:t>프로그램 화면</a:t>
+            </a:r>
+          </a:p>
+        </p:txBody>
+      </p:sp>
+      <p:sp>
+        <p:nvSpPr>
+          <p:cNvPr id="31" name="TextBox 30"/>
           <p:cNvSpPr txBox="1"/>
           <p:nvPr/>
         </p:nvSpPr>
         <p:spPr>
           <a:xfrm>
-            <a:off x="6199632" y="5741860"/>
-            <a:ext cx="5349240" cy="228600"/>
+            <a:off x="7434072" y="5482971"/>
+            <a:ext cx="4114800" cy="219456"/>
           </a:xfrm>
           <a:prstGeom prst="rect">
             <a:avLst/>
@@ -30342,7 +30712,7 @@
           <a:noFill/>
         </p:spPr>
         <p:txBody>
-          <a:bodyPr wrap="square" lIns="0" rIns="0" tIns="0" bIns="0" anchor="t">
+          <a:bodyPr wrap="square" lIns="0" rIns="0" tIns="0" bIns="0" anchor="ctr">
             <a:spAutoFit/>
           </a:bodyPr>
           <a:lstStyle/>
@@ -30353,28 +30723,143 @@
               </a:spcAft>
             </a:pPr>
             <a:r>
-              <a:rPr sz="1000" b="0" i="0">
+              <a:rPr sz="950" b="0" i="0">
                 <a:solidFill>
                   <a:srgbClr val="4A5A7A"/>
                 </a:solidFill>
                 <a:latin typeface="맑은 고딕"/>
                 <a:ea typeface="맑은 고딕"/>
               </a:rPr>
-              <a:t>3D: 동-북-고도 (고도 2 배), 끌어서 회전</a:t>
-            </a:r>
-          </a:p>
-        </p:txBody>
-      </p:sp>
-      <p:sp>
-        <p:nvSpPr>
-          <p:cNvPr id="30" name="TextBox 29"/>
+              <a:t>3D 보기: 동-북-고도 (고도 2 배), 끌어서 회전</a:t>
+            </a:r>
+          </a:p>
+        </p:txBody>
+      </p:sp>
+      <p:sp>
+        <p:nvSpPr>
+          <p:cNvPr id="32" name="Rounded Rectangle 31"/>
+          <p:cNvSpPr/>
+          <p:nvPr/>
+        </p:nvSpPr>
+        <p:spPr>
+          <a:xfrm>
+            <a:off x="640080" y="5775579"/>
+            <a:ext cx="1188720" cy="493776"/>
+          </a:xfrm>
+          <a:prstGeom prst="roundRect">
+            <a:avLst>
+              <a:gd name="adj" fmla="val 12000"/>
+            </a:avLst>
+          </a:prstGeom>
+          <a:solidFill>
+            <a:srgbClr val="EBF2FE"/>
+          </a:solidFill>
+          <a:ln>
+            <a:noFill/>
+          </a:ln>
+          <a:effectLst/>
+        </p:spPr>
+        <p:style>
+          <a:lnRef idx="1">
+            <a:schemeClr val="accent1"/>
+          </a:lnRef>
+          <a:fillRef idx="3">
+            <a:schemeClr val="accent1"/>
+          </a:fillRef>
+          <a:effectRef idx="2">
+            <a:schemeClr val="accent1"/>
+          </a:effectRef>
+          <a:fontRef idx="minor">
+            <a:schemeClr val="lt1"/>
+          </a:fontRef>
+        </p:style>
+        <p:txBody>
+          <a:bodyPr rtlCol="0" anchor="ctr" lIns="36576" rIns="36576" tIns="0" bIns="0" wrap="square"/>
+          <a:lstStyle/>
+          <a:p>
+            <a:pPr algn="ctr"/>
+            <a:r>
+              <a:rPr sz="1000" b="1" i="0">
+                <a:solidFill>
+                  <a:srgbClr val="2563EB"/>
+                </a:solidFill>
+                <a:latin typeface="맑은 고딕"/>
+                <a:ea typeface="맑은 고딕"/>
+              </a:rPr>
+              <a:t>그리는 데이터</a:t>
+            </a:r>
+          </a:p>
+          <a:p>
+            <a:pPr algn="ctr"/>
+            <a:r>
+              <a:rPr sz="850" b="0" i="0">
+                <a:solidFill>
+                  <a:srgbClr val="4A5A7A"/>
+                </a:solidFill>
+                <a:latin typeface="맑은 고딕"/>
+                <a:ea typeface="맑은 고딕"/>
+              </a:rPr>
+              <a:t>TrajectoryPlot.cpp</a:t>
+            </a:r>
+          </a:p>
+        </p:txBody>
+      </p:sp>
+      <p:sp>
+        <p:nvSpPr>
+          <p:cNvPr id="33" name="Rounded Rectangle 32"/>
+          <p:cNvSpPr/>
+          <p:nvPr/>
+        </p:nvSpPr>
+        <p:spPr>
+          <a:xfrm>
+            <a:off x="1938528" y="5775579"/>
+            <a:ext cx="3130296" cy="493776"/>
+          </a:xfrm>
+          <a:prstGeom prst="roundRect">
+            <a:avLst>
+              <a:gd name="adj" fmla="val 12000"/>
+            </a:avLst>
+          </a:prstGeom>
+          <a:solidFill>
+            <a:srgbClr val="FFFFFF"/>
+          </a:solidFill>
+          <a:ln w="9525">
+            <a:solidFill>
+              <a:srgbClr val="D2D9E5"/>
+            </a:solidFill>
+          </a:ln>
+          <a:effectLst/>
+        </p:spPr>
+        <p:style>
+          <a:lnRef idx="1">
+            <a:schemeClr val="accent1"/>
+          </a:lnRef>
+          <a:fillRef idx="3">
+            <a:schemeClr val="accent1"/>
+          </a:fillRef>
+          <a:effectRef idx="2">
+            <a:schemeClr val="accent1"/>
+          </a:effectRef>
+          <a:fontRef idx="minor">
+            <a:schemeClr val="lt1"/>
+          </a:fontRef>
+        </p:style>
+        <p:txBody>
+          <a:bodyPr rtlCol="0" anchor="ctr"/>
+          <a:lstStyle/>
+          <a:p/>
+        </p:txBody>
+      </p:sp>
+      <p:sp>
+        <p:nvSpPr>
+          <p:cNvPr id="34" name="TextBox 33"/>
           <p:cNvSpPr txBox="1"/>
           <p:nvPr/>
         </p:nvSpPr>
         <p:spPr>
           <a:xfrm>
-            <a:off x="640080" y="5998464"/>
-            <a:ext cx="2057400" cy="237744"/>
+            <a:off x="2048256" y="5812155"/>
+            <a:ext cx="2947416" cy="420624"/>
           </a:xfrm>
           <a:prstGeom prst="rect">
             <a:avLst/>
@@ -30382,14 +30867,14 @@
           <a:noFill/>
         </p:spPr>
         <p:txBody>
-          <a:bodyPr wrap="square" lIns="0" rIns="0" tIns="0" bIns="0" anchor="t">
+          <a:bodyPr wrap="square" lIns="0" rIns="0" tIns="0" bIns="0" anchor="ctr">
             <a:spAutoFit/>
           </a:bodyPr>
           <a:lstStyle/>
           <a:p>
             <a:pPr algn="l">
               <a:spcAft>
-                <a:spcPts val="0"/>
+                <a:spcPts val="100"/>
               </a:spcAft>
             </a:pPr>
             <a:r>
@@ -30400,21 +30885,79 @@
                 <a:latin typeface="맑은 고딕"/>
                 <a:ea typeface="맑은 고딕"/>
               </a:rPr>
-              <a:t>━ 참값 궤적 · ○ 시작점</a:t>
-            </a:r>
-          </a:p>
-        </p:txBody>
-      </p:sp>
-      <p:sp>
-        <p:nvSpPr>
-          <p:cNvPr id="31" name="TextBox 30"/>
+              <a:t>━ 참값 궤적   ○ 시작점</a:t>
+            </a:r>
+          </a:p>
+          <a:p>
+            <a:r>
+              <a:rPr sz="950" b="0" i="0">
+                <a:solidFill>
+                  <a:srgbClr val="4A5A7A"/>
+                </a:solidFill>
+                <a:latin typeface="맑은 고딕"/>
+                <a:ea typeface="맑은 고딕"/>
+              </a:rPr>
+              <a:t>궤적 계산 결과 (과제 3 표적 궤적 모의)</a:t>
+            </a:r>
+          </a:p>
+        </p:txBody>
+      </p:sp>
+      <p:sp>
+        <p:nvSpPr>
+          <p:cNvPr id="35" name="Rounded Rectangle 34"/>
+          <p:cNvSpPr/>
+          <p:nvPr/>
+        </p:nvSpPr>
+        <p:spPr>
+          <a:xfrm>
+            <a:off x="5178552" y="5775579"/>
+            <a:ext cx="3130296" cy="493776"/>
+          </a:xfrm>
+          <a:prstGeom prst="roundRect">
+            <a:avLst>
+              <a:gd name="adj" fmla="val 12000"/>
+            </a:avLst>
+          </a:prstGeom>
+          <a:solidFill>
+            <a:srgbClr val="FFFFFF"/>
+          </a:solidFill>
+          <a:ln w="9525">
+            <a:solidFill>
+              <a:srgbClr val="D2D9E5"/>
+            </a:solidFill>
+          </a:ln>
+          <a:effectLst/>
+        </p:spPr>
+        <p:style>
+          <a:lnRef idx="1">
+            <a:schemeClr val="accent1"/>
+          </a:lnRef>
+          <a:fillRef idx="3">
+            <a:schemeClr val="accent1"/>
+          </a:fillRef>
+          <a:effectRef idx="2">
+            <a:schemeClr val="accent1"/>
+          </a:effectRef>
+          <a:fontRef idx="minor">
+            <a:schemeClr val="lt1"/>
+          </a:fontRef>
+        </p:style>
+        <p:txBody>
+          <a:bodyPr rtlCol="0" anchor="ctr"/>
+          <a:lstStyle/>
+          <a:p/>
+        </p:txBody>
+      </p:sp>
+      <p:sp>
+        <p:nvSpPr>
+          <p:cNvPr id="36" name="TextBox 35"/>
           <p:cNvSpPr txBox="1"/>
           <p:nvPr/>
         </p:nvSpPr>
         <p:spPr>
           <a:xfrm>
-            <a:off x="2697480" y="5998464"/>
-            <a:ext cx="2414015" cy="237744"/>
+            <a:off x="5288280" y="5812155"/>
+            <a:ext cx="2947416" cy="420624"/>
           </a:xfrm>
           <a:prstGeom prst="rect">
             <a:avLst/>
@@ -30422,14 +30965,14 @@
           <a:noFill/>
         </p:spPr>
         <p:txBody>
-          <a:bodyPr wrap="square" lIns="0" rIns="0" tIns="0" bIns="0" anchor="t">
+          <a:bodyPr wrap="square" lIns="0" rIns="0" tIns="0" bIns="0" anchor="ctr">
             <a:spAutoFit/>
           </a:bodyPr>
           <a:lstStyle/>
           <a:p>
             <a:pPr algn="l">
               <a:spcAft>
-                <a:spcPts val="0"/>
+                <a:spcPts val="100"/>
               </a:spcAft>
             </a:pPr>
             <a:r>
@@ -30440,21 +30983,79 @@
                 <a:latin typeface="맑은 고딕"/>
                 <a:ea typeface="맑은 고딕"/>
               </a:rPr>
-              <a:t>● 플롯 (큰 점 = 지금 스캔)</a:t>
-            </a:r>
-          </a:p>
-        </p:txBody>
-      </p:sp>
-      <p:sp>
-        <p:nvSpPr>
-          <p:cNvPr id="32" name="TextBox 31"/>
+              <a:t>● 플롯 (큰 점 = 이번 스캔)   · 클러터</a:t>
+            </a:r>
+          </a:p>
+          <a:p>
+            <a:r>
+              <a:rPr sz="950" b="0" i="0">
+                <a:solidFill>
+                  <a:srgbClr val="4A5A7A"/>
+                </a:solidFill>
+                <a:latin typeface="맑은 고딕"/>
+                <a:ea typeface="맑은 고딕"/>
+              </a:rPr>
+              <a:t>측정 모의 결과, 이번 스캔은 UDP 로 받은 플롯</a:t>
+            </a:r>
+          </a:p>
+        </p:txBody>
+      </p:sp>
+      <p:sp>
+        <p:nvSpPr>
+          <p:cNvPr id="37" name="Rounded Rectangle 36"/>
+          <p:cNvSpPr/>
+          <p:nvPr/>
+        </p:nvSpPr>
+        <p:spPr>
+          <a:xfrm>
+            <a:off x="8418576" y="5775579"/>
+            <a:ext cx="3130296" cy="493776"/>
+          </a:xfrm>
+          <a:prstGeom prst="roundRect">
+            <a:avLst>
+              <a:gd name="adj" fmla="val 12000"/>
+            </a:avLst>
+          </a:prstGeom>
+          <a:solidFill>
+            <a:srgbClr val="FFFFFF"/>
+          </a:solidFill>
+          <a:ln w="9525">
+            <a:solidFill>
+              <a:srgbClr val="D2D9E5"/>
+            </a:solidFill>
+          </a:ln>
+          <a:effectLst/>
+        </p:spPr>
+        <p:style>
+          <a:lnRef idx="1">
+            <a:schemeClr val="accent1"/>
+          </a:lnRef>
+          <a:fillRef idx="3">
+            <a:schemeClr val="accent1"/>
+          </a:fillRef>
+          <a:effectRef idx="2">
+            <a:schemeClr val="accent1"/>
+          </a:effectRef>
+          <a:fontRef idx="minor">
+            <a:schemeClr val="lt1"/>
+          </a:fontRef>
+        </p:style>
+        <p:txBody>
+          <a:bodyPr rtlCol="0" anchor="ctr"/>
+          <a:lstStyle/>
+          <a:p/>
+        </p:txBody>
+      </p:sp>
+      <p:sp>
+        <p:nvSpPr>
+          <p:cNvPr id="38" name="TextBox 37"/>
           <p:cNvSpPr txBox="1"/>
           <p:nvPr/>
         </p:nvSpPr>
         <p:spPr>
           <a:xfrm>
-            <a:off x="5111496" y="5998464"/>
-            <a:ext cx="868680" cy="237744"/>
+            <a:off x="8528304" y="5812155"/>
+            <a:ext cx="2947416" cy="420624"/>
           </a:xfrm>
           <a:prstGeom prst="rect">
             <a:avLst/>
@@ -30462,185 +31063,67 @@
           <a:noFill/>
         </p:spPr>
         <p:txBody>
-          <a:bodyPr wrap="square" lIns="0" rIns="0" tIns="0" bIns="0" anchor="t">
+          <a:bodyPr wrap="square" lIns="0" rIns="0" tIns="0" bIns="0" anchor="ctr">
             <a:spAutoFit/>
           </a:bodyPr>
           <a:lstStyle/>
           <a:p>
             <a:pPr algn="l">
               <a:spcAft>
-                <a:spcPts val="0"/>
+                <a:spcPts val="100"/>
               </a:spcAft>
             </a:pPr>
             <a:r>
               <a:rPr sz="1050" b="1" i="0">
                 <a:solidFill>
+                  <a:srgbClr val="D97706"/>
+                </a:solidFill>
+                <a:latin typeface="맑은 고딕"/>
+                <a:ea typeface="맑은 고딕"/>
+              </a:rPr>
+              <a:t>□ 임시  </a:t>
+            </a:r>
+            <a:r>
+              <a:rPr sz="1050" b="1" i="0">
+                <a:solidFill>
+                  <a:srgbClr val="059669"/>
+                </a:solidFill>
+                <a:latin typeface="맑은 고딕"/>
+                <a:ea typeface="맑은 고딕"/>
+              </a:rPr>
+              <a:t>■ 확정  </a:t>
+            </a:r>
+            <a:r>
+              <a:rPr sz="1050" b="1" i="0">
+                <a:solidFill>
+                  <a:srgbClr val="7C3AED"/>
+                </a:solidFill>
+                <a:latin typeface="맑은 고딕"/>
+                <a:ea typeface="맑은 고딕"/>
+              </a:rPr>
+              <a:t>⬚ 메모리  </a:t>
+            </a:r>
+            <a:r>
+              <a:rPr sz="1050" b="1" i="0">
+                <a:solidFill>
                   <a:srgbClr val="6B7280"/>
                 </a:solidFill>
                 <a:latin typeface="맑은 고딕"/>
                 <a:ea typeface="맑은 고딕"/>
               </a:rPr>
-              <a:t>· 클러터</a:t>
-            </a:r>
-          </a:p>
-        </p:txBody>
-      </p:sp>
-      <p:sp>
-        <p:nvSpPr>
-          <p:cNvPr id="33" name="TextBox 32"/>
-          <p:cNvSpPr txBox="1"/>
-          <p:nvPr/>
-        </p:nvSpPr>
-        <p:spPr>
-          <a:xfrm>
-            <a:off x="5980176" y="5998464"/>
-            <a:ext cx="749808" cy="237744"/>
-          </a:xfrm>
-          <a:prstGeom prst="rect">
-            <a:avLst/>
-          </a:prstGeom>
-          <a:noFill/>
-        </p:spPr>
-        <p:txBody>
-          <a:bodyPr wrap="square" lIns="0" rIns="0" tIns="0" bIns="0" anchor="t">
-            <a:spAutoFit/>
-          </a:bodyPr>
-          <a:lstStyle/>
-          <a:p>
-            <a:pPr algn="l">
-              <a:spcAft>
-                <a:spcPts val="0"/>
-              </a:spcAft>
-            </a:pPr>
-            <a:r>
-              <a:rPr sz="1050" b="1" i="0">
-                <a:solidFill>
-                  <a:srgbClr val="D97706"/>
-                </a:solidFill>
-                <a:latin typeface="맑은 고딕"/>
-                <a:ea typeface="맑은 고딕"/>
-              </a:rPr>
-              <a:t>□ 임시</a:t>
-            </a:r>
-          </a:p>
-        </p:txBody>
-      </p:sp>
-      <p:sp>
-        <p:nvSpPr>
-          <p:cNvPr id="34" name="TextBox 33"/>
-          <p:cNvSpPr txBox="1"/>
-          <p:nvPr/>
-        </p:nvSpPr>
-        <p:spPr>
-          <a:xfrm>
-            <a:off x="6729984" y="5998464"/>
-            <a:ext cx="749808" cy="237744"/>
-          </a:xfrm>
-          <a:prstGeom prst="rect">
-            <a:avLst/>
-          </a:prstGeom>
-          <a:noFill/>
-        </p:spPr>
-        <p:txBody>
-          <a:bodyPr wrap="square" lIns="0" rIns="0" tIns="0" bIns="0" anchor="t">
-            <a:spAutoFit/>
-          </a:bodyPr>
-          <a:lstStyle/>
-          <a:p>
-            <a:pPr algn="l">
-              <a:spcAft>
-                <a:spcPts val="0"/>
-              </a:spcAft>
-            </a:pPr>
-            <a:r>
-              <a:rPr sz="1050" b="1" i="0">
-                <a:solidFill>
-                  <a:srgbClr val="059669"/>
-                </a:solidFill>
-                <a:latin typeface="맑은 고딕"/>
-                <a:ea typeface="맑은 고딕"/>
-              </a:rPr>
-              <a:t>■ 확정</a:t>
-            </a:r>
-          </a:p>
-        </p:txBody>
-      </p:sp>
-      <p:sp>
-        <p:nvSpPr>
-          <p:cNvPr id="35" name="TextBox 34"/>
-          <p:cNvSpPr txBox="1"/>
-          <p:nvPr/>
-        </p:nvSpPr>
-        <p:spPr>
-          <a:xfrm>
-            <a:off x="7479792" y="5998464"/>
-            <a:ext cx="868680" cy="237744"/>
-          </a:xfrm>
-          <a:prstGeom prst="rect">
-            <a:avLst/>
-          </a:prstGeom>
-          <a:noFill/>
-        </p:spPr>
-        <p:txBody>
-          <a:bodyPr wrap="square" lIns="0" rIns="0" tIns="0" bIns="0" anchor="t">
-            <a:spAutoFit/>
-          </a:bodyPr>
-          <a:lstStyle/>
-          <a:p>
-            <a:pPr algn="l">
-              <a:spcAft>
-                <a:spcPts val="0"/>
-              </a:spcAft>
-            </a:pPr>
-            <a:r>
-              <a:rPr sz="1050" b="1" i="0">
-                <a:solidFill>
-                  <a:srgbClr val="7C3AED"/>
-                </a:solidFill>
-                <a:latin typeface="맑은 고딕"/>
-                <a:ea typeface="맑은 고딕"/>
-              </a:rPr>
-              <a:t>⬚ 메모리</a:t>
-            </a:r>
-          </a:p>
-        </p:txBody>
-      </p:sp>
-      <p:sp>
-        <p:nvSpPr>
-          <p:cNvPr id="36" name="TextBox 35"/>
-          <p:cNvSpPr txBox="1"/>
-          <p:nvPr/>
-        </p:nvSpPr>
-        <p:spPr>
-          <a:xfrm>
-            <a:off x="8348471" y="5998464"/>
-            <a:ext cx="749808" cy="237744"/>
-          </a:xfrm>
-          <a:prstGeom prst="rect">
-            <a:avLst/>
-          </a:prstGeom>
-          <a:noFill/>
-        </p:spPr>
-        <p:txBody>
-          <a:bodyPr wrap="square" lIns="0" rIns="0" tIns="0" bIns="0" anchor="t">
-            <a:spAutoFit/>
-          </a:bodyPr>
-          <a:lstStyle/>
-          <a:p>
-            <a:pPr algn="l">
-              <a:spcAft>
-                <a:spcPts val="0"/>
-              </a:spcAft>
-            </a:pPr>
-            <a:r>
-              <a:rPr sz="1050" b="1" i="0">
-                <a:solidFill>
-                  <a:srgbClr val="6B7280"/>
-                </a:solidFill>
-                <a:latin typeface="맑은 고딕"/>
-                <a:ea typeface="맑은 고딕"/>
-              </a:rPr>
               <a:t>⊠ 삭제</a:t>
+            </a:r>
+          </a:p>
+          <a:p>
+            <a:r>
+              <a:rPr sz="950" b="0" i="0">
+                <a:solidFill>
+                  <a:srgbClr val="4A5A7A"/>
+                </a:solidFill>
+                <a:latin typeface="맑은 고딕"/>
+                <a:ea typeface="맑은 고딕"/>
+              </a:rPr>
+              <a:t>트랙 표와 같은 값 (위치 · 속도 · 상태 · ID)</a:t>
             </a:r>
           </a:p>
         </p:txBody>
@@ -30804,7 +31287,7 @@
           <p:nvPr/>
         </p:nvPicPr>
         <p:blipFill>
-          <a:blip r:embed="rId2"/>
+          <a:blip r:embed="rId4"/>
           <a:stretch>
             <a:fillRect/>
           </a:stretch>
@@ -30812,7 +31295,7 @@
         <p:spPr>
           <a:xfrm>
             <a:off x="566928" y="2194560"/>
-            <a:ext cx="6035040" cy="3926910"/>
+            <a:ext cx="5806440" cy="3778163"/>
           </a:xfrm>
           <a:prstGeom prst="rect">
             <a:avLst/>
@@ -30821,7 +31304,103 @@
       </p:pic>
       <p:sp>
         <p:nvSpPr>
-          <p:cNvPr id="27" name="Oval 26"/>
+          <p:cNvPr id="27" name="Rounded Rectangle 26"/>
+          <p:cNvSpPr/>
+          <p:nvPr/>
+        </p:nvSpPr>
+        <p:spPr>
+          <a:xfrm>
+            <a:off x="640080" y="6018443"/>
+            <a:ext cx="841248" cy="201168"/>
+          </a:xfrm>
+          <a:prstGeom prst="roundRect">
+            <a:avLst>
+              <a:gd name="adj" fmla="val 50000"/>
+            </a:avLst>
+          </a:prstGeom>
+          <a:solidFill>
+            <a:srgbClr val="059669"/>
+          </a:solidFill>
+          <a:ln>
+            <a:noFill/>
+          </a:ln>
+          <a:effectLst/>
+        </p:spPr>
+        <p:style>
+          <a:lnRef idx="1">
+            <a:schemeClr val="accent1"/>
+          </a:lnRef>
+          <a:fillRef idx="3">
+            <a:schemeClr val="accent1"/>
+          </a:fillRef>
+          <a:effectRef idx="2">
+            <a:schemeClr val="accent1"/>
+          </a:effectRef>
+          <a:fontRef idx="minor">
+            <a:schemeClr val="lt1"/>
+          </a:fontRef>
+        </p:style>
+        <p:txBody>
+          <a:bodyPr rtlCol="0" anchor="ctr" lIns="36576" rIns="36576" tIns="0" bIns="0" wrap="square"/>
+          <a:lstStyle/>
+          <a:p>
+            <a:pPr algn="ctr"/>
+            <a:r>
+              <a:rPr sz="850" b="1" i="0">
+                <a:solidFill>
+                  <a:srgbClr val="FFFFFF"/>
+                </a:solidFill>
+                <a:latin typeface="맑은 고딕"/>
+                <a:ea typeface="맑은 고딕"/>
+              </a:rPr>
+              <a:t>결과 데이터</a:t>
+            </a:r>
+          </a:p>
+        </p:txBody>
+      </p:sp>
+      <p:sp>
+        <p:nvSpPr>
+          <p:cNvPr id="28" name="TextBox 27"/>
+          <p:cNvSpPr txBox="1"/>
+          <p:nvPr/>
+        </p:nvSpPr>
+        <p:spPr>
+          <a:xfrm>
+            <a:off x="1554480" y="6009299"/>
+            <a:ext cx="4846320" cy="219456"/>
+          </a:xfrm>
+          <a:prstGeom prst="rect">
+            <a:avLst/>
+          </a:prstGeom>
+          <a:noFill/>
+        </p:spPr>
+        <p:txBody>
+          <a:bodyPr wrap="square" lIns="0" rIns="0" tIns="0" bIns="0" anchor="ctr">
+            <a:spAutoFit/>
+          </a:bodyPr>
+          <a:lstStyle/>
+          <a:p>
+            <a:pPr algn="l">
+              <a:spcAft>
+                <a:spcPts val="0"/>
+              </a:spcAft>
+            </a:pPr>
+            <a:r>
+              <a:rPr sz="950" b="0" i="0">
+                <a:solidFill>
+                  <a:srgbClr val="4A5A7A"/>
+                </a:solidFill>
+                <a:latin typeface="맑은 고딕"/>
+                <a:ea typeface="맑은 고딕"/>
+              </a:rPr>
+              <a:t>truth · plots · tracks.csv 의 스캔 1152 ~ 1154 값으로 그림</a:t>
+            </a:r>
+          </a:p>
+        </p:txBody>
+      </p:sp>
+      <p:sp>
+        <p:nvSpPr>
+          <p:cNvPr id="29" name="Oval 28"/>
           <p:cNvSpPr/>
           <p:nvPr/>
         </p:nvSpPr>
@@ -30875,7 +31454,7 @@
       </p:sp>
       <p:sp>
         <p:nvSpPr>
-          <p:cNvPr id="28" name="TextBox 27"/>
+          <p:cNvPr id="30" name="TextBox 29"/>
           <p:cNvSpPr txBox="1"/>
           <p:nvPr/>
         </p:nvSpPr>
@@ -30932,7 +31511,7 @@
       </p:sp>
       <p:sp>
         <p:nvSpPr>
-          <p:cNvPr id="29" name="Oval 28"/>
+          <p:cNvPr id="31" name="Oval 30"/>
           <p:cNvSpPr/>
           <p:nvPr/>
         </p:nvSpPr>
@@ -30986,7 +31565,7 @@
       </p:sp>
       <p:sp>
         <p:nvSpPr>
-          <p:cNvPr id="30" name="TextBox 29"/>
+          <p:cNvPr id="32" name="TextBox 31"/>
           <p:cNvSpPr txBox="1"/>
           <p:nvPr/>
         </p:nvSpPr>
@@ -31043,7 +31622,7 @@
       </p:sp>
       <p:sp>
         <p:nvSpPr>
-          <p:cNvPr id="31" name="Oval 30"/>
+          <p:cNvPr id="33" name="Oval 32"/>
           <p:cNvSpPr/>
           <p:nvPr/>
         </p:nvSpPr>
@@ -31097,7 +31676,7 @@
       </p:sp>
       <p:sp>
         <p:nvSpPr>
-          <p:cNvPr id="32" name="TextBox 31"/>
+          <p:cNvPr id="34" name="TextBox 33"/>
           <p:cNvSpPr txBox="1"/>
           <p:nvPr/>
         </p:nvSpPr>
@@ -31154,7 +31733,7 @@
       </p:sp>
       <p:sp>
         <p:nvSpPr>
-          <p:cNvPr id="33" name="Oval 32"/>
+          <p:cNvPr id="35" name="Oval 34"/>
           <p:cNvSpPr/>
           <p:nvPr/>
         </p:nvSpPr>
@@ -31208,7 +31787,7 @@
       </p:sp>
       <p:sp>
         <p:nvSpPr>
-          <p:cNvPr id="34" name="TextBox 33"/>
+          <p:cNvPr id="36" name="TextBox 35"/>
           <p:cNvSpPr txBox="1"/>
           <p:nvPr/>
         </p:nvSpPr>
@@ -31265,7 +31844,7 @@
       </p:sp>
       <p:sp>
         <p:nvSpPr>
-          <p:cNvPr id="35" name="TextBox 34"/>
+          <p:cNvPr id="37" name="TextBox 36"/>
           <p:cNvSpPr txBox="1"/>
           <p:nvPr/>
         </p:nvSpPr>
@@ -31303,9 +31882,49 @@
           </a:p>
         </p:txBody>
       </p:sp>
+      <p:sp>
+        <p:nvSpPr>
+          <p:cNvPr id="38" name="TextBox 37"/>
+          <p:cNvSpPr txBox="1"/>
+          <p:nvPr/>
+        </p:nvSpPr>
+        <p:spPr>
+          <a:xfrm>
+            <a:off x="8778240" y="4873752"/>
+            <a:ext cx="2770632" cy="237744"/>
+          </a:xfrm>
+          <a:prstGeom prst="rect">
+            <a:avLst/>
+          </a:prstGeom>
+          <a:noFill/>
+        </p:spPr>
+        <p:txBody>
+          <a:bodyPr wrap="square" lIns="0" rIns="0" tIns="0" bIns="0" anchor="ctr">
+            <a:spAutoFit/>
+          </a:bodyPr>
+          <a:lstStyle/>
+          <a:p>
+            <a:pPr algn="r">
+              <a:spcAft>
+                <a:spcPts val="0"/>
+              </a:spcAft>
+            </a:pPr>
+            <a:r>
+              <a:rPr sz="950" b="0" i="0">
+                <a:solidFill>
+                  <a:srgbClr val="4A5A7A"/>
+                </a:solidFill>
+                <a:latin typeface="맑은 고딕"/>
+                <a:ea typeface="맑은 고딕"/>
+              </a:rPr>
+              <a:t>tracks.csv 두 줄 (UI 트랙 표와 같은 값)</a:t>
+            </a:r>
+          </a:p>
+        </p:txBody>
+      </p:sp>
       <p:graphicFrame>
         <p:nvGraphicFramePr>
-          <p:cNvPr id="36" name="Table 35"/>
+          <p:cNvPr id="39" name="Table 38"/>
           <p:cNvGraphicFramePr>
             <a:graphicFrameLocks noGrp="1"/>
           </p:cNvGraphicFramePr>
@@ -31920,6 +32539,102 @@
         </p:nvSpPr>
         <p:spPr>
           <a:xfrm>
+            <a:off x="3931920" y="4901184"/>
+            <a:ext cx="841248" cy="201168"/>
+          </a:xfrm>
+          <a:prstGeom prst="roundRect">
+            <a:avLst>
+              <a:gd name="adj" fmla="val 50000"/>
+            </a:avLst>
+          </a:prstGeom>
+          <a:solidFill>
+            <a:srgbClr val="059669"/>
+          </a:solidFill>
+          <a:ln>
+            <a:noFill/>
+          </a:ln>
+          <a:effectLst/>
+        </p:spPr>
+        <p:style>
+          <a:lnRef idx="1">
+            <a:schemeClr val="accent1"/>
+          </a:lnRef>
+          <a:fillRef idx="3">
+            <a:schemeClr val="accent1"/>
+          </a:fillRef>
+          <a:effectRef idx="2">
+            <a:schemeClr val="accent1"/>
+          </a:effectRef>
+          <a:fontRef idx="minor">
+            <a:schemeClr val="lt1"/>
+          </a:fontRef>
+        </p:style>
+        <p:txBody>
+          <a:bodyPr rtlCol="0" anchor="ctr" lIns="36576" rIns="36576" tIns="0" bIns="0" wrap="square"/>
+          <a:lstStyle/>
+          <a:p>
+            <a:pPr algn="ctr"/>
+            <a:r>
+              <a:rPr sz="850" b="1" i="0">
+                <a:solidFill>
+                  <a:srgbClr val="FFFFFF"/>
+                </a:solidFill>
+                <a:latin typeface="맑은 고딕"/>
+                <a:ea typeface="맑은 고딕"/>
+              </a:rPr>
+              <a:t>결과 데이터</a:t>
+            </a:r>
+          </a:p>
+        </p:txBody>
+      </p:sp>
+      <p:sp>
+        <p:nvSpPr>
+          <p:cNvPr id="29" name="TextBox 28"/>
+          <p:cNvSpPr txBox="1"/>
+          <p:nvPr/>
+        </p:nvSpPr>
+        <p:spPr>
+          <a:xfrm>
+            <a:off x="4846320" y="4892040"/>
+            <a:ext cx="2569464" cy="219456"/>
+          </a:xfrm>
+          <a:prstGeom prst="rect">
+            <a:avLst/>
+          </a:prstGeom>
+          <a:noFill/>
+        </p:spPr>
+        <p:txBody>
+          <a:bodyPr wrap="square" lIns="0" rIns="0" tIns="0" bIns="0" anchor="ctr">
+            <a:spAutoFit/>
+          </a:bodyPr>
+          <a:lstStyle/>
+          <a:p>
+            <a:pPr algn="l">
+              <a:spcAft>
+                <a:spcPts val="0"/>
+              </a:spcAft>
+            </a:pPr>
+            <a:r>
+              <a:rPr sz="950" b="0" i="0">
+                <a:solidFill>
+                  <a:srgbClr val="4A5A7A"/>
+                </a:solidFill>
+                <a:latin typeface="맑은 고딕"/>
+                <a:ea typeface="맑은 고딕"/>
+              </a:rPr>
+              <a:t>위 그림: tracks.csv 의 처음 10 초로 그림</a:t>
+            </a:r>
+          </a:p>
+        </p:txBody>
+      </p:sp>
+      <p:sp>
+        <p:nvSpPr>
+          <p:cNvPr id="30" name="Rounded Rectangle 29"/>
+          <p:cNvSpPr/>
+          <p:nvPr/>
+        </p:nvSpPr>
+        <p:spPr>
+          <a:xfrm>
             <a:off x="603504" y="5175504"/>
             <a:ext cx="1552194" cy="1005840"/>
           </a:xfrm>
@@ -31960,7 +32675,7 @@
       </p:sp>
       <p:sp>
         <p:nvSpPr>
-          <p:cNvPr id="29" name="Rectangle 28"/>
+          <p:cNvPr id="31" name="Rectangle 30"/>
           <p:cNvSpPr/>
           <p:nvPr/>
         </p:nvSpPr>
@@ -32004,7 +32719,7 @@
       </p:sp>
       <p:sp>
         <p:nvSpPr>
-          <p:cNvPr id="30" name="TextBox 29"/>
+          <p:cNvPr id="32" name="TextBox 31"/>
           <p:cNvSpPr txBox="1"/>
           <p:nvPr/>
         </p:nvSpPr>
@@ -32044,7 +32759,7 @@
       </p:sp>
       <p:sp>
         <p:nvSpPr>
-          <p:cNvPr id="31" name="TextBox 30"/>
+          <p:cNvPr id="33" name="TextBox 32"/>
           <p:cNvSpPr txBox="1"/>
           <p:nvPr/>
         </p:nvSpPr>
@@ -32084,7 +32799,7 @@
       </p:sp>
       <p:sp>
         <p:nvSpPr>
-          <p:cNvPr id="32" name="TextBox 31"/>
+          <p:cNvPr id="34" name="TextBox 33"/>
           <p:cNvSpPr txBox="1"/>
           <p:nvPr/>
         </p:nvSpPr>
@@ -32141,7 +32856,7 @@
       </p:sp>
       <p:cxnSp>
         <p:nvCxnSpPr>
-          <p:cNvPr id="33" name="Connector 32"/>
+          <p:cNvPr id="35" name="Connector 34"/>
           <p:cNvCxnSpPr/>
           <p:nvPr/>
         </p:nvCxnSpPr>
@@ -32177,7 +32892,7 @@
       </p:cxnSp>
       <p:sp>
         <p:nvSpPr>
-          <p:cNvPr id="34" name="Rounded Rectangle 33"/>
+          <p:cNvPr id="36" name="Rounded Rectangle 35"/>
           <p:cNvSpPr/>
           <p:nvPr/>
         </p:nvSpPr>
@@ -32223,7 +32938,7 @@
       </p:sp>
       <p:sp>
         <p:nvSpPr>
-          <p:cNvPr id="35" name="Rectangle 34"/>
+          <p:cNvPr id="37" name="Rectangle 36"/>
           <p:cNvSpPr/>
           <p:nvPr/>
         </p:nvSpPr>
@@ -32267,7 +32982,7 @@
       </p:sp>
       <p:sp>
         <p:nvSpPr>
-          <p:cNvPr id="36" name="TextBox 35"/>
+          <p:cNvPr id="38" name="TextBox 37"/>
           <p:cNvSpPr txBox="1"/>
           <p:nvPr/>
         </p:nvSpPr>
@@ -32307,7 +33022,7 @@
       </p:sp>
       <p:sp>
         <p:nvSpPr>
-          <p:cNvPr id="37" name="TextBox 36"/>
+          <p:cNvPr id="39" name="TextBox 38"/>
           <p:cNvSpPr txBox="1"/>
           <p:nvPr/>
         </p:nvSpPr>
@@ -32347,7 +33062,7 @@
       </p:sp>
       <p:sp>
         <p:nvSpPr>
-          <p:cNvPr id="38" name="TextBox 37"/>
+          <p:cNvPr id="40" name="TextBox 39"/>
           <p:cNvSpPr txBox="1"/>
           <p:nvPr/>
         </p:nvSpPr>
@@ -32387,7 +33102,7 @@
       </p:sp>
       <p:cxnSp>
         <p:nvCxnSpPr>
-          <p:cNvPr id="39" name="Connector 38"/>
+          <p:cNvPr id="41" name="Connector 40"/>
           <p:cNvCxnSpPr/>
           <p:nvPr/>
         </p:nvCxnSpPr>
@@ -32423,7 +33138,7 @@
       </p:cxnSp>
       <p:sp>
         <p:nvSpPr>
-          <p:cNvPr id="40" name="Rounded Rectangle 39"/>
+          <p:cNvPr id="42" name="Rounded Rectangle 41"/>
           <p:cNvSpPr/>
           <p:nvPr/>
         </p:nvSpPr>
@@ -32469,7 +33184,7 @@
       </p:sp>
       <p:sp>
         <p:nvSpPr>
-          <p:cNvPr id="41" name="Rectangle 40"/>
+          <p:cNvPr id="43" name="Rectangle 42"/>
           <p:cNvSpPr/>
           <p:nvPr/>
         </p:nvSpPr>
@@ -32513,7 +33228,7 @@
       </p:sp>
       <p:cxnSp>
         <p:nvCxnSpPr>
-          <p:cNvPr id="42" name="Connector 41"/>
+          <p:cNvPr id="44" name="Connector 43"/>
           <p:cNvCxnSpPr/>
           <p:nvPr/>
         </p:nvCxnSpPr>
@@ -32548,7 +33263,7 @@
       </p:cxnSp>
       <p:cxnSp>
         <p:nvCxnSpPr>
-          <p:cNvPr id="43" name="Connector 42"/>
+          <p:cNvPr id="45" name="Connector 44"/>
           <p:cNvCxnSpPr/>
           <p:nvPr/>
         </p:nvCxnSpPr>
@@ -32583,7 +33298,7 @@
       </p:cxnSp>
       <p:sp>
         <p:nvSpPr>
-          <p:cNvPr id="44" name="TextBox 43"/>
+          <p:cNvPr id="46" name="TextBox 45"/>
           <p:cNvSpPr txBox="1"/>
           <p:nvPr/>
         </p:nvSpPr>
@@ -32623,7 +33338,7 @@
       </p:sp>
       <p:sp>
         <p:nvSpPr>
-          <p:cNvPr id="45" name="TextBox 44"/>
+          <p:cNvPr id="47" name="TextBox 46"/>
           <p:cNvSpPr txBox="1"/>
           <p:nvPr/>
         </p:nvSpPr>
@@ -32663,7 +33378,7 @@
       </p:sp>
       <p:sp>
         <p:nvSpPr>
-          <p:cNvPr id="46" name="TextBox 45"/>
+          <p:cNvPr id="48" name="TextBox 47"/>
           <p:cNvSpPr txBox="1"/>
           <p:nvPr/>
         </p:nvSpPr>
@@ -32703,7 +33418,7 @@
       </p:sp>
       <p:cxnSp>
         <p:nvCxnSpPr>
-          <p:cNvPr id="47" name="Connector 46"/>
+          <p:cNvPr id="49" name="Connector 48"/>
           <p:cNvCxnSpPr/>
           <p:nvPr/>
         </p:nvCxnSpPr>
@@ -32739,7 +33454,7 @@
       </p:cxnSp>
       <p:sp>
         <p:nvSpPr>
-          <p:cNvPr id="48" name="Rounded Rectangle 47"/>
+          <p:cNvPr id="50" name="Rounded Rectangle 49"/>
           <p:cNvSpPr/>
           <p:nvPr/>
         </p:nvSpPr>
@@ -32785,7 +33500,7 @@
       </p:sp>
       <p:sp>
         <p:nvSpPr>
-          <p:cNvPr id="49" name="TextBox 48"/>
+          <p:cNvPr id="51" name="TextBox 50"/>
           <p:cNvSpPr txBox="1"/>
           <p:nvPr/>
         </p:nvSpPr>
@@ -32825,7 +33540,7 @@
       </p:sp>
       <p:sp>
         <p:nvSpPr>
-          <p:cNvPr id="50" name="TextBox 49"/>
+          <p:cNvPr id="52" name="TextBox 51"/>
           <p:cNvSpPr txBox="1"/>
           <p:nvPr/>
         </p:nvSpPr>
@@ -32865,7 +33580,7 @@
       </p:sp>
       <p:sp>
         <p:nvSpPr>
-          <p:cNvPr id="51" name="TextBox 50"/>
+          <p:cNvPr id="53" name="TextBox 52"/>
           <p:cNvSpPr txBox="1"/>
           <p:nvPr/>
         </p:nvSpPr>
@@ -32905,7 +33620,7 @@
       </p:sp>
       <p:pic>
         <p:nvPicPr>
-          <p:cNvPr id="52" name="Picture 51" descr="ui_score_p2.png"/>
+          <p:cNvPr id="54" name="Picture 53" descr="ui_score_p2.png"/>
           <p:cNvPicPr>
             <a:picLocks noChangeAspect="1"/>
           </p:cNvPicPr>
@@ -32934,14 +33649,70 @@
       </p:pic>
       <p:sp>
         <p:nvSpPr>
-          <p:cNvPr id="53" name="TextBox 52"/>
+          <p:cNvPr id="55" name="Rounded Rectangle 54"/>
+          <p:cNvSpPr/>
+          <p:nvPr/>
+        </p:nvSpPr>
+        <p:spPr>
+          <a:xfrm>
+            <a:off x="7589520" y="5537355"/>
+            <a:ext cx="841248" cy="201168"/>
+          </a:xfrm>
+          <a:prstGeom prst="roundRect">
+            <a:avLst>
+              <a:gd name="adj" fmla="val 50000"/>
+            </a:avLst>
+          </a:prstGeom>
+          <a:solidFill>
+            <a:srgbClr val="2563EB"/>
+          </a:solidFill>
+          <a:ln>
+            <a:noFill/>
+          </a:ln>
+          <a:effectLst/>
+        </p:spPr>
+        <p:style>
+          <a:lnRef idx="1">
+            <a:schemeClr val="accent1"/>
+          </a:lnRef>
+          <a:fillRef idx="3">
+            <a:schemeClr val="accent1"/>
+          </a:fillRef>
+          <a:effectRef idx="2">
+            <a:schemeClr val="accent1"/>
+          </a:effectRef>
+          <a:fontRef idx="minor">
+            <a:schemeClr val="lt1"/>
+          </a:fontRef>
+        </p:style>
+        <p:txBody>
+          <a:bodyPr rtlCol="0" anchor="ctr" lIns="36576" rIns="36576" tIns="0" bIns="0" wrap="square"/>
+          <a:lstStyle/>
+          <a:p>
+            <a:pPr algn="ctr"/>
+            <a:r>
+              <a:rPr sz="850" b="1" i="0">
+                <a:solidFill>
+                  <a:srgbClr val="FFFFFF"/>
+                </a:solidFill>
+                <a:latin typeface="맑은 고딕"/>
+                <a:ea typeface="맑은 고딕"/>
+              </a:rPr>
+              <a:t>프로그램 화면</a:t>
+            </a:r>
+          </a:p>
+        </p:txBody>
+      </p:sp>
+      <p:sp>
+        <p:nvSpPr>
+          <p:cNvPr id="56" name="TextBox 55"/>
           <p:cNvSpPr txBox="1"/>
           <p:nvPr/>
         </p:nvSpPr>
         <p:spPr>
           <a:xfrm>
-            <a:off x="7589520" y="5514672"/>
-            <a:ext cx="3959352" cy="640080"/>
+            <a:off x="8503920" y="5528211"/>
+            <a:ext cx="3044952" cy="219456"/>
           </a:xfrm>
           <a:prstGeom prst="rect">
             <a:avLst/>
@@ -32949,7 +33720,7 @@
           <a:noFill/>
         </p:spPr>
         <p:txBody>
-          <a:bodyPr wrap="square" lIns="0" rIns="0" tIns="0" bIns="0" anchor="t">
+          <a:bodyPr wrap="square" lIns="0" rIns="0" tIns="0" bIns="0" anchor="ctr">
             <a:spAutoFit/>
           </a:bodyPr>
           <a:lstStyle/>
@@ -32960,7 +33731,7 @@
               </a:spcAft>
             </a:pPr>
             <a:r>
-              <a:rPr sz="1000" b="0" i="0">
+              <a:rPr sz="950" b="0" i="0">
                 <a:solidFill>
                   <a:srgbClr val="4A5A7A"/>
                 </a:solidFill>
@@ -32970,6 +33741,29 @@
               <a:t>스코어 확인 창: Flag 1 1 1 0 0 1 1</a:t>
             </a:r>
           </a:p>
+        </p:txBody>
+      </p:sp>
+      <p:sp>
+        <p:nvSpPr>
+          <p:cNvPr id="57" name="TextBox 56"/>
+          <p:cNvSpPr txBox="1"/>
+          <p:nvPr/>
+        </p:nvSpPr>
+        <p:spPr>
+          <a:xfrm>
+            <a:off x="7589520" y="5802531"/>
+            <a:ext cx="3959352" cy="438912"/>
+          </a:xfrm>
+          <a:prstGeom prst="rect">
+            <a:avLst/>
+          </a:prstGeom>
+          <a:noFill/>
+        </p:spPr>
+        <p:txBody>
+          <a:bodyPr wrap="square" lIns="0" rIns="0" tIns="0" bIns="0" anchor="t">
+            <a:spAutoFit/>
+          </a:bodyPr>
+          <a:lstStyle/>
           <a:p>
             <a:pPr algn="l">
               <a:spcAft>
@@ -33165,7 +33959,7 @@
           <p:nvPr/>
         </p:nvPicPr>
         <p:blipFill>
-          <a:blip r:embed="rId2"/>
+          <a:blip r:embed="rId5"/>
           <a:stretch>
             <a:fillRect/>
           </a:stretch>
@@ -33194,7 +33988,7 @@
           <p:nvPr/>
         </p:nvPicPr>
         <p:blipFill>
-          <a:blip r:embed="rId3"/>
+          <a:blip r:embed="rId6"/>
           <a:stretch>
             <a:fillRect/>
           </a:stretch>
@@ -33216,14 +34010,70 @@
       </p:pic>
       <p:sp>
         <p:nvSpPr>
-          <p:cNvPr id="28" name="TextBox 27"/>
+          <p:cNvPr id="28" name="Rounded Rectangle 27"/>
+          <p:cNvSpPr/>
+          <p:nvPr/>
+        </p:nvSpPr>
+        <p:spPr>
+          <a:xfrm>
+            <a:off x="640080" y="5741860"/>
+            <a:ext cx="841248" cy="201168"/>
+          </a:xfrm>
+          <a:prstGeom prst="roundRect">
+            <a:avLst>
+              <a:gd name="adj" fmla="val 50000"/>
+            </a:avLst>
+          </a:prstGeom>
+          <a:solidFill>
+            <a:srgbClr val="2563EB"/>
+          </a:solidFill>
+          <a:ln>
+            <a:noFill/>
+          </a:ln>
+          <a:effectLst/>
+        </p:spPr>
+        <p:style>
+          <a:lnRef idx="1">
+            <a:schemeClr val="accent1"/>
+          </a:lnRef>
+          <a:fillRef idx="3">
+            <a:schemeClr val="accent1"/>
+          </a:fillRef>
+          <a:effectRef idx="2">
+            <a:schemeClr val="accent1"/>
+          </a:effectRef>
+          <a:fontRef idx="minor">
+            <a:schemeClr val="lt1"/>
+          </a:fontRef>
+        </p:style>
+        <p:txBody>
+          <a:bodyPr rtlCol="0" anchor="ctr" lIns="36576" rIns="36576" tIns="0" bIns="0" wrap="square"/>
+          <a:lstStyle/>
+          <a:p>
+            <a:pPr algn="ctr"/>
+            <a:r>
+              <a:rPr sz="850" b="1" i="0">
+                <a:solidFill>
+                  <a:srgbClr val="FFFFFF"/>
+                </a:solidFill>
+                <a:latin typeface="맑은 고딕"/>
+                <a:ea typeface="맑은 고딕"/>
+              </a:rPr>
+              <a:t>프로그램 화면</a:t>
+            </a:r>
+          </a:p>
+        </p:txBody>
+      </p:sp>
+      <p:sp>
+        <p:nvSpPr>
+          <p:cNvPr id="29" name="TextBox 28"/>
           <p:cNvSpPr txBox="1"/>
           <p:nvPr/>
         </p:nvSpPr>
         <p:spPr>
           <a:xfrm>
-            <a:off x="640080" y="5741860"/>
-            <a:ext cx="5349240" cy="228600"/>
+            <a:off x="1554480" y="5732716"/>
+            <a:ext cx="4434840" cy="219456"/>
           </a:xfrm>
           <a:prstGeom prst="rect">
             <a:avLst/>
@@ -33231,7 +34081,7 @@
           <a:noFill/>
         </p:spPr>
         <p:txBody>
-          <a:bodyPr wrap="square" lIns="0" rIns="0" tIns="0" bIns="0" anchor="t">
+          <a:bodyPr wrap="square" lIns="0" rIns="0" tIns="0" bIns="0" anchor="ctr">
             <a:spAutoFit/>
           </a:bodyPr>
           <a:lstStyle/>
@@ -33242,28 +34092,84 @@
               </a:spcAft>
             </a:pPr>
             <a:r>
-              <a:rPr sz="1000" b="0" i="0">
+              <a:rPr sz="950" b="0" i="0">
                 <a:solidFill>
                   <a:srgbClr val="4A5A7A"/>
                 </a:solidFill>
                 <a:latin typeface="맑은 고딕"/>
                 <a:ea typeface="맑은 고딕"/>
               </a:rPr>
-              <a:t>2D: 위경도 격자 위 동-북 평면</a:t>
-            </a:r>
-          </a:p>
-        </p:txBody>
-      </p:sp>
-      <p:sp>
-        <p:nvSpPr>
-          <p:cNvPr id="29" name="TextBox 28"/>
+              <a:t>2D 보기: 위경도 격자 위 동-북 평면</a:t>
+            </a:r>
+          </a:p>
+        </p:txBody>
+      </p:sp>
+      <p:sp>
+        <p:nvSpPr>
+          <p:cNvPr id="30" name="Rounded Rectangle 29"/>
+          <p:cNvSpPr/>
+          <p:nvPr/>
+        </p:nvSpPr>
+        <p:spPr>
+          <a:xfrm>
+            <a:off x="6199632" y="5741860"/>
+            <a:ext cx="841248" cy="201168"/>
+          </a:xfrm>
+          <a:prstGeom prst="roundRect">
+            <a:avLst>
+              <a:gd name="adj" fmla="val 50000"/>
+            </a:avLst>
+          </a:prstGeom>
+          <a:solidFill>
+            <a:srgbClr val="2563EB"/>
+          </a:solidFill>
+          <a:ln>
+            <a:noFill/>
+          </a:ln>
+          <a:effectLst/>
+        </p:spPr>
+        <p:style>
+          <a:lnRef idx="1">
+            <a:schemeClr val="accent1"/>
+          </a:lnRef>
+          <a:fillRef idx="3">
+            <a:schemeClr val="accent1"/>
+          </a:fillRef>
+          <a:effectRef idx="2">
+            <a:schemeClr val="accent1"/>
+          </a:effectRef>
+          <a:fontRef idx="minor">
+            <a:schemeClr val="lt1"/>
+          </a:fontRef>
+        </p:style>
+        <p:txBody>
+          <a:bodyPr rtlCol="0" anchor="ctr" lIns="36576" rIns="36576" tIns="0" bIns="0" wrap="square"/>
+          <a:lstStyle/>
+          <a:p>
+            <a:pPr algn="ctr"/>
+            <a:r>
+              <a:rPr sz="850" b="1" i="0">
+                <a:solidFill>
+                  <a:srgbClr val="FFFFFF"/>
+                </a:solidFill>
+                <a:latin typeface="맑은 고딕"/>
+                <a:ea typeface="맑은 고딕"/>
+              </a:rPr>
+              <a:t>프로그램 화면</a:t>
+            </a:r>
+          </a:p>
+        </p:txBody>
+      </p:sp>
+      <p:sp>
+        <p:nvSpPr>
+          <p:cNvPr id="31" name="TextBox 30"/>
           <p:cNvSpPr txBox="1"/>
           <p:nvPr/>
         </p:nvSpPr>
         <p:spPr>
           <a:xfrm>
-            <a:off x="6199632" y="5741860"/>
-            <a:ext cx="5349240" cy="228600"/>
+            <a:off x="7114032" y="5732716"/>
+            <a:ext cx="4434840" cy="219456"/>
           </a:xfrm>
           <a:prstGeom prst="rect">
             <a:avLst/>
@@ -33271,7 +34177,7 @@
           <a:noFill/>
         </p:spPr>
         <p:txBody>
-          <a:bodyPr wrap="square" lIns="0" rIns="0" tIns="0" bIns="0" anchor="t">
+          <a:bodyPr wrap="square" lIns="0" rIns="0" tIns="0" bIns="0" anchor="ctr">
             <a:spAutoFit/>
           </a:bodyPr>
           <a:lstStyle/>
@@ -33282,21 +34188,21 @@
               </a:spcAft>
             </a:pPr>
             <a:r>
-              <a:rPr sz="1000" b="0" i="0">
+              <a:rPr sz="950" b="0" i="0">
                 <a:solidFill>
                   <a:srgbClr val="4A5A7A"/>
                 </a:solidFill>
                 <a:latin typeface="맑은 고딕"/>
                 <a:ea typeface="맑은 고딕"/>
               </a:rPr>
-              <a:t>3D: 동-북-고도 (고도 2 배)</a:t>
-            </a:r>
-          </a:p>
-        </p:txBody>
-      </p:sp>
-      <p:sp>
-        <p:nvSpPr>
-          <p:cNvPr id="30" name="TextBox 29"/>
+              <a:t>3D 보기: 동-북-고도 (고도 2 배)</a:t>
+            </a:r>
+          </a:p>
+        </p:txBody>
+      </p:sp>
+      <p:sp>
+        <p:nvSpPr>
+          <p:cNvPr id="32" name="TextBox 31"/>
           <p:cNvSpPr txBox="1"/>
           <p:nvPr/>
         </p:nvSpPr>
@@ -33336,7 +34242,7 @@
       </p:sp>
       <p:sp>
         <p:nvSpPr>
-          <p:cNvPr id="31" name="TextBox 30"/>
+          <p:cNvPr id="33" name="TextBox 32"/>
           <p:cNvSpPr txBox="1"/>
           <p:nvPr/>
         </p:nvSpPr>
@@ -33376,7 +34282,7 @@
       </p:sp>
       <p:sp>
         <p:nvSpPr>
-          <p:cNvPr id="32" name="TextBox 31"/>
+          <p:cNvPr id="34" name="TextBox 33"/>
           <p:cNvSpPr txBox="1"/>
           <p:nvPr/>
         </p:nvSpPr>
@@ -33416,7 +34322,7 @@
       </p:sp>
       <p:sp>
         <p:nvSpPr>
-          <p:cNvPr id="33" name="TextBox 32"/>
+          <p:cNvPr id="35" name="TextBox 34"/>
           <p:cNvSpPr txBox="1"/>
           <p:nvPr/>
         </p:nvSpPr>
@@ -33456,7 +34362,7 @@
       </p:sp>
       <p:sp>
         <p:nvSpPr>
-          <p:cNvPr id="34" name="TextBox 33"/>
+          <p:cNvPr id="36" name="TextBox 35"/>
           <p:cNvSpPr txBox="1"/>
           <p:nvPr/>
         </p:nvSpPr>
@@ -33496,7 +34402,7 @@
       </p:sp>
       <p:sp>
         <p:nvSpPr>
-          <p:cNvPr id="35" name="TextBox 34"/>
+          <p:cNvPr id="37" name="TextBox 36"/>
           <p:cNvSpPr txBox="1"/>
           <p:nvPr/>
         </p:nvSpPr>

--- a/Part5_Track_Init_Mgmt/ref/산출물/Chapter5_TrackInitMgmt.pptx
+++ b/Part5_Track_Init_Mgmt/ref/산출물/Chapter5_TrackInitMgmt.pptx
@@ -1897,12 +1897,17 @@
           </a:p>
           <a:p>
             <a:r>
-              <a:t>왼쪽 위 그림은 저장한 트랙 CSV에서 처음 10초 동안 생긴 트랙 22개를 골라 줄 하나씩 그린 것입니다. 칸 하나가 스캔 하나이고, 주황 칸 두 개가 임시 상태, 회색 칸 하나가 삭제 상태입니다.</a:t>
-            </a:r>
-          </a:p>
-          <a:p>
-            <a:r>
-              <a:t>아래는 첫 줄인 트랙 100의 경우입니다. 스캔 10에 플롯 두 개로 점수 2로 개시되고, 연관이 없으니 스캔 11에서 1, 스캔 12에서 0이 되어 삭제 상태가 되고, 스캔 13을 처리할 때 표에서 빠집니다.</a:t>
+              <a:t>왼쪽 위 그림은 처음 10초 동안 생긴 트랙 22개를 줄 하나씩 그린 것입니다. 칸 하나가 스캔 하나이고, 주황 칸 두 개가 임시 상태, 회색 칸 하나가 삭제 상태입니다.</a:t>
+            </a:r>
+          </a:p>
+          <a:p>
+            <a:r>
+              <a:t>이 그림은 결과 데이터로 그렸습니다. 같은 Core 코드를 실행해 스캔마다 트랙 표를 tracks.csv로 저장했고, 이 파일을 Python으로 읽어 그렸습니다. 아래 표는 그 데이터에서 그림 첫 줄인 트랙 100 부분을 그대로 옮긴 것입니다. CSV 한 줄이 그림의 칸 하나로, time이 가로 위치, track_id가 줄, state가 칸 색이 됩니다.</a:t>
+            </a:r>
+          </a:p>
+          <a:p>
+            <a:r>
+              <a:t>트랙 100은 스캔 10에 플롯 10067과 10074로 개시되어 state 1, score 2입니다. flag가 0이므로 스캔 11에서 score가 1로 내려가고, 스캔 12에서 0이 되어 state 4, 삭제 상태가 됩니다. 스캔 13에는 트랙 100의 줄이 없습니다. 처리를 시작할 때 표에서 빼기 때문이고, 그래서 그림에도 칸이 세 개뿐입니다.</a:t>
             </a:r>
           </a:p>
           <a:p>
@@ -32493,53 +32498,13 @@
       </p:pic>
       <p:sp>
         <p:nvSpPr>
-          <p:cNvPr id="27" name="TextBox 26"/>
-          <p:cNvSpPr txBox="1"/>
-          <p:nvPr/>
-        </p:nvSpPr>
-        <p:spPr>
-          <a:xfrm>
-            <a:off x="640080" y="4882896"/>
-            <a:ext cx="6766560" cy="237744"/>
-          </a:xfrm>
-          <a:prstGeom prst="rect">
-            <a:avLst/>
-          </a:prstGeom>
-          <a:noFill/>
-        </p:spPr>
-        <p:txBody>
-          <a:bodyPr wrap="square" lIns="0" rIns="0" tIns="0" bIns="0" anchor="t">
-            <a:spAutoFit/>
-          </a:bodyPr>
-          <a:lstStyle/>
-          <a:p>
-            <a:pPr algn="l">
-              <a:spcAft>
-                <a:spcPts val="0"/>
-              </a:spcAft>
-            </a:pPr>
-            <a:r>
-              <a:rPr sz="1100" b="1" i="0">
-                <a:solidFill>
-                  <a:srgbClr val="1B2740"/>
-                </a:solidFill>
-                <a:latin typeface="맑은 고딕"/>
-                <a:ea typeface="맑은 고딕"/>
-              </a:rPr>
-              <a:t>트랙 100 의 경우  (표적 2, 위 그림의 첫 줄)</a:t>
-            </a:r>
-          </a:p>
-        </p:txBody>
-      </p:sp>
-      <p:sp>
-        <p:nvSpPr>
-          <p:cNvPr id="28" name="Rounded Rectangle 27"/>
+          <p:cNvPr id="27" name="Rounded Rectangle 26"/>
           <p:cNvSpPr/>
           <p:nvPr/>
         </p:nvSpPr>
         <p:spPr>
           <a:xfrm>
-            <a:off x="3931920" y="4901184"/>
+            <a:off x="640080" y="4910328"/>
             <a:ext cx="841248" cy="201168"/>
           </a:xfrm>
           <a:prstGeom prst="roundRect">
@@ -32589,14 +32554,14 @@
       </p:sp>
       <p:sp>
         <p:nvSpPr>
-          <p:cNvPr id="29" name="TextBox 28"/>
+          <p:cNvPr id="28" name="TextBox 27"/>
           <p:cNvSpPr txBox="1"/>
           <p:nvPr/>
         </p:nvSpPr>
         <p:spPr>
           <a:xfrm>
-            <a:off x="4846320" y="4892040"/>
-            <a:ext cx="2569464" cy="219456"/>
+            <a:off x="1554480" y="4855464"/>
+            <a:ext cx="5852160" cy="274320"/>
           </a:xfrm>
           <a:prstGeom prst="rect">
             <a:avLst/>
@@ -32615,6 +32580,16 @@
               </a:spcAft>
             </a:pPr>
             <a:r>
+              <a:rPr sz="1100" b="1" i="0">
+                <a:solidFill>
+                  <a:srgbClr val="1B2740"/>
+                </a:solidFill>
+                <a:latin typeface="맑은 고딕"/>
+                <a:ea typeface="맑은 고딕"/>
+              </a:rPr>
+              <a:t>위 그림을 그린 데이터   </a:t>
+            </a:r>
+            <a:r>
               <a:rPr sz="950" b="0" i="0">
                 <a:solidFill>
                   <a:srgbClr val="4A5A7A"/>
@@ -32622,1005 +32597,1319 @@
                 <a:latin typeface="맑은 고딕"/>
                 <a:ea typeface="맑은 고딕"/>
               </a:rPr>
-              <a:t>위 그림: tracks.csv 의 처음 10 초로 그림</a:t>
-            </a:r>
-          </a:p>
-        </p:txBody>
-      </p:sp>
-      <p:sp>
-        <p:nvSpPr>
-          <p:cNvPr id="30" name="Rounded Rectangle 29"/>
-          <p:cNvSpPr/>
-          <p:nvPr/>
-        </p:nvSpPr>
-        <p:spPr>
-          <a:xfrm>
-            <a:off x="603504" y="5175504"/>
-            <a:ext cx="1552194" cy="1005840"/>
-          </a:xfrm>
-          <a:prstGeom prst="roundRect">
-            <a:avLst>
-              <a:gd name="adj" fmla="val 8000"/>
-            </a:avLst>
-          </a:prstGeom>
-          <a:solidFill>
-            <a:srgbClr val="FFFFFF"/>
-          </a:solidFill>
-          <a:ln w="17780">
-            <a:solidFill>
-              <a:srgbClr val="D97706"/>
-            </a:solidFill>
-          </a:ln>
-          <a:effectLst/>
-        </p:spPr>
-        <p:style>
-          <a:lnRef idx="1">
-            <a:schemeClr val="accent1"/>
-          </a:lnRef>
-          <a:fillRef idx="3">
-            <a:schemeClr val="accent1"/>
-          </a:fillRef>
-          <a:effectRef idx="2">
-            <a:schemeClr val="accent1"/>
-          </a:effectRef>
-          <a:fontRef idx="minor">
-            <a:schemeClr val="lt1"/>
-          </a:fontRef>
-        </p:style>
-        <p:txBody>
-          <a:bodyPr rtlCol="0" anchor="ctr"/>
-          <a:lstStyle/>
-          <a:p/>
-        </p:txBody>
-      </p:sp>
-      <p:sp>
-        <p:nvSpPr>
-          <p:cNvPr id="31" name="Rectangle 30"/>
-          <p:cNvSpPr/>
-          <p:nvPr/>
-        </p:nvSpPr>
-        <p:spPr>
-          <a:xfrm>
-            <a:off x="713232" y="5276088"/>
-            <a:ext cx="182880" cy="182880"/>
-          </a:xfrm>
-          <a:prstGeom prst="rect">
-            <a:avLst/>
-          </a:prstGeom>
-          <a:solidFill>
-            <a:srgbClr val="FFFFFF"/>
-          </a:solidFill>
-          <a:ln w="17780">
-            <a:solidFill>
-              <a:srgbClr val="D97706"/>
-            </a:solidFill>
-          </a:ln>
-          <a:effectLst/>
-        </p:spPr>
-        <p:style>
-          <a:lnRef idx="1">
-            <a:schemeClr val="accent1"/>
-          </a:lnRef>
-          <a:fillRef idx="3">
-            <a:schemeClr val="accent1"/>
-          </a:fillRef>
-          <a:effectRef idx="2">
-            <a:schemeClr val="accent1"/>
-          </a:effectRef>
-          <a:fontRef idx="minor">
-            <a:schemeClr val="lt1"/>
-          </a:fontRef>
-        </p:style>
-        <p:txBody>
-          <a:bodyPr rtlCol="0" anchor="ctr"/>
-          <a:lstStyle/>
-          <a:p/>
-        </p:txBody>
-      </p:sp>
-      <p:sp>
-        <p:nvSpPr>
-          <p:cNvPr id="32" name="TextBox 31"/>
-          <p:cNvSpPr txBox="1"/>
-          <p:nvPr/>
-        </p:nvSpPr>
-        <p:spPr>
-          <a:xfrm>
-            <a:off x="987552" y="5239512"/>
-            <a:ext cx="1094994" cy="237744"/>
-          </a:xfrm>
-          <a:prstGeom prst="rect">
-            <a:avLst/>
-          </a:prstGeom>
-          <a:noFill/>
-        </p:spPr>
-        <p:txBody>
-          <a:bodyPr wrap="square" lIns="0" rIns="0" tIns="0" bIns="0" anchor="ctr">
-            <a:spAutoFit/>
-          </a:bodyPr>
-          <a:lstStyle/>
-          <a:p>
-            <a:pPr algn="l">
-              <a:spcAft>
-                <a:spcPts val="0"/>
-              </a:spcAft>
-            </a:pPr>
-            <a:r>
-              <a:rPr sz="1100" b="1" i="0">
-                <a:solidFill>
-                  <a:srgbClr val="1B2740"/>
-                </a:solidFill>
-                <a:latin typeface="맑은 고딕"/>
-                <a:ea typeface="맑은 고딕"/>
-              </a:rPr>
-              <a:t>스캔 10</a:t>
-            </a:r>
-          </a:p>
-        </p:txBody>
-      </p:sp>
-      <p:sp>
-        <p:nvSpPr>
-          <p:cNvPr id="33" name="TextBox 32"/>
-          <p:cNvSpPr txBox="1"/>
-          <p:nvPr/>
-        </p:nvSpPr>
-        <p:spPr>
-          <a:xfrm>
-            <a:off x="713232" y="5541264"/>
-            <a:ext cx="1369314" cy="237744"/>
-          </a:xfrm>
-          <a:prstGeom prst="rect">
-            <a:avLst/>
-          </a:prstGeom>
-          <a:noFill/>
-        </p:spPr>
-        <p:txBody>
-          <a:bodyPr wrap="square" lIns="0" rIns="0" tIns="0" bIns="0" anchor="t">
-            <a:spAutoFit/>
-          </a:bodyPr>
-          <a:lstStyle/>
-          <a:p>
-            <a:pPr algn="l">
-              <a:spcAft>
-                <a:spcPts val="0"/>
-              </a:spcAft>
-            </a:pPr>
-            <a:r>
-              <a:rPr sz="1050" b="1" i="0">
-                <a:solidFill>
-                  <a:srgbClr val="D97706"/>
-                </a:solidFill>
-                <a:latin typeface="맑은 고딕"/>
-                <a:ea typeface="맑은 고딕"/>
-              </a:rPr>
-              <a:t>TrackScore 2</a:t>
-            </a:r>
-          </a:p>
-        </p:txBody>
-      </p:sp>
-      <p:sp>
-        <p:nvSpPr>
-          <p:cNvPr id="34" name="TextBox 33"/>
-          <p:cNvSpPr txBox="1"/>
-          <p:nvPr/>
-        </p:nvSpPr>
-        <p:spPr>
-          <a:xfrm>
-            <a:off x="713232" y="5797296"/>
-            <a:ext cx="1369314" cy="329184"/>
-          </a:xfrm>
-          <a:prstGeom prst="rect">
-            <a:avLst/>
-          </a:prstGeom>
-          <a:noFill/>
-        </p:spPr>
-        <p:txBody>
-          <a:bodyPr wrap="square" lIns="0" rIns="0" tIns="0" bIns="0" anchor="t">
-            <a:spAutoFit/>
-          </a:bodyPr>
-          <a:lstStyle/>
-          <a:p>
-            <a:pPr algn="l">
-              <a:spcAft>
-                <a:spcPts val="0"/>
-              </a:spcAft>
-            </a:pPr>
-            <a:r>
-              <a:rPr sz="900" b="0" i="0">
-                <a:solidFill>
-                  <a:srgbClr val="4A5A7A"/>
-                </a:solidFill>
-                <a:latin typeface="맑은 고딕"/>
-                <a:ea typeface="맑은 고딕"/>
-              </a:rPr>
-              <a:t>두 플롯으로 개시</a:t>
-            </a:r>
-          </a:p>
-          <a:p>
-            <a:pPr algn="l">
-              <a:spcAft>
-                <a:spcPts val="0"/>
-              </a:spcAft>
-            </a:pPr>
-            <a:r>
-              <a:rPr sz="900" b="0" i="0">
-                <a:solidFill>
-                  <a:srgbClr val="4A5A7A"/>
-                </a:solidFill>
-                <a:latin typeface="맑은 고딕"/>
-                <a:ea typeface="맑은 고딕"/>
-              </a:rPr>
-              <a:t>(10067 + 10074)</a:t>
-            </a:r>
-          </a:p>
-        </p:txBody>
-      </p:sp>
-      <p:cxnSp>
-        <p:nvCxnSpPr>
-          <p:cNvPr id="35" name="Connector 34"/>
-          <p:cNvCxnSpPr/>
-          <p:nvPr/>
-        </p:nvCxnSpPr>
-        <p:spPr>
-          <a:xfrm>
-            <a:off x="2173986" y="5678424"/>
-            <a:ext cx="164592" cy="0"/>
-          </a:xfrm>
-          <a:prstGeom prst="line">
-            <a:avLst/>
-          </a:prstGeom>
-          <a:ln w="15240">
-            <a:solidFill>
-              <a:srgbClr val="AEB9CC"/>
-            </a:solidFill>
-            <a:tailEnd type="triangle" w="med" len="med"/>
-          </a:ln>
-        </p:spPr>
-        <p:style>
-          <a:lnRef idx="2">
-            <a:schemeClr val="accent1"/>
-          </a:lnRef>
-          <a:fillRef idx="0">
-            <a:schemeClr val="accent1"/>
-          </a:fillRef>
-          <a:effectRef idx="1">
-            <a:schemeClr val="accent1"/>
-          </a:effectRef>
-          <a:fontRef idx="minor">
-            <a:schemeClr val="tx1"/>
-          </a:fontRef>
-        </p:style>
-      </p:cxnSp>
-      <p:sp>
-        <p:nvSpPr>
-          <p:cNvPr id="36" name="Rounded Rectangle 35"/>
-          <p:cNvSpPr/>
-          <p:nvPr/>
-        </p:nvSpPr>
-        <p:spPr>
-          <a:xfrm>
-            <a:off x="2356866" y="5175504"/>
-            <a:ext cx="1552194" cy="1005840"/>
-          </a:xfrm>
-          <a:prstGeom prst="roundRect">
-            <a:avLst>
-              <a:gd name="adj" fmla="val 8000"/>
-            </a:avLst>
-          </a:prstGeom>
-          <a:solidFill>
-            <a:srgbClr val="FFFFFF"/>
-          </a:solidFill>
-          <a:ln w="17780">
-            <a:solidFill>
-              <a:srgbClr val="D97706"/>
-            </a:solidFill>
-          </a:ln>
-          <a:effectLst/>
-        </p:spPr>
-        <p:style>
-          <a:lnRef idx="1">
-            <a:schemeClr val="accent1"/>
-          </a:lnRef>
-          <a:fillRef idx="3">
-            <a:schemeClr val="accent1"/>
-          </a:fillRef>
-          <a:effectRef idx="2">
-            <a:schemeClr val="accent1"/>
-          </a:effectRef>
-          <a:fontRef idx="minor">
-            <a:schemeClr val="lt1"/>
-          </a:fontRef>
-        </p:style>
-        <p:txBody>
-          <a:bodyPr rtlCol="0" anchor="ctr"/>
-          <a:lstStyle/>
-          <a:p/>
-        </p:txBody>
-      </p:sp>
-      <p:sp>
-        <p:nvSpPr>
-          <p:cNvPr id="37" name="Rectangle 36"/>
-          <p:cNvSpPr/>
-          <p:nvPr/>
-        </p:nvSpPr>
-        <p:spPr>
-          <a:xfrm>
-            <a:off x="2466594" y="5276088"/>
-            <a:ext cx="182880" cy="182880"/>
-          </a:xfrm>
-          <a:prstGeom prst="rect">
-            <a:avLst/>
-          </a:prstGeom>
-          <a:solidFill>
-            <a:srgbClr val="FFFFFF"/>
-          </a:solidFill>
-          <a:ln w="17780">
-            <a:solidFill>
-              <a:srgbClr val="D97706"/>
-            </a:solidFill>
-          </a:ln>
-          <a:effectLst/>
-        </p:spPr>
-        <p:style>
-          <a:lnRef idx="1">
-            <a:schemeClr val="accent1"/>
-          </a:lnRef>
-          <a:fillRef idx="3">
-            <a:schemeClr val="accent1"/>
-          </a:fillRef>
-          <a:effectRef idx="2">
-            <a:schemeClr val="accent1"/>
-          </a:effectRef>
-          <a:fontRef idx="minor">
-            <a:schemeClr val="lt1"/>
-          </a:fontRef>
-        </p:style>
-        <p:txBody>
-          <a:bodyPr rtlCol="0" anchor="ctr"/>
-          <a:lstStyle/>
-          <a:p/>
-        </p:txBody>
-      </p:sp>
-      <p:sp>
-        <p:nvSpPr>
-          <p:cNvPr id="38" name="TextBox 37"/>
-          <p:cNvSpPr txBox="1"/>
-          <p:nvPr/>
-        </p:nvSpPr>
-        <p:spPr>
-          <a:xfrm>
-            <a:off x="2740914" y="5239512"/>
-            <a:ext cx="1094994" cy="237744"/>
-          </a:xfrm>
-          <a:prstGeom prst="rect">
-            <a:avLst/>
-          </a:prstGeom>
-          <a:noFill/>
-        </p:spPr>
-        <p:txBody>
-          <a:bodyPr wrap="square" lIns="0" rIns="0" tIns="0" bIns="0" anchor="ctr">
-            <a:spAutoFit/>
-          </a:bodyPr>
-          <a:lstStyle/>
-          <a:p>
-            <a:pPr algn="l">
-              <a:spcAft>
-                <a:spcPts val="0"/>
-              </a:spcAft>
-            </a:pPr>
-            <a:r>
-              <a:rPr sz="1100" b="1" i="0">
-                <a:solidFill>
-                  <a:srgbClr val="1B2740"/>
-                </a:solidFill>
-                <a:latin typeface="맑은 고딕"/>
-                <a:ea typeface="맑은 고딕"/>
-              </a:rPr>
-              <a:t>스캔 11</a:t>
-            </a:r>
-          </a:p>
-        </p:txBody>
-      </p:sp>
-      <p:sp>
-        <p:nvSpPr>
-          <p:cNvPr id="39" name="TextBox 38"/>
-          <p:cNvSpPr txBox="1"/>
-          <p:nvPr/>
-        </p:nvSpPr>
-        <p:spPr>
-          <a:xfrm>
-            <a:off x="2466594" y="5541264"/>
-            <a:ext cx="1369314" cy="237744"/>
-          </a:xfrm>
-          <a:prstGeom prst="rect">
-            <a:avLst/>
-          </a:prstGeom>
-          <a:noFill/>
-        </p:spPr>
-        <p:txBody>
-          <a:bodyPr wrap="square" lIns="0" rIns="0" tIns="0" bIns="0" anchor="t">
-            <a:spAutoFit/>
-          </a:bodyPr>
-          <a:lstStyle/>
-          <a:p>
-            <a:pPr algn="l">
-              <a:spcAft>
-                <a:spcPts val="0"/>
-              </a:spcAft>
-            </a:pPr>
-            <a:r>
-              <a:rPr sz="1050" b="1" i="0">
-                <a:solidFill>
-                  <a:srgbClr val="D97706"/>
-                </a:solidFill>
-                <a:latin typeface="맑은 고딕"/>
-                <a:ea typeface="맑은 고딕"/>
-              </a:rPr>
-              <a:t>TrackScore 1</a:t>
-            </a:r>
-          </a:p>
-        </p:txBody>
-      </p:sp>
-      <p:sp>
-        <p:nvSpPr>
-          <p:cNvPr id="40" name="TextBox 39"/>
-          <p:cNvSpPr txBox="1"/>
-          <p:nvPr/>
-        </p:nvSpPr>
-        <p:spPr>
-          <a:xfrm>
-            <a:off x="2466594" y="5797296"/>
-            <a:ext cx="1369314" cy="329184"/>
-          </a:xfrm>
-          <a:prstGeom prst="rect">
-            <a:avLst/>
-          </a:prstGeom>
-          <a:noFill/>
-        </p:spPr>
-        <p:txBody>
-          <a:bodyPr wrap="square" lIns="0" rIns="0" tIns="0" bIns="0" anchor="t">
-            <a:spAutoFit/>
-          </a:bodyPr>
-          <a:lstStyle/>
-          <a:p>
-            <a:pPr algn="l">
-              <a:spcAft>
-                <a:spcPts val="0"/>
-              </a:spcAft>
-            </a:pPr>
-            <a:r>
-              <a:rPr sz="900" b="0" i="0">
-                <a:solidFill>
-                  <a:srgbClr val="4A5A7A"/>
-                </a:solidFill>
-                <a:latin typeface="맑은 고딕"/>
-                <a:ea typeface="맑은 고딕"/>
-              </a:rPr>
-              <a:t>Assigned_Flag 0 → −1</a:t>
-            </a:r>
-          </a:p>
-        </p:txBody>
-      </p:sp>
-      <p:cxnSp>
-        <p:nvCxnSpPr>
-          <p:cNvPr id="41" name="Connector 40"/>
-          <p:cNvCxnSpPr/>
-          <p:nvPr/>
-        </p:nvCxnSpPr>
-        <p:spPr>
-          <a:xfrm>
-            <a:off x="3927348" y="5678424"/>
-            <a:ext cx="164592" cy="0"/>
-          </a:xfrm>
-          <a:prstGeom prst="line">
-            <a:avLst/>
-          </a:prstGeom>
-          <a:ln w="15240">
-            <a:solidFill>
-              <a:srgbClr val="AEB9CC"/>
-            </a:solidFill>
-            <a:tailEnd type="triangle" w="med" len="med"/>
-          </a:ln>
-        </p:spPr>
-        <p:style>
-          <a:lnRef idx="2">
-            <a:schemeClr val="accent1"/>
-          </a:lnRef>
-          <a:fillRef idx="0">
-            <a:schemeClr val="accent1"/>
-          </a:fillRef>
-          <a:effectRef idx="1">
-            <a:schemeClr val="accent1"/>
-          </a:effectRef>
-          <a:fontRef idx="minor">
-            <a:schemeClr val="tx1"/>
-          </a:fontRef>
-        </p:style>
-      </p:cxnSp>
-      <p:sp>
-        <p:nvSpPr>
-          <p:cNvPr id="42" name="Rounded Rectangle 41"/>
-          <p:cNvSpPr/>
-          <p:nvPr/>
-        </p:nvSpPr>
-        <p:spPr>
-          <a:xfrm>
-            <a:off x="4110228" y="5175504"/>
-            <a:ext cx="1552194" cy="1005840"/>
-          </a:xfrm>
-          <a:prstGeom prst="roundRect">
-            <a:avLst>
-              <a:gd name="adj" fmla="val 8000"/>
-            </a:avLst>
-          </a:prstGeom>
-          <a:solidFill>
-            <a:srgbClr val="FFFFFF"/>
-          </a:solidFill>
-          <a:ln w="17780">
-            <a:solidFill>
-              <a:srgbClr val="6B7280"/>
-            </a:solidFill>
-          </a:ln>
-          <a:effectLst/>
-        </p:spPr>
-        <p:style>
-          <a:lnRef idx="1">
-            <a:schemeClr val="accent1"/>
-          </a:lnRef>
-          <a:fillRef idx="3">
-            <a:schemeClr val="accent1"/>
-          </a:fillRef>
-          <a:effectRef idx="2">
-            <a:schemeClr val="accent1"/>
-          </a:effectRef>
-          <a:fontRef idx="minor">
-            <a:schemeClr val="lt1"/>
-          </a:fontRef>
-        </p:style>
-        <p:txBody>
-          <a:bodyPr rtlCol="0" anchor="ctr"/>
-          <a:lstStyle/>
-          <a:p/>
-        </p:txBody>
-      </p:sp>
-      <p:sp>
-        <p:nvSpPr>
-          <p:cNvPr id="43" name="Rectangle 42"/>
-          <p:cNvSpPr/>
-          <p:nvPr/>
-        </p:nvSpPr>
-        <p:spPr>
-          <a:xfrm>
-            <a:off x="4219956" y="5276088"/>
-            <a:ext cx="182880" cy="182880"/>
-          </a:xfrm>
-          <a:prstGeom prst="rect">
-            <a:avLst/>
-          </a:prstGeom>
-          <a:solidFill>
-            <a:srgbClr val="FFFFFF"/>
-          </a:solidFill>
-          <a:ln w="17780">
-            <a:solidFill>
-              <a:srgbClr val="6B7280"/>
-            </a:solidFill>
-          </a:ln>
-          <a:effectLst/>
-        </p:spPr>
-        <p:style>
-          <a:lnRef idx="1">
-            <a:schemeClr val="accent1"/>
-          </a:lnRef>
-          <a:fillRef idx="3">
-            <a:schemeClr val="accent1"/>
-          </a:fillRef>
-          <a:effectRef idx="2">
-            <a:schemeClr val="accent1"/>
-          </a:effectRef>
-          <a:fontRef idx="minor">
-            <a:schemeClr val="lt1"/>
-          </a:fontRef>
-        </p:style>
-        <p:txBody>
-          <a:bodyPr rtlCol="0" anchor="ctr"/>
-          <a:lstStyle/>
-          <a:p/>
-        </p:txBody>
-      </p:sp>
-      <p:cxnSp>
-        <p:nvCxnSpPr>
-          <p:cNvPr id="44" name="Connector 43"/>
-          <p:cNvCxnSpPr/>
-          <p:nvPr/>
-        </p:nvCxnSpPr>
-        <p:spPr>
-          <a:xfrm>
-            <a:off x="4219956" y="5276088"/>
-            <a:ext cx="182880" cy="182880"/>
-          </a:xfrm>
-          <a:prstGeom prst="line">
-            <a:avLst/>
-          </a:prstGeom>
-          <a:ln w="12700">
-            <a:solidFill>
-              <a:srgbClr val="6B7280"/>
-            </a:solidFill>
-          </a:ln>
-        </p:spPr>
-        <p:style>
-          <a:lnRef idx="2">
-            <a:schemeClr val="accent1"/>
-          </a:lnRef>
-          <a:fillRef idx="0">
-            <a:schemeClr val="accent1"/>
-          </a:fillRef>
-          <a:effectRef idx="1">
-            <a:schemeClr val="accent1"/>
-          </a:effectRef>
-          <a:fontRef idx="minor">
-            <a:schemeClr val="tx1"/>
-          </a:fontRef>
-        </p:style>
-      </p:cxnSp>
-      <p:cxnSp>
-        <p:nvCxnSpPr>
-          <p:cNvPr id="45" name="Connector 44"/>
-          <p:cNvCxnSpPr/>
-          <p:nvPr/>
-        </p:nvCxnSpPr>
-        <p:spPr>
-          <a:xfrm flipV="1">
-            <a:off x="4219956" y="5276088"/>
-            <a:ext cx="182880" cy="182880"/>
-          </a:xfrm>
-          <a:prstGeom prst="line">
-            <a:avLst/>
-          </a:prstGeom>
-          <a:ln w="12700">
-            <a:solidFill>
-              <a:srgbClr val="6B7280"/>
-            </a:solidFill>
-          </a:ln>
-        </p:spPr>
-        <p:style>
-          <a:lnRef idx="2">
-            <a:schemeClr val="accent1"/>
-          </a:lnRef>
-          <a:fillRef idx="0">
-            <a:schemeClr val="accent1"/>
-          </a:fillRef>
-          <a:effectRef idx="1">
-            <a:schemeClr val="accent1"/>
-          </a:effectRef>
-          <a:fontRef idx="minor">
-            <a:schemeClr val="tx1"/>
-          </a:fontRef>
-        </p:style>
-      </p:cxnSp>
-      <p:sp>
-        <p:nvSpPr>
-          <p:cNvPr id="46" name="TextBox 45"/>
-          <p:cNvSpPr txBox="1"/>
-          <p:nvPr/>
-        </p:nvSpPr>
-        <p:spPr>
-          <a:xfrm>
-            <a:off x="4494276" y="5239512"/>
-            <a:ext cx="1094994" cy="237744"/>
-          </a:xfrm>
-          <a:prstGeom prst="rect">
-            <a:avLst/>
-          </a:prstGeom>
-          <a:noFill/>
-        </p:spPr>
-        <p:txBody>
-          <a:bodyPr wrap="square" lIns="0" rIns="0" tIns="0" bIns="0" anchor="ctr">
-            <a:spAutoFit/>
-          </a:bodyPr>
-          <a:lstStyle/>
-          <a:p>
-            <a:pPr algn="l">
-              <a:spcAft>
-                <a:spcPts val="0"/>
-              </a:spcAft>
-            </a:pPr>
-            <a:r>
-              <a:rPr sz="1100" b="1" i="0">
-                <a:solidFill>
-                  <a:srgbClr val="1B2740"/>
-                </a:solidFill>
-                <a:latin typeface="맑은 고딕"/>
-                <a:ea typeface="맑은 고딕"/>
-              </a:rPr>
-              <a:t>스캔 12</a:t>
-            </a:r>
-          </a:p>
-        </p:txBody>
-      </p:sp>
-      <p:sp>
-        <p:nvSpPr>
-          <p:cNvPr id="47" name="TextBox 46"/>
-          <p:cNvSpPr txBox="1"/>
-          <p:nvPr/>
-        </p:nvSpPr>
-        <p:spPr>
-          <a:xfrm>
-            <a:off x="4219956" y="5541264"/>
-            <a:ext cx="1369314" cy="237744"/>
-          </a:xfrm>
-          <a:prstGeom prst="rect">
-            <a:avLst/>
-          </a:prstGeom>
-          <a:noFill/>
-        </p:spPr>
-        <p:txBody>
-          <a:bodyPr wrap="square" lIns="0" rIns="0" tIns="0" bIns="0" anchor="t">
-            <a:spAutoFit/>
-          </a:bodyPr>
-          <a:lstStyle/>
-          <a:p>
-            <a:pPr algn="l">
-              <a:spcAft>
-                <a:spcPts val="0"/>
-              </a:spcAft>
-            </a:pPr>
-            <a:r>
-              <a:rPr sz="1050" b="1" i="0">
-                <a:solidFill>
-                  <a:srgbClr val="6B7280"/>
-                </a:solidFill>
-                <a:latin typeface="맑은 고딕"/>
-                <a:ea typeface="맑은 고딕"/>
-              </a:rPr>
-              <a:t>TrackScore 0</a:t>
-            </a:r>
-          </a:p>
-        </p:txBody>
-      </p:sp>
-      <p:sp>
-        <p:nvSpPr>
-          <p:cNvPr id="48" name="TextBox 47"/>
-          <p:cNvSpPr txBox="1"/>
-          <p:nvPr/>
-        </p:nvSpPr>
-        <p:spPr>
-          <a:xfrm>
-            <a:off x="4219956" y="5797296"/>
-            <a:ext cx="1369314" cy="329184"/>
-          </a:xfrm>
-          <a:prstGeom prst="rect">
-            <a:avLst/>
-          </a:prstGeom>
-          <a:noFill/>
-        </p:spPr>
-        <p:txBody>
-          <a:bodyPr wrap="square" lIns="0" rIns="0" tIns="0" bIns="0" anchor="t">
-            <a:spAutoFit/>
-          </a:bodyPr>
-          <a:lstStyle/>
-          <a:p>
-            <a:pPr algn="l">
-              <a:spcAft>
-                <a:spcPts val="0"/>
-              </a:spcAft>
-            </a:pPr>
-            <a:r>
-              <a:rPr sz="900" b="0" i="0">
-                <a:solidFill>
-                  <a:srgbClr val="4A5A7A"/>
-                </a:solidFill>
-                <a:latin typeface="맑은 고딕"/>
-                <a:ea typeface="맑은 고딕"/>
-              </a:rPr>
-              <a:t>0 이하라 삭제 상태 (4)</a:t>
-            </a:r>
-          </a:p>
-        </p:txBody>
-      </p:sp>
-      <p:cxnSp>
-        <p:nvCxnSpPr>
-          <p:cNvPr id="49" name="Connector 48"/>
-          <p:cNvCxnSpPr/>
-          <p:nvPr/>
-        </p:nvCxnSpPr>
-        <p:spPr>
-          <a:xfrm>
-            <a:off x="5680709" y="5678424"/>
-            <a:ext cx="164593" cy="0"/>
-          </a:xfrm>
-          <a:prstGeom prst="line">
-            <a:avLst/>
-          </a:prstGeom>
-          <a:ln w="15240">
-            <a:solidFill>
-              <a:srgbClr val="AEB9CC"/>
-            </a:solidFill>
-            <a:tailEnd type="triangle" w="med" len="med"/>
-          </a:ln>
-        </p:spPr>
-        <p:style>
-          <a:lnRef idx="2">
-            <a:schemeClr val="accent1"/>
-          </a:lnRef>
-          <a:fillRef idx="0">
-            <a:schemeClr val="accent1"/>
-          </a:fillRef>
-          <a:effectRef idx="1">
-            <a:schemeClr val="accent1"/>
-          </a:effectRef>
-          <a:fontRef idx="minor">
-            <a:schemeClr val="tx1"/>
-          </a:fontRef>
-        </p:style>
-      </p:cxnSp>
-      <p:sp>
-        <p:nvSpPr>
-          <p:cNvPr id="50" name="Rounded Rectangle 49"/>
-          <p:cNvSpPr/>
-          <p:nvPr/>
-        </p:nvSpPr>
-        <p:spPr>
-          <a:xfrm>
-            <a:off x="5863590" y="5175504"/>
-            <a:ext cx="1552194" cy="1005840"/>
-          </a:xfrm>
-          <a:prstGeom prst="roundRect">
-            <a:avLst>
-              <a:gd name="adj" fmla="val 8000"/>
-            </a:avLst>
-          </a:prstGeom>
-          <a:solidFill>
-            <a:srgbClr val="FFFFFF"/>
-          </a:solidFill>
-          <a:ln w="17780">
-            <a:solidFill>
-              <a:srgbClr val="AEB9CC"/>
-            </a:solidFill>
-          </a:ln>
-          <a:effectLst/>
-        </p:spPr>
-        <p:style>
-          <a:lnRef idx="1">
-            <a:schemeClr val="accent1"/>
-          </a:lnRef>
-          <a:fillRef idx="3">
-            <a:schemeClr val="accent1"/>
-          </a:fillRef>
-          <a:effectRef idx="2">
-            <a:schemeClr val="accent1"/>
-          </a:effectRef>
-          <a:fontRef idx="minor">
-            <a:schemeClr val="lt1"/>
-          </a:fontRef>
-        </p:style>
-        <p:txBody>
-          <a:bodyPr rtlCol="0" anchor="ctr"/>
-          <a:lstStyle/>
-          <a:p/>
-        </p:txBody>
-      </p:sp>
-      <p:sp>
-        <p:nvSpPr>
-          <p:cNvPr id="51" name="TextBox 50"/>
-          <p:cNvSpPr txBox="1"/>
-          <p:nvPr/>
-        </p:nvSpPr>
-        <p:spPr>
-          <a:xfrm>
-            <a:off x="6247638" y="5239512"/>
-            <a:ext cx="1094994" cy="237744"/>
-          </a:xfrm>
-          <a:prstGeom prst="rect">
-            <a:avLst/>
-          </a:prstGeom>
-          <a:noFill/>
-        </p:spPr>
-        <p:txBody>
-          <a:bodyPr wrap="square" lIns="0" rIns="0" tIns="0" bIns="0" anchor="ctr">
-            <a:spAutoFit/>
-          </a:bodyPr>
-          <a:lstStyle/>
-          <a:p>
-            <a:pPr algn="l">
-              <a:spcAft>
-                <a:spcPts val="0"/>
-              </a:spcAft>
-            </a:pPr>
-            <a:r>
-              <a:rPr sz="1100" b="1" i="0">
-                <a:solidFill>
-                  <a:srgbClr val="1B2740"/>
-                </a:solidFill>
-                <a:latin typeface="맑은 고딕"/>
-                <a:ea typeface="맑은 고딕"/>
-              </a:rPr>
-              <a:t>스캔 13</a:t>
-            </a:r>
-          </a:p>
-        </p:txBody>
-      </p:sp>
-      <p:sp>
-        <p:nvSpPr>
-          <p:cNvPr id="52" name="TextBox 51"/>
-          <p:cNvSpPr txBox="1"/>
-          <p:nvPr/>
-        </p:nvSpPr>
-        <p:spPr>
-          <a:xfrm>
-            <a:off x="5973318" y="5541264"/>
-            <a:ext cx="1369314" cy="237744"/>
-          </a:xfrm>
-          <a:prstGeom prst="rect">
-            <a:avLst/>
-          </a:prstGeom>
-          <a:noFill/>
-        </p:spPr>
-        <p:txBody>
-          <a:bodyPr wrap="square" lIns="0" rIns="0" tIns="0" bIns="0" anchor="t">
-            <a:spAutoFit/>
-          </a:bodyPr>
-          <a:lstStyle/>
-          <a:p>
-            <a:pPr algn="l">
-              <a:spcAft>
-                <a:spcPts val="0"/>
-              </a:spcAft>
-            </a:pPr>
-            <a:r>
-              <a:rPr sz="1050" b="1" i="0">
-                <a:solidFill>
-                  <a:srgbClr val="4A5A7A"/>
-                </a:solidFill>
-                <a:latin typeface="맑은 고딕"/>
-                <a:ea typeface="맑은 고딕"/>
-              </a:rPr>
-              <a:t>표에 없음</a:t>
-            </a:r>
-          </a:p>
-        </p:txBody>
-      </p:sp>
-      <p:sp>
-        <p:nvSpPr>
-          <p:cNvPr id="53" name="TextBox 52"/>
-          <p:cNvSpPr txBox="1"/>
-          <p:nvPr/>
-        </p:nvSpPr>
-        <p:spPr>
-          <a:xfrm>
-            <a:off x="5973318" y="5797296"/>
-            <a:ext cx="1369314" cy="329184"/>
-          </a:xfrm>
-          <a:prstGeom prst="rect">
-            <a:avLst/>
-          </a:prstGeom>
-          <a:noFill/>
-        </p:spPr>
-        <p:txBody>
-          <a:bodyPr wrap="square" lIns="0" rIns="0" tIns="0" bIns="0" anchor="t">
-            <a:spAutoFit/>
-          </a:bodyPr>
-          <a:lstStyle/>
-          <a:p>
-            <a:pPr algn="l">
-              <a:spcAft>
-                <a:spcPts val="0"/>
-              </a:spcAft>
-            </a:pPr>
-            <a:r>
-              <a:rPr sz="900" b="0" i="0">
-                <a:solidFill>
-                  <a:srgbClr val="4A5A7A"/>
-                </a:solidFill>
-                <a:latin typeface="맑은 고딕"/>
-                <a:ea typeface="맑은 고딕"/>
-              </a:rPr>
-              <a:t>처리 시작 때 표에서 뺌</a:t>
-            </a:r>
-          </a:p>
-        </p:txBody>
-      </p:sp>
+              <a:t>tracks.csv 의 트랙 100 (첫 줄) 부분. 한 줄이 그림의 칸 하나</a:t>
+            </a:r>
+          </a:p>
+        </p:txBody>
+      </p:sp>
+      <p:graphicFrame>
+        <p:nvGraphicFramePr>
+          <p:cNvPr id="29" name="Table 28"/>
+          <p:cNvGraphicFramePr>
+            <a:graphicFrameLocks noGrp="1"/>
+          </p:cNvGraphicFramePr>
+          <p:nvPr/>
+        </p:nvGraphicFramePr>
+        <p:xfrm>
+          <a:off x="640080" y="5157216"/>
+          <a:ext cx="6812280" cy="1097280"/>
+        </p:xfrm>
+        <a:graphic>
+          <a:graphicData uri="http://schemas.openxmlformats.org/drawingml/2006/table">
+            <a:tbl>
+              <a:tblPr firstRow="0" bandRow="0">
+                <a:tableStyleId>{5C22544A-7EE6-4342-B048-85BDC9FD1C3A}</a:tableStyleId>
+              </a:tblPr>
+              <a:tblGrid>
+                <a:gridCol w="411480"/>
+                <a:gridCol w="502920"/>
+                <a:gridCol w="731520"/>
+                <a:gridCol w="475488"/>
+                <a:gridCol w="475488"/>
+                <a:gridCol w="402336"/>
+                <a:gridCol w="749808"/>
+                <a:gridCol w="731520"/>
+                <a:gridCol w="658368"/>
+                <a:gridCol w="320040"/>
+                <a:gridCol w="1353312"/>
+              </a:tblGrid>
+              <a:tr h="219456">
+                <a:tc>
+                  <a:txBody>
+                    <a:bodyPr wrap="none"/>
+                    <a:lstStyle/>
+                    <a:p>
+                      <a:pPr algn="ctr"/>
+                      <a:r>
+                        <a:rPr sz="900" b="1" i="0">
+                          <a:solidFill>
+                            <a:srgbClr val="FFFFFF"/>
+                          </a:solidFill>
+                          <a:latin typeface="Consolas"/>
+                          <a:ea typeface="Consolas"/>
+                        </a:rPr>
+                        <a:t>scan</a:t>
+                      </a:r>
+                    </a:p>
+                  </a:txBody>
+                  <a:tcPr marL="27432" marR="27432" marT="0" marB="0" anchor="ctr">
+                    <a:solidFill>
+                      <a:srgbClr val="1B2740"/>
+                    </a:solidFill>
+                  </a:tcPr>
+                </a:tc>
+                <a:tc>
+                  <a:txBody>
+                    <a:bodyPr wrap="none"/>
+                    <a:lstStyle/>
+                    <a:p>
+                      <a:pPr algn="ctr"/>
+                      <a:r>
+                        <a:rPr sz="900" b="1" i="0">
+                          <a:solidFill>
+                            <a:srgbClr val="FFFFFF"/>
+                          </a:solidFill>
+                          <a:latin typeface="Consolas"/>
+                          <a:ea typeface="Consolas"/>
+                        </a:rPr>
+                        <a:t>time</a:t>
+                      </a:r>
+                    </a:p>
+                  </a:txBody>
+                  <a:tcPr marL="27432" marR="27432" marT="0" marB="0" anchor="ctr">
+                    <a:solidFill>
+                      <a:srgbClr val="1B2740"/>
+                    </a:solidFill>
+                  </a:tcPr>
+                </a:tc>
+                <a:tc>
+                  <a:txBody>
+                    <a:bodyPr wrap="none"/>
+                    <a:lstStyle/>
+                    <a:p>
+                      <a:pPr algn="ctr"/>
+                      <a:r>
+                        <a:rPr sz="900" b="1" i="0">
+                          <a:solidFill>
+                            <a:srgbClr val="FFFFFF"/>
+                          </a:solidFill>
+                          <a:latin typeface="Consolas"/>
+                          <a:ea typeface="Consolas"/>
+                        </a:rPr>
+                        <a:t>track_id</a:t>
+                      </a:r>
+                    </a:p>
+                  </a:txBody>
+                  <a:tcPr marL="27432" marR="27432" marT="0" marB="0" anchor="ctr">
+                    <a:solidFill>
+                      <a:srgbClr val="1B2740"/>
+                    </a:solidFill>
+                  </a:tcPr>
+                </a:tc>
+                <a:tc>
+                  <a:txBody>
+                    <a:bodyPr wrap="none"/>
+                    <a:lstStyle/>
+                    <a:p>
+                      <a:pPr algn="ctr"/>
+                      <a:r>
+                        <a:rPr sz="900" b="1" i="0">
+                          <a:solidFill>
+                            <a:srgbClr val="FFFFFF"/>
+                          </a:solidFill>
+                          <a:latin typeface="Consolas"/>
+                          <a:ea typeface="Consolas"/>
+                        </a:rPr>
+                        <a:t>state</a:t>
+                      </a:r>
+                    </a:p>
+                  </a:txBody>
+                  <a:tcPr marL="27432" marR="27432" marT="0" marB="0" anchor="ctr">
+                    <a:solidFill>
+                      <a:srgbClr val="1B2740"/>
+                    </a:solidFill>
+                  </a:tcPr>
+                </a:tc>
+                <a:tc>
+                  <a:txBody>
+                    <a:bodyPr wrap="none"/>
+                    <a:lstStyle/>
+                    <a:p>
+                      <a:pPr algn="ctr"/>
+                      <a:r>
+                        <a:rPr sz="900" b="1" i="0">
+                          <a:solidFill>
+                            <a:srgbClr val="FFFFFF"/>
+                          </a:solidFill>
+                          <a:latin typeface="Consolas"/>
+                          <a:ea typeface="Consolas"/>
+                        </a:rPr>
+                        <a:t>score</a:t>
+                      </a:r>
+                    </a:p>
+                  </a:txBody>
+                  <a:tcPr marL="27432" marR="27432" marT="0" marB="0" anchor="ctr">
+                    <a:solidFill>
+                      <a:srgbClr val="1B2740"/>
+                    </a:solidFill>
+                  </a:tcPr>
+                </a:tc>
+                <a:tc>
+                  <a:txBody>
+                    <a:bodyPr wrap="none"/>
+                    <a:lstStyle/>
+                    <a:p>
+                      <a:pPr algn="ctr"/>
+                      <a:r>
+                        <a:rPr sz="900" b="1" i="0">
+                          <a:solidFill>
+                            <a:srgbClr val="FFFFFF"/>
+                          </a:solidFill>
+                          <a:latin typeface="Consolas"/>
+                          <a:ea typeface="Consolas"/>
+                        </a:rPr>
+                        <a:t>flag</a:t>
+                      </a:r>
+                    </a:p>
+                  </a:txBody>
+                  <a:tcPr marL="27432" marR="27432" marT="0" marB="0" anchor="ctr">
+                    <a:solidFill>
+                      <a:srgbClr val="1B2740"/>
+                    </a:solidFill>
+                  </a:tcPr>
+                </a:tc>
+                <a:tc>
+                  <a:txBody>
+                    <a:bodyPr wrap="none"/>
+                    <a:lstStyle/>
+                    <a:p>
+                      <a:pPr algn="ctr"/>
+                      <a:r>
+                        <a:rPr sz="900" b="1" i="0">
+                          <a:solidFill>
+                            <a:srgbClr val="FFFFFF"/>
+                          </a:solidFill>
+                          <a:latin typeface="Consolas"/>
+                          <a:ea typeface="Consolas"/>
+                        </a:rPr>
+                        <a:t>plot_prev</a:t>
+                      </a:r>
+                    </a:p>
+                  </a:txBody>
+                  <a:tcPr marL="27432" marR="27432" marT="0" marB="0" anchor="ctr">
+                    <a:solidFill>
+                      <a:srgbClr val="1B2740"/>
+                    </a:solidFill>
+                  </a:tcPr>
+                </a:tc>
+                <a:tc>
+                  <a:txBody>
+                    <a:bodyPr wrap="none"/>
+                    <a:lstStyle/>
+                    <a:p>
+                      <a:pPr algn="ctr"/>
+                      <a:r>
+                        <a:rPr sz="900" b="1" i="0">
+                          <a:solidFill>
+                            <a:srgbClr val="FFFFFF"/>
+                          </a:solidFill>
+                          <a:latin typeface="Consolas"/>
+                          <a:ea typeface="Consolas"/>
+                        </a:rPr>
+                        <a:t>plot_cur</a:t>
+                      </a:r>
+                    </a:p>
+                  </a:txBody>
+                  <a:tcPr marL="27432" marR="27432" marT="0" marB="0" anchor="ctr">
+                    <a:solidFill>
+                      <a:srgbClr val="1B2740"/>
+                    </a:solidFill>
+                  </a:tcPr>
+                </a:tc>
+                <a:tc>
+                  <a:txBody>
+                    <a:bodyPr wrap="none"/>
+                    <a:lstStyle/>
+                    <a:p>
+                      <a:pPr algn="ctr"/>
+                      <a:r>
+                        <a:rPr sz="900" b="1" i="0">
+                          <a:solidFill>
+                            <a:srgbClr val="FFFFFF"/>
+                          </a:solidFill>
+                          <a:latin typeface="Consolas"/>
+                          <a:ea typeface="Consolas"/>
+                        </a:rPr>
+                        <a:t>src_cur</a:t>
+                      </a:r>
+                    </a:p>
+                  </a:txBody>
+                  <a:tcPr marL="27432" marR="27432" marT="0" marB="0" anchor="ctr">
+                    <a:solidFill>
+                      <a:srgbClr val="1B2740"/>
+                    </a:solidFill>
+                  </a:tcPr>
+                </a:tc>
+                <a:tc>
+                  <a:txBody>
+                    <a:bodyPr wrap="none"/>
+                    <a:lstStyle/>
+                    <a:p>
+                      <a:pPr algn="ctr"/>
+                      <a:r>
+                        <a:rPr sz="900" b="1" i="0">
+                          <a:solidFill>
+                            <a:srgbClr val="FFFFFF"/>
+                          </a:solidFill>
+                          <a:latin typeface="맑은 고딕"/>
+                          <a:ea typeface="맑은 고딕"/>
+                        </a:rPr>
+                        <a:t>칸</a:t>
+                      </a:r>
+                    </a:p>
+                  </a:txBody>
+                  <a:tcPr marL="27432" marR="27432" marT="0" marB="0" anchor="ctr">
+                    <a:solidFill>
+                      <a:srgbClr val="1B2740"/>
+                    </a:solidFill>
+                  </a:tcPr>
+                </a:tc>
+                <a:tc>
+                  <a:txBody>
+                    <a:bodyPr wrap="none"/>
+                    <a:lstStyle/>
+                    <a:p>
+                      <a:pPr algn="l"/>
+                      <a:r>
+                        <a:rPr sz="900" b="1" i="0">
+                          <a:solidFill>
+                            <a:srgbClr val="FFFFFF"/>
+                          </a:solidFill>
+                          <a:latin typeface="맑은 고딕"/>
+                          <a:ea typeface="맑은 고딕"/>
+                        </a:rPr>
+                        <a:t>뜻</a:t>
+                      </a:r>
+                    </a:p>
+                  </a:txBody>
+                  <a:tcPr marL="27432" marR="27432" marT="0" marB="0" anchor="ctr">
+                    <a:solidFill>
+                      <a:srgbClr val="1B2740"/>
+                    </a:solidFill>
+                  </a:tcPr>
+                </a:tc>
+              </a:tr>
+              <a:tr h="219456">
+                <a:tc>
+                  <a:txBody>
+                    <a:bodyPr wrap="none"/>
+                    <a:lstStyle/>
+                    <a:p>
+                      <a:pPr algn="ctr"/>
+                      <a:r>
+                        <a:rPr sz="950" b="0" i="0">
+                          <a:solidFill>
+                            <a:srgbClr val="1B2740"/>
+                          </a:solidFill>
+                          <a:latin typeface="Consolas"/>
+                          <a:ea typeface="Consolas"/>
+                        </a:rPr>
+                        <a:t>10</a:t>
+                      </a:r>
+                    </a:p>
+                  </a:txBody>
+                  <a:tcPr marL="27432" marR="27432" marT="0" marB="0" anchor="ctr">
+                    <a:solidFill>
+                      <a:srgbClr val="FEF5E7"/>
+                    </a:solidFill>
+                  </a:tcPr>
+                </a:tc>
+                <a:tc>
+                  <a:txBody>
+                    <a:bodyPr wrap="none"/>
+                    <a:lstStyle/>
+                    <a:p>
+                      <a:pPr algn="ctr"/>
+                      <a:r>
+                        <a:rPr sz="950" b="0" i="0">
+                          <a:solidFill>
+                            <a:srgbClr val="1B2740"/>
+                          </a:solidFill>
+                          <a:latin typeface="Consolas"/>
+                          <a:ea typeface="Consolas"/>
+                        </a:rPr>
+                        <a:t>1.000</a:t>
+                      </a:r>
+                    </a:p>
+                  </a:txBody>
+                  <a:tcPr marL="27432" marR="27432" marT="0" marB="0" anchor="ctr">
+                    <a:solidFill>
+                      <a:srgbClr val="FEF5E7"/>
+                    </a:solidFill>
+                  </a:tcPr>
+                </a:tc>
+                <a:tc>
+                  <a:txBody>
+                    <a:bodyPr wrap="none"/>
+                    <a:lstStyle/>
+                    <a:p>
+                      <a:pPr algn="ctr"/>
+                      <a:r>
+                        <a:rPr sz="950" b="0" i="0">
+                          <a:solidFill>
+                            <a:srgbClr val="1B2740"/>
+                          </a:solidFill>
+                          <a:latin typeface="Consolas"/>
+                          <a:ea typeface="Consolas"/>
+                        </a:rPr>
+                        <a:t>100</a:t>
+                      </a:r>
+                    </a:p>
+                  </a:txBody>
+                  <a:tcPr marL="27432" marR="27432" marT="0" marB="0" anchor="ctr">
+                    <a:solidFill>
+                      <a:srgbClr val="FEF5E7"/>
+                    </a:solidFill>
+                  </a:tcPr>
+                </a:tc>
+                <a:tc>
+                  <a:txBody>
+                    <a:bodyPr wrap="none"/>
+                    <a:lstStyle/>
+                    <a:p>
+                      <a:pPr algn="ctr"/>
+                      <a:r>
+                        <a:rPr sz="950" b="0" i="0">
+                          <a:solidFill>
+                            <a:srgbClr val="1B2740"/>
+                          </a:solidFill>
+                          <a:latin typeface="Consolas"/>
+                          <a:ea typeface="Consolas"/>
+                        </a:rPr>
+                        <a:t>1</a:t>
+                      </a:r>
+                    </a:p>
+                  </a:txBody>
+                  <a:tcPr marL="27432" marR="27432" marT="0" marB="0" anchor="ctr">
+                    <a:solidFill>
+                      <a:srgbClr val="FEF5E7"/>
+                    </a:solidFill>
+                  </a:tcPr>
+                </a:tc>
+                <a:tc>
+                  <a:txBody>
+                    <a:bodyPr wrap="none"/>
+                    <a:lstStyle/>
+                    <a:p>
+                      <a:pPr algn="ctr"/>
+                      <a:r>
+                        <a:rPr sz="950" b="0" i="0">
+                          <a:solidFill>
+                            <a:srgbClr val="1B2740"/>
+                          </a:solidFill>
+                          <a:latin typeface="Consolas"/>
+                          <a:ea typeface="Consolas"/>
+                        </a:rPr>
+                        <a:t>2</a:t>
+                      </a:r>
+                    </a:p>
+                  </a:txBody>
+                  <a:tcPr marL="27432" marR="27432" marT="0" marB="0" anchor="ctr">
+                    <a:solidFill>
+                      <a:srgbClr val="FEF5E7"/>
+                    </a:solidFill>
+                  </a:tcPr>
+                </a:tc>
+                <a:tc>
+                  <a:txBody>
+                    <a:bodyPr wrap="none"/>
+                    <a:lstStyle/>
+                    <a:p>
+                      <a:pPr algn="ctr"/>
+                      <a:r>
+                        <a:rPr sz="950" b="0" i="0">
+                          <a:solidFill>
+                            <a:srgbClr val="1B2740"/>
+                          </a:solidFill>
+                          <a:latin typeface="Consolas"/>
+                          <a:ea typeface="Consolas"/>
+                        </a:rPr>
+                        <a:t>0</a:t>
+                      </a:r>
+                    </a:p>
+                  </a:txBody>
+                  <a:tcPr marL="27432" marR="27432" marT="0" marB="0" anchor="ctr">
+                    <a:solidFill>
+                      <a:srgbClr val="FEF5E7"/>
+                    </a:solidFill>
+                  </a:tcPr>
+                </a:tc>
+                <a:tc>
+                  <a:txBody>
+                    <a:bodyPr wrap="none"/>
+                    <a:lstStyle/>
+                    <a:p>
+                      <a:pPr algn="ctr"/>
+                      <a:r>
+                        <a:rPr sz="950" b="0" i="0">
+                          <a:solidFill>
+                            <a:srgbClr val="1B2740"/>
+                          </a:solidFill>
+                          <a:latin typeface="Consolas"/>
+                          <a:ea typeface="Consolas"/>
+                        </a:rPr>
+                        <a:t>10067</a:t>
+                      </a:r>
+                    </a:p>
+                  </a:txBody>
+                  <a:tcPr marL="27432" marR="27432" marT="0" marB="0" anchor="ctr">
+                    <a:solidFill>
+                      <a:srgbClr val="FEF5E7"/>
+                    </a:solidFill>
+                  </a:tcPr>
+                </a:tc>
+                <a:tc>
+                  <a:txBody>
+                    <a:bodyPr wrap="none"/>
+                    <a:lstStyle/>
+                    <a:p>
+                      <a:pPr algn="ctr"/>
+                      <a:r>
+                        <a:rPr sz="950" b="0" i="0">
+                          <a:solidFill>
+                            <a:srgbClr val="1B2740"/>
+                          </a:solidFill>
+                          <a:latin typeface="Consolas"/>
+                          <a:ea typeface="Consolas"/>
+                        </a:rPr>
+                        <a:t>10074</a:t>
+                      </a:r>
+                    </a:p>
+                  </a:txBody>
+                  <a:tcPr marL="27432" marR="27432" marT="0" marB="0" anchor="ctr">
+                    <a:solidFill>
+                      <a:srgbClr val="FEF5E7"/>
+                    </a:solidFill>
+                  </a:tcPr>
+                </a:tc>
+                <a:tc>
+                  <a:txBody>
+                    <a:bodyPr wrap="none"/>
+                    <a:lstStyle/>
+                    <a:p>
+                      <a:pPr algn="ctr"/>
+                      <a:r>
+                        <a:rPr sz="950" b="0" i="0">
+                          <a:solidFill>
+                            <a:srgbClr val="1B2740"/>
+                          </a:solidFill>
+                          <a:latin typeface="Consolas"/>
+                          <a:ea typeface="Consolas"/>
+                        </a:rPr>
+                        <a:t>2</a:t>
+                      </a:r>
+                    </a:p>
+                  </a:txBody>
+                  <a:tcPr marL="27432" marR="27432" marT="0" marB="0" anchor="ctr">
+                    <a:solidFill>
+                      <a:srgbClr val="FEF5E7"/>
+                    </a:solidFill>
+                  </a:tcPr>
+                </a:tc>
+                <a:tc>
+                  <a:txBody>
+                    <a:bodyPr wrap="none"/>
+                    <a:lstStyle/>
+                    <a:p>
+                      <a:pPr algn="ctr"/>
+                      <a:r>
+                        <a:rPr sz="1100" b="1" i="0">
+                          <a:solidFill>
+                            <a:srgbClr val="D97706"/>
+                          </a:solidFill>
+                          <a:latin typeface="맑은 고딕"/>
+                          <a:ea typeface="맑은 고딕"/>
+                        </a:rPr>
+                        <a:t>■</a:t>
+                      </a:r>
+                    </a:p>
+                  </a:txBody>
+                  <a:tcPr marL="27432" marR="27432" marT="0" marB="0" anchor="ctr">
+                    <a:solidFill>
+                      <a:srgbClr val="FEF5E7"/>
+                    </a:solidFill>
+                  </a:tcPr>
+                </a:tc>
+                <a:tc>
+                  <a:txBody>
+                    <a:bodyPr wrap="none"/>
+                    <a:lstStyle/>
+                    <a:p>
+                      <a:pPr algn="l"/>
+                      <a:r>
+                        <a:rPr sz="900" b="0" i="0">
+                          <a:solidFill>
+                            <a:srgbClr val="4A5A7A"/>
+                          </a:solidFill>
+                          <a:latin typeface="맑은 고딕"/>
+                          <a:ea typeface="맑은 고딕"/>
+                        </a:rPr>
+                        <a:t>두 플롯으로 개시</a:t>
+                      </a:r>
+                    </a:p>
+                  </a:txBody>
+                  <a:tcPr marL="27432" marR="27432" marT="0" marB="0" anchor="ctr">
+                    <a:solidFill>
+                      <a:srgbClr val="FEF5E7"/>
+                    </a:solidFill>
+                  </a:tcPr>
+                </a:tc>
+              </a:tr>
+              <a:tr h="219456">
+                <a:tc>
+                  <a:txBody>
+                    <a:bodyPr wrap="none"/>
+                    <a:lstStyle/>
+                    <a:p>
+                      <a:pPr algn="ctr"/>
+                      <a:r>
+                        <a:rPr sz="950" b="0" i="0">
+                          <a:solidFill>
+                            <a:srgbClr val="1B2740"/>
+                          </a:solidFill>
+                          <a:latin typeface="Consolas"/>
+                          <a:ea typeface="Consolas"/>
+                        </a:rPr>
+                        <a:t>11</a:t>
+                      </a:r>
+                    </a:p>
+                  </a:txBody>
+                  <a:tcPr marL="27432" marR="27432" marT="0" marB="0" anchor="ctr">
+                    <a:solidFill>
+                      <a:srgbClr val="FEF5E7"/>
+                    </a:solidFill>
+                  </a:tcPr>
+                </a:tc>
+                <a:tc>
+                  <a:txBody>
+                    <a:bodyPr wrap="none"/>
+                    <a:lstStyle/>
+                    <a:p>
+                      <a:pPr algn="ctr"/>
+                      <a:r>
+                        <a:rPr sz="950" b="0" i="0">
+                          <a:solidFill>
+                            <a:srgbClr val="1B2740"/>
+                          </a:solidFill>
+                          <a:latin typeface="Consolas"/>
+                          <a:ea typeface="Consolas"/>
+                        </a:rPr>
+                        <a:t>1.100</a:t>
+                      </a:r>
+                    </a:p>
+                  </a:txBody>
+                  <a:tcPr marL="27432" marR="27432" marT="0" marB="0" anchor="ctr">
+                    <a:solidFill>
+                      <a:srgbClr val="FEF5E7"/>
+                    </a:solidFill>
+                  </a:tcPr>
+                </a:tc>
+                <a:tc>
+                  <a:txBody>
+                    <a:bodyPr wrap="none"/>
+                    <a:lstStyle/>
+                    <a:p>
+                      <a:pPr algn="ctr"/>
+                      <a:r>
+                        <a:rPr sz="950" b="0" i="0">
+                          <a:solidFill>
+                            <a:srgbClr val="1B2740"/>
+                          </a:solidFill>
+                          <a:latin typeface="Consolas"/>
+                          <a:ea typeface="Consolas"/>
+                        </a:rPr>
+                        <a:t>100</a:t>
+                      </a:r>
+                    </a:p>
+                  </a:txBody>
+                  <a:tcPr marL="27432" marR="27432" marT="0" marB="0" anchor="ctr">
+                    <a:solidFill>
+                      <a:srgbClr val="FEF5E7"/>
+                    </a:solidFill>
+                  </a:tcPr>
+                </a:tc>
+                <a:tc>
+                  <a:txBody>
+                    <a:bodyPr wrap="none"/>
+                    <a:lstStyle/>
+                    <a:p>
+                      <a:pPr algn="ctr"/>
+                      <a:r>
+                        <a:rPr sz="950" b="0" i="0">
+                          <a:solidFill>
+                            <a:srgbClr val="1B2740"/>
+                          </a:solidFill>
+                          <a:latin typeface="Consolas"/>
+                          <a:ea typeface="Consolas"/>
+                        </a:rPr>
+                        <a:t>1</a:t>
+                      </a:r>
+                    </a:p>
+                  </a:txBody>
+                  <a:tcPr marL="27432" marR="27432" marT="0" marB="0" anchor="ctr">
+                    <a:solidFill>
+                      <a:srgbClr val="FEF5E7"/>
+                    </a:solidFill>
+                  </a:tcPr>
+                </a:tc>
+                <a:tc>
+                  <a:txBody>
+                    <a:bodyPr wrap="none"/>
+                    <a:lstStyle/>
+                    <a:p>
+                      <a:pPr algn="ctr"/>
+                      <a:r>
+                        <a:rPr sz="950" b="0" i="0">
+                          <a:solidFill>
+                            <a:srgbClr val="1B2740"/>
+                          </a:solidFill>
+                          <a:latin typeface="Consolas"/>
+                          <a:ea typeface="Consolas"/>
+                        </a:rPr>
+                        <a:t>1</a:t>
+                      </a:r>
+                    </a:p>
+                  </a:txBody>
+                  <a:tcPr marL="27432" marR="27432" marT="0" marB="0" anchor="ctr">
+                    <a:solidFill>
+                      <a:srgbClr val="FEF5E7"/>
+                    </a:solidFill>
+                  </a:tcPr>
+                </a:tc>
+                <a:tc>
+                  <a:txBody>
+                    <a:bodyPr wrap="none"/>
+                    <a:lstStyle/>
+                    <a:p>
+                      <a:pPr algn="ctr"/>
+                      <a:r>
+                        <a:rPr sz="950" b="0" i="0">
+                          <a:solidFill>
+                            <a:srgbClr val="1B2740"/>
+                          </a:solidFill>
+                          <a:latin typeface="Consolas"/>
+                          <a:ea typeface="Consolas"/>
+                        </a:rPr>
+                        <a:t>0</a:t>
+                      </a:r>
+                    </a:p>
+                  </a:txBody>
+                  <a:tcPr marL="27432" marR="27432" marT="0" marB="0" anchor="ctr">
+                    <a:solidFill>
+                      <a:srgbClr val="FEF5E7"/>
+                    </a:solidFill>
+                  </a:tcPr>
+                </a:tc>
+                <a:tc>
+                  <a:txBody>
+                    <a:bodyPr wrap="none"/>
+                    <a:lstStyle/>
+                    <a:p>
+                      <a:pPr algn="ctr"/>
+                      <a:r>
+                        <a:rPr sz="950" b="0" i="0">
+                          <a:solidFill>
+                            <a:srgbClr val="1B2740"/>
+                          </a:solidFill>
+                          <a:latin typeface="Consolas"/>
+                          <a:ea typeface="Consolas"/>
+                        </a:rPr>
+                        <a:t>10067</a:t>
+                      </a:r>
+                    </a:p>
+                  </a:txBody>
+                  <a:tcPr marL="27432" marR="27432" marT="0" marB="0" anchor="ctr">
+                    <a:solidFill>
+                      <a:srgbClr val="FEF5E7"/>
+                    </a:solidFill>
+                  </a:tcPr>
+                </a:tc>
+                <a:tc>
+                  <a:txBody>
+                    <a:bodyPr wrap="none"/>
+                    <a:lstStyle/>
+                    <a:p>
+                      <a:pPr algn="ctr"/>
+                      <a:r>
+                        <a:rPr sz="950" b="0" i="0">
+                          <a:solidFill>
+                            <a:srgbClr val="1B2740"/>
+                          </a:solidFill>
+                          <a:latin typeface="Consolas"/>
+                          <a:ea typeface="Consolas"/>
+                        </a:rPr>
+                        <a:t>10074</a:t>
+                      </a:r>
+                    </a:p>
+                  </a:txBody>
+                  <a:tcPr marL="27432" marR="27432" marT="0" marB="0" anchor="ctr">
+                    <a:solidFill>
+                      <a:srgbClr val="FEF5E7"/>
+                    </a:solidFill>
+                  </a:tcPr>
+                </a:tc>
+                <a:tc>
+                  <a:txBody>
+                    <a:bodyPr wrap="none"/>
+                    <a:lstStyle/>
+                    <a:p>
+                      <a:pPr algn="ctr"/>
+                      <a:r>
+                        <a:rPr sz="950" b="0" i="0">
+                          <a:solidFill>
+                            <a:srgbClr val="1B2740"/>
+                          </a:solidFill>
+                          <a:latin typeface="Consolas"/>
+                          <a:ea typeface="Consolas"/>
+                        </a:rPr>
+                        <a:t>2</a:t>
+                      </a:r>
+                    </a:p>
+                  </a:txBody>
+                  <a:tcPr marL="27432" marR="27432" marT="0" marB="0" anchor="ctr">
+                    <a:solidFill>
+                      <a:srgbClr val="FEF5E7"/>
+                    </a:solidFill>
+                  </a:tcPr>
+                </a:tc>
+                <a:tc>
+                  <a:txBody>
+                    <a:bodyPr wrap="none"/>
+                    <a:lstStyle/>
+                    <a:p>
+                      <a:pPr algn="ctr"/>
+                      <a:r>
+                        <a:rPr sz="1100" b="1" i="0">
+                          <a:solidFill>
+                            <a:srgbClr val="D97706"/>
+                          </a:solidFill>
+                          <a:latin typeface="맑은 고딕"/>
+                          <a:ea typeface="맑은 고딕"/>
+                        </a:rPr>
+                        <a:t>■</a:t>
+                      </a:r>
+                    </a:p>
+                  </a:txBody>
+                  <a:tcPr marL="27432" marR="27432" marT="0" marB="0" anchor="ctr">
+                    <a:solidFill>
+                      <a:srgbClr val="FEF5E7"/>
+                    </a:solidFill>
+                  </a:tcPr>
+                </a:tc>
+                <a:tc>
+                  <a:txBody>
+                    <a:bodyPr wrap="none"/>
+                    <a:lstStyle/>
+                    <a:p>
+                      <a:pPr algn="l"/>
+                      <a:r>
+                        <a:rPr sz="900" b="0" i="0">
+                          <a:solidFill>
+                            <a:srgbClr val="4A5A7A"/>
+                          </a:solidFill>
+                          <a:latin typeface="맑은 고딕"/>
+                          <a:ea typeface="맑은 고딕"/>
+                        </a:rPr>
+                        <a:t>flag 0 → score −1</a:t>
+                      </a:r>
+                    </a:p>
+                  </a:txBody>
+                  <a:tcPr marL="27432" marR="27432" marT="0" marB="0" anchor="ctr">
+                    <a:solidFill>
+                      <a:srgbClr val="FEF5E7"/>
+                    </a:solidFill>
+                  </a:tcPr>
+                </a:tc>
+              </a:tr>
+              <a:tr h="219456">
+                <a:tc>
+                  <a:txBody>
+                    <a:bodyPr wrap="none"/>
+                    <a:lstStyle/>
+                    <a:p>
+                      <a:pPr algn="ctr"/>
+                      <a:r>
+                        <a:rPr sz="950" b="0" i="0">
+                          <a:solidFill>
+                            <a:srgbClr val="1B2740"/>
+                          </a:solidFill>
+                          <a:latin typeface="Consolas"/>
+                          <a:ea typeface="Consolas"/>
+                        </a:rPr>
+                        <a:t>12</a:t>
+                      </a:r>
+                    </a:p>
+                  </a:txBody>
+                  <a:tcPr marL="27432" marR="27432" marT="0" marB="0" anchor="ctr">
+                    <a:solidFill>
+                      <a:srgbClr val="F7F9FC"/>
+                    </a:solidFill>
+                  </a:tcPr>
+                </a:tc>
+                <a:tc>
+                  <a:txBody>
+                    <a:bodyPr wrap="none"/>
+                    <a:lstStyle/>
+                    <a:p>
+                      <a:pPr algn="ctr"/>
+                      <a:r>
+                        <a:rPr sz="950" b="0" i="0">
+                          <a:solidFill>
+                            <a:srgbClr val="1B2740"/>
+                          </a:solidFill>
+                          <a:latin typeface="Consolas"/>
+                          <a:ea typeface="Consolas"/>
+                        </a:rPr>
+                        <a:t>1.200</a:t>
+                      </a:r>
+                    </a:p>
+                  </a:txBody>
+                  <a:tcPr marL="27432" marR="27432" marT="0" marB="0" anchor="ctr">
+                    <a:solidFill>
+                      <a:srgbClr val="F7F9FC"/>
+                    </a:solidFill>
+                  </a:tcPr>
+                </a:tc>
+                <a:tc>
+                  <a:txBody>
+                    <a:bodyPr wrap="none"/>
+                    <a:lstStyle/>
+                    <a:p>
+                      <a:pPr algn="ctr"/>
+                      <a:r>
+                        <a:rPr sz="950" b="0" i="0">
+                          <a:solidFill>
+                            <a:srgbClr val="1B2740"/>
+                          </a:solidFill>
+                          <a:latin typeface="Consolas"/>
+                          <a:ea typeface="Consolas"/>
+                        </a:rPr>
+                        <a:t>100</a:t>
+                      </a:r>
+                    </a:p>
+                  </a:txBody>
+                  <a:tcPr marL="27432" marR="27432" marT="0" marB="0" anchor="ctr">
+                    <a:solidFill>
+                      <a:srgbClr val="F7F9FC"/>
+                    </a:solidFill>
+                  </a:tcPr>
+                </a:tc>
+                <a:tc>
+                  <a:txBody>
+                    <a:bodyPr wrap="none"/>
+                    <a:lstStyle/>
+                    <a:p>
+                      <a:pPr algn="ctr"/>
+                      <a:r>
+                        <a:rPr sz="950" b="0" i="0">
+                          <a:solidFill>
+                            <a:srgbClr val="1B2740"/>
+                          </a:solidFill>
+                          <a:latin typeface="Consolas"/>
+                          <a:ea typeface="Consolas"/>
+                        </a:rPr>
+                        <a:t>4</a:t>
+                      </a:r>
+                    </a:p>
+                  </a:txBody>
+                  <a:tcPr marL="27432" marR="27432" marT="0" marB="0" anchor="ctr">
+                    <a:solidFill>
+                      <a:srgbClr val="F7F9FC"/>
+                    </a:solidFill>
+                  </a:tcPr>
+                </a:tc>
+                <a:tc>
+                  <a:txBody>
+                    <a:bodyPr wrap="none"/>
+                    <a:lstStyle/>
+                    <a:p>
+                      <a:pPr algn="ctr"/>
+                      <a:r>
+                        <a:rPr sz="950" b="0" i="0">
+                          <a:solidFill>
+                            <a:srgbClr val="1B2740"/>
+                          </a:solidFill>
+                          <a:latin typeface="Consolas"/>
+                          <a:ea typeface="Consolas"/>
+                        </a:rPr>
+                        <a:t>0</a:t>
+                      </a:r>
+                    </a:p>
+                  </a:txBody>
+                  <a:tcPr marL="27432" marR="27432" marT="0" marB="0" anchor="ctr">
+                    <a:solidFill>
+                      <a:srgbClr val="F7F9FC"/>
+                    </a:solidFill>
+                  </a:tcPr>
+                </a:tc>
+                <a:tc>
+                  <a:txBody>
+                    <a:bodyPr wrap="none"/>
+                    <a:lstStyle/>
+                    <a:p>
+                      <a:pPr algn="ctr"/>
+                      <a:r>
+                        <a:rPr sz="950" b="0" i="0">
+                          <a:solidFill>
+                            <a:srgbClr val="1B2740"/>
+                          </a:solidFill>
+                          <a:latin typeface="Consolas"/>
+                          <a:ea typeface="Consolas"/>
+                        </a:rPr>
+                        <a:t>0</a:t>
+                      </a:r>
+                    </a:p>
+                  </a:txBody>
+                  <a:tcPr marL="27432" marR="27432" marT="0" marB="0" anchor="ctr">
+                    <a:solidFill>
+                      <a:srgbClr val="F7F9FC"/>
+                    </a:solidFill>
+                  </a:tcPr>
+                </a:tc>
+                <a:tc>
+                  <a:txBody>
+                    <a:bodyPr wrap="none"/>
+                    <a:lstStyle/>
+                    <a:p>
+                      <a:pPr algn="ctr"/>
+                      <a:r>
+                        <a:rPr sz="950" b="0" i="0">
+                          <a:solidFill>
+                            <a:srgbClr val="1B2740"/>
+                          </a:solidFill>
+                          <a:latin typeface="Consolas"/>
+                          <a:ea typeface="Consolas"/>
+                        </a:rPr>
+                        <a:t>10067</a:t>
+                      </a:r>
+                    </a:p>
+                  </a:txBody>
+                  <a:tcPr marL="27432" marR="27432" marT="0" marB="0" anchor="ctr">
+                    <a:solidFill>
+                      <a:srgbClr val="F7F9FC"/>
+                    </a:solidFill>
+                  </a:tcPr>
+                </a:tc>
+                <a:tc>
+                  <a:txBody>
+                    <a:bodyPr wrap="none"/>
+                    <a:lstStyle/>
+                    <a:p>
+                      <a:pPr algn="ctr"/>
+                      <a:r>
+                        <a:rPr sz="950" b="0" i="0">
+                          <a:solidFill>
+                            <a:srgbClr val="1B2740"/>
+                          </a:solidFill>
+                          <a:latin typeface="Consolas"/>
+                          <a:ea typeface="Consolas"/>
+                        </a:rPr>
+                        <a:t>10074</a:t>
+                      </a:r>
+                    </a:p>
+                  </a:txBody>
+                  <a:tcPr marL="27432" marR="27432" marT="0" marB="0" anchor="ctr">
+                    <a:solidFill>
+                      <a:srgbClr val="F7F9FC"/>
+                    </a:solidFill>
+                  </a:tcPr>
+                </a:tc>
+                <a:tc>
+                  <a:txBody>
+                    <a:bodyPr wrap="none"/>
+                    <a:lstStyle/>
+                    <a:p>
+                      <a:pPr algn="ctr"/>
+                      <a:r>
+                        <a:rPr sz="950" b="0" i="0">
+                          <a:solidFill>
+                            <a:srgbClr val="1B2740"/>
+                          </a:solidFill>
+                          <a:latin typeface="Consolas"/>
+                          <a:ea typeface="Consolas"/>
+                        </a:rPr>
+                        <a:t>2</a:t>
+                      </a:r>
+                    </a:p>
+                  </a:txBody>
+                  <a:tcPr marL="27432" marR="27432" marT="0" marB="0" anchor="ctr">
+                    <a:solidFill>
+                      <a:srgbClr val="F7F9FC"/>
+                    </a:solidFill>
+                  </a:tcPr>
+                </a:tc>
+                <a:tc>
+                  <a:txBody>
+                    <a:bodyPr wrap="none"/>
+                    <a:lstStyle/>
+                    <a:p>
+                      <a:pPr algn="ctr"/>
+                      <a:r>
+                        <a:rPr sz="1100" b="1" i="0">
+                          <a:solidFill>
+                            <a:srgbClr val="C9CED6"/>
+                          </a:solidFill>
+                          <a:latin typeface="맑은 고딕"/>
+                          <a:ea typeface="맑은 고딕"/>
+                        </a:rPr>
+                        <a:t>■</a:t>
+                      </a:r>
+                    </a:p>
+                  </a:txBody>
+                  <a:tcPr marL="27432" marR="27432" marT="0" marB="0" anchor="ctr">
+                    <a:solidFill>
+                      <a:srgbClr val="F7F9FC"/>
+                    </a:solidFill>
+                  </a:tcPr>
+                </a:tc>
+                <a:tc>
+                  <a:txBody>
+                    <a:bodyPr wrap="none"/>
+                    <a:lstStyle/>
+                    <a:p>
+                      <a:pPr algn="l"/>
+                      <a:r>
+                        <a:rPr sz="900" b="0" i="0">
+                          <a:solidFill>
+                            <a:srgbClr val="4A5A7A"/>
+                          </a:solidFill>
+                          <a:latin typeface="맑은 고딕"/>
+                          <a:ea typeface="맑은 고딕"/>
+                        </a:rPr>
+                        <a:t>score ≤ 0 → 삭제 상태</a:t>
+                      </a:r>
+                    </a:p>
+                  </a:txBody>
+                  <a:tcPr marL="27432" marR="27432" marT="0" marB="0" anchor="ctr">
+                    <a:solidFill>
+                      <a:srgbClr val="F7F9FC"/>
+                    </a:solidFill>
+                  </a:tcPr>
+                </a:tc>
+              </a:tr>
+              <a:tr h="219456">
+                <a:tc>
+                  <a:txBody>
+                    <a:bodyPr wrap="none"/>
+                    <a:lstStyle/>
+                    <a:p>
+                      <a:pPr algn="ctr"/>
+                      <a:r>
+                        <a:rPr sz="950" b="0" i="0">
+                          <a:solidFill>
+                            <a:srgbClr val="8794AC"/>
+                          </a:solidFill>
+                          <a:latin typeface="Consolas"/>
+                          <a:ea typeface="Consolas"/>
+                        </a:rPr>
+                        <a:t>13</a:t>
+                      </a:r>
+                    </a:p>
+                  </a:txBody>
+                  <a:tcPr marL="27432" marR="27432" marT="0" marB="0" anchor="ctr">
+                    <a:solidFill>
+                      <a:srgbClr val="FFFFFF"/>
+                    </a:solidFill>
+                  </a:tcPr>
+                </a:tc>
+                <a:tc>
+                  <a:txBody>
+                    <a:bodyPr wrap="none"/>
+                    <a:lstStyle/>
+                    <a:p>
+                      <a:pPr algn="ctr"/>
+                      <a:r>
+                        <a:rPr sz="950" b="0" i="0">
+                          <a:solidFill>
+                            <a:srgbClr val="8794AC"/>
+                          </a:solidFill>
+                          <a:latin typeface="Consolas"/>
+                          <a:ea typeface="Consolas"/>
+                        </a:rPr>
+                        <a:t>1.300</a:t>
+                      </a:r>
+                    </a:p>
+                  </a:txBody>
+                  <a:tcPr marL="27432" marR="27432" marT="0" marB="0" anchor="ctr">
+                    <a:solidFill>
+                      <a:srgbClr val="FFFFFF"/>
+                    </a:solidFill>
+                  </a:tcPr>
+                </a:tc>
+                <a:tc gridSpan="7">
+                  <a:txBody>
+                    <a:bodyPr wrap="none"/>
+                    <a:lstStyle/>
+                    <a:p>
+                      <a:pPr algn="ctr"/>
+                      <a:r>
+                        <a:rPr sz="900" b="0" i="0">
+                          <a:solidFill>
+                            <a:srgbClr val="8794AC"/>
+                          </a:solidFill>
+                          <a:latin typeface="맑은 고딕"/>
+                          <a:ea typeface="맑은 고딕"/>
+                        </a:rPr>
+                        <a:t>트랙 100 줄 없음</a:t>
+                      </a:r>
+                    </a:p>
+                  </a:txBody>
+                  <a:tcPr marL="27432" marR="27432" marT="0" marB="0" anchor="ctr">
+                    <a:solidFill>
+                      <a:srgbClr val="FFFFFF"/>
+                    </a:solidFill>
+                  </a:tcPr>
+                </a:tc>
+                <a:tc hMerge="1">
+                  <a:txBody>
+                    <a:bodyPr wrap="none"/>
+                    <a:lstStyle/>
+                    <a:p>
+                      <a:pPr algn="ctr"/>
+                    </a:p>
+                  </a:txBody>
+                  <a:tcPr marL="27432" marR="27432" marT="0" marB="0" anchor="ctr">
+                    <a:solidFill>
+                      <a:srgbClr val="FFFFFF"/>
+                    </a:solidFill>
+                  </a:tcPr>
+                </a:tc>
+                <a:tc hMerge="1">
+                  <a:txBody>
+                    <a:bodyPr wrap="none"/>
+                    <a:lstStyle/>
+                    <a:p>
+                      <a:pPr algn="ctr"/>
+                    </a:p>
+                  </a:txBody>
+                  <a:tcPr marL="27432" marR="27432" marT="0" marB="0" anchor="ctr">
+                    <a:solidFill>
+                      <a:srgbClr val="FFFFFF"/>
+                    </a:solidFill>
+                  </a:tcPr>
+                </a:tc>
+                <a:tc hMerge="1">
+                  <a:txBody>
+                    <a:bodyPr wrap="none"/>
+                    <a:lstStyle/>
+                    <a:p>
+                      <a:pPr algn="ctr"/>
+                    </a:p>
+                  </a:txBody>
+                  <a:tcPr marL="27432" marR="27432" marT="0" marB="0" anchor="ctr">
+                    <a:solidFill>
+                      <a:srgbClr val="FFFFFF"/>
+                    </a:solidFill>
+                  </a:tcPr>
+                </a:tc>
+                <a:tc hMerge="1">
+                  <a:txBody>
+                    <a:bodyPr wrap="none"/>
+                    <a:lstStyle/>
+                    <a:p>
+                      <a:pPr algn="ctr"/>
+                    </a:p>
+                  </a:txBody>
+                  <a:tcPr marL="27432" marR="27432" marT="0" marB="0" anchor="ctr">
+                    <a:solidFill>
+                      <a:srgbClr val="FFFFFF"/>
+                    </a:solidFill>
+                  </a:tcPr>
+                </a:tc>
+                <a:tc hMerge="1">
+                  <a:txBody>
+                    <a:bodyPr wrap="none"/>
+                    <a:lstStyle/>
+                    <a:p>
+                      <a:pPr algn="ctr"/>
+                    </a:p>
+                  </a:txBody>
+                  <a:tcPr marL="27432" marR="27432" marT="0" marB="0" anchor="ctr">
+                    <a:solidFill>
+                      <a:srgbClr val="FFFFFF"/>
+                    </a:solidFill>
+                  </a:tcPr>
+                </a:tc>
+                <a:tc hMerge="1">
+                  <a:txBody>
+                    <a:bodyPr wrap="none"/>
+                    <a:lstStyle/>
+                    <a:p>
+                      <a:pPr algn="ctr"/>
+                    </a:p>
+                  </a:txBody>
+                  <a:tcPr marL="27432" marR="27432" marT="0" marB="0" anchor="ctr">
+                    <a:solidFill>
+                      <a:srgbClr val="FFFFFF"/>
+                    </a:solidFill>
+                  </a:tcPr>
+                </a:tc>
+                <a:tc>
+                  <a:txBody>
+                    <a:bodyPr wrap="none"/>
+                    <a:lstStyle/>
+                    <a:p>
+                      <a:pPr algn="ctr"/>
+                      <a:r>
+                        <a:rPr sz="1100" b="1" i="0">
+                          <a:solidFill>
+                            <a:srgbClr val="8794AC"/>
+                          </a:solidFill>
+                          <a:latin typeface="맑은 고딕"/>
+                          <a:ea typeface="맑은 고딕"/>
+                        </a:rPr>
+                        <a:t>–</a:t>
+                      </a:r>
+                    </a:p>
+                  </a:txBody>
+                  <a:tcPr marL="27432" marR="27432" marT="0" marB="0" anchor="ctr">
+                    <a:solidFill>
+                      <a:srgbClr val="FFFFFF"/>
+                    </a:solidFill>
+                  </a:tcPr>
+                </a:tc>
+                <a:tc>
+                  <a:txBody>
+                    <a:bodyPr wrap="none"/>
+                    <a:lstStyle/>
+                    <a:p>
+                      <a:pPr algn="l"/>
+                      <a:r>
+                        <a:rPr sz="900" b="0" i="0">
+                          <a:solidFill>
+                            <a:srgbClr val="4A5A7A"/>
+                          </a:solidFill>
+                          <a:latin typeface="맑은 고딕"/>
+                          <a:ea typeface="맑은 고딕"/>
+                        </a:rPr>
+                        <a:t>처리 시작 때 뺌</a:t>
+                      </a:r>
+                    </a:p>
+                  </a:txBody>
+                  <a:tcPr marL="27432" marR="27432" marT="0" marB="0" anchor="ctr">
+                    <a:solidFill>
+                      <a:srgbClr val="FFFFFF"/>
+                    </a:solidFill>
+                  </a:tcPr>
+                </a:tc>
+              </a:tr>
+            </a:tbl>
+          </a:graphicData>
+        </a:graphic>
+      </p:graphicFrame>
       <p:pic>
         <p:nvPicPr>
-          <p:cNvPr id="54" name="Picture 53" descr="ui_score_p2.png"/>
+          <p:cNvPr id="30" name="Picture 29" descr="ui_score_p2.png"/>
           <p:cNvPicPr>
             <a:picLocks noChangeAspect="1"/>
           </p:cNvPicPr>
@@ -33649,7 +33938,7 @@
       </p:pic>
       <p:sp>
         <p:nvSpPr>
-          <p:cNvPr id="55" name="Rounded Rectangle 54"/>
+          <p:cNvPr id="31" name="Rounded Rectangle 30"/>
           <p:cNvSpPr/>
           <p:nvPr/>
         </p:nvSpPr>
@@ -33705,7 +33994,7 @@
       </p:sp>
       <p:sp>
         <p:nvSpPr>
-          <p:cNvPr id="56" name="TextBox 55"/>
+          <p:cNvPr id="32" name="TextBox 31"/>
           <p:cNvSpPr txBox="1"/>
           <p:nvPr/>
         </p:nvSpPr>
@@ -33745,7 +34034,7 @@
       </p:sp>
       <p:sp>
         <p:nvSpPr>
-          <p:cNvPr id="57" name="TextBox 56"/>
+          <p:cNvPr id="33" name="TextBox 32"/>
           <p:cNvSpPr txBox="1"/>
           <p:nvPr/>
         </p:nvSpPr>

--- a/Part5_Track_Init_Mgmt/ref/산출물/Chapter5_TrackInitMgmt.pptx
+++ b/Part5_Track_Init_Mgmt/ref/산출물/Chapter5_TrackInitMgmt.pptx
@@ -2507,27 +2507,37 @@
           </a:p>
           <a:p>
             <a:r>
-              <a:t>R이 무엇을 뜻하는지는 아래 그림으로 보겠습니다. 레이다는 거리는 정확하게 재지만 방향은 조금씩 틀리고, 이 각도 오차는 1번 그림처럼 손전등 빛과 같이 멀리 갈수록 옆으로 퍼집니다. 0.2도는 5킬로미터에서 약 17미터, 14킬로미터에서는 약 49미터가 됩니다. 반면 거리 오차는 어디서나 10미터입니다.</a:t>
-            </a:r>
-          </a:p>
-          <a:p>
-            <a:r>
-              <a:t>2번 그림은 14킬로미터 표적 주변을 실제 비율로 확대한 것입니다. 같은 표적을 여러 번 재면 플롯이 점들처럼 흩어지는데, 이 흩어지는 크기와 모양이 R입니다. 거리 방향으로는 10미터로 좁고 옆 방향으로는 49미터로 넓은, 옆으로 긴 타원이 됩니다. 위아래인 고각 방향도 같은 원리입니다.</a:t>
-            </a:r>
-          </a:p>
-          <a:p>
-            <a:r>
-              <a:t>오른쪽 아래는 R을 실제로 계산하는 행렬식입니다. 위 줄은 플롯 위치를 바꾸는 식으로, 이전 과제의 좌표 변환 함수 세 개를 그대로 이은 것입니다. 구좌표를 안테나 직교 좌표로 바꾸는 s, 그리고 안테나에서 동체로, 동체에서 북, 동, 아래로 돌리는 회전 두 개입니다.</a:t>
-            </a:r>
-          </a:p>
-          <a:p>
-            <a:r>
-              <a:t>아래 줄이 공분산을 바꾸는 식입니다. 행렬을 곱하는 변환은 공분산의 앞뒤로 같은 행렬을 곱하면 되므로, 회전 두 개는 위 줄과 같은 행렬을 그대로 씁니다. 다만 구좌표 변환 s는 곡선이라서, 측정 지점에서의 기울기인 G로 바꿔 씁니다.</a:t>
-            </a:r>
-          </a:p>
-          <a:p>
-            <a:r>
-              <a:t>G의 세 열은 거리, 방위각, 고각이 조금 변할 때 위치가 움직이는 방향과 크기이고, 크기가 각각 1, r cos el, r입니다. 그래서 각도 오차에 거리를 곱한 값이 미터 오차가 되고, 14킬로미터 표적이면 10미터, 49미터, 49미터로 2번 그림의 타원과 같습니다. 방위각 쪽의 cos el은 고각이 높을수록 같은 방위각 차이가 옆으로 덜 벌어지는 것을 반영한 값으로, 고각이 작으면 거의 1입니다.</a:t>
+              <a:t>아래 그림은 R이 무엇인지 보여 줍니다. 레이다는 거리는 정확하게 재지만 방향은 조금씩 틀리고, 이 각도 오차는 1번 그림처럼 손전등 빛과 같이 멀리 갈수록 옆으로 퍼집니다. 0.2도는 5킬로미터에서 약 17미터, 14킬로미터에서는 약 49미터가 됩니다. 반면 거리 오차는 어디서나 10미터입니다.</a:t>
+            </a:r>
+          </a:p>
+          <a:p>
+            <a:r>
+              <a:t>2번 그림은 표적 1이 있는 14킬로미터 거리에서 표적 주변을 실제 비율로 확대한 것입니다. 같은 표적을 여러 번 재면 플롯이 점들처럼 흩어지는데, 이 흩어지는 크기와 모양이 R입니다. 거리 방향으로는 10미터로 좁고 옆 방향으로는 49미터로 넓은, 옆으로 긴 타원이 됩니다. 위아래인 고각 방향도 같은 원리입니다.</a:t>
+            </a:r>
+          </a:p>
+          <a:p>
+            <a:r>
+              <a:t>오른쪽은 R을 실제로 계산하는 행렬식입니다. 가운데에서 바깥쪽으로 1, 2, 3 순서로 곱해 나갑니다.</a:t>
+            </a:r>
+          </a:p>
+          <a:p>
+            <a:r>
+              <a:t>1번 diag는 레이다가 직접 재는 거리, 방위각, 고각의 오차입니다. 과제 값 10미터, 0.2도, 0.2도를 제곱해 대각선에 놓습니다. 세 오차는 서로 따로 생기므로 대각선 밖은 0입니다.</a:t>
+            </a:r>
+          </a:p>
+          <a:p>
+            <a:r>
+              <a:t>2번 G는 각도 오차를 미터 오차로 바꾸는 행렬입니다. 아래 G의 세 열은 거리, 방위각, 고각이 조금 변할 때 위치가 움직이는 방향과 크기이고, 크기가 각각 1, r cos el, r입니다. 그래서 각도 오차에 거리를 곱한 값이 미터 오차가 되고, 14킬로미터에서는 10미터, 49미터, 49미터로 2번 그림의 타원과 같습니다. 방위각 쪽의 cos el은 고각이 높을수록 같은 방위각 차이가 옆으로 덜 벌어지는 것을 반영한 값으로, 고각이 작으면 거의 1입니다. 여기까지가 레이다 안테나를 기준으로 본 R입니다.</a:t>
+            </a:r>
+          </a:p>
+          <a:p>
+            <a:r>
+              <a:t>3번 M은 축을 돌리는 회전 행렬입니다. 안테나 기준의 정면, 왼쪽, 위 축을 동체 축으로 바꾸는 M A to B와, 플랫폼 자세에 따라 동체 축을 북, 동, 아래로 돌리는 M B to N을 곱한 것으로, 이전 과제 좌표 변환 함수에 들어 있는 회전 행렬 그대로입니다. 이번 시나리오는 플랫폼이 북쪽을 보고 정지해 있어 M B to N은 단위 행렬입니다. 회전은 방향만 바꾸므로 오차의 크기는 그대로입니다.</a:t>
+            </a:r>
+          </a:p>
+          <a:p>
+            <a:r>
+              <a:t>G와 M을 앞뒤로 두 번 곱하는 것은 공분산이 오차와 오차의 전치를 곱한 값이기 때문입니다. 오차 e를 행렬 A로 바꾸면 공분산은 A R A 전치가 됩니다.</a:t>
             </a:r>
           </a:p>
           <a:p>
@@ -38939,7 +38949,7 @@
         <p:spPr>
           <a:xfrm>
             <a:off x="640080" y="2286000"/>
-            <a:ext cx="1691640" cy="768096"/>
+            <a:ext cx="2212848" cy="768096"/>
           </a:xfrm>
           <a:prstGeom prst="roundRect">
             <a:avLst>
@@ -38983,7 +38993,7 @@
         <p:spPr>
           <a:xfrm>
             <a:off x="640080" y="2322576"/>
-            <a:ext cx="1691640" cy="237744"/>
+            <a:ext cx="2212848" cy="237744"/>
           </a:xfrm>
           <a:prstGeom prst="rect">
             <a:avLst/>
@@ -39023,7 +39033,7 @@
         <p:spPr>
           <a:xfrm>
             <a:off x="640080" y="2523744"/>
-            <a:ext cx="1691640" cy="475488"/>
+            <a:ext cx="2212848" cy="475488"/>
           </a:xfrm>
           <a:prstGeom prst="rect">
             <a:avLst/>
@@ -39062,8 +39072,8 @@
         </p:nvSpPr>
         <p:spPr>
           <a:xfrm>
-            <a:off x="2468880" y="2286000"/>
-            <a:ext cx="1691640" cy="768096"/>
+            <a:off x="2990087" y="2286000"/>
+            <a:ext cx="2212848" cy="768096"/>
           </a:xfrm>
           <a:prstGeom prst="roundRect">
             <a:avLst>
@@ -39106,8 +39116,8 @@
         </p:nvSpPr>
         <p:spPr>
           <a:xfrm>
-            <a:off x="2468880" y="2322576"/>
-            <a:ext cx="1691640" cy="237744"/>
+            <a:off x="2990087" y="2322576"/>
+            <a:ext cx="2212848" cy="237744"/>
           </a:xfrm>
           <a:prstGeom prst="rect">
             <a:avLst/>
@@ -39146,8 +39156,8 @@
         </p:nvSpPr>
         <p:spPr>
           <a:xfrm>
-            <a:off x="2468880" y="2523744"/>
-            <a:ext cx="1691640" cy="475488"/>
+            <a:off x="2990087" y="2523744"/>
+            <a:ext cx="2212848" cy="475488"/>
           </a:xfrm>
           <a:prstGeom prst="rect">
             <a:avLst/>
@@ -39186,8 +39196,8 @@
         </p:nvSpPr>
         <p:spPr>
           <a:xfrm>
-            <a:off x="4297680" y="2286000"/>
-            <a:ext cx="1691640" cy="768096"/>
+            <a:off x="5340096" y="2286000"/>
+            <a:ext cx="2212848" cy="768096"/>
           </a:xfrm>
           <a:prstGeom prst="roundRect">
             <a:avLst>
@@ -39230,8 +39240,8 @@
         </p:nvSpPr>
         <p:spPr>
           <a:xfrm>
-            <a:off x="4297680" y="2322576"/>
-            <a:ext cx="1691640" cy="237744"/>
+            <a:off x="5340096" y="2322576"/>
+            <a:ext cx="2212848" cy="237744"/>
           </a:xfrm>
           <a:prstGeom prst="rect">
             <a:avLst/>
@@ -39270,8 +39280,8 @@
         </p:nvSpPr>
         <p:spPr>
           <a:xfrm>
-            <a:off x="4297680" y="2523744"/>
-            <a:ext cx="1691640" cy="475488"/>
+            <a:off x="5340096" y="2523744"/>
+            <a:ext cx="2212848" cy="475488"/>
           </a:xfrm>
           <a:prstGeom prst="rect">
             <a:avLst/>
@@ -39498,29 +39508,123 @@
           </a:p>
         </p:txBody>
       </p:sp>
-      <p:sp>
-        <p:nvSpPr>
-          <p:cNvPr id="39" name="Rounded Rectangle 38"/>
+      <p:pic>
+        <p:nvPicPr>
+          <p:cNvPr id="39" name="Picture 38" descr="fig_rcov.png"/>
+          <p:cNvPicPr>
+            <a:picLocks noChangeAspect="1"/>
+          </p:cNvPicPr>
+          <p:nvPr/>
+        </p:nvPicPr>
+        <p:blipFill>
+          <a:blip r:embed="rId4"/>
+          <a:stretch>
+            <a:fillRect/>
+          </a:stretch>
+        </p:blipFill>
+        <p:spPr>
+          <a:xfrm>
+            <a:off x="640080" y="3611880"/>
+            <a:ext cx="6949440" cy="2606040"/>
+          </a:xfrm>
+          <a:prstGeom prst="rect">
+            <a:avLst/>
+          </a:prstGeom>
+        </p:spPr>
+      </p:pic>
+      <p:sp>
+        <p:nvSpPr>
+          <p:cNvPr id="40" name="TextBox 39"/>
+          <p:cNvSpPr txBox="1"/>
+          <p:nvPr/>
+        </p:nvSpPr>
+        <p:spPr>
+          <a:xfrm>
+            <a:off x="7772400" y="2286000"/>
+            <a:ext cx="3776472" cy="256032"/>
+          </a:xfrm>
+          <a:prstGeom prst="rect">
+            <a:avLst/>
+          </a:prstGeom>
+          <a:noFill/>
+        </p:spPr>
+        <p:txBody>
+          <a:bodyPr wrap="square" lIns="0" rIns="0" tIns="0" bIns="0" anchor="ctr">
+            <a:spAutoFit/>
+          </a:bodyPr>
+          <a:lstStyle/>
+          <a:p>
+            <a:pPr algn="l">
+              <a:spcAft>
+                <a:spcPts val="0"/>
+              </a:spcAft>
+            </a:pPr>
+            <a:r>
+              <a:rPr sz="1200" b="1" i="0">
+                <a:solidFill>
+                  <a:srgbClr val="1B2740"/>
+                </a:solidFill>
+                <a:latin typeface="맑은 고딕"/>
+                <a:ea typeface="맑은 고딕"/>
+              </a:rPr>
+              <a:t>R 계산 행렬식   </a:t>
+            </a:r>
+            <a:r>
+              <a:rPr sz="950" b="0" i="0">
+                <a:solidFill>
+                  <a:srgbClr val="8794AC"/>
+                </a:solidFill>
+                <a:latin typeface="맑은 고딕"/>
+                <a:ea typeface="맑은 고딕"/>
+              </a:rPr>
+              <a:t>안쪽 ① 부터 차례로 곱함</a:t>
+            </a:r>
+          </a:p>
+        </p:txBody>
+      </p:sp>
+      <p:pic>
+        <p:nvPicPr>
+          <p:cNvPr id="41" name="Picture 40" descr="fig_rformula.png"/>
+          <p:cNvPicPr>
+            <a:picLocks noChangeAspect="1"/>
+          </p:cNvPicPr>
+          <p:nvPr/>
+        </p:nvPicPr>
+        <p:blipFill>
+          <a:blip r:embed="rId5"/>
+          <a:stretch>
+            <a:fillRect/>
+          </a:stretch>
+        </p:blipFill>
+        <p:spPr>
+          <a:xfrm>
+            <a:off x="7772400" y="2560320"/>
+            <a:ext cx="3776472" cy="674506"/>
+          </a:xfrm>
+          <a:prstGeom prst="rect">
+            <a:avLst/>
+          </a:prstGeom>
+        </p:spPr>
+      </p:pic>
+      <p:sp>
+        <p:nvSpPr>
+          <p:cNvPr id="42" name="Oval 41"/>
           <p:cNvSpPr/>
           <p:nvPr/>
         </p:nvSpPr>
         <p:spPr>
           <a:xfrm>
-            <a:off x="6263640" y="2286000"/>
-            <a:ext cx="5285232" cy="1207008"/>
-          </a:xfrm>
-          <a:prstGeom prst="roundRect">
-            <a:avLst>
-              <a:gd name="adj" fmla="val 6000"/>
-            </a:avLst>
+            <a:off x="7772400" y="3310128"/>
+            <a:ext cx="201168" cy="201168"/>
+          </a:xfrm>
+          <a:prstGeom prst="ellipse">
+            <a:avLst/>
           </a:prstGeom>
           <a:solidFill>
-            <a:srgbClr val="FFFFFF"/>
+            <a:srgbClr val="1B2740"/>
           </a:solidFill>
-          <a:ln w="9525">
-            <a:solidFill>
-              <a:srgbClr val="D2D9E5"/>
-            </a:solidFill>
+          <a:ln>
+            <a:noFill/>
           </a:ln>
           <a:effectLst/>
         </p:spPr>
@@ -39539,21 +39643,33 @@
           </a:fontRef>
         </p:style>
         <p:txBody>
-          <a:bodyPr rtlCol="0" anchor="ctr"/>
-          <a:lstStyle/>
-          <a:p/>
-        </p:txBody>
-      </p:sp>
-      <p:sp>
-        <p:nvSpPr>
-          <p:cNvPr id="40" name="TextBox 39"/>
+          <a:bodyPr rtlCol="0" anchor="ctr" lIns="0" rIns="0" tIns="0" bIns="0"/>
+          <a:lstStyle/>
+          <a:p>
+            <a:pPr algn="ctr"/>
+            <a:r>
+              <a:rPr sz="850" b="1" i="0">
+                <a:solidFill>
+                  <a:srgbClr val="FFFFFF"/>
+                </a:solidFill>
+                <a:latin typeface="맑은 고딕"/>
+                <a:ea typeface="맑은 고딕"/>
+              </a:rPr>
+              <a:t>1</a:t>
+            </a:r>
+          </a:p>
+        </p:txBody>
+      </p:sp>
+      <p:sp>
+        <p:nvSpPr>
+          <p:cNvPr id="43" name="TextBox 42"/>
           <p:cNvSpPr txBox="1"/>
           <p:nvPr/>
         </p:nvSpPr>
         <p:spPr>
           <a:xfrm>
-            <a:off x="6400800" y="2331720"/>
-            <a:ext cx="5029200" cy="256032"/>
+            <a:off x="8065008" y="3282696"/>
+            <a:ext cx="3483864" cy="365760"/>
           </a:xfrm>
           <a:prstGeom prst="rect">
             <a:avLst/>
@@ -39572,34 +39688,146 @@
               </a:spcAft>
             </a:pPr>
             <a:r>
-              <a:rPr sz="1150" b="1" i="0">
-                <a:solidFill>
-                  <a:srgbClr val="1B2740"/>
-                </a:solidFill>
-                <a:latin typeface="맑은 고딕"/>
-                <a:ea typeface="맑은 고딕"/>
-              </a:rPr>
-              <a:t>R 이 뜻하는 것</a:t>
-            </a:r>
-          </a:p>
-        </p:txBody>
-      </p:sp>
-      <p:sp>
-        <p:nvSpPr>
-          <p:cNvPr id="41" name="Oval 40"/>
+              <a:rPr sz="1050" b="1" i="0">
+                <a:solidFill>
+                  <a:srgbClr val="1B2740"/>
+                </a:solidFill>
+                <a:latin typeface="맑은 고딕"/>
+                <a:ea typeface="맑은 고딕"/>
+              </a:rPr>
+              <a:t>재는 값의 오차   </a:t>
+            </a:r>
+            <a:r>
+              <a:rPr sz="1000" b="0" i="0">
+                <a:solidFill>
+                  <a:srgbClr val="1B2740"/>
+                </a:solidFill>
+                <a:latin typeface="Arial"/>
+                <a:ea typeface="맑은 고딕"/>
+              </a:rPr>
+              <a:t>diag(σ</a:t>
+            </a:r>
+            <a:r>
+              <a:rPr sz="1000" b="0" i="0" baseline="-25000">
+                <a:solidFill>
+                  <a:srgbClr val="1B2740"/>
+                </a:solidFill>
+                <a:latin typeface="Arial"/>
+                <a:ea typeface="맑은 고딕"/>
+              </a:rPr>
+              <a:t>r</a:t>
+            </a:r>
+            <a:r>
+              <a:rPr sz="1000" b="0" i="0" baseline="30000">
+                <a:solidFill>
+                  <a:srgbClr val="1B2740"/>
+                </a:solidFill>
+                <a:latin typeface="Arial"/>
+                <a:ea typeface="맑은 고딕"/>
+              </a:rPr>
+              <a:t>2</a:t>
+            </a:r>
+            <a:r>
+              <a:rPr sz="1000" b="0" i="0">
+                <a:solidFill>
+                  <a:srgbClr val="1B2740"/>
+                </a:solidFill>
+                <a:latin typeface="Arial"/>
+                <a:ea typeface="맑은 고딕"/>
+              </a:rPr>
+              <a:t>, σ</a:t>
+            </a:r>
+            <a:r>
+              <a:rPr sz="1000" b="0" i="0" baseline="-25000">
+                <a:solidFill>
+                  <a:srgbClr val="1B2740"/>
+                </a:solidFill>
+                <a:latin typeface="Arial"/>
+                <a:ea typeface="맑은 고딕"/>
+              </a:rPr>
+              <a:t>az</a:t>
+            </a:r>
+            <a:r>
+              <a:rPr sz="1000" b="0" i="0" baseline="30000">
+                <a:solidFill>
+                  <a:srgbClr val="1B2740"/>
+                </a:solidFill>
+                <a:latin typeface="Arial"/>
+                <a:ea typeface="맑은 고딕"/>
+              </a:rPr>
+              <a:t>2</a:t>
+            </a:r>
+            <a:r>
+              <a:rPr sz="1000" b="0" i="0">
+                <a:solidFill>
+                  <a:srgbClr val="1B2740"/>
+                </a:solidFill>
+                <a:latin typeface="Arial"/>
+                <a:ea typeface="맑은 고딕"/>
+              </a:rPr>
+              <a:t>, σ</a:t>
+            </a:r>
+            <a:r>
+              <a:rPr sz="1000" b="0" i="0" baseline="-25000">
+                <a:solidFill>
+                  <a:srgbClr val="1B2740"/>
+                </a:solidFill>
+                <a:latin typeface="Arial"/>
+                <a:ea typeface="맑은 고딕"/>
+              </a:rPr>
+              <a:t>el</a:t>
+            </a:r>
+            <a:r>
+              <a:rPr sz="1000" b="0" i="0" baseline="30000">
+                <a:solidFill>
+                  <a:srgbClr val="1B2740"/>
+                </a:solidFill>
+                <a:latin typeface="Arial"/>
+                <a:ea typeface="맑은 고딕"/>
+              </a:rPr>
+              <a:t>2</a:t>
+            </a:r>
+            <a:r>
+              <a:rPr sz="1000" b="0" i="0">
+                <a:solidFill>
+                  <a:srgbClr val="1B2740"/>
+                </a:solidFill>
+                <a:latin typeface="Arial"/>
+                <a:ea typeface="맑은 고딕"/>
+              </a:rPr>
+              <a:t>)</a:t>
+            </a:r>
+          </a:p>
+          <a:p>
+            <a:r>
+              <a:rPr sz="900" b="0" i="0">
+                <a:solidFill>
+                  <a:srgbClr val="4A5A7A"/>
+                </a:solidFill>
+                <a:latin typeface="맑은 고딕"/>
+                <a:ea typeface="맑은 고딕"/>
+              </a:rPr>
+              <a:t>거리 10 m, 각도 0.2° 의 제곱. 서로 따로라 대각선만</a:t>
+            </a:r>
+          </a:p>
+        </p:txBody>
+      </p:sp>
+      <p:sp>
+        <p:nvSpPr>
+          <p:cNvPr id="44" name="Oval 43"/>
           <p:cNvSpPr/>
           <p:nvPr/>
         </p:nvSpPr>
         <p:spPr>
           <a:xfrm>
-            <a:off x="6400800" y="2660903"/>
+            <a:off x="7772400" y="3730752"/>
             <a:ext cx="201168" cy="201168"/>
           </a:xfrm>
           <a:prstGeom prst="ellipse">
             <a:avLst/>
           </a:prstGeom>
           <a:solidFill>
-            <a:srgbClr val="DC2626"/>
+            <a:srgbClr val="2563EB"/>
           </a:solidFill>
           <a:ln>
             <a:noFill/>
@@ -39633,21 +39861,21 @@
                 <a:latin typeface="맑은 고딕"/>
                 <a:ea typeface="맑은 고딕"/>
               </a:rPr>
-              <a:t>1</a:t>
-            </a:r>
-          </a:p>
-        </p:txBody>
-      </p:sp>
-      <p:sp>
-        <p:nvSpPr>
-          <p:cNvPr id="42" name="TextBox 41"/>
+              <a:t>2</a:t>
+            </a:r>
+          </a:p>
+        </p:txBody>
+      </p:sp>
+      <p:sp>
+        <p:nvSpPr>
+          <p:cNvPr id="45" name="TextBox 44"/>
           <p:cNvSpPr txBox="1"/>
           <p:nvPr/>
         </p:nvSpPr>
         <p:spPr>
           <a:xfrm>
-            <a:off x="6693408" y="2633472"/>
-            <a:ext cx="4800600" cy="256032"/>
+            <a:off x="8065008" y="3703320"/>
+            <a:ext cx="3483864" cy="365760"/>
           </a:xfrm>
           <a:prstGeom prst="rect">
             <a:avLst/>
@@ -39655,7 +39883,7 @@
           <a:noFill/>
         </p:spPr>
         <p:txBody>
-          <a:bodyPr wrap="square" lIns="0" rIns="0" tIns="0" bIns="0" anchor="ctr">
+          <a:bodyPr wrap="square" lIns="0" rIns="0" tIns="0" bIns="0" anchor="t">
             <a:spAutoFit/>
           </a:bodyPr>
           <a:lstStyle/>
@@ -39673,134 +39901,42 @@
                 <a:latin typeface="맑은 고딕"/>
                 <a:ea typeface="맑은 고딕"/>
               </a:rPr>
-              <a:t>R = 플롯이 흩어지는 정도   </a:t>
-            </a:r>
-            <a:r>
-              <a:rPr sz="950" b="0" i="0">
+              <a:t>각도 → 미터   </a:t>
+            </a:r>
+            <a:r>
+              <a:rPr sz="1000" b="0" i="0">
+                <a:solidFill>
+                  <a:srgbClr val="2563EB"/>
+                </a:solidFill>
+                <a:latin typeface="Arial"/>
+                <a:ea typeface="맑은 고딕"/>
+              </a:rPr>
+              <a:t>G  (아래 행렬)</a:t>
+            </a:r>
+          </a:p>
+          <a:p>
+            <a:r>
+              <a:rPr sz="900" b="0" i="0">
                 <a:solidFill>
                   <a:srgbClr val="4A5A7A"/>
                 </a:solidFill>
                 <a:latin typeface="맑은 고딕"/>
                 <a:ea typeface="맑은 고딕"/>
               </a:rPr>
-              <a:t>같은 표적을 여러 번 잴 때 흩어지는 크기 · 모양</a:t>
-            </a:r>
-          </a:p>
-        </p:txBody>
-      </p:sp>
-      <p:sp>
-        <p:nvSpPr>
-          <p:cNvPr id="43" name="Oval 42"/>
+              <a:t>각도 오차 × 거리 = 미터 오차 (안테나 기준 R)</a:t>
+            </a:r>
+          </a:p>
+        </p:txBody>
+      </p:sp>
+      <p:sp>
+        <p:nvSpPr>
+          <p:cNvPr id="46" name="Oval 45"/>
           <p:cNvSpPr/>
           <p:nvPr/>
         </p:nvSpPr>
         <p:spPr>
           <a:xfrm>
-            <a:off x="6400800" y="2935223"/>
-            <a:ext cx="201168" cy="201168"/>
-          </a:xfrm>
-          <a:prstGeom prst="ellipse">
-            <a:avLst/>
-          </a:prstGeom>
-          <a:solidFill>
-            <a:srgbClr val="D97706"/>
-          </a:solidFill>
-          <a:ln>
-            <a:noFill/>
-          </a:ln>
-          <a:effectLst/>
-        </p:spPr>
-        <p:style>
-          <a:lnRef idx="1">
-            <a:schemeClr val="accent1"/>
-          </a:lnRef>
-          <a:fillRef idx="3">
-            <a:schemeClr val="accent1"/>
-          </a:fillRef>
-          <a:effectRef idx="2">
-            <a:schemeClr val="accent1"/>
-          </a:effectRef>
-          <a:fontRef idx="minor">
-            <a:schemeClr val="lt1"/>
-          </a:fontRef>
-        </p:style>
-        <p:txBody>
-          <a:bodyPr rtlCol="0" anchor="ctr" lIns="0" rIns="0" tIns="0" bIns="0"/>
-          <a:lstStyle/>
-          <a:p>
-            <a:pPr algn="ctr"/>
-            <a:r>
-              <a:rPr sz="850" b="1" i="0">
-                <a:solidFill>
-                  <a:srgbClr val="FFFFFF"/>
-                </a:solidFill>
-                <a:latin typeface="맑은 고딕"/>
-                <a:ea typeface="맑은 고딕"/>
-              </a:rPr>
-              <a:t>2</a:t>
-            </a:r>
-          </a:p>
-        </p:txBody>
-      </p:sp>
-      <p:sp>
-        <p:nvSpPr>
-          <p:cNvPr id="44" name="TextBox 43"/>
-          <p:cNvSpPr txBox="1"/>
-          <p:nvPr/>
-        </p:nvSpPr>
-        <p:spPr>
-          <a:xfrm>
-            <a:off x="6693408" y="2907791"/>
-            <a:ext cx="4800600" cy="256032"/>
-          </a:xfrm>
-          <a:prstGeom prst="rect">
-            <a:avLst/>
-          </a:prstGeom>
-          <a:noFill/>
-        </p:spPr>
-        <p:txBody>
-          <a:bodyPr wrap="square" lIns="0" rIns="0" tIns="0" bIns="0" anchor="ctr">
-            <a:spAutoFit/>
-          </a:bodyPr>
-          <a:lstStyle/>
-          <a:p>
-            <a:pPr algn="l">
-              <a:spcAft>
-                <a:spcPts val="0"/>
-              </a:spcAft>
-            </a:pPr>
-            <a:r>
-              <a:rPr sz="1050" b="1" i="0">
-                <a:solidFill>
-                  <a:srgbClr val="1B2740"/>
-                </a:solidFill>
-                <a:latin typeface="맑은 고딕"/>
-                <a:ea typeface="맑은 고딕"/>
-              </a:rPr>
-              <a:t>거리는 정확, 방향은 멀수록 퍼짐   </a:t>
-            </a:r>
-            <a:r>
-              <a:rPr sz="950" b="0" i="0">
-                <a:solidFill>
-                  <a:srgbClr val="4A5A7A"/>
-                </a:solidFill>
-                <a:latin typeface="맑은 고딕"/>
-                <a:ea typeface="맑은 고딕"/>
-              </a:rPr>
-              <a:t>거리 10 m 그대로, 옆 · 위아래 = 거리 × 0.2°</a:t>
-            </a:r>
-          </a:p>
-        </p:txBody>
-      </p:sp>
-      <p:sp>
-        <p:nvSpPr>
-          <p:cNvPr id="45" name="Oval 44"/>
-          <p:cNvSpPr/>
-          <p:nvPr/>
-        </p:nvSpPr>
-        <p:spPr>
-          <a:xfrm>
-            <a:off x="6400800" y="3209544"/>
+            <a:off x="7772400" y="4151376"/>
             <a:ext cx="201168" cy="201168"/>
           </a:xfrm>
           <a:prstGeom prst="ellipse">
@@ -39848,14 +39984,14 @@
       </p:sp>
       <p:sp>
         <p:nvSpPr>
-          <p:cNvPr id="46" name="TextBox 45"/>
+          <p:cNvPr id="47" name="TextBox 46"/>
           <p:cNvSpPr txBox="1"/>
           <p:nvPr/>
         </p:nvSpPr>
         <p:spPr>
           <a:xfrm>
-            <a:off x="6693408" y="3182112"/>
-            <a:ext cx="4800600" cy="256032"/>
+            <a:off x="8065008" y="4123944"/>
+            <a:ext cx="3483864" cy="530352"/>
           </a:xfrm>
           <a:prstGeom prst="rect">
             <a:avLst/>
@@ -39863,7 +39999,7 @@
           <a:noFill/>
         </p:spPr>
         <p:txBody>
-          <a:bodyPr wrap="square" lIns="0" rIns="0" tIns="0" bIns="0" anchor="ctr">
+          <a:bodyPr wrap="square" lIns="0" rIns="0" tIns="0" bIns="0" anchor="t">
             <a:spAutoFit/>
           </a:bodyPr>
           <a:lstStyle/>
@@ -39881,45 +40017,75 @@
                 <a:latin typeface="맑은 고딕"/>
                 <a:ea typeface="맑은 고딕"/>
               </a:rPr>
-              <a:t>그래서 옆으로 긴 타원   </a:t>
-            </a:r>
-            <a:r>
-              <a:rPr sz="950" b="0" i="0">
+              <a:t>축 돌리기   </a:t>
+            </a:r>
+            <a:r>
+              <a:rPr sz="1000" b="0" i="0">
+                <a:solidFill>
+                  <a:srgbClr val="059669"/>
+                </a:solidFill>
+                <a:latin typeface="Arial"/>
+                <a:ea typeface="맑은 고딕"/>
+              </a:rPr>
+              <a:t>M = M</a:t>
+            </a:r>
+            <a:r>
+              <a:rPr sz="1000" b="0" i="0" baseline="-25000">
+                <a:solidFill>
+                  <a:srgbClr val="059669"/>
+                </a:solidFill>
+                <a:latin typeface="Arial"/>
+                <a:ea typeface="맑은 고딕"/>
+              </a:rPr>
+              <a:t>B→N</a:t>
+            </a:r>
+            <a:r>
+              <a:rPr sz="1000" b="0" i="0">
+                <a:solidFill>
+                  <a:srgbClr val="059669"/>
+                </a:solidFill>
+                <a:latin typeface="Arial"/>
+                <a:ea typeface="맑은 고딕"/>
+              </a:rPr>
+              <a:t> · M</a:t>
+            </a:r>
+            <a:r>
+              <a:rPr sz="1000" b="0" i="0" baseline="-25000">
+                <a:solidFill>
+                  <a:srgbClr val="059669"/>
+                </a:solidFill>
+                <a:latin typeface="Arial"/>
+                <a:ea typeface="맑은 고딕"/>
+              </a:rPr>
+              <a:t>A→B</a:t>
+            </a:r>
+          </a:p>
+          <a:p>
+            <a:r>
+              <a:rPr sz="900" b="0" i="0">
                 <a:solidFill>
                   <a:srgbClr val="4A5A7A"/>
                 </a:solidFill>
                 <a:latin typeface="맑은 고딕"/>
                 <a:ea typeface="맑은 고딕"/>
               </a:rPr>
-              <a:t>거리 · 방향이 플롯마다 달라 R 도 플롯마다 계산</a:t>
-            </a:r>
-          </a:p>
-        </p:txBody>
-      </p:sp>
-      <p:pic>
-        <p:nvPicPr>
-          <p:cNvPr id="47" name="Picture 46" descr="fig_rcov.png"/>
-          <p:cNvPicPr>
-            <a:picLocks noChangeAspect="1"/>
-          </p:cNvPicPr>
-          <p:nvPr/>
-        </p:nvPicPr>
-        <p:blipFill>
-          <a:blip r:embed="rId4"/>
-          <a:stretch>
-            <a:fillRect/>
-          </a:stretch>
-        </p:blipFill>
-        <p:spPr>
-          <a:xfrm>
-            <a:off x="640080" y="3611880"/>
-            <a:ext cx="6949440" cy="2606040"/>
-          </a:xfrm>
-          <a:prstGeom prst="rect">
-            <a:avLst/>
-          </a:prstGeom>
-        </p:spPr>
-      </p:pic>
+              <a:t>안테나 기준 (정면 · 왼쪽 · 위) → 북 · 동 · 아래</a:t>
+            </a:r>
+          </a:p>
+          <a:p>
+            <a:r>
+              <a:rPr sz="900" b="0" i="0">
+                <a:solidFill>
+                  <a:srgbClr val="4A5A7A"/>
+                </a:solidFill>
+                <a:latin typeface="맑은 고딕"/>
+                <a:ea typeface="맑은 고딕"/>
+              </a:rPr>
+              <a:t>이전 과제 좌표 변환의 회전. 오차 크기는 그대로</a:t>
+            </a:r>
+          </a:p>
+        </p:txBody>
+      </p:sp>
       <p:sp>
         <p:nvSpPr>
           <p:cNvPr id="48" name="TextBox 47"/>
@@ -39928,8 +40094,8 @@
         </p:nvSpPr>
         <p:spPr>
           <a:xfrm>
-            <a:off x="7818120" y="3630168"/>
-            <a:ext cx="3749039" cy="256032"/>
+            <a:off x="7772400" y="4709160"/>
+            <a:ext cx="3776472" cy="201168"/>
           </a:xfrm>
           <a:prstGeom prst="rect">
             <a:avLst/>
@@ -39937,7 +40103,7 @@
           <a:noFill/>
         </p:spPr>
         <p:txBody>
-          <a:bodyPr wrap="square" lIns="0" rIns="0" tIns="0" bIns="0" anchor="ctr">
+          <a:bodyPr wrap="square" lIns="0" rIns="0" tIns="0" bIns="0" anchor="t">
             <a:spAutoFit/>
           </a:bodyPr>
           <a:lstStyle/>
@@ -39948,24 +40114,24 @@
               </a:spcAft>
             </a:pPr>
             <a:r>
-              <a:rPr sz="1200" b="1" i="0">
-                <a:solidFill>
-                  <a:srgbClr val="1B2740"/>
-                </a:solidFill>
-                <a:latin typeface="맑은 고딕"/>
-                <a:ea typeface="맑은 고딕"/>
-              </a:rPr>
-              <a:t>R 계산 행렬식   </a:t>
-            </a:r>
-            <a:r>
-              <a:rPr sz="950" b="0" i="0">
+              <a:rPr sz="900" b="0" i="0">
                 <a:solidFill>
                   <a:srgbClr val="8794AC"/>
                 </a:solidFill>
                 <a:latin typeface="맑은 고딕"/>
                 <a:ea typeface="맑은 고딕"/>
               </a:rPr>
-              <a:t>이전 과제 좌표 변환과 같은 행렬</a:t>
+              <a:t>앞뒤로 곱하는 까닭: 오차 e 를 A e 로 바꾸면 공분산은 A R A</a:t>
+            </a:r>
+            <a:r>
+              <a:rPr sz="900" b="0" i="0" baseline="30000">
+                <a:solidFill>
+                  <a:srgbClr val="8794AC"/>
+                </a:solidFill>
+                <a:latin typeface="맑은 고딕"/>
+                <a:ea typeface="맑은 고딕"/>
+              </a:rPr>
+              <a:t>T</a:t>
             </a:r>
           </a:p>
         </p:txBody>
@@ -39979,15 +40145,15 @@
           <p:nvPr/>
         </p:nvPicPr>
         <p:blipFill>
-          <a:blip r:embed="rId2"/>
+          <a:blip r:embed="rId6"/>
           <a:stretch>
             <a:fillRect/>
           </a:stretch>
         </p:blipFill>
         <p:spPr>
           <a:xfrm>
-            <a:off x="7754112" y="3877056"/>
-            <a:ext cx="3794760" cy="2394065"/>
+            <a:off x="7772400" y="4910328"/>
+            <a:ext cx="3776472" cy="1297642"/>
           </a:xfrm>
           <a:prstGeom prst="rect">
             <a:avLst/>

--- a/Part5_Track_Init_Mgmt/ref/산출물/Chapter5_TrackInitMgmt.pptx
+++ b/Part5_Track_Init_Mgmt/ref/산출물/Chapter5_TrackInitMgmt.pptx
@@ -2503,6 +2503,11 @@
           <a:p>
             <a:r>
               <a:t>과제 4에서는 SNR로 거리와 각도의 표준편차를 계산해 플롯을 만들었습니다. SNR 20에서 거리 4.74미터, 방위각 0.48도, 고각 0.49도였습니다. 하지만 트랙 초기화에 쓰는 R의 표준편차는 이번 과제에서 거리 10미터, 방위각과 고각 0.2도로 값을 정해 주었기 때문에, SNR로 계산한 값이 아니라 과제에서 준 이 값을 그대로 사용했습니다.</a:t>
+            </a:r>
+          </a:p>
+          <a:p>
+            <a:r>
+              <a:t>두 값을 따로 쓰는 이유는 역할이 다르기 때문입니다. SNR로 계산한 값은 플롯을 만드는 쪽이 실제로 넣은 잡음이고, 트랙을 개시하는 쪽은 받은 플롯만 보기 때문에 이 실제 잡음을 알 수 없습니다. 그래서 레이다가 알려 주는 측정 정확도, 즉 과제에서 정해 준 값을 플롯 메시지에 실어 보내고, 받는 쪽은 이 값으로 R을 만듭니다.</a:t>
             </a:r>
           </a:p>
           <a:p>
@@ -38949,7 +38954,7 @@
         <p:spPr>
           <a:xfrm>
             <a:off x="640080" y="2286000"/>
-            <a:ext cx="2212848" cy="768096"/>
+            <a:ext cx="2212848" cy="713232"/>
           </a:xfrm>
           <a:prstGeom prst="roundRect">
             <a:avLst>
@@ -38992,7 +38997,7 @@
         </p:nvSpPr>
         <p:spPr>
           <a:xfrm>
-            <a:off x="640080" y="2322576"/>
+            <a:off x="640080" y="2313432"/>
             <a:ext cx="2212848" cy="237744"/>
           </a:xfrm>
           <a:prstGeom prst="rect">
@@ -39032,7 +39037,7 @@
         </p:nvSpPr>
         <p:spPr>
           <a:xfrm>
-            <a:off x="640080" y="2523744"/>
+            <a:off x="640080" y="2487168"/>
             <a:ext cx="2212848" cy="475488"/>
           </a:xfrm>
           <a:prstGeom prst="rect">
@@ -39073,7 +39078,7 @@
         <p:spPr>
           <a:xfrm>
             <a:off x="2990087" y="2286000"/>
-            <a:ext cx="2212848" cy="768096"/>
+            <a:ext cx="2212848" cy="713232"/>
           </a:xfrm>
           <a:prstGeom prst="roundRect">
             <a:avLst>
@@ -39116,7 +39121,7 @@
         </p:nvSpPr>
         <p:spPr>
           <a:xfrm>
-            <a:off x="2990087" y="2322576"/>
+            <a:off x="2990087" y="2313432"/>
             <a:ext cx="2212848" cy="237744"/>
           </a:xfrm>
           <a:prstGeom prst="rect">
@@ -39156,7 +39161,7 @@
         </p:nvSpPr>
         <p:spPr>
           <a:xfrm>
-            <a:off x="2990087" y="2523744"/>
+            <a:off x="2990087" y="2487168"/>
             <a:ext cx="2212848" cy="475488"/>
           </a:xfrm>
           <a:prstGeom prst="rect">
@@ -39197,7 +39202,7 @@
         <p:spPr>
           <a:xfrm>
             <a:off x="5340096" y="2286000"/>
-            <a:ext cx="2212848" cy="768096"/>
+            <a:ext cx="2212848" cy="713232"/>
           </a:xfrm>
           <a:prstGeom prst="roundRect">
             <a:avLst>
@@ -39240,7 +39245,7 @@
         </p:nvSpPr>
         <p:spPr>
           <a:xfrm>
-            <a:off x="5340096" y="2322576"/>
+            <a:off x="5340096" y="2313432"/>
             <a:ext cx="2212848" cy="237744"/>
           </a:xfrm>
           <a:prstGeom prst="rect">
@@ -39280,7 +39285,7 @@
         </p:nvSpPr>
         <p:spPr>
           <a:xfrm>
-            <a:off x="5340096" y="2523744"/>
+            <a:off x="5340096" y="2487168"/>
             <a:ext cx="2212848" cy="475488"/>
           </a:xfrm>
           <a:prstGeom prst="rect">
@@ -39320,7 +39325,7 @@
         </p:nvSpPr>
         <p:spPr>
           <a:xfrm>
-            <a:off x="640080" y="3118104"/>
+            <a:off x="640080" y="3054096"/>
             <a:ext cx="987552" cy="192024"/>
           </a:xfrm>
           <a:prstGeom prst="roundRect">
@@ -39378,8 +39383,8 @@
         </p:nvSpPr>
         <p:spPr>
           <a:xfrm>
-            <a:off x="1719072" y="3118104"/>
-            <a:ext cx="4297680" cy="192024"/>
+            <a:off x="1719072" y="3054096"/>
+            <a:ext cx="5824728" cy="192024"/>
           </a:xfrm>
           <a:prstGeom prst="rect">
             <a:avLst/>
@@ -39405,7 +39410,7 @@
                 <a:latin typeface="맑은 고딕"/>
                 <a:ea typeface="맑은 고딕"/>
               </a:rPr>
-              <a:t>트랙 초기화 (초기 오차 공분산) 용 R 의 표준편차</a:t>
+              <a:t>트랙 초기화 R 에 사용. 플롯 메시지에 실어 받는 쪽에 알려 줌</a:t>
             </a:r>
           </a:p>
         </p:txBody>
@@ -39418,7 +39423,7 @@
         </p:nvSpPr>
         <p:spPr>
           <a:xfrm>
-            <a:off x="640080" y="3332988"/>
+            <a:off x="640080" y="3259836"/>
             <a:ext cx="987552" cy="192024"/>
           </a:xfrm>
           <a:prstGeom prst="roundRect">
@@ -39476,8 +39481,8 @@
         </p:nvSpPr>
         <p:spPr>
           <a:xfrm>
-            <a:off x="1719072" y="3332988"/>
-            <a:ext cx="4297680" cy="192024"/>
+            <a:off x="1719072" y="3259836"/>
+            <a:ext cx="5824728" cy="192024"/>
           </a:xfrm>
           <a:prstGeom prst="rect">
             <a:avLst/>
@@ -39503,14 +39508,110 @@
                 <a:latin typeface="맑은 고딕"/>
                 <a:ea typeface="맑은 고딕"/>
               </a:rPr>
-              <a:t>플롯 모의 잡음은 SNR 20 으로 계산: 4.74 m · 0.48° · 0.49° (R 과 별개)</a:t>
+              <a:t>플롯을 만들 때 넣은 실제 잡음 4.74 m · 0.48° · 0.49° (보내는 쪽만 앎)</a:t>
+            </a:r>
+          </a:p>
+        </p:txBody>
+      </p:sp>
+      <p:sp>
+        <p:nvSpPr>
+          <p:cNvPr id="39" name="Rounded Rectangle 38"/>
+          <p:cNvSpPr/>
+          <p:nvPr/>
+        </p:nvSpPr>
+        <p:spPr>
+          <a:xfrm>
+            <a:off x="640080" y="3465576"/>
+            <a:ext cx="987552" cy="192024"/>
+          </a:xfrm>
+          <a:prstGeom prst="roundRect">
+            <a:avLst>
+              <a:gd name="adj" fmla="val 25000"/>
+            </a:avLst>
+          </a:prstGeom>
+          <a:solidFill>
+            <a:srgbClr val="1B2740"/>
+          </a:solidFill>
+          <a:ln>
+            <a:noFill/>
+          </a:ln>
+          <a:effectLst/>
+        </p:spPr>
+        <p:style>
+          <a:lnRef idx="1">
+            <a:schemeClr val="accent1"/>
+          </a:lnRef>
+          <a:fillRef idx="3">
+            <a:schemeClr val="accent1"/>
+          </a:fillRef>
+          <a:effectRef idx="2">
+            <a:schemeClr val="accent1"/>
+          </a:effectRef>
+          <a:fontRef idx="minor">
+            <a:schemeClr val="lt1"/>
+          </a:fontRef>
+        </p:style>
+        <p:txBody>
+          <a:bodyPr rtlCol="0" anchor="ctr" lIns="36576" rIns="36576" tIns="0" bIns="0" wrap="square"/>
+          <a:lstStyle/>
+          <a:p>
+            <a:pPr algn="ctr"/>
+            <a:r>
+              <a:rPr sz="900" b="1" i="0">
+                <a:solidFill>
+                  <a:srgbClr val="FFFFFF"/>
+                </a:solidFill>
+                <a:latin typeface="맑은 고딕"/>
+                <a:ea typeface="맑은 고딕"/>
+              </a:rPr>
+              <a:t>왜 따로?</a:t>
+            </a:r>
+          </a:p>
+        </p:txBody>
+      </p:sp>
+      <p:sp>
+        <p:nvSpPr>
+          <p:cNvPr id="40" name="TextBox 39"/>
+          <p:cNvSpPr txBox="1"/>
+          <p:nvPr/>
+        </p:nvSpPr>
+        <p:spPr>
+          <a:xfrm>
+            <a:off x="1719072" y="3465576"/>
+            <a:ext cx="5824728" cy="192024"/>
+          </a:xfrm>
+          <a:prstGeom prst="rect">
+            <a:avLst/>
+          </a:prstGeom>
+          <a:noFill/>
+        </p:spPr>
+        <p:txBody>
+          <a:bodyPr wrap="square" lIns="0" rIns="0" tIns="0" bIns="0" anchor="ctr">
+            <a:spAutoFit/>
+          </a:bodyPr>
+          <a:lstStyle/>
+          <a:p>
+            <a:pPr algn="l">
+              <a:spcAft>
+                <a:spcPts val="0"/>
+              </a:spcAft>
+            </a:pPr>
+            <a:r>
+              <a:rPr sz="1000" b="1" i="0">
+                <a:solidFill>
+                  <a:srgbClr val="1B2740"/>
+                </a:solidFill>
+                <a:latin typeface="맑은 고딕"/>
+                <a:ea typeface="맑은 고딕"/>
+              </a:rPr>
+              <a:t>받는 쪽은 실제 잡음을 모르므로, 메시지로 받은 레이다 정확도로 R 을 만듦</a:t>
             </a:r>
           </a:p>
         </p:txBody>
       </p:sp>
       <p:pic>
         <p:nvPicPr>
-          <p:cNvPr id="39" name="Picture 38" descr="fig_rcov.png"/>
+          <p:cNvPr id="41" name="Picture 40" descr="fig_rcov.png"/>
           <p:cNvPicPr>
             <a:picLocks noChangeAspect="1"/>
           </p:cNvPicPr>
@@ -39524,7 +39625,7 @@
         </p:blipFill>
         <p:spPr>
           <a:xfrm>
-            <a:off x="640080" y="3611880"/>
+            <a:off x="640080" y="3694176"/>
             <a:ext cx="6949440" cy="2606040"/>
           </a:xfrm>
           <a:prstGeom prst="rect">
@@ -39534,7 +39635,7 @@
       </p:pic>
       <p:sp>
         <p:nvSpPr>
-          <p:cNvPr id="40" name="TextBox 39"/>
+          <p:cNvPr id="42" name="TextBox 41"/>
           <p:cNvSpPr txBox="1"/>
           <p:nvPr/>
         </p:nvSpPr>
@@ -39584,7 +39685,7 @@
       </p:sp>
       <p:pic>
         <p:nvPicPr>
-          <p:cNvPr id="41" name="Picture 40" descr="fig_rformula.png"/>
+          <p:cNvPr id="43" name="Picture 42" descr="fig_rformula.png"/>
           <p:cNvPicPr>
             <a:picLocks noChangeAspect="1"/>
           </p:cNvPicPr>
@@ -39608,7 +39709,7 @@
       </p:pic>
       <p:sp>
         <p:nvSpPr>
-          <p:cNvPr id="42" name="Oval 41"/>
+          <p:cNvPr id="44" name="Oval 43"/>
           <p:cNvSpPr/>
           <p:nvPr/>
         </p:nvSpPr>
@@ -39662,7 +39763,7 @@
       </p:sp>
       <p:sp>
         <p:nvSpPr>
-          <p:cNvPr id="43" name="TextBox 42"/>
+          <p:cNvPr id="45" name="TextBox 44"/>
           <p:cNvSpPr txBox="1"/>
           <p:nvPr/>
         </p:nvSpPr>
@@ -39814,7 +39915,7 @@
       </p:sp>
       <p:sp>
         <p:nvSpPr>
-          <p:cNvPr id="44" name="Oval 43"/>
+          <p:cNvPr id="46" name="Oval 45"/>
           <p:cNvSpPr/>
           <p:nvPr/>
         </p:nvSpPr>
@@ -39868,7 +39969,7 @@
       </p:sp>
       <p:sp>
         <p:nvSpPr>
-          <p:cNvPr id="45" name="TextBox 44"/>
+          <p:cNvPr id="47" name="TextBox 46"/>
           <p:cNvSpPr txBox="1"/>
           <p:nvPr/>
         </p:nvSpPr>
@@ -39930,7 +40031,7 @@
       </p:sp>
       <p:sp>
         <p:nvSpPr>
-          <p:cNvPr id="46" name="Oval 45"/>
+          <p:cNvPr id="48" name="Oval 47"/>
           <p:cNvSpPr/>
           <p:nvPr/>
         </p:nvSpPr>
@@ -39984,7 +40085,7 @@
       </p:sp>
       <p:sp>
         <p:nvSpPr>
-          <p:cNvPr id="47" name="TextBox 46"/>
+          <p:cNvPr id="49" name="TextBox 48"/>
           <p:cNvSpPr txBox="1"/>
           <p:nvPr/>
         </p:nvSpPr>
@@ -40088,7 +40189,7 @@
       </p:sp>
       <p:sp>
         <p:nvSpPr>
-          <p:cNvPr id="48" name="TextBox 47"/>
+          <p:cNvPr id="50" name="TextBox 49"/>
           <p:cNvSpPr txBox="1"/>
           <p:nvPr/>
         </p:nvSpPr>
@@ -40138,7 +40239,7 @@
       </p:sp>
       <p:pic>
         <p:nvPicPr>
-          <p:cNvPr id="49" name="Picture 48" descr="fig_rmatrix.png"/>
+          <p:cNvPr id="51" name="Picture 50" descr="fig_rmatrix.png"/>
           <p:cNvPicPr>
             <a:picLocks noChangeAspect="1"/>
           </p:cNvPicPr>

--- a/Part5_Track_Init_Mgmt/ref/산출물/Chapter5_TrackInitMgmt.pptx
+++ b/Part5_Track_Init_Mgmt/ref/산출물/Chapter5_TrackInitMgmt.pptx
@@ -12008,7 +12008,7 @@
                 <a:latin typeface="Consolas"/>
                 <a:ea typeface="Consolas"/>
               </a:rPr>
-              <a:t>103  </a:t>
+              <a:t> 45  </a:t>
             </a:r>
             <a:r>
               <a:rPr sz="860" b="0" i="0">
@@ -12055,7 +12055,7 @@
                 <a:latin typeface="Consolas"/>
                 <a:ea typeface="Consolas"/>
               </a:rPr>
-              <a:t>104  </a:t>
+              <a:t> 46  </a:t>
             </a:r>
             <a:r>
               <a:rPr sz="860" b="0" i="0">
@@ -12082,7 +12082,7 @@
                 <a:latin typeface="Consolas"/>
                 <a:ea typeface="Consolas"/>
               </a:rPr>
-              <a:t>105  </a:t>
+              <a:t> 47  </a:t>
             </a:r>
             <a:r>
               <a:rPr sz="860" b="0" i="0">
@@ -12152,7 +12152,7 @@
                 <a:latin typeface="Consolas"/>
                 <a:ea typeface="Consolas"/>
               </a:rPr>
-              <a:t>// 트랙 ID (100 ~ 10000)</a:t>
+              <a:t>// 100 ~ 10000</a:t>
             </a:r>
           </a:p>
           <a:p>
@@ -12169,7 +12169,7 @@
                 <a:latin typeface="Consolas"/>
                 <a:ea typeface="Consolas"/>
               </a:rPr>
-              <a:t>106  </a:t>
+              <a:t> 48  </a:t>
             </a:r>
             <a:r>
               <a:rPr sz="860" b="0" i="0">
@@ -12256,7 +12256,7 @@
                 <a:latin typeface="Consolas"/>
                 <a:ea typeface="Consolas"/>
               </a:rPr>
-              <a:t>107  </a:t>
+              <a:t> 49  </a:t>
             </a:r>
             <a:r>
               <a:rPr sz="860" b="0" i="0">
@@ -12307,26 +12307,6 @@
                 <a:ea typeface="Consolas"/>
               </a:rPr>
               <a:t>;</a:t>
-            </a:r>
-            <a:r>
-              <a:rPr sz="860" b="0" i="0">
-                <a:solidFill>
-                  <a:srgbClr val="1B2740"/>
-                </a:solidFill>
-                <a:latin typeface="Consolas"/>
-                <a:ea typeface="Consolas"/>
-              </a:rPr>
-              <a:t>  </a:t>
-            </a:r>
-            <a:r>
-              <a:rPr sz="860" b="0" i="0">
-                <a:solidFill>
-                  <a:srgbClr val="059669"/>
-                </a:solidFill>
-                <a:latin typeface="Consolas"/>
-                <a:ea typeface="Consolas"/>
-              </a:rPr>
-              <a:t>// 트랙 점수</a:t>
             </a:r>
           </a:p>
           <a:p>
@@ -12343,7 +12323,7 @@
                 <a:latin typeface="Consolas"/>
                 <a:ea typeface="Consolas"/>
               </a:rPr>
-              <a:t>108  </a:t>
+              <a:t> 50  </a:t>
             </a:r>
             <a:r>
               <a:rPr sz="860" b="0" i="0">
@@ -12394,26 +12374,6 @@
                 <a:ea typeface="Consolas"/>
               </a:rPr>
               <a:t>;</a:t>
-            </a:r>
-            <a:r>
-              <a:rPr sz="860" b="0" i="0">
-                <a:solidFill>
-                  <a:srgbClr val="1B2740"/>
-                </a:solidFill>
-                <a:latin typeface="Consolas"/>
-                <a:ea typeface="Consolas"/>
-              </a:rPr>
-              <a:t>  </a:t>
-            </a:r>
-            <a:r>
-              <a:rPr sz="860" b="0" i="0">
-                <a:solidFill>
-                  <a:srgbClr val="059669"/>
-                </a:solidFill>
-                <a:latin typeface="Consolas"/>
-                <a:ea typeface="Consolas"/>
-              </a:rPr>
-              <a:t>// 메모리 점수</a:t>
             </a:r>
           </a:p>
           <a:p>
@@ -12430,7 +12390,7 @@
                 <a:latin typeface="Consolas"/>
                 <a:ea typeface="Consolas"/>
               </a:rPr>
-              <a:t>109  </a:t>
+              <a:t> 51  </a:t>
             </a:r>
             <a:r>
               <a:rPr sz="860" b="0" i="0">
@@ -12500,7 +12460,7 @@
                 <a:latin typeface="Consolas"/>
                 <a:ea typeface="Consolas"/>
               </a:rPr>
-              <a:t>// 트랙 연관 결과. 1 성공, 0 실패</a:t>
+              <a:t>// 연관 결과: 1 성공, 0 실패</a:t>
             </a:r>
           </a:p>
           <a:p>
@@ -12517,7 +12477,7 @@
                 <a:latin typeface="Consolas"/>
                 <a:ea typeface="Consolas"/>
               </a:rPr>
-              <a:t>110  </a:t>
+              <a:t> 52  </a:t>
             </a:r>
             <a:r>
               <a:rPr sz="860" b="0" i="0">
@@ -12587,7 +12547,7 @@
                 <a:latin typeface="Consolas"/>
                 <a:ea typeface="Consolas"/>
               </a:rPr>
-              <a:t>// 9 x 1 상태변수 (VC-NED)</a:t>
+              <a:t>// 상태변수 9 x 1 (VC-NED)</a:t>
             </a:r>
           </a:p>
           <a:p>
@@ -12604,7 +12564,7 @@
                 <a:latin typeface="Consolas"/>
                 <a:ea typeface="Consolas"/>
               </a:rPr>
-              <a:t>111  </a:t>
+              <a:t> 53  </a:t>
             </a:r>
             <a:r>
               <a:rPr sz="860" b="0" i="0">
@@ -12674,7 +12634,7 @@
                 <a:latin typeface="Consolas"/>
                 <a:ea typeface="Consolas"/>
               </a:rPr>
-              <a:t>// 9 x 9 오차 공분산</a:t>
+              <a:t>// 오차 공분산 9 x 9</a:t>
             </a:r>
           </a:p>
           <a:p>
@@ -12691,7 +12651,7 @@
                 <a:latin typeface="Consolas"/>
                 <a:ea typeface="Consolas"/>
               </a:rPr>
-              <a:t>112  </a:t>
+              <a:t> 54  </a:t>
             </a:r>
             <a:r>
               <a:rPr sz="860" b="0" i="0">
@@ -12778,7 +12738,7 @@
                 <a:latin typeface="Consolas"/>
                 <a:ea typeface="Consolas"/>
               </a:rPr>
-              <a:t>113  </a:t>
+              <a:t> 55  </a:t>
             </a:r>
             <a:r>
               <a:rPr sz="860" b="0" i="0">
@@ -12848,7 +12808,7 @@
                 <a:latin typeface="Consolas"/>
                 <a:ea typeface="Consolas"/>
               </a:rPr>
-              <a:t>// 개시 스캔 번호</a:t>
+              <a:t>// 개시 스캔</a:t>
             </a:r>
           </a:p>
           <a:p>
@@ -12865,7 +12825,7 @@
                 <a:latin typeface="Consolas"/>
                 <a:ea typeface="Consolas"/>
               </a:rPr>
-              <a:t>114  </a:t>
+              <a:t> 56  </a:t>
             </a:r>
             <a:r>
               <a:rPr sz="860" b="0" i="0">
@@ -12965,7 +12925,7 @@
                 <a:latin typeface="Consolas"/>
                 <a:ea typeface="Consolas"/>
               </a:rPr>
-              <a:t>// 개시에 쓴 플롯 ID (앞 스캔, 이번 스캔)</a:t>
+              <a:t>// 개시 플롯 ID (앞 스캔, 이번 스캔)</a:t>
             </a:r>
           </a:p>
           <a:p>
@@ -12982,7 +12942,7 @@
                 <a:latin typeface="Consolas"/>
                 <a:ea typeface="Consolas"/>
               </a:rPr>
-              <a:t>115  </a:t>
+              <a:t> 57  </a:t>
             </a:r>
             <a:r>
               <a:rPr sz="860" b="0" i="0">
@@ -13156,7 +13116,7 @@
                 <a:latin typeface="Consolas"/>
                 <a:ea typeface="Consolas"/>
               </a:rPr>
-              <a:t> 36  </a:t>
+              <a:t> 19  </a:t>
             </a:r>
             <a:r>
               <a:rPr sz="860" b="0" i="0">
@@ -13217,6 +13177,26 @@
                 <a:ea typeface="Consolas"/>
               </a:rPr>
               <a:t>800.0</a:t>
+            </a:r>
+            <a:r>
+              <a:rPr sz="860" b="0" i="0">
+                <a:solidFill>
+                  <a:srgbClr val="1B2740"/>
+                </a:solidFill>
+                <a:latin typeface="Consolas"/>
+                <a:ea typeface="Consolas"/>
+              </a:rPr>
+              <a:t>  </a:t>
+            </a:r>
+            <a:r>
+              <a:rPr sz="860" b="0" i="0">
+                <a:solidFill>
+                  <a:srgbClr val="059669"/>
+                </a:solidFill>
+                <a:latin typeface="Consolas"/>
+                <a:ea typeface="Consolas"/>
+              </a:rPr>
+              <a:t>// 속도 게이트 [m/s]</a:t>
             </a:r>
           </a:p>
           <a:p>
@@ -13233,7 +13213,7 @@
                 <a:latin typeface="Consolas"/>
                 <a:ea typeface="Consolas"/>
               </a:rPr>
-              <a:t> 40  </a:t>
+              <a:t> 20  </a:t>
             </a:r>
             <a:r>
               <a:rPr sz="860" b="0" i="0">
@@ -13294,6 +13274,26 @@
                 <a:ea typeface="Consolas"/>
               </a:rPr>
               <a:t>5</a:t>
+            </a:r>
+            <a:r>
+              <a:rPr sz="860" b="0" i="0">
+                <a:solidFill>
+                  <a:srgbClr val="1B2740"/>
+                </a:solidFill>
+                <a:latin typeface="Consolas"/>
+                <a:ea typeface="Consolas"/>
+              </a:rPr>
+              <a:t>  </a:t>
+            </a:r>
+            <a:r>
+              <a:rPr sz="860" b="0" i="0">
+                <a:solidFill>
+                  <a:srgbClr val="059669"/>
+                </a:solidFill>
+                <a:latin typeface="Consolas"/>
+                <a:ea typeface="Consolas"/>
+              </a:rPr>
+              <a:t>// TrackScore &gt;= 5 이면 확정</a:t>
             </a:r>
           </a:p>
           <a:p>
@@ -13310,7 +13310,7 @@
                 <a:latin typeface="Consolas"/>
                 <a:ea typeface="Consolas"/>
               </a:rPr>
-              <a:t> 44  </a:t>
+              <a:t> 21  </a:t>
             </a:r>
             <a:r>
               <a:rPr sz="860" b="0" i="0">
@@ -13371,6 +13371,26 @@
                 <a:ea typeface="Consolas"/>
               </a:rPr>
               <a:t>0</a:t>
+            </a:r>
+            <a:r>
+              <a:rPr sz="860" b="0" i="0">
+                <a:solidFill>
+                  <a:srgbClr val="1B2740"/>
+                </a:solidFill>
+                <a:latin typeface="Consolas"/>
+                <a:ea typeface="Consolas"/>
+              </a:rPr>
+              <a:t>  </a:t>
+            </a:r>
+            <a:r>
+              <a:rPr sz="860" b="0" i="0">
+                <a:solidFill>
+                  <a:srgbClr val="059669"/>
+                </a:solidFill>
+                <a:latin typeface="Consolas"/>
+                <a:ea typeface="Consolas"/>
+              </a:rPr>
+              <a:t>// TrackScore &lt;= 0 이면 삭제</a:t>
             </a:r>
           </a:p>
           <a:p>
@@ -13387,7 +13407,7 @@
                 <a:latin typeface="Consolas"/>
                 <a:ea typeface="Consolas"/>
               </a:rPr>
-              <a:t> 48  </a:t>
+              <a:t> 22  </a:t>
             </a:r>
             <a:r>
               <a:rPr sz="860" b="0" i="0">
@@ -13448,6 +13468,26 @@
                 <a:ea typeface="Consolas"/>
               </a:rPr>
               <a:t>5</a:t>
+            </a:r>
+            <a:r>
+              <a:rPr sz="860" b="0" i="0">
+                <a:solidFill>
+                  <a:srgbClr val="1B2740"/>
+                </a:solidFill>
+                <a:latin typeface="Consolas"/>
+                <a:ea typeface="Consolas"/>
+              </a:rPr>
+              <a:t>  </a:t>
+            </a:r>
+            <a:r>
+              <a:rPr sz="860" b="0" i="0">
+                <a:solidFill>
+                  <a:srgbClr val="059669"/>
+                </a:solidFill>
+                <a:latin typeface="Consolas"/>
+                <a:ea typeface="Consolas"/>
+              </a:rPr>
+              <a:t>// MemoryScore &gt;= 5 이면 삭제</a:t>
             </a:r>
           </a:p>
           <a:p>
@@ -13464,7 +13504,7 @@
                 <a:latin typeface="Consolas"/>
                 <a:ea typeface="Consolas"/>
               </a:rPr>
-              <a:t> 52  </a:t>
+              <a:t> 23  </a:t>
             </a:r>
             <a:r>
               <a:rPr sz="860" b="0" i="0">
@@ -13525,6 +13565,26 @@
                 <a:ea typeface="Consolas"/>
               </a:rPr>
               <a:t>2</a:t>
+            </a:r>
+            <a:r>
+              <a:rPr sz="860" b="0" i="0">
+                <a:solidFill>
+                  <a:srgbClr val="1B2740"/>
+                </a:solidFill>
+                <a:latin typeface="Consolas"/>
+                <a:ea typeface="Consolas"/>
+              </a:rPr>
+              <a:t>  </a:t>
+            </a:r>
+            <a:r>
+              <a:rPr sz="860" b="0" i="0">
+                <a:solidFill>
+                  <a:srgbClr val="059669"/>
+                </a:solidFill>
+                <a:latin typeface="Consolas"/>
+                <a:ea typeface="Consolas"/>
+              </a:rPr>
+              <a:t>// 개시 점수 (두 플롯 = 성공 2 번)</a:t>
             </a:r>
           </a:p>
           <a:p>
@@ -13541,7 +13601,7 @@
                 <a:latin typeface="Consolas"/>
                 <a:ea typeface="Consolas"/>
               </a:rPr>
-              <a:t> 64  </a:t>
+              <a:t> 26  </a:t>
             </a:r>
             <a:r>
               <a:rPr sz="860" b="0" i="0">
@@ -13602,6 +13662,26 @@
                 <a:ea typeface="Consolas"/>
               </a:rPr>
               <a:t>10.0</a:t>
+            </a:r>
+            <a:r>
+              <a:rPr sz="860" b="0" i="0">
+                <a:solidFill>
+                  <a:srgbClr val="1B2740"/>
+                </a:solidFill>
+                <a:latin typeface="Consolas"/>
+                <a:ea typeface="Consolas"/>
+              </a:rPr>
+              <a:t>  </a:t>
+            </a:r>
+            <a:r>
+              <a:rPr sz="860" b="0" i="0">
+                <a:solidFill>
+                  <a:srgbClr val="059669"/>
+                </a:solidFill>
+                <a:latin typeface="Consolas"/>
+                <a:ea typeface="Consolas"/>
+              </a:rPr>
+              <a:t>// R 표준편차: 거리 [m]</a:t>
             </a:r>
           </a:p>
           <a:p>
@@ -13618,7 +13698,7 @@
                 <a:latin typeface="Consolas"/>
                 <a:ea typeface="Consolas"/>
               </a:rPr>
-              <a:t> 68  </a:t>
+              <a:t> 27  </a:t>
             </a:r>
             <a:r>
               <a:rPr sz="860" b="0" i="0">
@@ -13679,6 +13759,26 @@
                 <a:ea typeface="Consolas"/>
               </a:rPr>
               <a:t>0.2</a:t>
+            </a:r>
+            <a:r>
+              <a:rPr sz="860" b="0" i="0">
+                <a:solidFill>
+                  <a:srgbClr val="1B2740"/>
+                </a:solidFill>
+                <a:latin typeface="Consolas"/>
+                <a:ea typeface="Consolas"/>
+              </a:rPr>
+              <a:t>  </a:t>
+            </a:r>
+            <a:r>
+              <a:rPr sz="860" b="0" i="0">
+                <a:solidFill>
+                  <a:srgbClr val="059669"/>
+                </a:solidFill>
+                <a:latin typeface="Consolas"/>
+                <a:ea typeface="Consolas"/>
+              </a:rPr>
+              <a:t>// 방위각 [deg]</a:t>
             </a:r>
           </a:p>
           <a:p>
@@ -13695,7 +13795,7 @@
                 <a:latin typeface="Consolas"/>
                 <a:ea typeface="Consolas"/>
               </a:rPr>
-              <a:t> 72  </a:t>
+              <a:t> 28  </a:t>
             </a:r>
             <a:r>
               <a:rPr sz="860" b="0" i="0">
@@ -13756,6 +13856,26 @@
                 <a:ea typeface="Consolas"/>
               </a:rPr>
               <a:t>0.2</a:t>
+            </a:r>
+            <a:r>
+              <a:rPr sz="860" b="0" i="0">
+                <a:solidFill>
+                  <a:srgbClr val="1B2740"/>
+                </a:solidFill>
+                <a:latin typeface="Consolas"/>
+                <a:ea typeface="Consolas"/>
+              </a:rPr>
+              <a:t>  </a:t>
+            </a:r>
+            <a:r>
+              <a:rPr sz="860" b="0" i="0">
+                <a:solidFill>
+                  <a:srgbClr val="059669"/>
+                </a:solidFill>
+                <a:latin typeface="Consolas"/>
+                <a:ea typeface="Consolas"/>
+              </a:rPr>
+              <a:t>// 고각 [deg]</a:t>
             </a:r>
           </a:p>
         </p:txBody>
@@ -15099,7 +15219,7 @@
                 <a:latin typeface="Consolas"/>
                 <a:ea typeface="Consolas"/>
               </a:rPr>
-              <a:t>222  </a:t>
+              <a:t>161  </a:t>
             </a:r>
             <a:r>
               <a:rPr sz="780" b="0" i="0">
@@ -15366,7 +15486,7 @@
                 <a:latin typeface="Consolas"/>
                 <a:ea typeface="Consolas"/>
               </a:rPr>
-              <a:t>223  </a:t>
+              <a:t>162  </a:t>
             </a:r>
             <a:r>
               <a:rPr sz="780" b="0" i="0">
@@ -15393,7 +15513,7 @@
                 <a:latin typeface="Consolas"/>
                 <a:ea typeface="Consolas"/>
               </a:rPr>
-              <a:t>224  </a:t>
+              <a:t>163  </a:t>
             </a:r>
             <a:r>
               <a:rPr sz="780" b="0" i="0">
@@ -15620,7 +15740,7 @@
                 <a:latin typeface="Consolas"/>
                 <a:ea typeface="Consolas"/>
               </a:rPr>
-              <a:t>225  </a:t>
+              <a:t>164  </a:t>
             </a:r>
             <a:r>
               <a:rPr sz="780" b="0" i="0">
@@ -15777,7 +15897,7 @@
                 <a:latin typeface="Consolas"/>
                 <a:ea typeface="Consolas"/>
               </a:rPr>
-              <a:t>226  </a:t>
+              <a:t>165  </a:t>
             </a:r>
             <a:r>
               <a:rPr sz="780" b="0" i="0">
@@ -15934,7 +16054,7 @@
                 <a:latin typeface="Consolas"/>
                 <a:ea typeface="Consolas"/>
               </a:rPr>
-              <a:t>227  </a:t>
+              <a:t>166  </a:t>
             </a:r>
             <a:r>
               <a:rPr sz="780" b="0" i="0">
@@ -16001,7 +16121,7 @@
                 <a:latin typeface="Consolas"/>
                 <a:ea typeface="Consolas"/>
               </a:rPr>
-              <a:t>228  </a:t>
+              <a:t>167  </a:t>
             </a:r>
             <a:r>
               <a:rPr sz="780" b="0" i="0">
@@ -16068,7 +16188,7 @@
                 <a:latin typeface="Consolas"/>
                 <a:ea typeface="Consolas"/>
               </a:rPr>
-              <a:t>230  </a:t>
+              <a:t>169  </a:t>
             </a:r>
             <a:r>
               <a:rPr sz="780" b="0" i="0">
@@ -16205,7 +16325,7 @@
                 <a:latin typeface="Consolas"/>
                 <a:ea typeface="Consolas"/>
               </a:rPr>
-              <a:t>231  </a:t>
+              <a:t>170  </a:t>
             </a:r>
             <a:r>
               <a:rPr sz="780" b="0" i="0">
@@ -16342,7 +16462,7 @@
                 <a:latin typeface="Consolas"/>
                 <a:ea typeface="Consolas"/>
               </a:rPr>
-              <a:t>233  </a:t>
+              <a:t>172  </a:t>
             </a:r>
             <a:r>
               <a:rPr sz="780" b="0" i="0">
@@ -16579,7 +16699,7 @@
                 <a:latin typeface="Consolas"/>
                 <a:ea typeface="Consolas"/>
               </a:rPr>
-              <a:t>234  </a:t>
+              <a:t>173  </a:t>
             </a:r>
             <a:r>
               <a:rPr sz="780" b="0" i="0">
@@ -16616,7 +16736,7 @@
                 <a:latin typeface="Consolas"/>
                 <a:ea typeface="Consolas"/>
               </a:rPr>
-              <a:t>235  </a:t>
+              <a:t>174  </a:t>
             </a:r>
             <a:r>
               <a:rPr sz="780" b="0" i="0">
@@ -16913,7 +17033,7 @@
                 <a:latin typeface="Consolas"/>
                 <a:ea typeface="Consolas"/>
               </a:rPr>
-              <a:t>236  </a:t>
+              <a:t>175  </a:t>
             </a:r>
             <a:r>
               <a:rPr sz="780" b="0" i="0">
@@ -17410,7 +17530,7 @@
                 <a:latin typeface="Consolas"/>
                 <a:ea typeface="Consolas"/>
               </a:rPr>
-              <a:t>237  </a:t>
+              <a:t>176  </a:t>
             </a:r>
             <a:r>
               <a:rPr sz="780" b="0" i="0">
@@ -17687,7 +17807,7 @@
                 <a:latin typeface="Consolas"/>
                 <a:ea typeface="Consolas"/>
               </a:rPr>
-              <a:t>239  </a:t>
+              <a:t>178  </a:t>
             </a:r>
             <a:r>
               <a:rPr sz="780" b="0" i="0">
@@ -17924,7 +18044,7 @@
                 <a:latin typeface="Consolas"/>
                 <a:ea typeface="Consolas"/>
               </a:rPr>
-              <a:t>240  </a:t>
+              <a:t>179  </a:t>
             </a:r>
             <a:r>
               <a:rPr sz="780" b="0" i="0">
@@ -17961,7 +18081,7 @@
                 <a:latin typeface="Consolas"/>
                 <a:ea typeface="Consolas"/>
               </a:rPr>
-              <a:t>241  </a:t>
+              <a:t>180  </a:t>
             </a:r>
             <a:r>
               <a:rPr sz="780" b="0" i="0">
@@ -18348,7 +18468,7 @@
                 <a:latin typeface="Consolas"/>
                 <a:ea typeface="Consolas"/>
               </a:rPr>
-              <a:t>242  </a:t>
+              <a:t>181  </a:t>
             </a:r>
             <a:r>
               <a:rPr sz="780" b="0" i="0">
@@ -18815,7 +18935,7 @@
                 <a:latin typeface="Consolas"/>
                 <a:ea typeface="Consolas"/>
               </a:rPr>
-              <a:t>243  </a:t>
+              <a:t>182  </a:t>
             </a:r>
             <a:r>
               <a:rPr sz="780" b="0" i="0">
@@ -19282,7 +19402,7 @@
                 <a:latin typeface="Consolas"/>
                 <a:ea typeface="Consolas"/>
               </a:rPr>
-              <a:t>244  </a:t>
+              <a:t>183  </a:t>
             </a:r>
             <a:r>
               <a:rPr sz="780" b="0" i="0">
@@ -19869,7 +19989,7 @@
                 <a:latin typeface="Consolas"/>
                 <a:ea typeface="Consolas"/>
               </a:rPr>
-              <a:t>245  </a:t>
+              <a:t>184  </a:t>
             </a:r>
             <a:r>
               <a:rPr sz="780" b="0" i="0">
@@ -19906,7 +20026,7 @@
                 <a:latin typeface="Consolas"/>
                 <a:ea typeface="Consolas"/>
               </a:rPr>
-              <a:t>246  </a:t>
+              <a:t>185  </a:t>
             </a:r>
             <a:r>
               <a:rPr sz="780" b="0" i="0">
@@ -19943,7 +20063,7 @@
                 <a:latin typeface="Consolas"/>
                 <a:ea typeface="Consolas"/>
               </a:rPr>
-              <a:t>247  </a:t>
+              <a:t>186  </a:t>
             </a:r>
             <a:r>
               <a:rPr sz="780" b="0" i="0">
@@ -20387,7 +20507,7 @@
                 <a:latin typeface="Consolas"/>
                 <a:ea typeface="Consolas"/>
               </a:rPr>
-              <a:t>285  </a:t>
+              <a:t>212  </a:t>
             </a:r>
             <a:r>
               <a:rPr sz="740" b="0" i="0">
@@ -20494,7 +20614,7 @@
                 <a:latin typeface="Consolas"/>
                 <a:ea typeface="Consolas"/>
               </a:rPr>
-              <a:t>286  </a:t>
+              <a:t>213  </a:t>
             </a:r>
             <a:r>
               <a:rPr sz="740" b="0" i="0">
@@ -20521,7 +20641,7 @@
                 <a:latin typeface="Consolas"/>
                 <a:ea typeface="Consolas"/>
               </a:rPr>
-              <a:t>287  </a:t>
+              <a:t>214  </a:t>
             </a:r>
             <a:r>
               <a:rPr sz="740" b="0" i="0">
@@ -20638,7 +20758,7 @@
                 <a:latin typeface="Consolas"/>
                 <a:ea typeface="Consolas"/>
               </a:rPr>
-              <a:t>288  </a:t>
+              <a:t>215  </a:t>
             </a:r>
             <a:r>
               <a:rPr sz="740" b="0" i="0">
@@ -20785,7 +20905,7 @@
                 <a:latin typeface="Consolas"/>
                 <a:ea typeface="Consolas"/>
               </a:rPr>
-              <a:t>289  </a:t>
+              <a:t>216  </a:t>
             </a:r>
             <a:r>
               <a:rPr sz="740" b="0" i="0">
@@ -20932,7 +21052,7 @@
                 <a:latin typeface="Consolas"/>
                 <a:ea typeface="Consolas"/>
               </a:rPr>
-              <a:t>290  </a:t>
+              <a:t>217  </a:t>
             </a:r>
             <a:r>
               <a:rPr sz="740" b="0" i="0">
@@ -22176,7 +22296,7 @@
                 <a:latin typeface="Consolas"/>
                 <a:ea typeface="Consolas"/>
               </a:rPr>
-              <a:t>158  </a:t>
+              <a:t>105  </a:t>
             </a:r>
             <a:r>
               <a:rPr sz="760" b="0" i="0">
@@ -22283,7 +22403,7 @@
                 <a:latin typeface="Consolas"/>
                 <a:ea typeface="Consolas"/>
               </a:rPr>
-              <a:t>159  </a:t>
+              <a:t>106  </a:t>
             </a:r>
             <a:r>
               <a:rPr sz="760" b="0" i="0">
@@ -22310,7 +22430,7 @@
                 <a:latin typeface="Consolas"/>
                 <a:ea typeface="Consolas"/>
               </a:rPr>
-              <a:t>160  </a:t>
+              <a:t>107  </a:t>
             </a:r>
             <a:r>
               <a:rPr sz="760" b="0" i="0">
@@ -22617,7 +22737,7 @@
                 <a:latin typeface="Consolas"/>
                 <a:ea typeface="Consolas"/>
               </a:rPr>
-              <a:t>162  </a:t>
+              <a:t>109  </a:t>
             </a:r>
             <a:r>
               <a:rPr sz="760" b="0" i="0">
@@ -22724,7 +22844,7 @@
                 <a:latin typeface="Consolas"/>
                 <a:ea typeface="Consolas"/>
               </a:rPr>
-              <a:t>163  </a:t>
+              <a:t>110  </a:t>
             </a:r>
             <a:r>
               <a:rPr sz="760" b="0" i="0">
@@ -22761,7 +22881,7 @@
                 <a:latin typeface="Consolas"/>
                 <a:ea typeface="Consolas"/>
               </a:rPr>
-              <a:t>164  </a:t>
+              <a:t>111  </a:t>
             </a:r>
             <a:r>
               <a:rPr sz="760" b="0" i="0">
@@ -22828,7 +22948,7 @@
                 <a:latin typeface="Consolas"/>
                 <a:ea typeface="Consolas"/>
               </a:rPr>
-              <a:t>165  </a:t>
+              <a:t>112  </a:t>
             </a:r>
             <a:r>
               <a:rPr sz="760" b="0" i="0">
@@ -23195,7 +23315,7 @@
                 <a:latin typeface="Consolas"/>
                 <a:ea typeface="Consolas"/>
               </a:rPr>
-              <a:t>167  </a:t>
+              <a:t>114  </a:t>
             </a:r>
             <a:r>
               <a:rPr sz="760" b="0" i="0">
@@ -23352,7 +23472,7 @@
                 <a:latin typeface="Consolas"/>
                 <a:ea typeface="Consolas"/>
               </a:rPr>
-              <a:t>168  </a:t>
+              <a:t>115  </a:t>
             </a:r>
             <a:r>
               <a:rPr sz="760" b="0" i="0">
@@ -23389,7 +23509,7 @@
                 <a:latin typeface="Consolas"/>
                 <a:ea typeface="Consolas"/>
               </a:rPr>
-              <a:t>169  </a:t>
+              <a:t>116  </a:t>
             </a:r>
             <a:r>
               <a:rPr sz="760" b="0" i="0">
@@ -23506,7 +23626,7 @@
                 <a:latin typeface="Consolas"/>
                 <a:ea typeface="Consolas"/>
               </a:rPr>
-              <a:t>170  </a:t>
+              <a:t>117  </a:t>
             </a:r>
             <a:r>
               <a:rPr sz="760" b="0" i="0">
@@ -23543,7 +23663,7 @@
                 <a:latin typeface="Consolas"/>
                 <a:ea typeface="Consolas"/>
               </a:rPr>
-              <a:t>171  </a:t>
+              <a:t>118  </a:t>
             </a:r>
             <a:r>
               <a:rPr sz="760" b="0" i="0">
@@ -23720,7 +23840,7 @@
                 <a:latin typeface="Consolas"/>
                 <a:ea typeface="Consolas"/>
               </a:rPr>
-              <a:t>172  </a:t>
+              <a:t>119  </a:t>
             </a:r>
             <a:r>
               <a:rPr sz="760" b="0" i="0">
@@ -23757,7 +23877,7 @@
                 <a:latin typeface="Consolas"/>
                 <a:ea typeface="Consolas"/>
               </a:rPr>
-              <a:t>173  </a:t>
+              <a:t>120  </a:t>
             </a:r>
             <a:r>
               <a:rPr sz="760" b="0" i="0">
@@ -23874,7 +23994,7 @@
                 <a:latin typeface="Consolas"/>
                 <a:ea typeface="Consolas"/>
               </a:rPr>
-              <a:t>174  </a:t>
+              <a:t>121  </a:t>
             </a:r>
             <a:r>
               <a:rPr sz="760" b="0" i="0">
@@ -23911,7 +24031,7 @@
                 <a:latin typeface="Consolas"/>
                 <a:ea typeface="Consolas"/>
               </a:rPr>
-              <a:t>175  </a:t>
+              <a:t>122  </a:t>
             </a:r>
             <a:r>
               <a:rPr sz="760" b="0" i="0">
@@ -23948,7 +24068,7 @@
                 <a:latin typeface="Consolas"/>
                 <a:ea typeface="Consolas"/>
               </a:rPr>
-              <a:t>176  </a:t>
+              <a:t>123  </a:t>
             </a:r>
             <a:r>
               <a:rPr sz="760" b="0" i="0">
@@ -23985,7 +24105,7 @@
                 <a:latin typeface="Consolas"/>
                 <a:ea typeface="Consolas"/>
               </a:rPr>
-              <a:t>177  </a:t>
+              <a:t>124  </a:t>
             </a:r>
             <a:r>
               <a:rPr sz="760" b="0" i="0">
@@ -24022,7 +24142,7 @@
                 <a:latin typeface="Consolas"/>
                 <a:ea typeface="Consolas"/>
               </a:rPr>
-              <a:t>178  </a:t>
+              <a:t>125  </a:t>
             </a:r>
             <a:r>
               <a:rPr sz="760" b="0" i="0">
@@ -24059,7 +24179,7 @@
                 <a:latin typeface="Consolas"/>
                 <a:ea typeface="Consolas"/>
               </a:rPr>
-              <a:t>179  </a:t>
+              <a:t>126  </a:t>
             </a:r>
             <a:r>
               <a:rPr sz="760" b="0" i="0">
@@ -24637,7 +24757,7 @@
                 <a:latin typeface="Consolas"/>
                 <a:ea typeface="Consolas"/>
               </a:rPr>
-              <a:t>181  </a:t>
+              <a:t>128  </a:t>
             </a:r>
             <a:r>
               <a:rPr sz="760" b="0" i="0">
@@ -24704,7 +24824,7 @@
                 <a:latin typeface="Consolas"/>
                 <a:ea typeface="Consolas"/>
               </a:rPr>
-              <a:t>182  </a:t>
+              <a:t>129  </a:t>
             </a:r>
             <a:r>
               <a:rPr sz="760" b="0" i="0">
@@ -24831,7 +24951,7 @@
                 <a:latin typeface="Consolas"/>
                 <a:ea typeface="Consolas"/>
               </a:rPr>
-              <a:t>183  </a:t>
+              <a:t>130  </a:t>
             </a:r>
             <a:r>
               <a:rPr sz="760" b="0" i="0">
@@ -24868,7 +24988,7 @@
                 <a:latin typeface="Consolas"/>
                 <a:ea typeface="Consolas"/>
               </a:rPr>
-              <a:t>184  </a:t>
+              <a:t>131  </a:t>
             </a:r>
             <a:r>
               <a:rPr sz="760" b="0" i="0">
@@ -24985,7 +25105,7 @@
                 <a:latin typeface="Consolas"/>
                 <a:ea typeface="Consolas"/>
               </a:rPr>
-              <a:t>185  </a:t>
+              <a:t>132  </a:t>
             </a:r>
             <a:r>
               <a:rPr sz="760" b="0" i="0">
@@ -25172,7 +25292,7 @@
                 <a:latin typeface="Consolas"/>
                 <a:ea typeface="Consolas"/>
               </a:rPr>
-              <a:t>186  </a:t>
+              <a:t>133  </a:t>
             </a:r>
             <a:r>
               <a:rPr sz="760" b="0" i="0">
@@ -25209,7 +25329,7 @@
                 <a:latin typeface="Consolas"/>
                 <a:ea typeface="Consolas"/>
               </a:rPr>
-              <a:t>187  </a:t>
+              <a:t>134  </a:t>
             </a:r>
             <a:r>
               <a:rPr sz="760" b="0" i="0">
@@ -25256,7 +25376,7 @@
                 <a:latin typeface="Consolas"/>
                 <a:ea typeface="Consolas"/>
               </a:rPr>
-              <a:t>189  </a:t>
+              <a:t>136  </a:t>
             </a:r>
             <a:r>
               <a:rPr sz="760" b="0" i="0">
@@ -25323,7 +25443,7 @@
                 <a:latin typeface="Consolas"/>
                 <a:ea typeface="Consolas"/>
               </a:rPr>
-              <a:t>190  </a:t>
+              <a:t>137  </a:t>
             </a:r>
             <a:r>
               <a:rPr sz="760" b="0" i="0">
@@ -25450,7 +25570,7 @@
                 <a:latin typeface="Consolas"/>
                 <a:ea typeface="Consolas"/>
               </a:rPr>
-              <a:t>191  </a:t>
+              <a:t>138  </a:t>
             </a:r>
             <a:r>
               <a:rPr sz="760" b="0" i="0">
@@ -25487,7 +25607,7 @@
                 <a:latin typeface="Consolas"/>
                 <a:ea typeface="Consolas"/>
               </a:rPr>
-              <a:t>192  </a:t>
+              <a:t>139  </a:t>
             </a:r>
             <a:r>
               <a:rPr sz="760" b="0" i="0">
@@ -25604,7 +25724,7 @@
                 <a:latin typeface="Consolas"/>
                 <a:ea typeface="Consolas"/>
               </a:rPr>
-              <a:t>193  </a:t>
+              <a:t>140  </a:t>
             </a:r>
             <a:r>
               <a:rPr sz="760" b="0" i="0">
@@ -25721,7 +25841,7 @@
                 <a:latin typeface="Consolas"/>
                 <a:ea typeface="Consolas"/>
               </a:rPr>
-              <a:t>194  </a:t>
+              <a:t>141  </a:t>
             </a:r>
             <a:r>
               <a:rPr sz="760" b="0" i="0">
@@ -25758,7 +25878,7 @@
                 <a:latin typeface="Consolas"/>
                 <a:ea typeface="Consolas"/>
               </a:rPr>
-              <a:t>195  </a:t>
+              <a:t>142  </a:t>
             </a:r>
             <a:r>
               <a:rPr sz="760" b="0" i="0">
@@ -25795,7 +25915,7 @@
                 <a:latin typeface="Consolas"/>
                 <a:ea typeface="Consolas"/>
               </a:rPr>
-              <a:t>196  </a:t>
+              <a:t>143  </a:t>
             </a:r>
             <a:r>
               <a:rPr sz="760" b="0" i="0">
@@ -25832,7 +25952,7 @@
                 <a:latin typeface="Consolas"/>
                 <a:ea typeface="Consolas"/>
               </a:rPr>
-              <a:t>197  </a:t>
+              <a:t>144  </a:t>
             </a:r>
             <a:r>
               <a:rPr sz="760" b="0" i="0">
@@ -26019,7 +26139,7 @@
                 <a:latin typeface="Consolas"/>
                 <a:ea typeface="Consolas"/>
               </a:rPr>
-              <a:t>199  </a:t>
+              <a:t>146  </a:t>
             </a:r>
             <a:r>
               <a:rPr sz="760" b="0" i="0">
@@ -26176,7 +26296,7 @@
                 <a:latin typeface="Consolas"/>
                 <a:ea typeface="Consolas"/>
               </a:rPr>
-              <a:t>200  </a:t>
+              <a:t>147  </a:t>
             </a:r>
             <a:r>
               <a:rPr sz="760" b="0" i="0">
@@ -26213,7 +26333,7 @@
                 <a:latin typeface="Consolas"/>
                 <a:ea typeface="Consolas"/>
               </a:rPr>
-              <a:t>201  </a:t>
+              <a:t>148  </a:t>
             </a:r>
             <a:r>
               <a:rPr sz="760" b="0" i="0">
@@ -26330,7 +26450,7 @@
                 <a:latin typeface="Consolas"/>
                 <a:ea typeface="Consolas"/>
               </a:rPr>
-              <a:t>202  </a:t>
+              <a:t>149  </a:t>
             </a:r>
             <a:r>
               <a:rPr sz="760" b="0" i="0">
@@ -26367,7 +26487,7 @@
                 <a:latin typeface="Consolas"/>
                 <a:ea typeface="Consolas"/>
               </a:rPr>
-              <a:t>203  </a:t>
+              <a:t>150  </a:t>
             </a:r>
             <a:r>
               <a:rPr sz="760" b="0" i="0">
@@ -26404,7 +26524,7 @@
                 <a:latin typeface="Consolas"/>
                 <a:ea typeface="Consolas"/>
               </a:rPr>
-              <a:t>204  </a:t>
+              <a:t>151  </a:t>
             </a:r>
             <a:r>
               <a:rPr sz="760" b="0" i="0">
